--- a/slides/brc_hazel_week_d4.pptx
+++ b/slides/brc_hazel_week_d4.pptx
@@ -5,7 +5,7 @@
     <p:sldMasterId id="2147483648" r:id="rId1"/>
   </p:sldMasterIdLst>
   <p:notesMasterIdLst>
-    <p:notesMasterId r:id="rId13"/>
+    <p:notesMasterId r:id="rId14"/>
   </p:notesMasterIdLst>
   <p:sldIdLst>
     <p:sldId id="257" r:id="rId2"/>
@@ -16,9 +16,10 @@
     <p:sldId id="308" r:id="rId7"/>
     <p:sldId id="304" r:id="rId8"/>
     <p:sldId id="305" r:id="rId9"/>
-    <p:sldId id="302" r:id="rId10"/>
-    <p:sldId id="306" r:id="rId11"/>
-    <p:sldId id="307" r:id="rId12"/>
+    <p:sldId id="309" r:id="rId10"/>
+    <p:sldId id="302" r:id="rId11"/>
+    <p:sldId id="306" r:id="rId12"/>
+    <p:sldId id="307" r:id="rId13"/>
   </p:sldIdLst>
   <p:sldSz cx="12192000" cy="6858000"/>
   <p:notesSz cx="6858000" cy="9144000"/>
@@ -117,6 +118,11 @@
       </a:defRPr>
     </a:lvl9pPr>
   </p:defaultTextStyle>
+  <p:extLst>
+    <p:ext uri="{EFAFB233-063F-42B5-8137-9DF3F51BA10A}">
+      <p15:sldGuideLst xmlns:p15="http://schemas.microsoft.com/office/powerpoint/2012/main"/>
+    </p:ext>
+  </p:extLst>
 </p:presentation>
 </file>
 
@@ -202,7 +208,7 @@
           <a:p>
             <a:fld id="{C03B9CC4-35C2-F643-8821-8A26B4C2EFBC}" type="datetimeFigureOut">
               <a:rPr lang="en-US" smtClean="0"/>
-              <a:t>4/16/26</a:t>
+              <a:t>4/21/26</a:t>
             </a:fld>
             <a:endParaRPr lang="en-US"/>
           </a:p>
@@ -1004,6 +1010,114 @@
         <p:cNvPr id="1" name="">
           <a:extLst>
             <a:ext uri="{FF2B5EF4-FFF2-40B4-BE49-F238E27FC236}">
+              <a16:creationId xmlns:a16="http://schemas.microsoft.com/office/drawing/2014/main" id="{3BA24F4C-2561-D993-E2AF-6C2F448C3767}"/>
+            </a:ext>
+          </a:extLst>
+        </p:cNvPr>
+        <p:cNvGrpSpPr/>
+        <p:nvPr/>
+      </p:nvGrpSpPr>
+      <p:grpSpPr>
+        <a:xfrm>
+          <a:off x="0" y="0"/>
+          <a:ext cx="0" cy="0"/>
+          <a:chOff x="0" y="0"/>
+          <a:chExt cx="0" cy="0"/>
+        </a:xfrm>
+      </p:grpSpPr>
+      <p:sp>
+        <p:nvSpPr>
+          <p:cNvPr id="2" name="Slide Image Placeholder 1">
+            <a:extLst>
+              <a:ext uri="{FF2B5EF4-FFF2-40B4-BE49-F238E27FC236}">
+                <a16:creationId xmlns:a16="http://schemas.microsoft.com/office/drawing/2014/main" id="{C0158F02-F0A9-5C7F-59D3-45CF137DF28C}"/>
+              </a:ext>
+            </a:extLst>
+          </p:cNvPr>
+          <p:cNvSpPr>
+            <a:spLocks noGrp="1" noRot="1" noChangeAspect="1"/>
+          </p:cNvSpPr>
+          <p:nvPr>
+            <p:ph type="sldImg"/>
+          </p:nvPr>
+        </p:nvSpPr>
+        <p:spPr/>
+      </p:sp>
+      <p:sp>
+        <p:nvSpPr>
+          <p:cNvPr id="3" name="Notes Placeholder 2">
+            <a:extLst>
+              <a:ext uri="{FF2B5EF4-FFF2-40B4-BE49-F238E27FC236}">
+                <a16:creationId xmlns:a16="http://schemas.microsoft.com/office/drawing/2014/main" id="{88A752F2-053D-BAF3-4747-65889D1D8A5B}"/>
+              </a:ext>
+            </a:extLst>
+          </p:cNvPr>
+          <p:cNvSpPr>
+            <a:spLocks noGrp="1"/>
+          </p:cNvSpPr>
+          <p:nvPr>
+            <p:ph type="body" idx="1"/>
+          </p:nvPr>
+        </p:nvSpPr>
+        <p:spPr/>
+        <p:txBody>
+          <a:bodyPr/>
+          <a:lstStyle/>
+          <a:p>
+            <a:endParaRPr lang="en-US" dirty="0"/>
+          </a:p>
+        </p:txBody>
+      </p:sp>
+      <p:sp>
+        <p:nvSpPr>
+          <p:cNvPr id="4" name="Slide Number Placeholder 3">
+            <a:extLst>
+              <a:ext uri="{FF2B5EF4-FFF2-40B4-BE49-F238E27FC236}">
+                <a16:creationId xmlns:a16="http://schemas.microsoft.com/office/drawing/2014/main" id="{5C6C9165-5886-2A22-7869-3C7F2BB53B87}"/>
+              </a:ext>
+            </a:extLst>
+          </p:cNvPr>
+          <p:cNvSpPr>
+            <a:spLocks noGrp="1"/>
+          </p:cNvSpPr>
+          <p:nvPr>
+            <p:ph type="sldNum" sz="quarter" idx="5"/>
+          </p:nvPr>
+        </p:nvSpPr>
+        <p:spPr/>
+        <p:txBody>
+          <a:bodyPr/>
+          <a:lstStyle/>
+          <a:p>
+            <a:fld id="{13FC26C8-C37B-D543-9AB9-4FE91B5DFE38}" type="slidenum">
+              <a:rPr lang="en-US" smtClean="0"/>
+              <a:t>9</a:t>
+            </a:fld>
+            <a:endParaRPr lang="en-US"/>
+          </a:p>
+        </p:txBody>
+      </p:sp>
+    </p:spTree>
+    <p:extLst>
+      <p:ext uri="{BB962C8B-B14F-4D97-AF65-F5344CB8AC3E}">
+        <p14:creationId xmlns:p14="http://schemas.microsoft.com/office/powerpoint/2010/main" val="2129920553"/>
+      </p:ext>
+    </p:extLst>
+  </p:cSld>
+  <p:clrMapOvr>
+    <a:masterClrMapping/>
+  </p:clrMapOvr>
+</p:notes>
+</file>
+
+<file path=ppt/notesSlides/notesSlide7.xml><?xml version="1.0" encoding="utf-8"?>
+<p:notes xmlns:a="http://schemas.openxmlformats.org/drawingml/2006/main" xmlns:r="http://schemas.openxmlformats.org/officeDocument/2006/relationships" xmlns:p="http://schemas.openxmlformats.org/presentationml/2006/main">
+  <p:cSld>
+    <p:spTree>
+      <p:nvGrpSpPr>
+        <p:cNvPr id="1" name="">
+          <a:extLst>
+            <a:ext uri="{FF2B5EF4-FFF2-40B4-BE49-F238E27FC236}">
               <a16:creationId xmlns:a16="http://schemas.microsoft.com/office/drawing/2014/main" id="{8E6B57B1-8152-0CAF-1148-5F11ADB38C4B}"/>
             </a:ext>
           </a:extLst>
@@ -1085,7 +1199,7 @@
           <a:p>
             <a:fld id="{13FC26C8-C37B-D543-9AB9-4FE91B5DFE38}" type="slidenum">
               <a:rPr lang="en-US" smtClean="0"/>
-              <a:t>10</a:t>
+              <a:t>11</a:t>
             </a:fld>
             <a:endParaRPr lang="en-US"/>
           </a:p>
@@ -1104,7 +1218,7 @@
 </p:notes>
 </file>
 
-<file path=ppt/notesSlides/notesSlide7.xml><?xml version="1.0" encoding="utf-8"?>
+<file path=ppt/notesSlides/notesSlide8.xml><?xml version="1.0" encoding="utf-8"?>
 <p:notes xmlns:a="http://schemas.openxmlformats.org/drawingml/2006/main" xmlns:r="http://schemas.openxmlformats.org/officeDocument/2006/relationships" xmlns:p="http://schemas.openxmlformats.org/presentationml/2006/main">
   <p:cSld>
     <p:spTree>
@@ -1193,7 +1307,7 @@
           <a:p>
             <a:fld id="{13FC26C8-C37B-D543-9AB9-4FE91B5DFE38}" type="slidenum">
               <a:rPr lang="en-US" smtClean="0"/>
-              <a:t>11</a:t>
+              <a:t>12</a:t>
             </a:fld>
             <a:endParaRPr lang="en-US"/>
           </a:p>
@@ -1359,7 +1473,7 @@
           <a:p>
             <a:fld id="{07922428-1601-1349-B82F-394AB362B944}" type="datetimeFigureOut">
               <a:rPr lang="en-US" smtClean="0"/>
-              <a:t>4/16/26</a:t>
+              <a:t>4/21/26</a:t>
             </a:fld>
             <a:endParaRPr lang="en-US"/>
           </a:p>
@@ -1557,7 +1671,7 @@
           <a:p>
             <a:fld id="{07922428-1601-1349-B82F-394AB362B944}" type="datetimeFigureOut">
               <a:rPr lang="en-US" smtClean="0"/>
-              <a:t>4/16/26</a:t>
+              <a:t>4/21/26</a:t>
             </a:fld>
             <a:endParaRPr lang="en-US"/>
           </a:p>
@@ -1765,7 +1879,7 @@
           <a:p>
             <a:fld id="{07922428-1601-1349-B82F-394AB362B944}" type="datetimeFigureOut">
               <a:rPr lang="en-US" smtClean="0"/>
-              <a:t>4/16/26</a:t>
+              <a:t>4/21/26</a:t>
             </a:fld>
             <a:endParaRPr lang="en-US"/>
           </a:p>
@@ -1963,7 +2077,7 @@
           <a:p>
             <a:fld id="{07922428-1601-1349-B82F-394AB362B944}" type="datetimeFigureOut">
               <a:rPr lang="en-US" smtClean="0"/>
-              <a:t>4/16/26</a:t>
+              <a:t>4/21/26</a:t>
             </a:fld>
             <a:endParaRPr lang="en-US"/>
           </a:p>
@@ -2238,7 +2352,7 @@
           <a:p>
             <a:fld id="{07922428-1601-1349-B82F-394AB362B944}" type="datetimeFigureOut">
               <a:rPr lang="en-US" smtClean="0"/>
-              <a:t>4/16/26</a:t>
+              <a:t>4/21/26</a:t>
             </a:fld>
             <a:endParaRPr lang="en-US"/>
           </a:p>
@@ -2503,7 +2617,7 @@
           <a:p>
             <a:fld id="{07922428-1601-1349-B82F-394AB362B944}" type="datetimeFigureOut">
               <a:rPr lang="en-US" smtClean="0"/>
-              <a:t>4/16/26</a:t>
+              <a:t>4/21/26</a:t>
             </a:fld>
             <a:endParaRPr lang="en-US"/>
           </a:p>
@@ -2915,7 +3029,7 @@
           <a:p>
             <a:fld id="{07922428-1601-1349-B82F-394AB362B944}" type="datetimeFigureOut">
               <a:rPr lang="en-US" smtClean="0"/>
-              <a:t>4/16/26</a:t>
+              <a:t>4/21/26</a:t>
             </a:fld>
             <a:endParaRPr lang="en-US"/>
           </a:p>
@@ -3056,7 +3170,7 @@
           <a:p>
             <a:fld id="{07922428-1601-1349-B82F-394AB362B944}" type="datetimeFigureOut">
               <a:rPr lang="en-US" smtClean="0"/>
-              <a:t>4/16/26</a:t>
+              <a:t>4/21/26</a:t>
             </a:fld>
             <a:endParaRPr lang="en-US"/>
           </a:p>
@@ -3169,7 +3283,7 @@
           <a:p>
             <a:fld id="{07922428-1601-1349-B82F-394AB362B944}" type="datetimeFigureOut">
               <a:rPr lang="en-US" smtClean="0"/>
-              <a:t>4/16/26</a:t>
+              <a:t>4/21/26</a:t>
             </a:fld>
             <a:endParaRPr lang="en-US"/>
           </a:p>
@@ -3480,7 +3594,7 @@
           <a:p>
             <a:fld id="{07922428-1601-1349-B82F-394AB362B944}" type="datetimeFigureOut">
               <a:rPr lang="en-US" smtClean="0"/>
-              <a:t>4/16/26</a:t>
+              <a:t>4/21/26</a:t>
             </a:fld>
             <a:endParaRPr lang="en-US"/>
           </a:p>
@@ -3768,7 +3882,7 @@
           <a:p>
             <a:fld id="{07922428-1601-1349-B82F-394AB362B944}" type="datetimeFigureOut">
               <a:rPr lang="en-US" smtClean="0"/>
-              <a:t>4/16/26</a:t>
+              <a:t>4/21/26</a:t>
             </a:fld>
             <a:endParaRPr lang="en-US"/>
           </a:p>
@@ -4009,7 +4123,7 @@
           <a:p>
             <a:fld id="{07922428-1601-1349-B82F-394AB362B944}" type="datetimeFigureOut">
               <a:rPr lang="en-US" smtClean="0"/>
-              <a:t>4/16/26</a:t>
+              <a:t>4/21/26</a:t>
             </a:fld>
             <a:endParaRPr lang="en-US"/>
           </a:p>
@@ -4681,6 +4795,145 @@
         <p:cNvPr id="1" name="">
           <a:extLst>
             <a:ext uri="{FF2B5EF4-FFF2-40B4-BE49-F238E27FC236}">
+              <a16:creationId xmlns:a16="http://schemas.microsoft.com/office/drawing/2014/main" id="{ECF3FCFC-5B5A-48C4-991E-88A3B828AF77}"/>
+            </a:ext>
+          </a:extLst>
+        </p:cNvPr>
+        <p:cNvGrpSpPr/>
+        <p:nvPr/>
+      </p:nvGrpSpPr>
+      <p:grpSpPr>
+        <a:xfrm>
+          <a:off x="0" y="0"/>
+          <a:ext cx="0" cy="0"/>
+          <a:chOff x="0" y="0"/>
+          <a:chExt cx="0" cy="0"/>
+        </a:xfrm>
+      </p:grpSpPr>
+      <p:sp>
+        <p:nvSpPr>
+          <p:cNvPr id="6" name="Title 1">
+            <a:extLst>
+              <a:ext uri="{FF2B5EF4-FFF2-40B4-BE49-F238E27FC236}">
+                <a16:creationId xmlns:a16="http://schemas.microsoft.com/office/drawing/2014/main" id="{BEF8470A-62C7-5CDA-7431-1EF86C6C1BF2}"/>
+              </a:ext>
+            </a:extLst>
+          </p:cNvPr>
+          <p:cNvSpPr txBox="1">
+            <a:spLocks/>
+          </p:cNvSpPr>
+          <p:nvPr/>
+        </p:nvSpPr>
+        <p:spPr>
+          <a:xfrm>
+            <a:off x="1646320" y="2089105"/>
+            <a:ext cx="9144000" cy="2387600"/>
+          </a:xfrm>
+          <a:prstGeom prst="rect">
+            <a:avLst/>
+          </a:prstGeom>
+        </p:spPr>
+        <p:txBody>
+          <a:bodyPr vert="horz" lIns="91440" tIns="45720" rIns="91440" bIns="45720" rtlCol="0" anchor="ctr">
+            <a:normAutofit/>
+          </a:bodyPr>
+          <a:lstStyle>
+            <a:lvl1pPr algn="l" defTabSz="914400" rtl="0" eaLnBrk="1" latinLnBrk="0" hangingPunct="1">
+              <a:lnSpc>
+                <a:spcPct val="90000"/>
+              </a:lnSpc>
+              <a:spcBef>
+                <a:spcPct val="0"/>
+              </a:spcBef>
+              <a:buNone/>
+              <a:defRPr sz="4400" kern="1200">
+                <a:solidFill>
+                  <a:schemeClr val="tx1"/>
+                </a:solidFill>
+                <a:latin typeface="+mj-lt"/>
+                <a:ea typeface="+mj-ea"/>
+                <a:cs typeface="+mj-cs"/>
+              </a:defRPr>
+            </a:lvl1pPr>
+          </a:lstStyle>
+          <a:p>
+            <a:r>
+              <a:rPr lang="en-US" sz="5400" dirty="0">
+                <a:latin typeface="Helvetica" pitchFamily="2" charset="0"/>
+              </a:rPr>
+              <a:t>7. Data management</a:t>
+            </a:r>
+          </a:p>
+        </p:txBody>
+      </p:sp>
+      <p:pic>
+        <p:nvPicPr>
+          <p:cNvPr id="2050" name="Picture 2" descr="Data management - Free seo and web icons">
+            <a:extLst>
+              <a:ext uri="{FF2B5EF4-FFF2-40B4-BE49-F238E27FC236}">
+                <a16:creationId xmlns:a16="http://schemas.microsoft.com/office/drawing/2014/main" id="{795F056A-A7D0-3B26-1938-3D7EF394BC64}"/>
+              </a:ext>
+            </a:extLst>
+          </p:cNvPr>
+          <p:cNvPicPr>
+            <a:picLocks noChangeAspect="1" noChangeArrowheads="1"/>
+          </p:cNvPicPr>
+          <p:nvPr/>
+        </p:nvPicPr>
+        <p:blipFill>
+          <a:blip r:embed="rId2">
+            <a:extLst>
+              <a:ext uri="{28A0092B-C50C-407E-A947-70E740481C1C}">
+                <a14:useLocalDpi xmlns:a14="http://schemas.microsoft.com/office/drawing/2010/main" val="0"/>
+              </a:ext>
+            </a:extLst>
+          </a:blip>
+          <a:srcRect/>
+          <a:stretch>
+            <a:fillRect/>
+          </a:stretch>
+        </p:blipFill>
+        <p:spPr bwMode="auto">
+          <a:xfrm>
+            <a:off x="8598725" y="2238499"/>
+            <a:ext cx="1365992" cy="1365992"/>
+          </a:xfrm>
+          <a:prstGeom prst="rect">
+            <a:avLst/>
+          </a:prstGeom>
+          <a:noFill/>
+          <a:extLst>
+            <a:ext uri="{909E8E84-426E-40DD-AFC4-6F175D3DCCD1}">
+              <a14:hiddenFill xmlns:a14="http://schemas.microsoft.com/office/drawing/2010/main">
+                <a:solidFill>
+                  <a:srgbClr val="FFFFFF"/>
+                </a:solidFill>
+              </a14:hiddenFill>
+            </a:ext>
+          </a:extLst>
+        </p:spPr>
+      </p:pic>
+    </p:spTree>
+    <p:extLst>
+      <p:ext uri="{BB962C8B-B14F-4D97-AF65-F5344CB8AC3E}">
+        <p14:creationId xmlns:p14="http://schemas.microsoft.com/office/powerpoint/2010/main" val="458796420"/>
+      </p:ext>
+    </p:extLst>
+  </p:cSld>
+  <p:clrMapOvr>
+    <a:masterClrMapping/>
+  </p:clrMapOvr>
+</p:sld>
+</file>
+
+<file path=ppt/slides/slide11.xml><?xml version="1.0" encoding="utf-8"?>
+<p:sld xmlns:a="http://schemas.openxmlformats.org/drawingml/2006/main" xmlns:r="http://schemas.openxmlformats.org/officeDocument/2006/relationships" xmlns:p="http://schemas.openxmlformats.org/presentationml/2006/main">
+  <p:cSld>
+    <p:spTree>
+      <p:nvGrpSpPr>
+        <p:cNvPr id="1" name="">
+          <a:extLst>
+            <a:ext uri="{FF2B5EF4-FFF2-40B4-BE49-F238E27FC236}">
               <a16:creationId xmlns:a16="http://schemas.microsoft.com/office/drawing/2014/main" id="{C5BD9C26-8755-B56F-F5E2-215BBF6A7BDF}"/>
             </a:ext>
           </a:extLst>
@@ -4771,7 +5024,7 @@
 </p:sld>
 </file>
 
-<file path=ppt/slides/slide11.xml><?xml version="1.0" encoding="utf-8"?>
+<file path=ppt/slides/slide12.xml><?xml version="1.0" encoding="utf-8"?>
 <p:sld xmlns:a="http://schemas.openxmlformats.org/drawingml/2006/main" xmlns:r="http://schemas.openxmlformats.org/officeDocument/2006/relationships" xmlns:p="http://schemas.openxmlformats.org/presentationml/2006/main">
   <p:cSld>
     <p:spTree>
@@ -7714,376 +7967,6 @@
           </p:txBody>
         </p:sp>
       </p:grpSp>
-      <p:grpSp>
-        <p:nvGrpSpPr>
-          <p:cNvPr id="18" name="Group 17">
-            <a:extLst>
-              <a:ext uri="{FF2B5EF4-FFF2-40B4-BE49-F238E27FC236}">
-                <a16:creationId xmlns:a16="http://schemas.microsoft.com/office/drawing/2014/main" id="{6B9E793B-409E-3CBB-EBA4-FD5CE2AA626A}"/>
-              </a:ext>
-            </a:extLst>
-          </p:cNvPr>
-          <p:cNvGrpSpPr/>
-          <p:nvPr/>
-        </p:nvGrpSpPr>
-        <p:grpSpPr>
-          <a:xfrm>
-            <a:off x="6754587" y="987033"/>
-            <a:ext cx="2692234" cy="1968176"/>
-            <a:chOff x="7441873" y="644510"/>
-            <a:chExt cx="3420091" cy="2495088"/>
-          </a:xfrm>
-        </p:grpSpPr>
-        <p:pic>
-          <p:nvPicPr>
-            <p:cNvPr id="8" name="Picture 7" descr="What Is HPC? - UArizona HPC Documentation">
-              <a:extLst>
-                <a:ext uri="{FF2B5EF4-FFF2-40B4-BE49-F238E27FC236}">
-                  <a16:creationId xmlns:a16="http://schemas.microsoft.com/office/drawing/2014/main" id="{65AB546E-5503-B817-1C34-157DD25B0695}"/>
-                </a:ext>
-              </a:extLst>
-            </p:cNvPr>
-            <p:cNvPicPr>
-              <a:picLocks noChangeAspect="1" noChangeArrowheads="1"/>
-            </p:cNvPicPr>
-            <p:nvPr/>
-          </p:nvPicPr>
-          <p:blipFill>
-            <a:blip r:embed="rId3">
-              <a:extLst>
-                <a:ext uri="{28A0092B-C50C-407E-A947-70E740481C1C}">
-                  <a14:useLocalDpi xmlns:a14="http://schemas.microsoft.com/office/drawing/2010/main" val="0"/>
-                </a:ext>
-              </a:extLst>
-            </a:blip>
-            <a:srcRect/>
-            <a:stretch>
-              <a:fillRect/>
-            </a:stretch>
-          </p:blipFill>
-          <p:spPr bwMode="auto">
-            <a:xfrm>
-              <a:off x="8460181" y="1405560"/>
-              <a:ext cx="2401783" cy="1734038"/>
-            </a:xfrm>
-            <a:prstGeom prst="rect">
-              <a:avLst/>
-            </a:prstGeom>
-            <a:noFill/>
-            <a:extLst>
-              <a:ext uri="{909E8E84-426E-40DD-AFC4-6F175D3DCCD1}">
-                <a14:hiddenFill xmlns:a14="http://schemas.microsoft.com/office/drawing/2010/main">
-                  <a:solidFill>
-                    <a:srgbClr val="FFFFFF"/>
-                  </a:solidFill>
-                </a14:hiddenFill>
-              </a:ext>
-            </a:extLst>
-          </p:spPr>
-        </p:pic>
-        <p:pic>
-          <p:nvPicPr>
-            <p:cNvPr id="9" name="Picture 8" descr="What Is HPC? - UArizona HPC Documentation">
-              <a:extLst>
-                <a:ext uri="{FF2B5EF4-FFF2-40B4-BE49-F238E27FC236}">
-                  <a16:creationId xmlns:a16="http://schemas.microsoft.com/office/drawing/2014/main" id="{01D908A9-68B3-7395-16D9-507DCDEBF057}"/>
-                </a:ext>
-              </a:extLst>
-            </p:cNvPr>
-            <p:cNvPicPr>
-              <a:picLocks noChangeAspect="1" noChangeArrowheads="1"/>
-            </p:cNvPicPr>
-            <p:nvPr/>
-          </p:nvPicPr>
-          <p:blipFill rotWithShape="1">
-            <a:blip r:embed="rId3">
-              <a:extLst>
-                <a:ext uri="{28A0092B-C50C-407E-A947-70E740481C1C}">
-                  <a14:useLocalDpi xmlns:a14="http://schemas.microsoft.com/office/drawing/2010/main" val="0"/>
-                </a:ext>
-              </a:extLst>
-            </a:blip>
-            <a:srcRect t="30664" r="57602"/>
-            <a:stretch>
-              <a:fillRect/>
-            </a:stretch>
-          </p:blipFill>
-          <p:spPr bwMode="auto">
-            <a:xfrm>
-              <a:off x="7441873" y="1627030"/>
-              <a:ext cx="1018308" cy="1202313"/>
-            </a:xfrm>
-            <a:prstGeom prst="rect">
-              <a:avLst/>
-            </a:prstGeom>
-            <a:noFill/>
-            <a:extLst>
-              <a:ext uri="{909E8E84-426E-40DD-AFC4-6F175D3DCCD1}">
-                <a14:hiddenFill xmlns:a14="http://schemas.microsoft.com/office/drawing/2010/main">
-                  <a:solidFill>
-                    <a:srgbClr val="FFFFFF"/>
-                  </a:solidFill>
-                </a14:hiddenFill>
-              </a:ext>
-            </a:extLst>
-          </p:spPr>
-        </p:pic>
-        <p:pic>
-          <p:nvPicPr>
-            <p:cNvPr id="10" name="Picture 9" descr="What Is HPC? - UArizona HPC Documentation">
-              <a:extLst>
-                <a:ext uri="{FF2B5EF4-FFF2-40B4-BE49-F238E27FC236}">
-                  <a16:creationId xmlns:a16="http://schemas.microsoft.com/office/drawing/2014/main" id="{D6F13731-B45F-49C2-B74D-67FB39106EEF}"/>
-                </a:ext>
-              </a:extLst>
-            </p:cNvPr>
-            <p:cNvPicPr>
-              <a:picLocks noChangeAspect="1" noChangeArrowheads="1"/>
-            </p:cNvPicPr>
-            <p:nvPr/>
-          </p:nvPicPr>
-          <p:blipFill rotWithShape="1">
-            <a:blip r:embed="rId3">
-              <a:extLst>
-                <a:ext uri="{28A0092B-C50C-407E-A947-70E740481C1C}">
-                  <a14:useLocalDpi xmlns:a14="http://schemas.microsoft.com/office/drawing/2010/main" val="0"/>
-                </a:ext>
-              </a:extLst>
-            </a:blip>
-            <a:srcRect t="30664" r="57602"/>
-            <a:stretch>
-              <a:fillRect/>
-            </a:stretch>
-          </p:blipFill>
-          <p:spPr bwMode="auto">
-            <a:xfrm>
-              <a:off x="8508674" y="669410"/>
-              <a:ext cx="1018308" cy="1202313"/>
-            </a:xfrm>
-            <a:prstGeom prst="rect">
-              <a:avLst/>
-            </a:prstGeom>
-            <a:noFill/>
-            <a:extLst>
-              <a:ext uri="{909E8E84-426E-40DD-AFC4-6F175D3DCCD1}">
-                <a14:hiddenFill xmlns:a14="http://schemas.microsoft.com/office/drawing/2010/main">
-                  <a:solidFill>
-                    <a:srgbClr val="FFFFFF"/>
-                  </a:solidFill>
-                </a14:hiddenFill>
-              </a:ext>
-            </a:extLst>
-          </p:spPr>
-        </p:pic>
-        <p:sp>
-          <p:nvSpPr>
-            <p:cNvPr id="13" name="Rectangle 12">
-              <a:extLst>
-                <a:ext uri="{FF2B5EF4-FFF2-40B4-BE49-F238E27FC236}">
-                  <a16:creationId xmlns:a16="http://schemas.microsoft.com/office/drawing/2014/main" id="{FD74BA47-6333-17DB-DB29-150936889D09}"/>
-                </a:ext>
-              </a:extLst>
-            </p:cNvPr>
-            <p:cNvSpPr/>
-            <p:nvPr/>
-          </p:nvSpPr>
-          <p:spPr>
-            <a:xfrm>
-              <a:off x="8871364" y="644510"/>
-              <a:ext cx="679865" cy="358496"/>
-            </a:xfrm>
-            <a:prstGeom prst="rect">
-              <a:avLst/>
-            </a:prstGeom>
-            <a:solidFill>
-              <a:schemeClr val="bg1"/>
-            </a:solidFill>
-            <a:ln>
-              <a:noFill/>
-            </a:ln>
-          </p:spPr>
-          <p:style>
-            <a:lnRef idx="2">
-              <a:schemeClr val="accent1">
-                <a:shade val="15000"/>
-              </a:schemeClr>
-            </a:lnRef>
-            <a:fillRef idx="1">
-              <a:schemeClr val="accent1"/>
-            </a:fillRef>
-            <a:effectRef idx="0">
-              <a:schemeClr val="accent1"/>
-            </a:effectRef>
-            <a:fontRef idx="minor">
-              <a:schemeClr val="lt1"/>
-            </a:fontRef>
-          </p:style>
-          <p:txBody>
-            <a:bodyPr rtlCol="0" anchor="ctr"/>
-            <a:lstStyle/>
-            <a:p>
-              <a:pPr algn="ctr"/>
-              <a:endParaRPr lang="en-US"/>
-            </a:p>
-          </p:txBody>
-        </p:sp>
-        <p:sp>
-          <p:nvSpPr>
-            <p:cNvPr id="14" name="Rectangle 13">
-              <a:extLst>
-                <a:ext uri="{FF2B5EF4-FFF2-40B4-BE49-F238E27FC236}">
-                  <a16:creationId xmlns:a16="http://schemas.microsoft.com/office/drawing/2014/main" id="{930DD9FD-8F16-3B6D-DD23-B6CF2F586CAB}"/>
-                </a:ext>
-              </a:extLst>
-            </p:cNvPr>
-            <p:cNvSpPr/>
-            <p:nvPr/>
-          </p:nvSpPr>
-          <p:spPr>
-            <a:xfrm>
-              <a:off x="7804562" y="1592946"/>
-              <a:ext cx="679865" cy="358496"/>
-            </a:xfrm>
-            <a:prstGeom prst="rect">
-              <a:avLst/>
-            </a:prstGeom>
-            <a:solidFill>
-              <a:schemeClr val="bg1"/>
-            </a:solidFill>
-            <a:ln>
-              <a:noFill/>
-            </a:ln>
-          </p:spPr>
-          <p:style>
-            <a:lnRef idx="2">
-              <a:schemeClr val="accent1">
-                <a:shade val="15000"/>
-              </a:schemeClr>
-            </a:lnRef>
-            <a:fillRef idx="1">
-              <a:schemeClr val="accent1"/>
-            </a:fillRef>
-            <a:effectRef idx="0">
-              <a:schemeClr val="accent1"/>
-            </a:effectRef>
-            <a:fontRef idx="minor">
-              <a:schemeClr val="lt1"/>
-            </a:fontRef>
-          </p:style>
-          <p:txBody>
-            <a:bodyPr rtlCol="0" anchor="ctr"/>
-            <a:lstStyle/>
-            <a:p>
-              <a:pPr algn="ctr"/>
-              <a:endParaRPr lang="en-US"/>
-            </a:p>
-          </p:txBody>
-        </p:sp>
-        <p:sp>
-          <p:nvSpPr>
-            <p:cNvPr id="15" name="Rectangle 14">
-              <a:extLst>
-                <a:ext uri="{FF2B5EF4-FFF2-40B4-BE49-F238E27FC236}">
-                  <a16:creationId xmlns:a16="http://schemas.microsoft.com/office/drawing/2014/main" id="{607C784F-2F1A-7135-B28D-6B3D0CAD4344}"/>
-                </a:ext>
-              </a:extLst>
-            </p:cNvPr>
-            <p:cNvSpPr/>
-            <p:nvPr/>
-          </p:nvSpPr>
-          <p:spPr>
-            <a:xfrm>
-              <a:off x="8822870" y="1901519"/>
-              <a:ext cx="679865" cy="358496"/>
-            </a:xfrm>
-            <a:prstGeom prst="rect">
-              <a:avLst/>
-            </a:prstGeom>
-            <a:solidFill>
-              <a:schemeClr val="bg1"/>
-            </a:solidFill>
-            <a:ln>
-              <a:noFill/>
-            </a:ln>
-          </p:spPr>
-          <p:style>
-            <a:lnRef idx="2">
-              <a:schemeClr val="accent1">
-                <a:shade val="15000"/>
-              </a:schemeClr>
-            </a:lnRef>
-            <a:fillRef idx="1">
-              <a:schemeClr val="accent1"/>
-            </a:fillRef>
-            <a:effectRef idx="0">
-              <a:schemeClr val="accent1"/>
-            </a:effectRef>
-            <a:fontRef idx="minor">
-              <a:schemeClr val="lt1"/>
-            </a:fontRef>
-          </p:style>
-          <p:txBody>
-            <a:bodyPr rtlCol="0" anchor="ctr"/>
-            <a:lstStyle/>
-            <a:p>
-              <a:pPr algn="ctr"/>
-              <a:endParaRPr lang="en-US"/>
-            </a:p>
-          </p:txBody>
-        </p:sp>
-        <p:sp>
-          <p:nvSpPr>
-            <p:cNvPr id="16" name="Rectangle 15">
-              <a:extLst>
-                <a:ext uri="{FF2B5EF4-FFF2-40B4-BE49-F238E27FC236}">
-                  <a16:creationId xmlns:a16="http://schemas.microsoft.com/office/drawing/2014/main" id="{3F9F1F70-1117-3714-AE7C-779FC253ADAF}"/>
-                </a:ext>
-              </a:extLst>
-            </p:cNvPr>
-            <p:cNvSpPr/>
-            <p:nvPr/>
-          </p:nvSpPr>
-          <p:spPr>
-            <a:xfrm>
-              <a:off x="10011889" y="1306317"/>
-              <a:ext cx="679865" cy="358496"/>
-            </a:xfrm>
-            <a:prstGeom prst="rect">
-              <a:avLst/>
-            </a:prstGeom>
-            <a:solidFill>
-              <a:schemeClr val="bg1"/>
-            </a:solidFill>
-            <a:ln>
-              <a:noFill/>
-            </a:ln>
-          </p:spPr>
-          <p:style>
-            <a:lnRef idx="2">
-              <a:schemeClr val="accent1">
-                <a:shade val="15000"/>
-              </a:schemeClr>
-            </a:lnRef>
-            <a:fillRef idx="1">
-              <a:schemeClr val="accent1"/>
-            </a:fillRef>
-            <a:effectRef idx="0">
-              <a:schemeClr val="accent1"/>
-            </a:effectRef>
-            <a:fontRef idx="minor">
-              <a:schemeClr val="lt1"/>
-            </a:fontRef>
-          </p:style>
-          <p:txBody>
-            <a:bodyPr rtlCol="0" anchor="ctr"/>
-            <a:lstStyle/>
-            <a:p>
-              <a:pPr algn="ctr"/>
-              <a:endParaRPr lang="en-US"/>
-            </a:p>
-          </p:txBody>
-        </p:sp>
-      </p:grpSp>
       <p:sp>
         <p:nvSpPr>
           <p:cNvPr id="19" name="TextBox 18">
@@ -8099,7 +7982,7 @@
         <p:spPr>
           <a:xfrm>
             <a:off x="2223032" y="3141148"/>
-            <a:ext cx="2174506" cy="646331"/>
+            <a:ext cx="2333203" cy="646331"/>
           </a:xfrm>
           <a:prstGeom prst="rect">
             <a:avLst/>
@@ -8113,14 +7996,18 @@
           <a:lstStyle/>
           <a:p>
             <a:r>
+              <a:rPr lang="en-US" b="1" dirty="0"/>
+              <a:t>Personal machine </a:t>
+            </a:r>
+            <a:r>
               <a:rPr lang="en-US" dirty="0"/>
-              <a:t>Personal machine; </a:t>
+              <a:t>– </a:t>
             </a:r>
           </a:p>
           <a:p>
             <a:r>
               <a:rPr lang="en-US" dirty="0"/>
-              <a:t>1 installation; simple </a:t>
+              <a:t>1 installation –  simple </a:t>
             </a:r>
           </a:p>
         </p:txBody>
@@ -8154,8 +8041,12 @@
           <a:lstStyle/>
           <a:p>
             <a:r>
+              <a:rPr lang="en-US" b="1" dirty="0"/>
+              <a:t>HPC</a:t>
+            </a:r>
+            <a:r>
               <a:rPr lang="en-US" dirty="0"/>
-              <a:t>HPC – multiple installations – conflicts </a:t>
+              <a:t> – multiple installations – conflicts </a:t>
             </a:r>
           </a:p>
         </p:txBody>
@@ -8268,123 +8159,514 @@
           </a:p>
         </p:txBody>
       </p:sp>
-      <p:sp>
-        <p:nvSpPr>
-          <p:cNvPr id="24" name="TextBox 23">
-            <a:extLst>
-              <a:ext uri="{FF2B5EF4-FFF2-40B4-BE49-F238E27FC236}">
-                <a16:creationId xmlns:a16="http://schemas.microsoft.com/office/drawing/2014/main" id="{395FF2D7-14F0-A371-8002-DD80EF26F081}"/>
-              </a:ext>
-            </a:extLst>
-          </p:cNvPr>
-          <p:cNvSpPr txBox="1"/>
+      <p:grpSp>
+        <p:nvGrpSpPr>
+          <p:cNvPr id="4" name="Group 3">
+            <a:extLst>
+              <a:ext uri="{FF2B5EF4-FFF2-40B4-BE49-F238E27FC236}">
+                <a16:creationId xmlns:a16="http://schemas.microsoft.com/office/drawing/2014/main" id="{5FA63460-9510-ABE2-3A9D-89D1A4149218}"/>
+              </a:ext>
+            </a:extLst>
+          </p:cNvPr>
+          <p:cNvGrpSpPr/>
           <p:nvPr/>
-        </p:nvSpPr>
-        <p:spPr>
+        </p:nvGrpSpPr>
+        <p:grpSpPr>
           <a:xfrm>
-            <a:off x="8348011" y="1172997"/>
-            <a:ext cx="1001981" cy="261610"/>
+            <a:off x="6654394" y="987033"/>
+            <a:ext cx="2792427" cy="1968176"/>
+            <a:chOff x="6654394" y="987033"/>
+            <a:chExt cx="2792427" cy="1968176"/>
           </a:xfrm>
-          <a:prstGeom prst="rect">
-            <a:avLst/>
-          </a:prstGeom>
-          <a:noFill/>
-        </p:spPr>
-        <p:txBody>
-          <a:bodyPr wrap="square">
-            <a:spAutoFit/>
-          </a:bodyPr>
-          <a:lstStyle/>
-          <a:p>
-            <a:r>
-              <a:rPr lang="en-US" sz="1100" dirty="0">
-                <a:solidFill>
-                  <a:srgbClr val="C00000"/>
-                </a:solidFill>
-              </a:rPr>
-              <a:t>Python 3.12</a:t>
-            </a:r>
-          </a:p>
-        </p:txBody>
-      </p:sp>
-      <p:sp>
-        <p:nvSpPr>
-          <p:cNvPr id="25" name="TextBox 24">
-            <a:extLst>
-              <a:ext uri="{FF2B5EF4-FFF2-40B4-BE49-F238E27FC236}">
-                <a16:creationId xmlns:a16="http://schemas.microsoft.com/office/drawing/2014/main" id="{F4D8C13D-F639-992F-4F8F-7FC84DF483AE}"/>
-              </a:ext>
-            </a:extLst>
-          </p:cNvPr>
-          <p:cNvSpPr txBox="1"/>
-          <p:nvPr/>
-        </p:nvSpPr>
-        <p:spPr>
-          <a:xfrm>
-            <a:off x="6654394" y="1677522"/>
-            <a:ext cx="1001981" cy="261610"/>
-          </a:xfrm>
-          <a:prstGeom prst="rect">
-            <a:avLst/>
-          </a:prstGeom>
-          <a:noFill/>
-        </p:spPr>
-        <p:txBody>
-          <a:bodyPr wrap="square">
-            <a:spAutoFit/>
-          </a:bodyPr>
-          <a:lstStyle/>
-          <a:p>
-            <a:r>
-              <a:rPr lang="en-US" sz="1100" dirty="0">
-                <a:solidFill>
-                  <a:srgbClr val="C00000"/>
-                </a:solidFill>
-              </a:rPr>
-              <a:t>Python 3.9</a:t>
-            </a:r>
-          </a:p>
-        </p:txBody>
-      </p:sp>
-      <p:sp>
-        <p:nvSpPr>
-          <p:cNvPr id="26" name="TextBox 25">
-            <a:extLst>
-              <a:ext uri="{FF2B5EF4-FFF2-40B4-BE49-F238E27FC236}">
-                <a16:creationId xmlns:a16="http://schemas.microsoft.com/office/drawing/2014/main" id="{91224570-2CF9-37A1-384C-77645919911B}"/>
-              </a:ext>
-            </a:extLst>
-          </p:cNvPr>
-          <p:cNvSpPr txBox="1"/>
-          <p:nvPr/>
-        </p:nvSpPr>
-        <p:spPr>
-          <a:xfrm>
-            <a:off x="7556181" y="1954626"/>
-            <a:ext cx="1001981" cy="261610"/>
-          </a:xfrm>
-          <a:prstGeom prst="rect">
-            <a:avLst/>
-          </a:prstGeom>
-          <a:noFill/>
-        </p:spPr>
-        <p:txBody>
-          <a:bodyPr wrap="square">
-            <a:spAutoFit/>
-          </a:bodyPr>
-          <a:lstStyle/>
-          <a:p>
-            <a:r>
-              <a:rPr lang="en-US" sz="1100" dirty="0">
-                <a:solidFill>
-                  <a:srgbClr val="C00000"/>
-                </a:solidFill>
-              </a:rPr>
-              <a:t>Python 3.7</a:t>
-            </a:r>
-          </a:p>
-        </p:txBody>
-      </p:sp>
+        </p:grpSpPr>
+        <p:grpSp>
+          <p:nvGrpSpPr>
+            <p:cNvPr id="18" name="Group 17">
+              <a:extLst>
+                <a:ext uri="{FF2B5EF4-FFF2-40B4-BE49-F238E27FC236}">
+                  <a16:creationId xmlns:a16="http://schemas.microsoft.com/office/drawing/2014/main" id="{6B9E793B-409E-3CBB-EBA4-FD5CE2AA626A}"/>
+                </a:ext>
+              </a:extLst>
+            </p:cNvPr>
+            <p:cNvGrpSpPr/>
+            <p:nvPr/>
+          </p:nvGrpSpPr>
+          <p:grpSpPr>
+            <a:xfrm>
+              <a:off x="6754587" y="987033"/>
+              <a:ext cx="2692234" cy="1968176"/>
+              <a:chOff x="7441873" y="644510"/>
+              <a:chExt cx="3420091" cy="2495088"/>
+            </a:xfrm>
+          </p:grpSpPr>
+          <p:pic>
+            <p:nvPicPr>
+              <p:cNvPr id="8" name="Picture 7" descr="What Is HPC? - UArizona HPC Documentation">
+                <a:extLst>
+                  <a:ext uri="{FF2B5EF4-FFF2-40B4-BE49-F238E27FC236}">
+                    <a16:creationId xmlns:a16="http://schemas.microsoft.com/office/drawing/2014/main" id="{65AB546E-5503-B817-1C34-157DD25B0695}"/>
+                  </a:ext>
+                </a:extLst>
+              </p:cNvPr>
+              <p:cNvPicPr>
+                <a:picLocks noChangeAspect="1" noChangeArrowheads="1"/>
+              </p:cNvPicPr>
+              <p:nvPr/>
+            </p:nvPicPr>
+            <p:blipFill>
+              <a:blip r:embed="rId3">
+                <a:extLst>
+                  <a:ext uri="{28A0092B-C50C-407E-A947-70E740481C1C}">
+                    <a14:useLocalDpi xmlns:a14="http://schemas.microsoft.com/office/drawing/2010/main" val="0"/>
+                  </a:ext>
+                </a:extLst>
+              </a:blip>
+              <a:srcRect/>
+              <a:stretch>
+                <a:fillRect/>
+              </a:stretch>
+            </p:blipFill>
+            <p:spPr bwMode="auto">
+              <a:xfrm>
+                <a:off x="8460181" y="1405560"/>
+                <a:ext cx="2401783" cy="1734038"/>
+              </a:xfrm>
+              <a:prstGeom prst="rect">
+                <a:avLst/>
+              </a:prstGeom>
+              <a:noFill/>
+              <a:extLst>
+                <a:ext uri="{909E8E84-426E-40DD-AFC4-6F175D3DCCD1}">
+                  <a14:hiddenFill xmlns:a14="http://schemas.microsoft.com/office/drawing/2010/main">
+                    <a:solidFill>
+                      <a:srgbClr val="FFFFFF"/>
+                    </a:solidFill>
+                  </a14:hiddenFill>
+                </a:ext>
+              </a:extLst>
+            </p:spPr>
+          </p:pic>
+          <p:pic>
+            <p:nvPicPr>
+              <p:cNvPr id="9" name="Picture 8" descr="What Is HPC? - UArizona HPC Documentation">
+                <a:extLst>
+                  <a:ext uri="{FF2B5EF4-FFF2-40B4-BE49-F238E27FC236}">
+                    <a16:creationId xmlns:a16="http://schemas.microsoft.com/office/drawing/2014/main" id="{01D908A9-68B3-7395-16D9-507DCDEBF057}"/>
+                  </a:ext>
+                </a:extLst>
+              </p:cNvPr>
+              <p:cNvPicPr>
+                <a:picLocks noChangeAspect="1" noChangeArrowheads="1"/>
+              </p:cNvPicPr>
+              <p:nvPr/>
+            </p:nvPicPr>
+            <p:blipFill rotWithShape="1">
+              <a:blip r:embed="rId3">
+                <a:extLst>
+                  <a:ext uri="{28A0092B-C50C-407E-A947-70E740481C1C}">
+                    <a14:useLocalDpi xmlns:a14="http://schemas.microsoft.com/office/drawing/2010/main" val="0"/>
+                  </a:ext>
+                </a:extLst>
+              </a:blip>
+              <a:srcRect t="30664" r="57602"/>
+              <a:stretch>
+                <a:fillRect/>
+              </a:stretch>
+            </p:blipFill>
+            <p:spPr bwMode="auto">
+              <a:xfrm>
+                <a:off x="7441873" y="1627030"/>
+                <a:ext cx="1018308" cy="1202313"/>
+              </a:xfrm>
+              <a:prstGeom prst="rect">
+                <a:avLst/>
+              </a:prstGeom>
+              <a:noFill/>
+              <a:extLst>
+                <a:ext uri="{909E8E84-426E-40DD-AFC4-6F175D3DCCD1}">
+                  <a14:hiddenFill xmlns:a14="http://schemas.microsoft.com/office/drawing/2010/main">
+                    <a:solidFill>
+                      <a:srgbClr val="FFFFFF"/>
+                    </a:solidFill>
+                  </a14:hiddenFill>
+                </a:ext>
+              </a:extLst>
+            </p:spPr>
+          </p:pic>
+          <p:pic>
+            <p:nvPicPr>
+              <p:cNvPr id="10" name="Picture 9" descr="What Is HPC? - UArizona HPC Documentation">
+                <a:extLst>
+                  <a:ext uri="{FF2B5EF4-FFF2-40B4-BE49-F238E27FC236}">
+                    <a16:creationId xmlns:a16="http://schemas.microsoft.com/office/drawing/2014/main" id="{D6F13731-B45F-49C2-B74D-67FB39106EEF}"/>
+                  </a:ext>
+                </a:extLst>
+              </p:cNvPr>
+              <p:cNvPicPr>
+                <a:picLocks noChangeAspect="1" noChangeArrowheads="1"/>
+              </p:cNvPicPr>
+              <p:nvPr/>
+            </p:nvPicPr>
+            <p:blipFill rotWithShape="1">
+              <a:blip r:embed="rId3">
+                <a:extLst>
+                  <a:ext uri="{28A0092B-C50C-407E-A947-70E740481C1C}">
+                    <a14:useLocalDpi xmlns:a14="http://schemas.microsoft.com/office/drawing/2010/main" val="0"/>
+                  </a:ext>
+                </a:extLst>
+              </a:blip>
+              <a:srcRect t="30664" r="57602"/>
+              <a:stretch>
+                <a:fillRect/>
+              </a:stretch>
+            </p:blipFill>
+            <p:spPr bwMode="auto">
+              <a:xfrm>
+                <a:off x="8508674" y="669410"/>
+                <a:ext cx="1018308" cy="1202313"/>
+              </a:xfrm>
+              <a:prstGeom prst="rect">
+                <a:avLst/>
+              </a:prstGeom>
+              <a:noFill/>
+              <a:extLst>
+                <a:ext uri="{909E8E84-426E-40DD-AFC4-6F175D3DCCD1}">
+                  <a14:hiddenFill xmlns:a14="http://schemas.microsoft.com/office/drawing/2010/main">
+                    <a:solidFill>
+                      <a:srgbClr val="FFFFFF"/>
+                    </a:solidFill>
+                  </a14:hiddenFill>
+                </a:ext>
+              </a:extLst>
+            </p:spPr>
+          </p:pic>
+          <p:sp>
+            <p:nvSpPr>
+              <p:cNvPr id="13" name="Rectangle 12">
+                <a:extLst>
+                  <a:ext uri="{FF2B5EF4-FFF2-40B4-BE49-F238E27FC236}">
+                    <a16:creationId xmlns:a16="http://schemas.microsoft.com/office/drawing/2014/main" id="{FD74BA47-6333-17DB-DB29-150936889D09}"/>
+                  </a:ext>
+                </a:extLst>
+              </p:cNvPr>
+              <p:cNvSpPr/>
+              <p:nvPr/>
+            </p:nvSpPr>
+            <p:spPr>
+              <a:xfrm>
+                <a:off x="8871364" y="644510"/>
+                <a:ext cx="679865" cy="358496"/>
+              </a:xfrm>
+              <a:prstGeom prst="rect">
+                <a:avLst/>
+              </a:prstGeom>
+              <a:solidFill>
+                <a:schemeClr val="bg1"/>
+              </a:solidFill>
+              <a:ln>
+                <a:noFill/>
+              </a:ln>
+            </p:spPr>
+            <p:style>
+              <a:lnRef idx="2">
+                <a:schemeClr val="accent1">
+                  <a:shade val="15000"/>
+                </a:schemeClr>
+              </a:lnRef>
+              <a:fillRef idx="1">
+                <a:schemeClr val="accent1"/>
+              </a:fillRef>
+              <a:effectRef idx="0">
+                <a:schemeClr val="accent1"/>
+              </a:effectRef>
+              <a:fontRef idx="minor">
+                <a:schemeClr val="lt1"/>
+              </a:fontRef>
+            </p:style>
+            <p:txBody>
+              <a:bodyPr rtlCol="0" anchor="ctr"/>
+              <a:lstStyle/>
+              <a:p>
+                <a:pPr algn="ctr"/>
+                <a:endParaRPr lang="en-US"/>
+              </a:p>
+            </p:txBody>
+          </p:sp>
+          <p:sp>
+            <p:nvSpPr>
+              <p:cNvPr id="14" name="Rectangle 13">
+                <a:extLst>
+                  <a:ext uri="{FF2B5EF4-FFF2-40B4-BE49-F238E27FC236}">
+                    <a16:creationId xmlns:a16="http://schemas.microsoft.com/office/drawing/2014/main" id="{930DD9FD-8F16-3B6D-DD23-B6CF2F586CAB}"/>
+                  </a:ext>
+                </a:extLst>
+              </p:cNvPr>
+              <p:cNvSpPr/>
+              <p:nvPr/>
+            </p:nvSpPr>
+            <p:spPr>
+              <a:xfrm>
+                <a:off x="7804562" y="1592946"/>
+                <a:ext cx="679865" cy="358496"/>
+              </a:xfrm>
+              <a:prstGeom prst="rect">
+                <a:avLst/>
+              </a:prstGeom>
+              <a:solidFill>
+                <a:schemeClr val="bg1"/>
+              </a:solidFill>
+              <a:ln>
+                <a:noFill/>
+              </a:ln>
+            </p:spPr>
+            <p:style>
+              <a:lnRef idx="2">
+                <a:schemeClr val="accent1">
+                  <a:shade val="15000"/>
+                </a:schemeClr>
+              </a:lnRef>
+              <a:fillRef idx="1">
+                <a:schemeClr val="accent1"/>
+              </a:fillRef>
+              <a:effectRef idx="0">
+                <a:schemeClr val="accent1"/>
+              </a:effectRef>
+              <a:fontRef idx="minor">
+                <a:schemeClr val="lt1"/>
+              </a:fontRef>
+            </p:style>
+            <p:txBody>
+              <a:bodyPr rtlCol="0" anchor="ctr"/>
+              <a:lstStyle/>
+              <a:p>
+                <a:pPr algn="ctr"/>
+                <a:endParaRPr lang="en-US"/>
+              </a:p>
+            </p:txBody>
+          </p:sp>
+          <p:sp>
+            <p:nvSpPr>
+              <p:cNvPr id="15" name="Rectangle 14">
+                <a:extLst>
+                  <a:ext uri="{FF2B5EF4-FFF2-40B4-BE49-F238E27FC236}">
+                    <a16:creationId xmlns:a16="http://schemas.microsoft.com/office/drawing/2014/main" id="{607C784F-2F1A-7135-B28D-6B3D0CAD4344}"/>
+                  </a:ext>
+                </a:extLst>
+              </p:cNvPr>
+              <p:cNvSpPr/>
+              <p:nvPr/>
+            </p:nvSpPr>
+            <p:spPr>
+              <a:xfrm>
+                <a:off x="8822870" y="1901519"/>
+                <a:ext cx="679865" cy="358496"/>
+              </a:xfrm>
+              <a:prstGeom prst="rect">
+                <a:avLst/>
+              </a:prstGeom>
+              <a:solidFill>
+                <a:schemeClr val="bg1"/>
+              </a:solidFill>
+              <a:ln>
+                <a:noFill/>
+              </a:ln>
+            </p:spPr>
+            <p:style>
+              <a:lnRef idx="2">
+                <a:schemeClr val="accent1">
+                  <a:shade val="15000"/>
+                </a:schemeClr>
+              </a:lnRef>
+              <a:fillRef idx="1">
+                <a:schemeClr val="accent1"/>
+              </a:fillRef>
+              <a:effectRef idx="0">
+                <a:schemeClr val="accent1"/>
+              </a:effectRef>
+              <a:fontRef idx="minor">
+                <a:schemeClr val="lt1"/>
+              </a:fontRef>
+            </p:style>
+            <p:txBody>
+              <a:bodyPr rtlCol="0" anchor="ctr"/>
+              <a:lstStyle/>
+              <a:p>
+                <a:pPr algn="ctr"/>
+                <a:endParaRPr lang="en-US"/>
+              </a:p>
+            </p:txBody>
+          </p:sp>
+          <p:sp>
+            <p:nvSpPr>
+              <p:cNvPr id="16" name="Rectangle 15">
+                <a:extLst>
+                  <a:ext uri="{FF2B5EF4-FFF2-40B4-BE49-F238E27FC236}">
+                    <a16:creationId xmlns:a16="http://schemas.microsoft.com/office/drawing/2014/main" id="{3F9F1F70-1117-3714-AE7C-779FC253ADAF}"/>
+                  </a:ext>
+                </a:extLst>
+              </p:cNvPr>
+              <p:cNvSpPr/>
+              <p:nvPr/>
+            </p:nvSpPr>
+            <p:spPr>
+              <a:xfrm>
+                <a:off x="10011889" y="1306317"/>
+                <a:ext cx="679865" cy="358496"/>
+              </a:xfrm>
+              <a:prstGeom prst="rect">
+                <a:avLst/>
+              </a:prstGeom>
+              <a:solidFill>
+                <a:schemeClr val="bg1"/>
+              </a:solidFill>
+              <a:ln>
+                <a:noFill/>
+              </a:ln>
+            </p:spPr>
+            <p:style>
+              <a:lnRef idx="2">
+                <a:schemeClr val="accent1">
+                  <a:shade val="15000"/>
+                </a:schemeClr>
+              </a:lnRef>
+              <a:fillRef idx="1">
+                <a:schemeClr val="accent1"/>
+              </a:fillRef>
+              <a:effectRef idx="0">
+                <a:schemeClr val="accent1"/>
+              </a:effectRef>
+              <a:fontRef idx="minor">
+                <a:schemeClr val="lt1"/>
+              </a:fontRef>
+            </p:style>
+            <p:txBody>
+              <a:bodyPr rtlCol="0" anchor="ctr"/>
+              <a:lstStyle/>
+              <a:p>
+                <a:pPr algn="ctr"/>
+                <a:endParaRPr lang="en-US"/>
+              </a:p>
+            </p:txBody>
+          </p:sp>
+        </p:grpSp>
+        <p:sp>
+          <p:nvSpPr>
+            <p:cNvPr id="24" name="TextBox 23">
+              <a:extLst>
+                <a:ext uri="{FF2B5EF4-FFF2-40B4-BE49-F238E27FC236}">
+                  <a16:creationId xmlns:a16="http://schemas.microsoft.com/office/drawing/2014/main" id="{395FF2D7-14F0-A371-8002-DD80EF26F081}"/>
+                </a:ext>
+              </a:extLst>
+            </p:cNvPr>
+            <p:cNvSpPr txBox="1"/>
+            <p:nvPr/>
+          </p:nvSpPr>
+          <p:spPr>
+            <a:xfrm>
+              <a:off x="8348011" y="1172997"/>
+              <a:ext cx="1001981" cy="261610"/>
+            </a:xfrm>
+            <a:prstGeom prst="rect">
+              <a:avLst/>
+            </a:prstGeom>
+            <a:noFill/>
+          </p:spPr>
+          <p:txBody>
+            <a:bodyPr wrap="square">
+              <a:spAutoFit/>
+            </a:bodyPr>
+            <a:lstStyle/>
+            <a:p>
+              <a:r>
+                <a:rPr lang="en-US" sz="1100" dirty="0">
+                  <a:solidFill>
+                    <a:srgbClr val="C00000"/>
+                  </a:solidFill>
+                </a:rPr>
+                <a:t>Python 3.12</a:t>
+              </a:r>
+            </a:p>
+          </p:txBody>
+        </p:sp>
+        <p:sp>
+          <p:nvSpPr>
+            <p:cNvPr id="25" name="TextBox 24">
+              <a:extLst>
+                <a:ext uri="{FF2B5EF4-FFF2-40B4-BE49-F238E27FC236}">
+                  <a16:creationId xmlns:a16="http://schemas.microsoft.com/office/drawing/2014/main" id="{F4D8C13D-F639-992F-4F8F-7FC84DF483AE}"/>
+                </a:ext>
+              </a:extLst>
+            </p:cNvPr>
+            <p:cNvSpPr txBox="1"/>
+            <p:nvPr/>
+          </p:nvSpPr>
+          <p:spPr>
+            <a:xfrm>
+              <a:off x="6654394" y="1677522"/>
+              <a:ext cx="1001981" cy="261610"/>
+            </a:xfrm>
+            <a:prstGeom prst="rect">
+              <a:avLst/>
+            </a:prstGeom>
+            <a:noFill/>
+          </p:spPr>
+          <p:txBody>
+            <a:bodyPr wrap="square">
+              <a:spAutoFit/>
+            </a:bodyPr>
+            <a:lstStyle/>
+            <a:p>
+              <a:r>
+                <a:rPr lang="en-US" sz="1100" dirty="0">
+                  <a:solidFill>
+                    <a:srgbClr val="C00000"/>
+                  </a:solidFill>
+                </a:rPr>
+                <a:t>Python 3.9</a:t>
+              </a:r>
+            </a:p>
+          </p:txBody>
+        </p:sp>
+        <p:sp>
+          <p:nvSpPr>
+            <p:cNvPr id="26" name="TextBox 25">
+              <a:extLst>
+                <a:ext uri="{FF2B5EF4-FFF2-40B4-BE49-F238E27FC236}">
+                  <a16:creationId xmlns:a16="http://schemas.microsoft.com/office/drawing/2014/main" id="{91224570-2CF9-37A1-384C-77645919911B}"/>
+                </a:ext>
+              </a:extLst>
+            </p:cNvPr>
+            <p:cNvSpPr txBox="1"/>
+            <p:nvPr/>
+          </p:nvSpPr>
+          <p:spPr>
+            <a:xfrm>
+              <a:off x="7556181" y="1954626"/>
+              <a:ext cx="1001981" cy="261610"/>
+            </a:xfrm>
+            <a:prstGeom prst="rect">
+              <a:avLst/>
+            </a:prstGeom>
+            <a:noFill/>
+          </p:spPr>
+          <p:txBody>
+            <a:bodyPr wrap="square">
+              <a:spAutoFit/>
+            </a:bodyPr>
+            <a:lstStyle/>
+            <a:p>
+              <a:r>
+                <a:rPr lang="en-US" sz="1100" dirty="0">
+                  <a:solidFill>
+                    <a:srgbClr val="C00000"/>
+                  </a:solidFill>
+                </a:rPr>
+                <a:t>Python 3.7</a:t>
+              </a:r>
+            </a:p>
+          </p:txBody>
+        </p:sp>
+      </p:grpSp>
       <p:sp>
         <p:nvSpPr>
           <p:cNvPr id="27" name="TextBox 26">
@@ -8470,6 +8752,41 @@
             <a:r>
               <a:rPr lang="en-US" dirty="0"/>
               <a:t>, they're tools for different situations. You'll probably use all three at different points.</a:t>
+            </a:r>
+          </a:p>
+        </p:txBody>
+      </p:sp>
+      <p:sp>
+        <p:nvSpPr>
+          <p:cNvPr id="3" name="TextBox 2">
+            <a:extLst>
+              <a:ext uri="{FF2B5EF4-FFF2-40B4-BE49-F238E27FC236}">
+                <a16:creationId xmlns:a16="http://schemas.microsoft.com/office/drawing/2014/main" id="{3261A3D7-8C0F-95EE-70EB-AC86B14BE9B4}"/>
+              </a:ext>
+            </a:extLst>
+          </p:cNvPr>
+          <p:cNvSpPr txBox="1"/>
+          <p:nvPr/>
+        </p:nvSpPr>
+        <p:spPr>
+          <a:xfrm>
+            <a:off x="5266716" y="2663251"/>
+            <a:ext cx="453457" cy="369332"/>
+          </a:xfrm>
+          <a:prstGeom prst="rect">
+            <a:avLst/>
+          </a:prstGeom>
+          <a:noFill/>
+        </p:spPr>
+        <p:txBody>
+          <a:bodyPr wrap="none" rtlCol="0">
+            <a:spAutoFit/>
+          </a:bodyPr>
+          <a:lstStyle/>
+          <a:p>
+            <a:r>
+              <a:rPr lang="en-US" dirty="0"/>
+              <a:t>Vs.</a:t>
             </a:r>
           </a:p>
         </p:txBody>
@@ -8572,7 +8889,19 @@
           <a:p>
             <a:r>
               <a:rPr lang="en-US" dirty="0"/>
-              <a:t>The software is already installed on the cluster, but it's switched off by default to avoid conflicts. </a:t>
+              <a:t>The </a:t>
+            </a:r>
+            <a:r>
+              <a:rPr lang="en-US" b="1" dirty="0">
+                <a:solidFill>
+                  <a:schemeClr val="accent1"/>
+                </a:solidFill>
+              </a:rPr>
+              <a:t>software is already installed on the cluster</a:t>
+            </a:r>
+            <a:r>
+              <a:rPr lang="en-US" dirty="0"/>
+              <a:t>, but it's switched off by default to avoid conflicts. </a:t>
             </a:r>
           </a:p>
           <a:p>
@@ -8671,9 +9000,8 @@
             <a:r>
               <a:rPr lang="en-US" sz="1200" dirty="0">
                 <a:solidFill>
-                  <a:schemeClr val="accent6">
-                    <a:lumMod val="60000"/>
-                    <a:lumOff val="40000"/>
+                  <a:schemeClr val="bg1">
+                    <a:lumMod val="65000"/>
                   </a:schemeClr>
                 </a:solidFill>
                 <a:latin typeface="Menlo" panose="020B0609030804020204" pitchFamily="49" charset="0"/>
@@ -8695,9 +9023,8 @@
             <a:r>
               <a:rPr lang="en-US" sz="1200" dirty="0">
                 <a:solidFill>
-                  <a:schemeClr val="accent6">
-                    <a:lumMod val="60000"/>
-                    <a:lumOff val="40000"/>
+                  <a:schemeClr val="bg1">
+                    <a:lumMod val="65000"/>
                   </a:schemeClr>
                 </a:solidFill>
                 <a:latin typeface="Menlo" panose="020B0609030804020204" pitchFamily="49" charset="0"/>
@@ -8719,9 +9046,8 @@
             <a:r>
               <a:rPr lang="en-US" sz="1200" dirty="0">
                 <a:solidFill>
-                  <a:schemeClr val="accent6">
-                    <a:lumMod val="60000"/>
-                    <a:lumOff val="40000"/>
+                  <a:schemeClr val="bg1">
+                    <a:lumMod val="65000"/>
                   </a:schemeClr>
                 </a:solidFill>
                 <a:latin typeface="Menlo" panose="020B0609030804020204" pitchFamily="49" charset="0"/>
@@ -8743,9 +9069,8 @@
             <a:r>
               <a:rPr lang="en-US" sz="1200" dirty="0">
                 <a:solidFill>
-                  <a:schemeClr val="accent6">
-                    <a:lumMod val="60000"/>
-                    <a:lumOff val="40000"/>
+                  <a:schemeClr val="bg1">
+                    <a:lumMod val="65000"/>
                   </a:schemeClr>
                 </a:solidFill>
                 <a:latin typeface="Menlo" panose="020B0609030804020204" pitchFamily="49" charset="0"/>
@@ -9053,53 +9378,6 @@
           </a:extLst>
         </p:spPr>
       </p:pic>
-      <p:pic>
-        <p:nvPicPr>
-          <p:cNvPr id="5124" name="Picture 4" descr="How to create a Virtual Environment in Python? | by Kiran Mohan | Medium">
-            <a:extLst>
-              <a:ext uri="{FF2B5EF4-FFF2-40B4-BE49-F238E27FC236}">
-                <a16:creationId xmlns:a16="http://schemas.microsoft.com/office/drawing/2014/main" id="{BA9ADBF2-96F2-9072-BE48-0CE182B2545F}"/>
-              </a:ext>
-            </a:extLst>
-          </p:cNvPr>
-          <p:cNvPicPr>
-            <a:picLocks noChangeAspect="1" noChangeArrowheads="1"/>
-          </p:cNvPicPr>
-          <p:nvPr/>
-        </p:nvPicPr>
-        <p:blipFill>
-          <a:blip r:embed="rId4">
-            <a:extLst>
-              <a:ext uri="{28A0092B-C50C-407E-A947-70E740481C1C}">
-                <a14:useLocalDpi xmlns:a14="http://schemas.microsoft.com/office/drawing/2010/main" val="0"/>
-              </a:ext>
-            </a:extLst>
-          </a:blip>
-          <a:srcRect/>
-          <a:stretch>
-            <a:fillRect/>
-          </a:stretch>
-        </p:blipFill>
-        <p:spPr bwMode="auto">
-          <a:xfrm>
-            <a:off x="6935188" y="2283794"/>
-            <a:ext cx="4841339" cy="2666319"/>
-          </a:xfrm>
-          <a:prstGeom prst="rect">
-            <a:avLst/>
-          </a:prstGeom>
-          <a:noFill/>
-          <a:extLst>
-            <a:ext uri="{909E8E84-426E-40DD-AFC4-6F175D3DCCD1}">
-              <a14:hiddenFill xmlns:a14="http://schemas.microsoft.com/office/drawing/2010/main">
-                <a:solidFill>
-                  <a:srgbClr val="FFFFFF"/>
-                </a:solidFill>
-              </a14:hiddenFill>
-            </a:ext>
-          </a:extLst>
-        </p:spPr>
-      </p:pic>
       <p:sp>
         <p:nvSpPr>
           <p:cNvPr id="4" name="TextBox 3">
@@ -9115,7 +9393,7 @@
         <p:spPr>
           <a:xfrm>
             <a:off x="840178" y="1567403"/>
-            <a:ext cx="6095010" cy="2308324"/>
+            <a:ext cx="6095010" cy="2862322"/>
           </a:xfrm>
           <a:prstGeom prst="rect">
             <a:avLst/>
@@ -9141,24 +9419,114 @@
             </a:r>
             <a:r>
               <a:rPr lang="en-US" dirty="0"/>
-              <a:t> environment is an isolated box where you can install whatever you want without affecting anyone else or anything else on the system. You can have multiple environments — one for your RNA-seq pipeline, one for your phylogenetics work — each with different tools and versions, all coexisting peacefully.</a:t>
+              <a:t> environment is an </a:t>
+            </a:r>
+            <a:r>
+              <a:rPr lang="en-US" b="1" dirty="0">
+                <a:solidFill>
+                  <a:schemeClr val="accent6"/>
+                </a:solidFill>
+              </a:rPr>
+              <a:t>isolated box </a:t>
+            </a:r>
+            <a:r>
+              <a:rPr lang="en-US" dirty="0"/>
+              <a:t>where you can install whatever you want </a:t>
+            </a:r>
+            <a:r>
+              <a:rPr lang="en-US" dirty="0">
+                <a:solidFill>
+                  <a:schemeClr val="accent6"/>
+                </a:solidFill>
+              </a:rPr>
+              <a:t>without affecting anyone </a:t>
+            </a:r>
+            <a:r>
+              <a:rPr lang="en-US" dirty="0"/>
+              <a:t>else or anything else on the system. </a:t>
             </a:r>
           </a:p>
           <a:p>
             <a:pPr>
               <a:buNone/>
             </a:pPr>
+            <a:endParaRPr lang="en-US" dirty="0"/>
+          </a:p>
+          <a:p>
+            <a:pPr>
+              <a:buNone/>
+            </a:pPr>
             <a:r>
               <a:rPr lang="en-US" dirty="0"/>
-              <a:t>The mental model: a module is a light switch someone else installed. A </a:t>
-            </a:r>
-            <a:r>
-              <a:rPr lang="en-US" dirty="0" err="1"/>
+              <a:t>You can have </a:t>
+            </a:r>
+            <a:r>
+              <a:rPr lang="en-US" dirty="0">
+                <a:solidFill>
+                  <a:schemeClr val="accent6"/>
+                </a:solidFill>
+              </a:rPr>
+              <a:t>multiple environments </a:t>
+            </a:r>
+            <a:r>
+              <a:rPr lang="en-US" dirty="0"/>
+              <a:t>each with different tools and versions, all coexisting peacefully.</a:t>
+            </a:r>
+          </a:p>
+          <a:p>
+            <a:pPr>
+              <a:buNone/>
+            </a:pPr>
+            <a:endParaRPr lang="en-US" dirty="0"/>
+          </a:p>
+          <a:p>
+            <a:pPr>
+              <a:buNone/>
+            </a:pPr>
+            <a:r>
+              <a:rPr lang="en-US" dirty="0"/>
+              <a:t>A </a:t>
+            </a:r>
+            <a:r>
+              <a:rPr lang="en-US" dirty="0">
+                <a:solidFill>
+                  <a:schemeClr val="accent1"/>
+                </a:solidFill>
+              </a:rPr>
+              <a:t>module</a:t>
+            </a:r>
+            <a:r>
+              <a:rPr lang="en-US" dirty="0"/>
+              <a:t> is a light switch someone else installed. </a:t>
+            </a:r>
+          </a:p>
+          <a:p>
+            <a:pPr>
+              <a:buNone/>
+            </a:pPr>
+            <a:r>
+              <a:rPr lang="en-US" dirty="0"/>
+              <a:t>A </a:t>
+            </a:r>
+            <a:r>
+              <a:rPr lang="en-US" dirty="0" err="1">
+                <a:solidFill>
+                  <a:schemeClr val="accent6"/>
+                </a:solidFill>
+              </a:rPr>
               <a:t>conda</a:t>
             </a:r>
             <a:r>
+              <a:rPr lang="en-US" dirty="0">
+                <a:solidFill>
+                  <a:schemeClr val="accent6"/>
+                </a:solidFill>
+              </a:rPr>
+              <a:t> environment </a:t>
+            </a:r>
+            <a:r>
               <a:rPr lang="en-US" dirty="0"/>
-              <a:t> environment is your own private room with its own switches.</a:t>
+              <a:t>is your own private room with its own switches.</a:t>
             </a:r>
           </a:p>
         </p:txBody>
@@ -9177,13 +9545,17 @@
         </p:nvSpPr>
         <p:spPr>
           <a:xfrm>
-            <a:off x="838200" y="3967885"/>
+            <a:off x="838200" y="4989383"/>
             <a:ext cx="6945581" cy="938719"/>
           </a:xfrm>
           <a:prstGeom prst="rect">
             <a:avLst/>
           </a:prstGeom>
-          <a:noFill/>
+          <a:solidFill>
+            <a:schemeClr val="bg1">
+              <a:lumMod val="95000"/>
+            </a:schemeClr>
+          </a:solidFill>
         </p:spPr>
         <p:txBody>
           <a:bodyPr wrap="square">
@@ -9531,6 +9903,1228 @@
           </a:p>
         </p:txBody>
       </p:sp>
+      <p:grpSp>
+        <p:nvGrpSpPr>
+          <p:cNvPr id="3" name="Group 2">
+            <a:extLst>
+              <a:ext uri="{FF2B5EF4-FFF2-40B4-BE49-F238E27FC236}">
+                <a16:creationId xmlns:a16="http://schemas.microsoft.com/office/drawing/2014/main" id="{E52D1738-5211-9BFB-4DC1-ED497598F84D}"/>
+              </a:ext>
+            </a:extLst>
+          </p:cNvPr>
+          <p:cNvGrpSpPr/>
+          <p:nvPr/>
+        </p:nvGrpSpPr>
+        <p:grpSpPr>
+          <a:xfrm>
+            <a:off x="8212777" y="4317880"/>
+            <a:ext cx="3141023" cy="2174995"/>
+            <a:chOff x="6654394" y="987033"/>
+            <a:chExt cx="2792427" cy="1968176"/>
+          </a:xfrm>
+        </p:grpSpPr>
+        <p:grpSp>
+          <p:nvGrpSpPr>
+            <p:cNvPr id="5" name="Group 4">
+              <a:extLst>
+                <a:ext uri="{FF2B5EF4-FFF2-40B4-BE49-F238E27FC236}">
+                  <a16:creationId xmlns:a16="http://schemas.microsoft.com/office/drawing/2014/main" id="{41961B6B-3AEA-A9B6-3327-9DECEA96D783}"/>
+                </a:ext>
+              </a:extLst>
+            </p:cNvPr>
+            <p:cNvGrpSpPr/>
+            <p:nvPr/>
+          </p:nvGrpSpPr>
+          <p:grpSpPr>
+            <a:xfrm>
+              <a:off x="6754587" y="987033"/>
+              <a:ext cx="2692234" cy="1968176"/>
+              <a:chOff x="7441873" y="644510"/>
+              <a:chExt cx="3420091" cy="2495088"/>
+            </a:xfrm>
+          </p:grpSpPr>
+          <p:pic>
+            <p:nvPicPr>
+              <p:cNvPr id="10" name="Picture 9" descr="What Is HPC? - UArizona HPC Documentation">
+                <a:extLst>
+                  <a:ext uri="{FF2B5EF4-FFF2-40B4-BE49-F238E27FC236}">
+                    <a16:creationId xmlns:a16="http://schemas.microsoft.com/office/drawing/2014/main" id="{6970FD71-C65B-B456-A4CF-CC7DA31EEB46}"/>
+                  </a:ext>
+                </a:extLst>
+              </p:cNvPr>
+              <p:cNvPicPr>
+                <a:picLocks noChangeAspect="1" noChangeArrowheads="1"/>
+              </p:cNvPicPr>
+              <p:nvPr/>
+            </p:nvPicPr>
+            <p:blipFill>
+              <a:blip r:embed="rId4">
+                <a:extLst>
+                  <a:ext uri="{28A0092B-C50C-407E-A947-70E740481C1C}">
+                    <a14:useLocalDpi xmlns:a14="http://schemas.microsoft.com/office/drawing/2010/main" val="0"/>
+                  </a:ext>
+                </a:extLst>
+              </a:blip>
+              <a:srcRect/>
+              <a:stretch>
+                <a:fillRect/>
+              </a:stretch>
+            </p:blipFill>
+            <p:spPr bwMode="auto">
+              <a:xfrm>
+                <a:off x="8460181" y="1405560"/>
+                <a:ext cx="2401783" cy="1734038"/>
+              </a:xfrm>
+              <a:prstGeom prst="rect">
+                <a:avLst/>
+              </a:prstGeom>
+              <a:noFill/>
+              <a:extLst>
+                <a:ext uri="{909E8E84-426E-40DD-AFC4-6F175D3DCCD1}">
+                  <a14:hiddenFill xmlns:a14="http://schemas.microsoft.com/office/drawing/2010/main">
+                    <a:solidFill>
+                      <a:srgbClr val="FFFFFF"/>
+                    </a:solidFill>
+                  </a14:hiddenFill>
+                </a:ext>
+              </a:extLst>
+            </p:spPr>
+          </p:pic>
+          <p:pic>
+            <p:nvPicPr>
+              <p:cNvPr id="11" name="Picture 10" descr="What Is HPC? - UArizona HPC Documentation">
+                <a:extLst>
+                  <a:ext uri="{FF2B5EF4-FFF2-40B4-BE49-F238E27FC236}">
+                    <a16:creationId xmlns:a16="http://schemas.microsoft.com/office/drawing/2014/main" id="{AA1A282A-CA35-31BD-3A0D-551687E99029}"/>
+                  </a:ext>
+                </a:extLst>
+              </p:cNvPr>
+              <p:cNvPicPr>
+                <a:picLocks noChangeAspect="1" noChangeArrowheads="1"/>
+              </p:cNvPicPr>
+              <p:nvPr/>
+            </p:nvPicPr>
+            <p:blipFill rotWithShape="1">
+              <a:blip r:embed="rId4">
+                <a:extLst>
+                  <a:ext uri="{28A0092B-C50C-407E-A947-70E740481C1C}">
+                    <a14:useLocalDpi xmlns:a14="http://schemas.microsoft.com/office/drawing/2010/main" val="0"/>
+                  </a:ext>
+                </a:extLst>
+              </a:blip>
+              <a:srcRect t="30664" r="57602"/>
+              <a:stretch>
+                <a:fillRect/>
+              </a:stretch>
+            </p:blipFill>
+            <p:spPr bwMode="auto">
+              <a:xfrm>
+                <a:off x="7441873" y="1627030"/>
+                <a:ext cx="1018308" cy="1202313"/>
+              </a:xfrm>
+              <a:prstGeom prst="rect">
+                <a:avLst/>
+              </a:prstGeom>
+              <a:noFill/>
+              <a:extLst>
+                <a:ext uri="{909E8E84-426E-40DD-AFC4-6F175D3DCCD1}">
+                  <a14:hiddenFill xmlns:a14="http://schemas.microsoft.com/office/drawing/2010/main">
+                    <a:solidFill>
+                      <a:srgbClr val="FFFFFF"/>
+                    </a:solidFill>
+                  </a14:hiddenFill>
+                </a:ext>
+              </a:extLst>
+            </p:spPr>
+          </p:pic>
+          <p:pic>
+            <p:nvPicPr>
+              <p:cNvPr id="12" name="Picture 11" descr="What Is HPC? - UArizona HPC Documentation">
+                <a:extLst>
+                  <a:ext uri="{FF2B5EF4-FFF2-40B4-BE49-F238E27FC236}">
+                    <a16:creationId xmlns:a16="http://schemas.microsoft.com/office/drawing/2014/main" id="{395B66B0-CC1F-0558-49BC-8CB85BE50552}"/>
+                  </a:ext>
+                </a:extLst>
+              </p:cNvPr>
+              <p:cNvPicPr>
+                <a:picLocks noChangeAspect="1" noChangeArrowheads="1"/>
+              </p:cNvPicPr>
+              <p:nvPr/>
+            </p:nvPicPr>
+            <p:blipFill rotWithShape="1">
+              <a:blip r:embed="rId4">
+                <a:extLst>
+                  <a:ext uri="{28A0092B-C50C-407E-A947-70E740481C1C}">
+                    <a14:useLocalDpi xmlns:a14="http://schemas.microsoft.com/office/drawing/2010/main" val="0"/>
+                  </a:ext>
+                </a:extLst>
+              </a:blip>
+              <a:srcRect t="30664" r="57602"/>
+              <a:stretch>
+                <a:fillRect/>
+              </a:stretch>
+            </p:blipFill>
+            <p:spPr bwMode="auto">
+              <a:xfrm>
+                <a:off x="8508674" y="669410"/>
+                <a:ext cx="1018308" cy="1202313"/>
+              </a:xfrm>
+              <a:prstGeom prst="rect">
+                <a:avLst/>
+              </a:prstGeom>
+              <a:noFill/>
+              <a:extLst>
+                <a:ext uri="{909E8E84-426E-40DD-AFC4-6F175D3DCCD1}">
+                  <a14:hiddenFill xmlns:a14="http://schemas.microsoft.com/office/drawing/2010/main">
+                    <a:solidFill>
+                      <a:srgbClr val="FFFFFF"/>
+                    </a:solidFill>
+                  </a14:hiddenFill>
+                </a:ext>
+              </a:extLst>
+            </p:spPr>
+          </p:pic>
+          <p:sp>
+            <p:nvSpPr>
+              <p:cNvPr id="13" name="Rectangle 12">
+                <a:extLst>
+                  <a:ext uri="{FF2B5EF4-FFF2-40B4-BE49-F238E27FC236}">
+                    <a16:creationId xmlns:a16="http://schemas.microsoft.com/office/drawing/2014/main" id="{4D0033C9-43A9-CDC2-A761-D8EA74DE8520}"/>
+                  </a:ext>
+                </a:extLst>
+              </p:cNvPr>
+              <p:cNvSpPr/>
+              <p:nvPr/>
+            </p:nvSpPr>
+            <p:spPr>
+              <a:xfrm>
+                <a:off x="8871364" y="644510"/>
+                <a:ext cx="679865" cy="358496"/>
+              </a:xfrm>
+              <a:prstGeom prst="rect">
+                <a:avLst/>
+              </a:prstGeom>
+              <a:solidFill>
+                <a:schemeClr val="bg1"/>
+              </a:solidFill>
+              <a:ln>
+                <a:noFill/>
+              </a:ln>
+            </p:spPr>
+            <p:style>
+              <a:lnRef idx="2">
+                <a:schemeClr val="accent1">
+                  <a:shade val="15000"/>
+                </a:schemeClr>
+              </a:lnRef>
+              <a:fillRef idx="1">
+                <a:schemeClr val="accent1"/>
+              </a:fillRef>
+              <a:effectRef idx="0">
+                <a:schemeClr val="accent1"/>
+              </a:effectRef>
+              <a:fontRef idx="minor">
+                <a:schemeClr val="lt1"/>
+              </a:fontRef>
+            </p:style>
+            <p:txBody>
+              <a:bodyPr rtlCol="0" anchor="ctr"/>
+              <a:lstStyle/>
+              <a:p>
+                <a:pPr algn="ctr"/>
+                <a:endParaRPr lang="en-US"/>
+              </a:p>
+            </p:txBody>
+          </p:sp>
+          <p:sp>
+            <p:nvSpPr>
+              <p:cNvPr id="14" name="Rectangle 13">
+                <a:extLst>
+                  <a:ext uri="{FF2B5EF4-FFF2-40B4-BE49-F238E27FC236}">
+                    <a16:creationId xmlns:a16="http://schemas.microsoft.com/office/drawing/2014/main" id="{B2FD602C-40D8-8A73-42A9-4ACF09C1007C}"/>
+                  </a:ext>
+                </a:extLst>
+              </p:cNvPr>
+              <p:cNvSpPr/>
+              <p:nvPr/>
+            </p:nvSpPr>
+            <p:spPr>
+              <a:xfrm>
+                <a:off x="7804562" y="1592946"/>
+                <a:ext cx="679865" cy="358496"/>
+              </a:xfrm>
+              <a:prstGeom prst="rect">
+                <a:avLst/>
+              </a:prstGeom>
+              <a:solidFill>
+                <a:schemeClr val="bg1"/>
+              </a:solidFill>
+              <a:ln>
+                <a:noFill/>
+              </a:ln>
+            </p:spPr>
+            <p:style>
+              <a:lnRef idx="2">
+                <a:schemeClr val="accent1">
+                  <a:shade val="15000"/>
+                </a:schemeClr>
+              </a:lnRef>
+              <a:fillRef idx="1">
+                <a:schemeClr val="accent1"/>
+              </a:fillRef>
+              <a:effectRef idx="0">
+                <a:schemeClr val="accent1"/>
+              </a:effectRef>
+              <a:fontRef idx="minor">
+                <a:schemeClr val="lt1"/>
+              </a:fontRef>
+            </p:style>
+            <p:txBody>
+              <a:bodyPr rtlCol="0" anchor="ctr"/>
+              <a:lstStyle/>
+              <a:p>
+                <a:pPr algn="ctr"/>
+                <a:endParaRPr lang="en-US"/>
+              </a:p>
+            </p:txBody>
+          </p:sp>
+          <p:sp>
+            <p:nvSpPr>
+              <p:cNvPr id="15" name="Rectangle 14">
+                <a:extLst>
+                  <a:ext uri="{FF2B5EF4-FFF2-40B4-BE49-F238E27FC236}">
+                    <a16:creationId xmlns:a16="http://schemas.microsoft.com/office/drawing/2014/main" id="{6502F68F-780C-F288-531A-DAA0FDDF11FB}"/>
+                  </a:ext>
+                </a:extLst>
+              </p:cNvPr>
+              <p:cNvSpPr/>
+              <p:nvPr/>
+            </p:nvSpPr>
+            <p:spPr>
+              <a:xfrm>
+                <a:off x="8822870" y="1901519"/>
+                <a:ext cx="679865" cy="358496"/>
+              </a:xfrm>
+              <a:prstGeom prst="rect">
+                <a:avLst/>
+              </a:prstGeom>
+              <a:solidFill>
+                <a:schemeClr val="bg1"/>
+              </a:solidFill>
+              <a:ln>
+                <a:noFill/>
+              </a:ln>
+            </p:spPr>
+            <p:style>
+              <a:lnRef idx="2">
+                <a:schemeClr val="accent1">
+                  <a:shade val="15000"/>
+                </a:schemeClr>
+              </a:lnRef>
+              <a:fillRef idx="1">
+                <a:schemeClr val="accent1"/>
+              </a:fillRef>
+              <a:effectRef idx="0">
+                <a:schemeClr val="accent1"/>
+              </a:effectRef>
+              <a:fontRef idx="minor">
+                <a:schemeClr val="lt1"/>
+              </a:fontRef>
+            </p:style>
+            <p:txBody>
+              <a:bodyPr rtlCol="0" anchor="ctr"/>
+              <a:lstStyle/>
+              <a:p>
+                <a:pPr algn="ctr"/>
+                <a:endParaRPr lang="en-US"/>
+              </a:p>
+            </p:txBody>
+          </p:sp>
+          <p:sp>
+            <p:nvSpPr>
+              <p:cNvPr id="16" name="Rectangle 15">
+                <a:extLst>
+                  <a:ext uri="{FF2B5EF4-FFF2-40B4-BE49-F238E27FC236}">
+                    <a16:creationId xmlns:a16="http://schemas.microsoft.com/office/drawing/2014/main" id="{048FEFE0-2941-B746-3E11-2E805E5E75B3}"/>
+                  </a:ext>
+                </a:extLst>
+              </p:cNvPr>
+              <p:cNvSpPr/>
+              <p:nvPr/>
+            </p:nvSpPr>
+            <p:spPr>
+              <a:xfrm>
+                <a:off x="10011889" y="1306317"/>
+                <a:ext cx="679865" cy="358496"/>
+              </a:xfrm>
+              <a:prstGeom prst="rect">
+                <a:avLst/>
+              </a:prstGeom>
+              <a:solidFill>
+                <a:schemeClr val="bg1"/>
+              </a:solidFill>
+              <a:ln>
+                <a:noFill/>
+              </a:ln>
+            </p:spPr>
+            <p:style>
+              <a:lnRef idx="2">
+                <a:schemeClr val="accent1">
+                  <a:shade val="15000"/>
+                </a:schemeClr>
+              </a:lnRef>
+              <a:fillRef idx="1">
+                <a:schemeClr val="accent1"/>
+              </a:fillRef>
+              <a:effectRef idx="0">
+                <a:schemeClr val="accent1"/>
+              </a:effectRef>
+              <a:fontRef idx="minor">
+                <a:schemeClr val="lt1"/>
+              </a:fontRef>
+            </p:style>
+            <p:txBody>
+              <a:bodyPr rtlCol="0" anchor="ctr"/>
+              <a:lstStyle/>
+              <a:p>
+                <a:pPr algn="ctr"/>
+                <a:endParaRPr lang="en-US"/>
+              </a:p>
+            </p:txBody>
+          </p:sp>
+        </p:grpSp>
+        <p:sp>
+          <p:nvSpPr>
+            <p:cNvPr id="7" name="TextBox 6">
+              <a:extLst>
+                <a:ext uri="{FF2B5EF4-FFF2-40B4-BE49-F238E27FC236}">
+                  <a16:creationId xmlns:a16="http://schemas.microsoft.com/office/drawing/2014/main" id="{D778033C-0E49-CDDC-A663-CCB69F294D31}"/>
+                </a:ext>
+              </a:extLst>
+            </p:cNvPr>
+            <p:cNvSpPr txBox="1"/>
+            <p:nvPr/>
+          </p:nvSpPr>
+          <p:spPr>
+            <a:xfrm>
+              <a:off x="8348011" y="1172997"/>
+              <a:ext cx="1001981" cy="236734"/>
+            </a:xfrm>
+            <a:prstGeom prst="rect">
+              <a:avLst/>
+            </a:prstGeom>
+            <a:noFill/>
+          </p:spPr>
+          <p:txBody>
+            <a:bodyPr wrap="square">
+              <a:spAutoFit/>
+            </a:bodyPr>
+            <a:lstStyle/>
+            <a:p>
+              <a:r>
+                <a:rPr lang="en-US" sz="1100" dirty="0">
+                  <a:solidFill>
+                    <a:schemeClr val="accent6">
+                      <a:lumMod val="75000"/>
+                    </a:schemeClr>
+                  </a:solidFill>
+                </a:rPr>
+                <a:t>Python 3.12</a:t>
+              </a:r>
+            </a:p>
+          </p:txBody>
+        </p:sp>
+        <p:sp>
+          <p:nvSpPr>
+            <p:cNvPr id="8" name="TextBox 7">
+              <a:extLst>
+                <a:ext uri="{FF2B5EF4-FFF2-40B4-BE49-F238E27FC236}">
+                  <a16:creationId xmlns:a16="http://schemas.microsoft.com/office/drawing/2014/main" id="{F517445B-703A-C0D1-3B72-F36848D6C89A}"/>
+                </a:ext>
+              </a:extLst>
+            </p:cNvPr>
+            <p:cNvSpPr txBox="1"/>
+            <p:nvPr/>
+          </p:nvSpPr>
+          <p:spPr>
+            <a:xfrm>
+              <a:off x="6654394" y="1677522"/>
+              <a:ext cx="1001981" cy="236734"/>
+            </a:xfrm>
+            <a:prstGeom prst="rect">
+              <a:avLst/>
+            </a:prstGeom>
+            <a:noFill/>
+          </p:spPr>
+          <p:txBody>
+            <a:bodyPr wrap="square">
+              <a:spAutoFit/>
+            </a:bodyPr>
+            <a:lstStyle/>
+            <a:p>
+              <a:r>
+                <a:rPr lang="en-US" sz="1100" dirty="0">
+                  <a:solidFill>
+                    <a:schemeClr val="accent6">
+                      <a:lumMod val="75000"/>
+                    </a:schemeClr>
+                  </a:solidFill>
+                </a:rPr>
+                <a:t>Python 3.9</a:t>
+              </a:r>
+            </a:p>
+          </p:txBody>
+        </p:sp>
+        <p:sp>
+          <p:nvSpPr>
+            <p:cNvPr id="9" name="TextBox 8">
+              <a:extLst>
+                <a:ext uri="{FF2B5EF4-FFF2-40B4-BE49-F238E27FC236}">
+                  <a16:creationId xmlns:a16="http://schemas.microsoft.com/office/drawing/2014/main" id="{267111EF-064A-1DB4-EF0F-9427AAE47F35}"/>
+                </a:ext>
+              </a:extLst>
+            </p:cNvPr>
+            <p:cNvSpPr txBox="1"/>
+            <p:nvPr/>
+          </p:nvSpPr>
+          <p:spPr>
+            <a:xfrm>
+              <a:off x="7556181" y="1954626"/>
+              <a:ext cx="1001981" cy="236734"/>
+            </a:xfrm>
+            <a:prstGeom prst="rect">
+              <a:avLst/>
+            </a:prstGeom>
+            <a:noFill/>
+          </p:spPr>
+          <p:txBody>
+            <a:bodyPr wrap="square">
+              <a:spAutoFit/>
+            </a:bodyPr>
+            <a:lstStyle/>
+            <a:p>
+              <a:r>
+                <a:rPr lang="en-US" sz="1100" dirty="0">
+                  <a:solidFill>
+                    <a:schemeClr val="accent6">
+                      <a:lumMod val="75000"/>
+                    </a:schemeClr>
+                  </a:solidFill>
+                </a:rPr>
+                <a:t>Python 3.7</a:t>
+              </a:r>
+            </a:p>
+          </p:txBody>
+        </p:sp>
+      </p:grpSp>
+      <p:sp>
+        <p:nvSpPr>
+          <p:cNvPr id="17" name="Rectangle 16">
+            <a:extLst>
+              <a:ext uri="{FF2B5EF4-FFF2-40B4-BE49-F238E27FC236}">
+                <a16:creationId xmlns:a16="http://schemas.microsoft.com/office/drawing/2014/main" id="{F77D2E23-8F9E-2770-F52F-1F23229496C7}"/>
+              </a:ext>
+            </a:extLst>
+          </p:cNvPr>
+          <p:cNvSpPr/>
+          <p:nvPr/>
+        </p:nvSpPr>
+        <p:spPr>
+          <a:xfrm>
+            <a:off x="8267807" y="5022862"/>
+            <a:ext cx="714688" cy="345429"/>
+          </a:xfrm>
+          <a:prstGeom prst="rect">
+            <a:avLst/>
+          </a:prstGeom>
+          <a:noFill/>
+          <a:ln w="19050">
+            <a:solidFill>
+              <a:schemeClr val="accent6"/>
+            </a:solidFill>
+          </a:ln>
+        </p:spPr>
+        <p:style>
+          <a:lnRef idx="2">
+            <a:schemeClr val="accent1">
+              <a:shade val="15000"/>
+            </a:schemeClr>
+          </a:lnRef>
+          <a:fillRef idx="1">
+            <a:schemeClr val="accent1"/>
+          </a:fillRef>
+          <a:effectRef idx="0">
+            <a:schemeClr val="accent1"/>
+          </a:effectRef>
+          <a:fontRef idx="minor">
+            <a:schemeClr val="lt1"/>
+          </a:fontRef>
+        </p:style>
+        <p:txBody>
+          <a:bodyPr rtlCol="0" anchor="ctr"/>
+          <a:lstStyle/>
+          <a:p>
+            <a:pPr algn="ctr"/>
+            <a:endParaRPr lang="en-US"/>
+          </a:p>
+        </p:txBody>
+      </p:sp>
+      <p:sp>
+        <p:nvSpPr>
+          <p:cNvPr id="18" name="Rectangle 17">
+            <a:extLst>
+              <a:ext uri="{FF2B5EF4-FFF2-40B4-BE49-F238E27FC236}">
+                <a16:creationId xmlns:a16="http://schemas.microsoft.com/office/drawing/2014/main" id="{7FDC282A-315E-B96D-264B-4B85CB9757EF}"/>
+              </a:ext>
+            </a:extLst>
+          </p:cNvPr>
+          <p:cNvSpPr/>
+          <p:nvPr/>
+        </p:nvSpPr>
+        <p:spPr>
+          <a:xfrm>
+            <a:off x="10171740" y="4467056"/>
+            <a:ext cx="756697" cy="345429"/>
+          </a:xfrm>
+          <a:prstGeom prst="rect">
+            <a:avLst/>
+          </a:prstGeom>
+          <a:noFill/>
+          <a:ln w="19050">
+            <a:solidFill>
+              <a:schemeClr val="accent6"/>
+            </a:solidFill>
+          </a:ln>
+        </p:spPr>
+        <p:style>
+          <a:lnRef idx="2">
+            <a:schemeClr val="accent1">
+              <a:shade val="15000"/>
+            </a:schemeClr>
+          </a:lnRef>
+          <a:fillRef idx="1">
+            <a:schemeClr val="accent1"/>
+          </a:fillRef>
+          <a:effectRef idx="0">
+            <a:schemeClr val="accent1"/>
+          </a:effectRef>
+          <a:fontRef idx="minor">
+            <a:schemeClr val="lt1"/>
+          </a:fontRef>
+        </p:style>
+        <p:txBody>
+          <a:bodyPr rtlCol="0" anchor="ctr"/>
+          <a:lstStyle/>
+          <a:p>
+            <a:pPr algn="ctr"/>
+            <a:endParaRPr lang="en-US"/>
+          </a:p>
+        </p:txBody>
+      </p:sp>
+      <p:sp>
+        <p:nvSpPr>
+          <p:cNvPr id="19" name="Rectangle 18">
+            <a:extLst>
+              <a:ext uri="{FF2B5EF4-FFF2-40B4-BE49-F238E27FC236}">
+                <a16:creationId xmlns:a16="http://schemas.microsoft.com/office/drawing/2014/main" id="{0B35D8C7-E462-D1E2-BE3F-4427A2FD2C02}"/>
+              </a:ext>
+            </a:extLst>
+          </p:cNvPr>
+          <p:cNvSpPr/>
+          <p:nvPr/>
+        </p:nvSpPr>
+        <p:spPr>
+          <a:xfrm>
+            <a:off x="9284811" y="5383219"/>
+            <a:ext cx="714688" cy="240389"/>
+          </a:xfrm>
+          <a:prstGeom prst="rect">
+            <a:avLst/>
+          </a:prstGeom>
+          <a:noFill/>
+          <a:ln w="19050">
+            <a:solidFill>
+              <a:schemeClr val="accent6"/>
+            </a:solidFill>
+          </a:ln>
+        </p:spPr>
+        <p:style>
+          <a:lnRef idx="2">
+            <a:schemeClr val="accent1">
+              <a:shade val="15000"/>
+            </a:schemeClr>
+          </a:lnRef>
+          <a:fillRef idx="1">
+            <a:schemeClr val="accent1"/>
+          </a:fillRef>
+          <a:effectRef idx="0">
+            <a:schemeClr val="accent1"/>
+          </a:effectRef>
+          <a:fontRef idx="minor">
+            <a:schemeClr val="lt1"/>
+          </a:fontRef>
+        </p:style>
+        <p:txBody>
+          <a:bodyPr rtlCol="0" anchor="ctr"/>
+          <a:lstStyle/>
+          <a:p>
+            <a:pPr algn="ctr"/>
+            <a:endParaRPr lang="en-US"/>
+          </a:p>
+        </p:txBody>
+      </p:sp>
+      <p:grpSp>
+        <p:nvGrpSpPr>
+          <p:cNvPr id="22" name="Group 21">
+            <a:extLst>
+              <a:ext uri="{FF2B5EF4-FFF2-40B4-BE49-F238E27FC236}">
+                <a16:creationId xmlns:a16="http://schemas.microsoft.com/office/drawing/2014/main" id="{B0DA7DA8-6EC6-B324-4946-41A74617C167}"/>
+              </a:ext>
+            </a:extLst>
+          </p:cNvPr>
+          <p:cNvGrpSpPr/>
+          <p:nvPr/>
+        </p:nvGrpSpPr>
+        <p:grpSpPr>
+          <a:xfrm>
+            <a:off x="8267807" y="1569156"/>
+            <a:ext cx="2792427" cy="1968176"/>
+            <a:chOff x="6654394" y="987033"/>
+            <a:chExt cx="2792427" cy="1968176"/>
+          </a:xfrm>
+        </p:grpSpPr>
+        <p:grpSp>
+          <p:nvGrpSpPr>
+            <p:cNvPr id="23" name="Group 22">
+              <a:extLst>
+                <a:ext uri="{FF2B5EF4-FFF2-40B4-BE49-F238E27FC236}">
+                  <a16:creationId xmlns:a16="http://schemas.microsoft.com/office/drawing/2014/main" id="{23C8625E-0CF4-23A8-482C-39D653E81E08}"/>
+                </a:ext>
+              </a:extLst>
+            </p:cNvPr>
+            <p:cNvGrpSpPr/>
+            <p:nvPr/>
+          </p:nvGrpSpPr>
+          <p:grpSpPr>
+            <a:xfrm>
+              <a:off x="6754587" y="987033"/>
+              <a:ext cx="2692234" cy="1968176"/>
+              <a:chOff x="7441873" y="644510"/>
+              <a:chExt cx="3420091" cy="2495088"/>
+            </a:xfrm>
+          </p:grpSpPr>
+          <p:pic>
+            <p:nvPicPr>
+              <p:cNvPr id="27" name="Picture 26" descr="What Is HPC? - UArizona HPC Documentation">
+                <a:extLst>
+                  <a:ext uri="{FF2B5EF4-FFF2-40B4-BE49-F238E27FC236}">
+                    <a16:creationId xmlns:a16="http://schemas.microsoft.com/office/drawing/2014/main" id="{8170A3F6-BA2A-82F0-5B69-9D30D203773F}"/>
+                  </a:ext>
+                </a:extLst>
+              </p:cNvPr>
+              <p:cNvPicPr>
+                <a:picLocks noChangeAspect="1" noChangeArrowheads="1"/>
+              </p:cNvPicPr>
+              <p:nvPr/>
+            </p:nvPicPr>
+            <p:blipFill>
+              <a:blip r:embed="rId4">
+                <a:extLst>
+                  <a:ext uri="{28A0092B-C50C-407E-A947-70E740481C1C}">
+                    <a14:useLocalDpi xmlns:a14="http://schemas.microsoft.com/office/drawing/2010/main" val="0"/>
+                  </a:ext>
+                </a:extLst>
+              </a:blip>
+              <a:srcRect/>
+              <a:stretch>
+                <a:fillRect/>
+              </a:stretch>
+            </p:blipFill>
+            <p:spPr bwMode="auto">
+              <a:xfrm>
+                <a:off x="8460181" y="1405560"/>
+                <a:ext cx="2401783" cy="1734038"/>
+              </a:xfrm>
+              <a:prstGeom prst="rect">
+                <a:avLst/>
+              </a:prstGeom>
+              <a:noFill/>
+              <a:extLst>
+                <a:ext uri="{909E8E84-426E-40DD-AFC4-6F175D3DCCD1}">
+                  <a14:hiddenFill xmlns:a14="http://schemas.microsoft.com/office/drawing/2010/main">
+                    <a:solidFill>
+                      <a:srgbClr val="FFFFFF"/>
+                    </a:solidFill>
+                  </a14:hiddenFill>
+                </a:ext>
+              </a:extLst>
+            </p:spPr>
+          </p:pic>
+          <p:pic>
+            <p:nvPicPr>
+              <p:cNvPr id="28" name="Picture 27" descr="What Is HPC? - UArizona HPC Documentation">
+                <a:extLst>
+                  <a:ext uri="{FF2B5EF4-FFF2-40B4-BE49-F238E27FC236}">
+                    <a16:creationId xmlns:a16="http://schemas.microsoft.com/office/drawing/2014/main" id="{0A86A1AA-9234-97EA-FF1B-AA7C3CB36BC9}"/>
+                  </a:ext>
+                </a:extLst>
+              </p:cNvPr>
+              <p:cNvPicPr>
+                <a:picLocks noChangeAspect="1" noChangeArrowheads="1"/>
+              </p:cNvPicPr>
+              <p:nvPr/>
+            </p:nvPicPr>
+            <p:blipFill rotWithShape="1">
+              <a:blip r:embed="rId4">
+                <a:extLst>
+                  <a:ext uri="{28A0092B-C50C-407E-A947-70E740481C1C}">
+                    <a14:useLocalDpi xmlns:a14="http://schemas.microsoft.com/office/drawing/2010/main" val="0"/>
+                  </a:ext>
+                </a:extLst>
+              </a:blip>
+              <a:srcRect t="30664" r="57602"/>
+              <a:stretch>
+                <a:fillRect/>
+              </a:stretch>
+            </p:blipFill>
+            <p:spPr bwMode="auto">
+              <a:xfrm>
+                <a:off x="7441873" y="1627030"/>
+                <a:ext cx="1018308" cy="1202313"/>
+              </a:xfrm>
+              <a:prstGeom prst="rect">
+                <a:avLst/>
+              </a:prstGeom>
+              <a:noFill/>
+              <a:extLst>
+                <a:ext uri="{909E8E84-426E-40DD-AFC4-6F175D3DCCD1}">
+                  <a14:hiddenFill xmlns:a14="http://schemas.microsoft.com/office/drawing/2010/main">
+                    <a:solidFill>
+                      <a:srgbClr val="FFFFFF"/>
+                    </a:solidFill>
+                  </a14:hiddenFill>
+                </a:ext>
+              </a:extLst>
+            </p:spPr>
+          </p:pic>
+          <p:pic>
+            <p:nvPicPr>
+              <p:cNvPr id="29" name="Picture 28" descr="What Is HPC? - UArizona HPC Documentation">
+                <a:extLst>
+                  <a:ext uri="{FF2B5EF4-FFF2-40B4-BE49-F238E27FC236}">
+                    <a16:creationId xmlns:a16="http://schemas.microsoft.com/office/drawing/2014/main" id="{8A6F1780-317F-2569-A7FA-54EA762BA81E}"/>
+                  </a:ext>
+                </a:extLst>
+              </p:cNvPr>
+              <p:cNvPicPr>
+                <a:picLocks noChangeAspect="1" noChangeArrowheads="1"/>
+              </p:cNvPicPr>
+              <p:nvPr/>
+            </p:nvPicPr>
+            <p:blipFill rotWithShape="1">
+              <a:blip r:embed="rId4">
+                <a:extLst>
+                  <a:ext uri="{28A0092B-C50C-407E-A947-70E740481C1C}">
+                    <a14:useLocalDpi xmlns:a14="http://schemas.microsoft.com/office/drawing/2010/main" val="0"/>
+                  </a:ext>
+                </a:extLst>
+              </a:blip>
+              <a:srcRect t="30664" r="57602"/>
+              <a:stretch>
+                <a:fillRect/>
+              </a:stretch>
+            </p:blipFill>
+            <p:spPr bwMode="auto">
+              <a:xfrm>
+                <a:off x="8508674" y="669410"/>
+                <a:ext cx="1018308" cy="1202313"/>
+              </a:xfrm>
+              <a:prstGeom prst="rect">
+                <a:avLst/>
+              </a:prstGeom>
+              <a:noFill/>
+              <a:extLst>
+                <a:ext uri="{909E8E84-426E-40DD-AFC4-6F175D3DCCD1}">
+                  <a14:hiddenFill xmlns:a14="http://schemas.microsoft.com/office/drawing/2010/main">
+                    <a:solidFill>
+                      <a:srgbClr val="FFFFFF"/>
+                    </a:solidFill>
+                  </a14:hiddenFill>
+                </a:ext>
+              </a:extLst>
+            </p:spPr>
+          </p:pic>
+          <p:sp>
+            <p:nvSpPr>
+              <p:cNvPr id="30" name="Rectangle 29">
+                <a:extLst>
+                  <a:ext uri="{FF2B5EF4-FFF2-40B4-BE49-F238E27FC236}">
+                    <a16:creationId xmlns:a16="http://schemas.microsoft.com/office/drawing/2014/main" id="{36252C8B-C10C-0F46-B62F-1F622874EBF7}"/>
+                  </a:ext>
+                </a:extLst>
+              </p:cNvPr>
+              <p:cNvSpPr/>
+              <p:nvPr/>
+            </p:nvSpPr>
+            <p:spPr>
+              <a:xfrm>
+                <a:off x="8871364" y="644510"/>
+                <a:ext cx="679865" cy="358496"/>
+              </a:xfrm>
+              <a:prstGeom prst="rect">
+                <a:avLst/>
+              </a:prstGeom>
+              <a:solidFill>
+                <a:schemeClr val="bg1"/>
+              </a:solidFill>
+              <a:ln>
+                <a:noFill/>
+              </a:ln>
+            </p:spPr>
+            <p:style>
+              <a:lnRef idx="2">
+                <a:schemeClr val="accent1">
+                  <a:shade val="15000"/>
+                </a:schemeClr>
+              </a:lnRef>
+              <a:fillRef idx="1">
+                <a:schemeClr val="accent1"/>
+              </a:fillRef>
+              <a:effectRef idx="0">
+                <a:schemeClr val="accent1"/>
+              </a:effectRef>
+              <a:fontRef idx="minor">
+                <a:schemeClr val="lt1"/>
+              </a:fontRef>
+            </p:style>
+            <p:txBody>
+              <a:bodyPr rtlCol="0" anchor="ctr"/>
+              <a:lstStyle/>
+              <a:p>
+                <a:pPr algn="ctr"/>
+                <a:endParaRPr lang="en-US"/>
+              </a:p>
+            </p:txBody>
+          </p:sp>
+          <p:sp>
+            <p:nvSpPr>
+              <p:cNvPr id="31" name="Rectangle 30">
+                <a:extLst>
+                  <a:ext uri="{FF2B5EF4-FFF2-40B4-BE49-F238E27FC236}">
+                    <a16:creationId xmlns:a16="http://schemas.microsoft.com/office/drawing/2014/main" id="{408FC90F-1C41-C255-0D93-B64C2C50BFB3}"/>
+                  </a:ext>
+                </a:extLst>
+              </p:cNvPr>
+              <p:cNvSpPr/>
+              <p:nvPr/>
+            </p:nvSpPr>
+            <p:spPr>
+              <a:xfrm>
+                <a:off x="7804562" y="1592946"/>
+                <a:ext cx="679865" cy="358496"/>
+              </a:xfrm>
+              <a:prstGeom prst="rect">
+                <a:avLst/>
+              </a:prstGeom>
+              <a:solidFill>
+                <a:schemeClr val="bg1"/>
+              </a:solidFill>
+              <a:ln>
+                <a:noFill/>
+              </a:ln>
+            </p:spPr>
+            <p:style>
+              <a:lnRef idx="2">
+                <a:schemeClr val="accent1">
+                  <a:shade val="15000"/>
+                </a:schemeClr>
+              </a:lnRef>
+              <a:fillRef idx="1">
+                <a:schemeClr val="accent1"/>
+              </a:fillRef>
+              <a:effectRef idx="0">
+                <a:schemeClr val="accent1"/>
+              </a:effectRef>
+              <a:fontRef idx="minor">
+                <a:schemeClr val="lt1"/>
+              </a:fontRef>
+            </p:style>
+            <p:txBody>
+              <a:bodyPr rtlCol="0" anchor="ctr"/>
+              <a:lstStyle/>
+              <a:p>
+                <a:pPr algn="ctr"/>
+                <a:endParaRPr lang="en-US"/>
+              </a:p>
+            </p:txBody>
+          </p:sp>
+          <p:sp>
+            <p:nvSpPr>
+              <p:cNvPr id="32" name="Rectangle 31">
+                <a:extLst>
+                  <a:ext uri="{FF2B5EF4-FFF2-40B4-BE49-F238E27FC236}">
+                    <a16:creationId xmlns:a16="http://schemas.microsoft.com/office/drawing/2014/main" id="{55291F9A-05E4-31AD-756F-68B5093433CD}"/>
+                  </a:ext>
+                </a:extLst>
+              </p:cNvPr>
+              <p:cNvSpPr/>
+              <p:nvPr/>
+            </p:nvSpPr>
+            <p:spPr>
+              <a:xfrm>
+                <a:off x="8822870" y="1901519"/>
+                <a:ext cx="679865" cy="358496"/>
+              </a:xfrm>
+              <a:prstGeom prst="rect">
+                <a:avLst/>
+              </a:prstGeom>
+              <a:solidFill>
+                <a:schemeClr val="bg1"/>
+              </a:solidFill>
+              <a:ln>
+                <a:noFill/>
+              </a:ln>
+            </p:spPr>
+            <p:style>
+              <a:lnRef idx="2">
+                <a:schemeClr val="accent1">
+                  <a:shade val="15000"/>
+                </a:schemeClr>
+              </a:lnRef>
+              <a:fillRef idx="1">
+                <a:schemeClr val="accent1"/>
+              </a:fillRef>
+              <a:effectRef idx="0">
+                <a:schemeClr val="accent1"/>
+              </a:effectRef>
+              <a:fontRef idx="minor">
+                <a:schemeClr val="lt1"/>
+              </a:fontRef>
+            </p:style>
+            <p:txBody>
+              <a:bodyPr rtlCol="0" anchor="ctr"/>
+              <a:lstStyle/>
+              <a:p>
+                <a:pPr algn="ctr"/>
+                <a:endParaRPr lang="en-US"/>
+              </a:p>
+            </p:txBody>
+          </p:sp>
+          <p:sp>
+            <p:nvSpPr>
+              <p:cNvPr id="33" name="Rectangle 32">
+                <a:extLst>
+                  <a:ext uri="{FF2B5EF4-FFF2-40B4-BE49-F238E27FC236}">
+                    <a16:creationId xmlns:a16="http://schemas.microsoft.com/office/drawing/2014/main" id="{2026B49B-5F59-30B4-AF85-CEDCBEE3BE57}"/>
+                  </a:ext>
+                </a:extLst>
+              </p:cNvPr>
+              <p:cNvSpPr/>
+              <p:nvPr/>
+            </p:nvSpPr>
+            <p:spPr>
+              <a:xfrm>
+                <a:off x="10011889" y="1306317"/>
+                <a:ext cx="679865" cy="358496"/>
+              </a:xfrm>
+              <a:prstGeom prst="rect">
+                <a:avLst/>
+              </a:prstGeom>
+              <a:solidFill>
+                <a:schemeClr val="bg1"/>
+              </a:solidFill>
+              <a:ln>
+                <a:noFill/>
+              </a:ln>
+            </p:spPr>
+            <p:style>
+              <a:lnRef idx="2">
+                <a:schemeClr val="accent1">
+                  <a:shade val="15000"/>
+                </a:schemeClr>
+              </a:lnRef>
+              <a:fillRef idx="1">
+                <a:schemeClr val="accent1"/>
+              </a:fillRef>
+              <a:effectRef idx="0">
+                <a:schemeClr val="accent1"/>
+              </a:effectRef>
+              <a:fontRef idx="minor">
+                <a:schemeClr val="lt1"/>
+              </a:fontRef>
+            </p:style>
+            <p:txBody>
+              <a:bodyPr rtlCol="0" anchor="ctr"/>
+              <a:lstStyle/>
+              <a:p>
+                <a:pPr algn="ctr"/>
+                <a:endParaRPr lang="en-US"/>
+              </a:p>
+            </p:txBody>
+          </p:sp>
+        </p:grpSp>
+        <p:sp>
+          <p:nvSpPr>
+            <p:cNvPr id="24" name="TextBox 23">
+              <a:extLst>
+                <a:ext uri="{FF2B5EF4-FFF2-40B4-BE49-F238E27FC236}">
+                  <a16:creationId xmlns:a16="http://schemas.microsoft.com/office/drawing/2014/main" id="{4A5CF5BF-2DC8-7D38-912F-4B81C54F63B9}"/>
+                </a:ext>
+              </a:extLst>
+            </p:cNvPr>
+            <p:cNvSpPr txBox="1"/>
+            <p:nvPr/>
+          </p:nvSpPr>
+          <p:spPr>
+            <a:xfrm>
+              <a:off x="8348011" y="1172997"/>
+              <a:ext cx="1001981" cy="261610"/>
+            </a:xfrm>
+            <a:prstGeom prst="rect">
+              <a:avLst/>
+            </a:prstGeom>
+            <a:noFill/>
+          </p:spPr>
+          <p:txBody>
+            <a:bodyPr wrap="square">
+              <a:spAutoFit/>
+            </a:bodyPr>
+            <a:lstStyle/>
+            <a:p>
+              <a:r>
+                <a:rPr lang="en-US" sz="1100" dirty="0">
+                  <a:solidFill>
+                    <a:srgbClr val="C00000"/>
+                  </a:solidFill>
+                </a:rPr>
+                <a:t>Python 3.12</a:t>
+              </a:r>
+            </a:p>
+          </p:txBody>
+        </p:sp>
+        <p:sp>
+          <p:nvSpPr>
+            <p:cNvPr id="25" name="TextBox 24">
+              <a:extLst>
+                <a:ext uri="{FF2B5EF4-FFF2-40B4-BE49-F238E27FC236}">
+                  <a16:creationId xmlns:a16="http://schemas.microsoft.com/office/drawing/2014/main" id="{2685D945-1321-AEEF-36B1-7A579F337B5C}"/>
+                </a:ext>
+              </a:extLst>
+            </p:cNvPr>
+            <p:cNvSpPr txBox="1"/>
+            <p:nvPr/>
+          </p:nvSpPr>
+          <p:spPr>
+            <a:xfrm>
+              <a:off x="6654394" y="1677522"/>
+              <a:ext cx="1001981" cy="261610"/>
+            </a:xfrm>
+            <a:prstGeom prst="rect">
+              <a:avLst/>
+            </a:prstGeom>
+            <a:noFill/>
+          </p:spPr>
+          <p:txBody>
+            <a:bodyPr wrap="square">
+              <a:spAutoFit/>
+            </a:bodyPr>
+            <a:lstStyle/>
+            <a:p>
+              <a:r>
+                <a:rPr lang="en-US" sz="1100" dirty="0">
+                  <a:solidFill>
+                    <a:srgbClr val="C00000"/>
+                  </a:solidFill>
+                </a:rPr>
+                <a:t>Python 3.9</a:t>
+              </a:r>
+            </a:p>
+          </p:txBody>
+        </p:sp>
+        <p:sp>
+          <p:nvSpPr>
+            <p:cNvPr id="26" name="TextBox 25">
+              <a:extLst>
+                <a:ext uri="{FF2B5EF4-FFF2-40B4-BE49-F238E27FC236}">
+                  <a16:creationId xmlns:a16="http://schemas.microsoft.com/office/drawing/2014/main" id="{D1E99496-A4DA-D0CD-367A-1DE27E2F0A6D}"/>
+                </a:ext>
+              </a:extLst>
+            </p:cNvPr>
+            <p:cNvSpPr txBox="1"/>
+            <p:nvPr/>
+          </p:nvSpPr>
+          <p:spPr>
+            <a:xfrm>
+              <a:off x="7556181" y="1954626"/>
+              <a:ext cx="1001981" cy="261610"/>
+            </a:xfrm>
+            <a:prstGeom prst="rect">
+              <a:avLst/>
+            </a:prstGeom>
+            <a:noFill/>
+          </p:spPr>
+          <p:txBody>
+            <a:bodyPr wrap="square">
+              <a:spAutoFit/>
+            </a:bodyPr>
+            <a:lstStyle/>
+            <a:p>
+              <a:r>
+                <a:rPr lang="en-US" sz="1100" dirty="0">
+                  <a:solidFill>
+                    <a:srgbClr val="C00000"/>
+                  </a:solidFill>
+                </a:rPr>
+                <a:t>Python 3.7</a:t>
+              </a:r>
+            </a:p>
+          </p:txBody>
+        </p:sp>
+      </p:grpSp>
+      <p:cxnSp>
+        <p:nvCxnSpPr>
+          <p:cNvPr id="35" name="Straight Arrow Connector 34">
+            <a:extLst>
+              <a:ext uri="{FF2B5EF4-FFF2-40B4-BE49-F238E27FC236}">
+                <a16:creationId xmlns:a16="http://schemas.microsoft.com/office/drawing/2014/main" id="{6098E80C-3B92-4648-5432-9E80F247CB76}"/>
+              </a:ext>
+            </a:extLst>
+          </p:cNvPr>
+          <p:cNvCxnSpPr/>
+          <p:nvPr/>
+        </p:nvCxnSpPr>
+        <p:spPr>
+          <a:xfrm>
+            <a:off x="9670584" y="3693226"/>
+            <a:ext cx="0" cy="564078"/>
+          </a:xfrm>
+          <a:prstGeom prst="straightConnector1">
+            <a:avLst/>
+          </a:prstGeom>
+          <a:ln w="28575">
+            <a:solidFill>
+              <a:schemeClr val="bg1">
+                <a:lumMod val="50000"/>
+              </a:schemeClr>
+            </a:solidFill>
+            <a:tailEnd type="triangle"/>
+          </a:ln>
+        </p:spPr>
+        <p:style>
+          <a:lnRef idx="1">
+            <a:schemeClr val="accent1"/>
+          </a:lnRef>
+          <a:fillRef idx="0">
+            <a:schemeClr val="accent1"/>
+          </a:fillRef>
+          <a:effectRef idx="0">
+            <a:schemeClr val="accent1"/>
+          </a:effectRef>
+          <a:fontRef idx="minor">
+            <a:schemeClr val="tx1"/>
+          </a:fontRef>
+        </p:style>
+      </p:cxnSp>
     </p:spTree>
     <p:extLst>
       <p:ext uri="{BB962C8B-B14F-4D97-AF65-F5344CB8AC3E}">
@@ -9613,8 +11207,8 @@
         </p:nvSpPr>
         <p:spPr>
           <a:xfrm>
-            <a:off x="785044" y="1315233"/>
-            <a:ext cx="10568756" cy="6186309"/>
+            <a:off x="838200" y="1442549"/>
+            <a:ext cx="6405465" cy="5355312"/>
           </a:xfrm>
           <a:prstGeom prst="rect">
             <a:avLst/>
@@ -9629,46 +11223,65 @@
           <a:p>
             <a:r>
               <a:rPr lang="en-US" dirty="0"/>
-              <a:t>Sometimes even </a:t>
-            </a:r>
-            <a:r>
-              <a:rPr lang="en-US" dirty="0" err="1"/>
-              <a:t>conda</a:t>
+              <a:t>We </a:t>
+            </a:r>
+            <a:r>
+              <a:rPr lang="en-US" b="1" dirty="0"/>
+              <a:t>have to</a:t>
             </a:r>
             <a:r>
               <a:rPr lang="en-US" dirty="0"/>
-              <a:t> isn't enough. Some tools have extremely complex dependencies, require a specific operating system configuration, or you need to guarantee that your analysis will run identically on any system — not just Hazel. That's what containers solve.</a:t>
-            </a:r>
-          </a:p>
-          <a:p>
+              <a:t> use containers when: </a:t>
+            </a:r>
+          </a:p>
+          <a:p>
+            <a:pPr marL="285750" indent="-285750">
+              <a:buFontTx/>
+              <a:buChar char="-"/>
+            </a:pPr>
             <a:r>
               <a:rPr lang="en-US" dirty="0"/>
-              <a:t>A container is like a complete mini-computer with its own operating system, libraries, and software all bundled together. You don't install the software — you just run the container. On Hazel, the container system is called </a:t>
-            </a:r>
-            <a:r>
-              <a:rPr lang="en-US" dirty="0" err="1"/>
-              <a:t>Apptainer</a:t>
-            </a:r>
+              <a:t>extremely complex dependencies</a:t>
+            </a:r>
+          </a:p>
+          <a:p>
+            <a:pPr marL="285750" indent="-285750">
+              <a:buFontTx/>
+              <a:buChar char="-"/>
+            </a:pPr>
             <a:r>
               <a:rPr lang="en-US" dirty="0"/>
-              <a:t> (formerly Singularity).</a:t>
-            </a:r>
-          </a:p>
-          <a:p>
+              <a:t>require a specific operating system configuration</a:t>
+            </a:r>
+          </a:p>
+          <a:p>
+            <a:pPr marL="285750" indent="-285750">
+              <a:buFontTx/>
+              <a:buChar char="-"/>
+            </a:pPr>
             <a:r>
               <a:rPr lang="en-US" dirty="0"/>
-              <a:t>The analogy: if a </a:t>
-            </a:r>
-            <a:r>
-              <a:rPr lang="en-US" dirty="0" err="1"/>
-              <a:t>conda</a:t>
-            </a:r>
+              <a:t>need to guarantee that analysis will run identically on any system — not just Hazel</a:t>
+            </a:r>
+          </a:p>
+          <a:p>
+            <a:endParaRPr lang="en-US" dirty="0"/>
+          </a:p>
+          <a:p>
             <a:r>
               <a:rPr lang="en-US" dirty="0"/>
-              <a:t> environment is your private room, a container is a fully furnished apartment you can pick up and move anywhere.</a:t>
-            </a:r>
-          </a:p>
-          <a:p>
+              <a:t>We </a:t>
+            </a:r>
+            <a:r>
+              <a:rPr lang="en-US" b="1" dirty="0">
+                <a:solidFill>
+                  <a:schemeClr val="accent2">
+                    <a:lumMod val="75000"/>
+                  </a:schemeClr>
+                </a:solidFill>
+              </a:rPr>
+              <a:t>should generally use containers</a:t>
+            </a:r>
             <a:endParaRPr lang="en-US" dirty="0"/>
           </a:p>
           <a:p>
@@ -9677,134 +11290,131 @@
           <a:p>
             <a:r>
               <a:rPr lang="en-US" dirty="0"/>
-              <a:t>module load </a:t>
-            </a:r>
-            <a:r>
-              <a:rPr lang="en-US" dirty="0" err="1"/>
-              <a:t>apptainer</a:t>
-            </a:r>
+              <a:t>A container is like a complete mini-computer: </a:t>
+            </a:r>
+          </a:p>
+          <a:p>
+            <a:pPr marL="285750" indent="-285750">
+              <a:buFontTx/>
+              <a:buChar char="-"/>
+            </a:pPr>
             <a:r>
               <a:rPr lang="en-US" dirty="0"/>
-              <a:t> </a:t>
-            </a:r>
-          </a:p>
-          <a:p>
-            <a:r>
-              <a:rPr lang="en-US" dirty="0" err="1"/>
-              <a:t>apptainer</a:t>
-            </a:r>
+              <a:t>Operating system</a:t>
+            </a:r>
+          </a:p>
+          <a:p>
+            <a:pPr marL="285750" indent="-285750">
+              <a:buFontTx/>
+              <a:buChar char="-"/>
+            </a:pPr>
             <a:r>
               <a:rPr lang="en-US" dirty="0"/>
-              <a:t> exec </a:t>
-            </a:r>
-            <a:r>
-              <a:rPr lang="en-US" dirty="0" err="1"/>
-              <a:t>mycontainer.sif</a:t>
-            </a:r>
+              <a:t>Libraries</a:t>
+            </a:r>
+          </a:p>
+          <a:p>
+            <a:pPr marL="285750" indent="-285750">
+              <a:buFontTx/>
+              <a:buChar char="-"/>
+            </a:pPr>
             <a:r>
               <a:rPr lang="en-US" dirty="0"/>
-              <a:t> </a:t>
-            </a:r>
-            <a:r>
-              <a:rPr lang="en-US" dirty="0" err="1"/>
-              <a:t>fastqc</a:t>
-            </a:r>
+              <a:t>Software</a:t>
+            </a:r>
+          </a:p>
+          <a:p>
             <a:r>
               <a:rPr lang="en-US" dirty="0"/>
-              <a:t> –help</a:t>
-            </a:r>
-          </a:p>
-          <a:p>
+              <a:t>You don't install the software — you just run the container. </a:t>
+            </a:r>
+          </a:p>
+          <a:p>
+            <a:pPr marL="285750" indent="-285750">
+              <a:buFontTx/>
+              <a:buChar char="-"/>
+            </a:pPr>
             <a:endParaRPr lang="en-US" dirty="0"/>
           </a:p>
           <a:p>
             <a:r>
-              <a:rPr lang="en-US" b="1" dirty="0"/>
-              <a:t>Slide: Where do containers come from?</a:t>
-            </a:r>
+              <a:rPr lang="en-US" dirty="0">
+                <a:solidFill>
+                  <a:schemeClr val="accent1"/>
+                </a:solidFill>
+              </a:rPr>
+              <a:t>Module</a:t>
+            </a:r>
+            <a:r>
+              <a:rPr lang="en-US" dirty="0"/>
+              <a:t> = switch</a:t>
+            </a:r>
+          </a:p>
+          <a:p>
+            <a:r>
+              <a:rPr lang="en-US" dirty="0">
+                <a:solidFill>
+                  <a:schemeClr val="accent6"/>
+                </a:solidFill>
+              </a:rPr>
+              <a:t>Conda environment </a:t>
+            </a:r>
+            <a:r>
+              <a:rPr lang="en-US" dirty="0"/>
+              <a:t>= private room with switches</a:t>
+            </a:r>
+          </a:p>
+          <a:p>
+            <a:r>
+              <a:rPr lang="en-US" dirty="0">
+                <a:solidFill>
+                  <a:schemeClr val="accent2">
+                    <a:lumMod val="75000"/>
+                  </a:schemeClr>
+                </a:solidFill>
+              </a:rPr>
+              <a:t>Container</a:t>
+            </a:r>
+            <a:r>
+              <a:rPr lang="en-US" dirty="0"/>
+              <a:t> = fully furnished apartment you can pick up and move anywhere.</a:t>
+            </a:r>
+          </a:p>
+          <a:p>
             <a:endParaRPr lang="en-US" dirty="0"/>
           </a:p>
-          <a:p>
-            <a:r>
-              <a:rPr lang="en-US" dirty="0"/>
-              <a:t>Beginners immediately ask this. Three main sources:</a:t>
-            </a:r>
-          </a:p>
-          <a:p>
-            <a:r>
-              <a:rPr lang="en-US" b="1" dirty="0"/>
-              <a:t>Docker Hub</a:t>
-            </a:r>
-            <a:r>
-              <a:rPr lang="en-US" dirty="0"/>
-              <a:t> — the largest repository; </a:t>
-            </a:r>
-            <a:r>
-              <a:rPr lang="en-US" dirty="0" err="1"/>
-              <a:t>Apptainer</a:t>
-            </a:r>
-            <a:r>
-              <a:rPr lang="en-US" dirty="0"/>
-              <a:t> can pull and convert Docker containers directly</a:t>
-            </a:r>
-          </a:p>
-          <a:p>
-            <a:r>
-              <a:rPr lang="en-US" b="1" dirty="0" err="1"/>
-              <a:t>Biocontainers</a:t>
-            </a:r>
-            <a:r>
-              <a:rPr lang="en-US" dirty="0"/>
-              <a:t> — bioinformatics-specific containers, one per tool</a:t>
-            </a:r>
-          </a:p>
-          <a:p>
-            <a:r>
-              <a:rPr lang="en-US" b="1" dirty="0"/>
-              <a:t>You build your own</a:t>
-            </a:r>
-            <a:r>
-              <a:rPr lang="en-US" dirty="0"/>
-              <a:t> — advanced use, not needed for most beginners</a:t>
-            </a:r>
-          </a:p>
-          <a:p>
-            <a:r>
-              <a:rPr lang="en-US" dirty="0"/>
-              <a:t>For most bioinformatics tools, a container already exists and you just need to pull it:</a:t>
-            </a:r>
-          </a:p>
-          <a:p>
-            <a:endParaRPr lang="en-US" dirty="0"/>
-          </a:p>
-          <a:p>
-            <a:r>
-              <a:rPr lang="en-US" dirty="0" err="1"/>
-              <a:t>apptainer</a:t>
-            </a:r>
-            <a:r>
-              <a:rPr lang="en-US" dirty="0"/>
-              <a:t> pull docker://</a:t>
-            </a:r>
-            <a:r>
-              <a:rPr lang="en-US" dirty="0" err="1"/>
-              <a:t>biocontainers</a:t>
-            </a:r>
-            <a:r>
-              <a:rPr lang="en-US" dirty="0"/>
-              <a:t>/</a:t>
-            </a:r>
-            <a:r>
-              <a:rPr lang="en-US" dirty="0" err="1"/>
-              <a:t>fastqc:latest</a:t>
-            </a:r>
-            <a:endParaRPr lang="en-US" dirty="0"/>
-          </a:p>
-          <a:p>
-            <a:endParaRPr lang="en-US" dirty="0"/>
-          </a:p>
         </p:txBody>
       </p:sp>
+      <p:pic>
+        <p:nvPicPr>
+          <p:cNvPr id="4" name="Picture 3">
+            <a:extLst>
+              <a:ext uri="{FF2B5EF4-FFF2-40B4-BE49-F238E27FC236}">
+                <a16:creationId xmlns:a16="http://schemas.microsoft.com/office/drawing/2014/main" id="{1A5E3C14-0703-76A5-5414-7B911F52189B}"/>
+              </a:ext>
+            </a:extLst>
+          </p:cNvPr>
+          <p:cNvPicPr>
+            <a:picLocks noChangeAspect="1"/>
+          </p:cNvPicPr>
+          <p:nvPr/>
+        </p:nvPicPr>
+        <p:blipFill>
+          <a:blip r:embed="rId3"/>
+          <a:stretch>
+            <a:fillRect/>
+          </a:stretch>
+        </p:blipFill>
+        <p:spPr>
+          <a:xfrm>
+            <a:off x="6531428" y="1590990"/>
+            <a:ext cx="6165273" cy="4281440"/>
+          </a:xfrm>
+          <a:prstGeom prst="rect">
+            <a:avLst/>
+          </a:prstGeom>
+        </p:spPr>
+      </p:pic>
     </p:spTree>
     <p:extLst>
       <p:ext uri="{BB962C8B-B14F-4D97-AF65-F5344CB8AC3E}">
@@ -9826,7 +11436,7 @@
         <p:cNvPr id="1" name="">
           <a:extLst>
             <a:ext uri="{FF2B5EF4-FFF2-40B4-BE49-F238E27FC236}">
-              <a16:creationId xmlns:a16="http://schemas.microsoft.com/office/drawing/2014/main" id="{ECF3FCFC-5B5A-48C4-991E-88A3B828AF77}"/>
+              <a16:creationId xmlns:a16="http://schemas.microsoft.com/office/drawing/2014/main" id="{0827E178-611C-4A10-AB68-2E8C2C7D82E1}"/>
             </a:ext>
           </a:extLst>
         </p:cNvPr>
@@ -9843,66 +11453,325 @@
       </p:grpSpPr>
       <p:sp>
         <p:nvSpPr>
-          <p:cNvPr id="6" name="Title 1">
-            <a:extLst>
-              <a:ext uri="{FF2B5EF4-FFF2-40B4-BE49-F238E27FC236}">
-                <a16:creationId xmlns:a16="http://schemas.microsoft.com/office/drawing/2014/main" id="{BEF8470A-62C7-5CDA-7431-1EF86C6C1BF2}"/>
-              </a:ext>
-            </a:extLst>
-          </p:cNvPr>
-          <p:cNvSpPr txBox="1">
-            <a:spLocks/>
+          <p:cNvPr id="2" name="Title 1">
+            <a:extLst>
+              <a:ext uri="{FF2B5EF4-FFF2-40B4-BE49-F238E27FC236}">
+                <a16:creationId xmlns:a16="http://schemas.microsoft.com/office/drawing/2014/main" id="{6F68F1C3-1BB9-9B74-0597-520B1FC41047}"/>
+              </a:ext>
+            </a:extLst>
+          </p:cNvPr>
+          <p:cNvSpPr>
+            <a:spLocks noGrp="1"/>
           </p:cNvSpPr>
+          <p:nvPr>
+            <p:ph type="title"/>
+          </p:nvPr>
+        </p:nvSpPr>
+        <p:spPr/>
+        <p:txBody>
+          <a:bodyPr>
+            <a:normAutofit/>
+          </a:bodyPr>
+          <a:lstStyle/>
+          <a:p>
+            <a:r>
+              <a:rPr lang="en-US" sz="4000" dirty="0">
+                <a:latin typeface="Helvetica" pitchFamily="2" charset="0"/>
+              </a:rPr>
+              <a:t>Introduction to containers</a:t>
+            </a:r>
+          </a:p>
+        </p:txBody>
+      </p:sp>
+      <p:sp>
+        <p:nvSpPr>
+          <p:cNvPr id="3" name="TextBox 2">
+            <a:extLst>
+              <a:ext uri="{FF2B5EF4-FFF2-40B4-BE49-F238E27FC236}">
+                <a16:creationId xmlns:a16="http://schemas.microsoft.com/office/drawing/2014/main" id="{943C4728-1E7E-65B9-D493-3DE384802022}"/>
+              </a:ext>
+            </a:extLst>
+          </p:cNvPr>
+          <p:cNvSpPr txBox="1"/>
           <p:nvPr/>
         </p:nvSpPr>
         <p:spPr>
           <a:xfrm>
-            <a:off x="1646320" y="2089105"/>
-            <a:ext cx="9144000" cy="2387600"/>
+            <a:off x="838200" y="1598911"/>
+            <a:ext cx="4339442" cy="461665"/>
           </a:xfrm>
           <a:prstGeom prst="rect">
             <a:avLst/>
           </a:prstGeom>
+          <a:solidFill>
+            <a:schemeClr val="bg1">
+              <a:lumMod val="95000"/>
+            </a:schemeClr>
+          </a:solidFill>
         </p:spPr>
         <p:txBody>
-          <a:bodyPr vert="horz" lIns="91440" tIns="45720" rIns="91440" bIns="45720" rtlCol="0" anchor="ctr">
-            <a:normAutofit/>
+          <a:bodyPr wrap="square" rtlCol="0">
+            <a:spAutoFit/>
           </a:bodyPr>
-          <a:lstStyle>
-            <a:lvl1pPr algn="l" defTabSz="914400" rtl="0" eaLnBrk="1" latinLnBrk="0" hangingPunct="1">
-              <a:lnSpc>
-                <a:spcPct val="90000"/>
-              </a:lnSpc>
-              <a:spcBef>
-                <a:spcPct val="0"/>
-              </a:spcBef>
-              <a:buNone/>
-              <a:defRPr sz="4400" kern="1200">
+          <a:lstStyle/>
+          <a:p>
+            <a:r>
+              <a:rPr lang="en-US" sz="1200" dirty="0">
+                <a:latin typeface="Menlo" panose="020B0609030804020204" pitchFamily="49" charset="0"/>
+                <a:ea typeface="Menlo" panose="020B0609030804020204" pitchFamily="49" charset="0"/>
+                <a:cs typeface="Menlo" panose="020B0609030804020204" pitchFamily="49" charset="0"/>
+              </a:rPr>
+              <a:t>module load </a:t>
+            </a:r>
+            <a:r>
+              <a:rPr lang="en-US" sz="1200" dirty="0" err="1">
+                <a:latin typeface="Menlo" panose="020B0609030804020204" pitchFamily="49" charset="0"/>
+                <a:ea typeface="Menlo" panose="020B0609030804020204" pitchFamily="49" charset="0"/>
+                <a:cs typeface="Menlo" panose="020B0609030804020204" pitchFamily="49" charset="0"/>
+              </a:rPr>
+              <a:t>apptainer</a:t>
+            </a:r>
+            <a:r>
+              <a:rPr lang="en-US" sz="1200" dirty="0">
+                <a:latin typeface="Menlo" panose="020B0609030804020204" pitchFamily="49" charset="0"/>
+                <a:ea typeface="Menlo" panose="020B0609030804020204" pitchFamily="49" charset="0"/>
+                <a:cs typeface="Menlo" panose="020B0609030804020204" pitchFamily="49" charset="0"/>
+              </a:rPr>
+              <a:t> </a:t>
+            </a:r>
+          </a:p>
+          <a:p>
+            <a:r>
+              <a:rPr lang="en-US" sz="1200" dirty="0" err="1">
+                <a:latin typeface="Menlo" panose="020B0609030804020204" pitchFamily="49" charset="0"/>
+                <a:ea typeface="Menlo" panose="020B0609030804020204" pitchFamily="49" charset="0"/>
+                <a:cs typeface="Menlo" panose="020B0609030804020204" pitchFamily="49" charset="0"/>
+              </a:rPr>
+              <a:t>apptainer</a:t>
+            </a:r>
+            <a:r>
+              <a:rPr lang="en-US" sz="1200" dirty="0">
+                <a:latin typeface="Menlo" panose="020B0609030804020204" pitchFamily="49" charset="0"/>
+                <a:ea typeface="Menlo" panose="020B0609030804020204" pitchFamily="49" charset="0"/>
+                <a:cs typeface="Menlo" panose="020B0609030804020204" pitchFamily="49" charset="0"/>
+              </a:rPr>
+              <a:t> exec </a:t>
+            </a:r>
+            <a:r>
+              <a:rPr lang="en-US" sz="1200" dirty="0" err="1">
                 <a:solidFill>
-                  <a:schemeClr val="tx1"/>
+                  <a:schemeClr val="accent2">
+                    <a:lumMod val="75000"/>
+                  </a:schemeClr>
                 </a:solidFill>
-                <a:latin typeface="+mj-lt"/>
-                <a:ea typeface="+mj-ea"/>
-                <a:cs typeface="+mj-cs"/>
-              </a:defRPr>
-            </a:lvl1pPr>
-          </a:lstStyle>
-          <a:p>
-            <a:r>
-              <a:rPr lang="en-US" sz="5400" dirty="0">
-                <a:latin typeface="Helvetica" pitchFamily="2" charset="0"/>
+                <a:latin typeface="Menlo" panose="020B0609030804020204" pitchFamily="49" charset="0"/>
+                <a:ea typeface="Menlo" panose="020B0609030804020204" pitchFamily="49" charset="0"/>
+                <a:cs typeface="Menlo" panose="020B0609030804020204" pitchFamily="49" charset="0"/>
               </a:rPr>
-              <a:t>7. Data management</a:t>
-            </a:r>
+              <a:t>mycontainer.sif</a:t>
+            </a:r>
+            <a:r>
+              <a:rPr lang="en-US" sz="1200" dirty="0">
+                <a:solidFill>
+                  <a:schemeClr val="accent2">
+                    <a:lumMod val="75000"/>
+                  </a:schemeClr>
+                </a:solidFill>
+                <a:latin typeface="Menlo" panose="020B0609030804020204" pitchFamily="49" charset="0"/>
+                <a:ea typeface="Menlo" panose="020B0609030804020204" pitchFamily="49" charset="0"/>
+                <a:cs typeface="Menlo" panose="020B0609030804020204" pitchFamily="49" charset="0"/>
+              </a:rPr>
+              <a:t> </a:t>
+            </a:r>
+            <a:r>
+              <a:rPr lang="en-US" sz="1200" dirty="0" err="1">
+                <a:latin typeface="Menlo" panose="020B0609030804020204" pitchFamily="49" charset="0"/>
+                <a:ea typeface="Menlo" panose="020B0609030804020204" pitchFamily="49" charset="0"/>
+                <a:cs typeface="Menlo" panose="020B0609030804020204" pitchFamily="49" charset="0"/>
+              </a:rPr>
+              <a:t>fastqc</a:t>
+            </a:r>
+            <a:r>
+              <a:rPr lang="en-US" sz="1200" dirty="0">
+                <a:latin typeface="Menlo" panose="020B0609030804020204" pitchFamily="49" charset="0"/>
+                <a:ea typeface="Menlo" panose="020B0609030804020204" pitchFamily="49" charset="0"/>
+                <a:cs typeface="Menlo" panose="020B0609030804020204" pitchFamily="49" charset="0"/>
+              </a:rPr>
+              <a:t> –help</a:t>
+            </a:r>
+          </a:p>
+        </p:txBody>
+      </p:sp>
+      <p:sp>
+        <p:nvSpPr>
+          <p:cNvPr id="4" name="TextBox 3">
+            <a:extLst>
+              <a:ext uri="{FF2B5EF4-FFF2-40B4-BE49-F238E27FC236}">
+                <a16:creationId xmlns:a16="http://schemas.microsoft.com/office/drawing/2014/main" id="{E6861FA9-7AF1-DC19-E5DD-5BA7E6730003}"/>
+              </a:ext>
+            </a:extLst>
+          </p:cNvPr>
+          <p:cNvSpPr txBox="1"/>
+          <p:nvPr/>
+        </p:nvSpPr>
+        <p:spPr>
+          <a:xfrm>
+            <a:off x="838200" y="2270149"/>
+            <a:ext cx="9233425" cy="1477328"/>
+          </a:xfrm>
+          <a:prstGeom prst="rect">
+            <a:avLst/>
+          </a:prstGeom>
+          <a:noFill/>
+        </p:spPr>
+        <p:txBody>
+          <a:bodyPr wrap="none" rtlCol="0">
+            <a:spAutoFit/>
+          </a:bodyPr>
+          <a:lstStyle/>
+          <a:p>
+            <a:r>
+              <a:rPr lang="en-US" b="1" dirty="0"/>
+              <a:t>Where do containers come from?</a:t>
+            </a:r>
+            <a:endParaRPr lang="en-US" dirty="0"/>
+          </a:p>
+          <a:p>
+            <a:r>
+              <a:rPr lang="en-US" b="1" dirty="0"/>
+              <a:t>- Docker Hub</a:t>
+            </a:r>
+            <a:r>
+              <a:rPr lang="en-US" dirty="0"/>
+              <a:t> — the largest repository; </a:t>
+            </a:r>
+            <a:r>
+              <a:rPr lang="en-US" dirty="0" err="1"/>
+              <a:t>Apptainer</a:t>
+            </a:r>
+            <a:r>
+              <a:rPr lang="en-US" dirty="0"/>
+              <a:t> can pull and convert Docker containers directly</a:t>
+            </a:r>
+          </a:p>
+          <a:p>
+            <a:r>
+              <a:rPr lang="en-US" b="1" dirty="0"/>
+              <a:t>- </a:t>
+            </a:r>
+            <a:r>
+              <a:rPr lang="en-US" b="1" dirty="0" err="1"/>
+              <a:t>Biocontainers</a:t>
+            </a:r>
+            <a:r>
+              <a:rPr lang="en-US" dirty="0"/>
+              <a:t> — bioinformatics-specific containers, one per tool</a:t>
+            </a:r>
+          </a:p>
+          <a:p>
+            <a:r>
+              <a:rPr lang="en-US" b="1" dirty="0"/>
+              <a:t>- You build your own</a:t>
+            </a:r>
+            <a:r>
+              <a:rPr lang="en-US" dirty="0"/>
+              <a:t> — advanced</a:t>
+            </a:r>
+          </a:p>
+          <a:p>
+            <a:r>
+              <a:rPr lang="en-US" dirty="0"/>
+              <a:t>For most bioinformatics tools, a container already exists and you just need to pull it:</a:t>
+            </a:r>
+          </a:p>
+        </p:txBody>
+      </p:sp>
+      <p:sp>
+        <p:nvSpPr>
+          <p:cNvPr id="6" name="TextBox 5">
+            <a:extLst>
+              <a:ext uri="{FF2B5EF4-FFF2-40B4-BE49-F238E27FC236}">
+                <a16:creationId xmlns:a16="http://schemas.microsoft.com/office/drawing/2014/main" id="{37AC0079-8786-5697-F3BD-C094A7DFBFC5}"/>
+              </a:ext>
+            </a:extLst>
+          </p:cNvPr>
+          <p:cNvSpPr txBox="1"/>
+          <p:nvPr/>
+        </p:nvSpPr>
+        <p:spPr>
+          <a:xfrm>
+            <a:off x="892134" y="3957050"/>
+            <a:ext cx="5051466" cy="276999"/>
+          </a:xfrm>
+          <a:prstGeom prst="rect">
+            <a:avLst/>
+          </a:prstGeom>
+          <a:solidFill>
+            <a:schemeClr val="bg1">
+              <a:lumMod val="95000"/>
+            </a:schemeClr>
+          </a:solidFill>
+        </p:spPr>
+        <p:txBody>
+          <a:bodyPr wrap="square">
+            <a:spAutoFit/>
+          </a:bodyPr>
+          <a:lstStyle/>
+          <a:p>
+            <a:r>
+              <a:rPr lang="en-US" sz="1200" dirty="0" err="1">
+                <a:latin typeface="Menlo" panose="020B0609030804020204" pitchFamily="49" charset="0"/>
+                <a:ea typeface="Menlo" panose="020B0609030804020204" pitchFamily="49" charset="0"/>
+                <a:cs typeface="Menlo" panose="020B0609030804020204" pitchFamily="49" charset="0"/>
+              </a:rPr>
+              <a:t>apptainer</a:t>
+            </a:r>
+            <a:r>
+              <a:rPr lang="en-US" sz="1200" dirty="0">
+                <a:latin typeface="Menlo" panose="020B0609030804020204" pitchFamily="49" charset="0"/>
+                <a:ea typeface="Menlo" panose="020B0609030804020204" pitchFamily="49" charset="0"/>
+                <a:cs typeface="Menlo" panose="020B0609030804020204" pitchFamily="49" charset="0"/>
+              </a:rPr>
+              <a:t> pull docker://</a:t>
+            </a:r>
+            <a:r>
+              <a:rPr lang="en-US" sz="1200" dirty="0" err="1">
+                <a:latin typeface="Menlo" panose="020B0609030804020204" pitchFamily="49" charset="0"/>
+                <a:ea typeface="Menlo" panose="020B0609030804020204" pitchFamily="49" charset="0"/>
+                <a:cs typeface="Menlo" panose="020B0609030804020204" pitchFamily="49" charset="0"/>
+              </a:rPr>
+              <a:t>biocontainers</a:t>
+            </a:r>
+            <a:r>
+              <a:rPr lang="en-US" sz="1200" dirty="0">
+                <a:latin typeface="Menlo" panose="020B0609030804020204" pitchFamily="49" charset="0"/>
+                <a:ea typeface="Menlo" panose="020B0609030804020204" pitchFamily="49" charset="0"/>
+                <a:cs typeface="Menlo" panose="020B0609030804020204" pitchFamily="49" charset="0"/>
+              </a:rPr>
+              <a:t>/</a:t>
+            </a:r>
+            <a:r>
+              <a:rPr lang="en-US" sz="1200" dirty="0" err="1">
+                <a:latin typeface="Menlo" panose="020B0609030804020204" pitchFamily="49" charset="0"/>
+                <a:ea typeface="Menlo" panose="020B0609030804020204" pitchFamily="49" charset="0"/>
+                <a:cs typeface="Menlo" panose="020B0609030804020204" pitchFamily="49" charset="0"/>
+              </a:rPr>
+              <a:t>fastqc:latest</a:t>
+            </a:r>
+            <a:endParaRPr lang="en-US" sz="1200" dirty="0">
+              <a:latin typeface="Menlo" panose="020B0609030804020204" pitchFamily="49" charset="0"/>
+              <a:ea typeface="Menlo" panose="020B0609030804020204" pitchFamily="49" charset="0"/>
+              <a:cs typeface="Menlo" panose="020B0609030804020204" pitchFamily="49" charset="0"/>
+            </a:endParaRPr>
           </a:p>
         </p:txBody>
       </p:sp>
       <p:pic>
         <p:nvPicPr>
-          <p:cNvPr id="2050" name="Picture 2" descr="Data management - Free seo and web icons">
-            <a:extLst>
-              <a:ext uri="{FF2B5EF4-FFF2-40B4-BE49-F238E27FC236}">
-                <a16:creationId xmlns:a16="http://schemas.microsoft.com/office/drawing/2014/main" id="{795F056A-A7D0-3B26-1938-3D7EF394BC64}"/>
+          <p:cNvPr id="1026" name="Picture 2" descr="Track how many times docker image was pulled | by Huseyn Gasimov |  FAUN.dev() 🐾">
+            <a:extLst>
+              <a:ext uri="{FF2B5EF4-FFF2-40B4-BE49-F238E27FC236}">
+                <a16:creationId xmlns:a16="http://schemas.microsoft.com/office/drawing/2014/main" id="{3D8E1CF5-2AFA-7011-15DB-FDD032F33BD2}"/>
               </a:ext>
             </a:extLst>
           </p:cNvPr>
@@ -9912,7 +11781,7 @@
           <p:nvPr/>
         </p:nvPicPr>
         <p:blipFill>
-          <a:blip r:embed="rId2">
+          <a:blip r:embed="rId3">
             <a:extLst>
               <a:ext uri="{28A0092B-C50C-407E-A947-70E740481C1C}">
                 <a14:useLocalDpi xmlns:a14="http://schemas.microsoft.com/office/drawing/2010/main" val="0"/>
@@ -9926,8 +11795,8 @@
         </p:blipFill>
         <p:spPr bwMode="auto">
           <a:xfrm>
-            <a:off x="8598725" y="2238499"/>
-            <a:ext cx="1365992" cy="1365992"/>
+            <a:off x="8413667" y="1068928"/>
+            <a:ext cx="2382322" cy="1243520"/>
           </a:xfrm>
           <a:prstGeom prst="rect">
             <a:avLst/>
@@ -9944,10 +11813,40 @@
           </a:extLst>
         </p:spPr>
       </p:pic>
+      <p:pic>
+        <p:nvPicPr>
+          <p:cNvPr id="7" name="Picture 6">
+            <a:extLst>
+              <a:ext uri="{FF2B5EF4-FFF2-40B4-BE49-F238E27FC236}">
+                <a16:creationId xmlns:a16="http://schemas.microsoft.com/office/drawing/2014/main" id="{D25BDE24-2625-9843-3D38-D73FE62CF1A1}"/>
+              </a:ext>
+            </a:extLst>
+          </p:cNvPr>
+          <p:cNvPicPr>
+            <a:picLocks noChangeAspect="1"/>
+          </p:cNvPicPr>
+          <p:nvPr/>
+        </p:nvPicPr>
+        <p:blipFill>
+          <a:blip r:embed="rId4"/>
+          <a:stretch>
+            <a:fillRect/>
+          </a:stretch>
+        </p:blipFill>
+        <p:spPr>
+          <a:xfrm>
+            <a:off x="2321626" y="4443622"/>
+            <a:ext cx="7405254" cy="2318846"/>
+          </a:xfrm>
+          <a:prstGeom prst="rect">
+            <a:avLst/>
+          </a:prstGeom>
+        </p:spPr>
+      </p:pic>
     </p:spTree>
     <p:extLst>
       <p:ext uri="{BB962C8B-B14F-4D97-AF65-F5344CB8AC3E}">
-        <p14:creationId xmlns:p14="http://schemas.microsoft.com/office/powerpoint/2010/main" val="458796420"/>
+        <p14:creationId xmlns:p14="http://schemas.microsoft.com/office/powerpoint/2010/main" val="493050639"/>
       </p:ext>
     </p:extLst>
   </p:cSld>

--- a/slides/brc_hazel_week_d4.pptx
+++ b/slides/brc_hazel_week_d4.pptx
@@ -5,7 +5,7 @@
     <p:sldMasterId id="2147483648" r:id="rId1"/>
   </p:sldMasterIdLst>
   <p:notesMasterIdLst>
-    <p:notesMasterId r:id="rId14"/>
+    <p:notesMasterId r:id="rId20"/>
   </p:notesMasterIdLst>
   <p:sldIdLst>
     <p:sldId id="257" r:id="rId2"/>
@@ -17,9 +17,15 @@
     <p:sldId id="304" r:id="rId8"/>
     <p:sldId id="305" r:id="rId9"/>
     <p:sldId id="309" r:id="rId10"/>
-    <p:sldId id="302" r:id="rId11"/>
-    <p:sldId id="306" r:id="rId12"/>
-    <p:sldId id="307" r:id="rId13"/>
+    <p:sldId id="314" r:id="rId11"/>
+    <p:sldId id="302" r:id="rId12"/>
+    <p:sldId id="306" r:id="rId13"/>
+    <p:sldId id="282" r:id="rId14"/>
+    <p:sldId id="283" r:id="rId15"/>
+    <p:sldId id="284" r:id="rId16"/>
+    <p:sldId id="285" r:id="rId17"/>
+    <p:sldId id="307" r:id="rId18"/>
+    <p:sldId id="315" r:id="rId19"/>
   </p:sldIdLst>
   <p:sldSz cx="12192000" cy="6858000"/>
   <p:notesSz cx="6858000" cy="9144000"/>
@@ -559,6 +565,438 @@
 </p:notes>
 </file>
 
+<file path=ppt/notesSlides/notesSlide10.xml><?xml version="1.0" encoding="utf-8"?>
+<p:notes xmlns:a="http://schemas.openxmlformats.org/drawingml/2006/main" xmlns:r="http://schemas.openxmlformats.org/officeDocument/2006/relationships" xmlns:p="http://schemas.openxmlformats.org/presentationml/2006/main">
+  <p:cSld>
+    <p:spTree>
+      <p:nvGrpSpPr>
+        <p:cNvPr id="1" name="">
+          <a:extLst>
+            <a:ext uri="{FF2B5EF4-FFF2-40B4-BE49-F238E27FC236}">
+              <a16:creationId xmlns:a16="http://schemas.microsoft.com/office/drawing/2014/main" id="{8F1C4602-573C-E7B2-144B-CC99687A0B16}"/>
+            </a:ext>
+          </a:extLst>
+        </p:cNvPr>
+        <p:cNvGrpSpPr/>
+        <p:nvPr/>
+      </p:nvGrpSpPr>
+      <p:grpSpPr>
+        <a:xfrm>
+          <a:off x="0" y="0"/>
+          <a:ext cx="0" cy="0"/>
+          <a:chOff x="0" y="0"/>
+          <a:chExt cx="0" cy="0"/>
+        </a:xfrm>
+      </p:grpSpPr>
+      <p:sp>
+        <p:nvSpPr>
+          <p:cNvPr id="2" name="Slide Image Placeholder 1">
+            <a:extLst>
+              <a:ext uri="{FF2B5EF4-FFF2-40B4-BE49-F238E27FC236}">
+                <a16:creationId xmlns:a16="http://schemas.microsoft.com/office/drawing/2014/main" id="{041771D4-87E8-C940-DC8A-40D048CE6C93}"/>
+              </a:ext>
+            </a:extLst>
+          </p:cNvPr>
+          <p:cNvSpPr>
+            <a:spLocks noGrp="1" noRot="1" noChangeAspect="1"/>
+          </p:cNvSpPr>
+          <p:nvPr>
+            <p:ph type="sldImg"/>
+          </p:nvPr>
+        </p:nvSpPr>
+        <p:spPr/>
+      </p:sp>
+      <p:sp>
+        <p:nvSpPr>
+          <p:cNvPr id="3" name="Notes Placeholder 2">
+            <a:extLst>
+              <a:ext uri="{FF2B5EF4-FFF2-40B4-BE49-F238E27FC236}">
+                <a16:creationId xmlns:a16="http://schemas.microsoft.com/office/drawing/2014/main" id="{419F1E72-B414-5AF4-6E93-E17BA3F34C30}"/>
+              </a:ext>
+            </a:extLst>
+          </p:cNvPr>
+          <p:cNvSpPr>
+            <a:spLocks noGrp="1"/>
+          </p:cNvSpPr>
+          <p:nvPr>
+            <p:ph type="body" idx="1"/>
+          </p:nvPr>
+        </p:nvSpPr>
+        <p:spPr/>
+        <p:txBody>
+          <a:bodyPr/>
+          <a:lstStyle/>
+          <a:p>
+            <a:endParaRPr lang="en-US" dirty="0"/>
+          </a:p>
+        </p:txBody>
+      </p:sp>
+      <p:sp>
+        <p:nvSpPr>
+          <p:cNvPr id="4" name="Slide Number Placeholder 3">
+            <a:extLst>
+              <a:ext uri="{FF2B5EF4-FFF2-40B4-BE49-F238E27FC236}">
+                <a16:creationId xmlns:a16="http://schemas.microsoft.com/office/drawing/2014/main" id="{9531FE67-91B6-7C7F-A77B-9A45D1D24008}"/>
+              </a:ext>
+            </a:extLst>
+          </p:cNvPr>
+          <p:cNvSpPr>
+            <a:spLocks noGrp="1"/>
+          </p:cNvSpPr>
+          <p:nvPr>
+            <p:ph type="sldNum" sz="quarter" idx="5"/>
+          </p:nvPr>
+        </p:nvSpPr>
+        <p:spPr/>
+        <p:txBody>
+          <a:bodyPr/>
+          <a:lstStyle/>
+          <a:p>
+            <a:fld id="{13FC26C8-C37B-D543-9AB9-4FE91B5DFE38}" type="slidenum">
+              <a:rPr lang="en-US" smtClean="0"/>
+              <a:t>15</a:t>
+            </a:fld>
+            <a:endParaRPr lang="en-US"/>
+          </a:p>
+        </p:txBody>
+      </p:sp>
+    </p:spTree>
+    <p:extLst>
+      <p:ext uri="{BB962C8B-B14F-4D97-AF65-F5344CB8AC3E}">
+        <p14:creationId xmlns:p14="http://schemas.microsoft.com/office/powerpoint/2010/main" val="3364549075"/>
+      </p:ext>
+    </p:extLst>
+  </p:cSld>
+  <p:clrMapOvr>
+    <a:masterClrMapping/>
+  </p:clrMapOvr>
+</p:notes>
+</file>
+
+<file path=ppt/notesSlides/notesSlide11.xml><?xml version="1.0" encoding="utf-8"?>
+<p:notes xmlns:a="http://schemas.openxmlformats.org/drawingml/2006/main" xmlns:r="http://schemas.openxmlformats.org/officeDocument/2006/relationships" xmlns:p="http://schemas.openxmlformats.org/presentationml/2006/main">
+  <p:cSld>
+    <p:spTree>
+      <p:nvGrpSpPr>
+        <p:cNvPr id="1" name="">
+          <a:extLst>
+            <a:ext uri="{FF2B5EF4-FFF2-40B4-BE49-F238E27FC236}">
+              <a16:creationId xmlns:a16="http://schemas.microsoft.com/office/drawing/2014/main" id="{6F58FFE3-9ECC-6C12-5900-C8FA0CBF230F}"/>
+            </a:ext>
+          </a:extLst>
+        </p:cNvPr>
+        <p:cNvGrpSpPr/>
+        <p:nvPr/>
+      </p:nvGrpSpPr>
+      <p:grpSpPr>
+        <a:xfrm>
+          <a:off x="0" y="0"/>
+          <a:ext cx="0" cy="0"/>
+          <a:chOff x="0" y="0"/>
+          <a:chExt cx="0" cy="0"/>
+        </a:xfrm>
+      </p:grpSpPr>
+      <p:sp>
+        <p:nvSpPr>
+          <p:cNvPr id="2" name="Slide Image Placeholder 1">
+            <a:extLst>
+              <a:ext uri="{FF2B5EF4-FFF2-40B4-BE49-F238E27FC236}">
+                <a16:creationId xmlns:a16="http://schemas.microsoft.com/office/drawing/2014/main" id="{E1FDB182-C5A0-6356-19F4-BCDFE7913E39}"/>
+              </a:ext>
+            </a:extLst>
+          </p:cNvPr>
+          <p:cNvSpPr>
+            <a:spLocks noGrp="1" noRot="1" noChangeAspect="1"/>
+          </p:cNvSpPr>
+          <p:nvPr>
+            <p:ph type="sldImg"/>
+          </p:nvPr>
+        </p:nvSpPr>
+        <p:spPr/>
+      </p:sp>
+      <p:sp>
+        <p:nvSpPr>
+          <p:cNvPr id="3" name="Notes Placeholder 2">
+            <a:extLst>
+              <a:ext uri="{FF2B5EF4-FFF2-40B4-BE49-F238E27FC236}">
+                <a16:creationId xmlns:a16="http://schemas.microsoft.com/office/drawing/2014/main" id="{FFC66B04-332C-53F7-B8AD-FAD5E85CB066}"/>
+              </a:ext>
+            </a:extLst>
+          </p:cNvPr>
+          <p:cNvSpPr>
+            <a:spLocks noGrp="1"/>
+          </p:cNvSpPr>
+          <p:nvPr>
+            <p:ph type="body" idx="1"/>
+          </p:nvPr>
+        </p:nvSpPr>
+        <p:spPr/>
+        <p:txBody>
+          <a:bodyPr/>
+          <a:lstStyle/>
+          <a:p>
+            <a:endParaRPr lang="en-US" dirty="0"/>
+          </a:p>
+        </p:txBody>
+      </p:sp>
+      <p:sp>
+        <p:nvSpPr>
+          <p:cNvPr id="4" name="Slide Number Placeholder 3">
+            <a:extLst>
+              <a:ext uri="{FF2B5EF4-FFF2-40B4-BE49-F238E27FC236}">
+                <a16:creationId xmlns:a16="http://schemas.microsoft.com/office/drawing/2014/main" id="{077425FC-BA0A-0997-4984-29BD8F2D7D67}"/>
+              </a:ext>
+            </a:extLst>
+          </p:cNvPr>
+          <p:cNvSpPr>
+            <a:spLocks noGrp="1"/>
+          </p:cNvSpPr>
+          <p:nvPr>
+            <p:ph type="sldNum" sz="quarter" idx="5"/>
+          </p:nvPr>
+        </p:nvSpPr>
+        <p:spPr/>
+        <p:txBody>
+          <a:bodyPr/>
+          <a:lstStyle/>
+          <a:p>
+            <a:fld id="{13FC26C8-C37B-D543-9AB9-4FE91B5DFE38}" type="slidenum">
+              <a:rPr lang="en-US" smtClean="0"/>
+              <a:t>16</a:t>
+            </a:fld>
+            <a:endParaRPr lang="en-US"/>
+          </a:p>
+        </p:txBody>
+      </p:sp>
+    </p:spTree>
+    <p:extLst>
+      <p:ext uri="{BB962C8B-B14F-4D97-AF65-F5344CB8AC3E}">
+        <p14:creationId xmlns:p14="http://schemas.microsoft.com/office/powerpoint/2010/main" val="3486693448"/>
+      </p:ext>
+    </p:extLst>
+  </p:cSld>
+  <p:clrMapOvr>
+    <a:masterClrMapping/>
+  </p:clrMapOvr>
+</p:notes>
+</file>
+
+<file path=ppt/notesSlides/notesSlide12.xml><?xml version="1.0" encoding="utf-8"?>
+<p:notes xmlns:a="http://schemas.openxmlformats.org/drawingml/2006/main" xmlns:r="http://schemas.openxmlformats.org/officeDocument/2006/relationships" xmlns:p="http://schemas.openxmlformats.org/presentationml/2006/main">
+  <p:cSld>
+    <p:spTree>
+      <p:nvGrpSpPr>
+        <p:cNvPr id="1" name="">
+          <a:extLst>
+            <a:ext uri="{FF2B5EF4-FFF2-40B4-BE49-F238E27FC236}">
+              <a16:creationId xmlns:a16="http://schemas.microsoft.com/office/drawing/2014/main" id="{18DEC249-14DD-35C3-7AA4-D4BD8CCC8B78}"/>
+            </a:ext>
+          </a:extLst>
+        </p:cNvPr>
+        <p:cNvGrpSpPr/>
+        <p:nvPr/>
+      </p:nvGrpSpPr>
+      <p:grpSpPr>
+        <a:xfrm>
+          <a:off x="0" y="0"/>
+          <a:ext cx="0" cy="0"/>
+          <a:chOff x="0" y="0"/>
+          <a:chExt cx="0" cy="0"/>
+        </a:xfrm>
+      </p:grpSpPr>
+      <p:sp>
+        <p:nvSpPr>
+          <p:cNvPr id="2" name="Slide Image Placeholder 1">
+            <a:extLst>
+              <a:ext uri="{FF2B5EF4-FFF2-40B4-BE49-F238E27FC236}">
+                <a16:creationId xmlns:a16="http://schemas.microsoft.com/office/drawing/2014/main" id="{DADE9EB2-BFA1-0FC8-6716-E36E2FD50FA5}"/>
+              </a:ext>
+            </a:extLst>
+          </p:cNvPr>
+          <p:cNvSpPr>
+            <a:spLocks noGrp="1" noRot="1" noChangeAspect="1"/>
+          </p:cNvSpPr>
+          <p:nvPr>
+            <p:ph type="sldImg"/>
+          </p:nvPr>
+        </p:nvSpPr>
+        <p:spPr/>
+      </p:sp>
+      <p:sp>
+        <p:nvSpPr>
+          <p:cNvPr id="3" name="Notes Placeholder 2">
+            <a:extLst>
+              <a:ext uri="{FF2B5EF4-FFF2-40B4-BE49-F238E27FC236}">
+                <a16:creationId xmlns:a16="http://schemas.microsoft.com/office/drawing/2014/main" id="{EF5EE962-FD7B-D588-6F3D-26A5404EE5A5}"/>
+              </a:ext>
+            </a:extLst>
+          </p:cNvPr>
+          <p:cNvSpPr>
+            <a:spLocks noGrp="1"/>
+          </p:cNvSpPr>
+          <p:nvPr>
+            <p:ph type="body" idx="1"/>
+          </p:nvPr>
+        </p:nvSpPr>
+        <p:spPr/>
+        <p:txBody>
+          <a:bodyPr/>
+          <a:lstStyle/>
+          <a:p>
+            <a:endParaRPr lang="en-US" dirty="0"/>
+          </a:p>
+        </p:txBody>
+      </p:sp>
+      <p:sp>
+        <p:nvSpPr>
+          <p:cNvPr id="4" name="Slide Number Placeholder 3">
+            <a:extLst>
+              <a:ext uri="{FF2B5EF4-FFF2-40B4-BE49-F238E27FC236}">
+                <a16:creationId xmlns:a16="http://schemas.microsoft.com/office/drawing/2014/main" id="{DB011D55-FC6F-64CA-45BA-AD0CEBCB2983}"/>
+              </a:ext>
+            </a:extLst>
+          </p:cNvPr>
+          <p:cNvSpPr>
+            <a:spLocks noGrp="1"/>
+          </p:cNvSpPr>
+          <p:nvPr>
+            <p:ph type="sldNum" sz="quarter" idx="5"/>
+          </p:nvPr>
+        </p:nvSpPr>
+        <p:spPr/>
+        <p:txBody>
+          <a:bodyPr/>
+          <a:lstStyle/>
+          <a:p>
+            <a:fld id="{13FC26C8-C37B-D543-9AB9-4FE91B5DFE38}" type="slidenum">
+              <a:rPr lang="en-US" smtClean="0"/>
+              <a:t>17</a:t>
+            </a:fld>
+            <a:endParaRPr lang="en-US"/>
+          </a:p>
+        </p:txBody>
+      </p:sp>
+    </p:spTree>
+    <p:extLst>
+      <p:ext uri="{BB962C8B-B14F-4D97-AF65-F5344CB8AC3E}">
+        <p14:creationId xmlns:p14="http://schemas.microsoft.com/office/powerpoint/2010/main" val="3417861335"/>
+      </p:ext>
+    </p:extLst>
+  </p:cSld>
+  <p:clrMapOvr>
+    <a:masterClrMapping/>
+  </p:clrMapOvr>
+</p:notes>
+</file>
+
+<file path=ppt/notesSlides/notesSlide13.xml><?xml version="1.0" encoding="utf-8"?>
+<p:notes xmlns:a="http://schemas.openxmlformats.org/drawingml/2006/main" xmlns:r="http://schemas.openxmlformats.org/officeDocument/2006/relationships" xmlns:p="http://schemas.openxmlformats.org/presentationml/2006/main">
+  <p:cSld>
+    <p:spTree>
+      <p:nvGrpSpPr>
+        <p:cNvPr id="1" name="">
+          <a:extLst>
+            <a:ext uri="{FF2B5EF4-FFF2-40B4-BE49-F238E27FC236}">
+              <a16:creationId xmlns:a16="http://schemas.microsoft.com/office/drawing/2014/main" id="{52DC9975-8597-2F02-7039-A9C1C2E038C7}"/>
+            </a:ext>
+          </a:extLst>
+        </p:cNvPr>
+        <p:cNvGrpSpPr/>
+        <p:nvPr/>
+      </p:nvGrpSpPr>
+      <p:grpSpPr>
+        <a:xfrm>
+          <a:off x="0" y="0"/>
+          <a:ext cx="0" cy="0"/>
+          <a:chOff x="0" y="0"/>
+          <a:chExt cx="0" cy="0"/>
+        </a:xfrm>
+      </p:grpSpPr>
+      <p:sp>
+        <p:nvSpPr>
+          <p:cNvPr id="2" name="Slide Image Placeholder 1">
+            <a:extLst>
+              <a:ext uri="{FF2B5EF4-FFF2-40B4-BE49-F238E27FC236}">
+                <a16:creationId xmlns:a16="http://schemas.microsoft.com/office/drawing/2014/main" id="{AFEBDD39-9E77-14D9-071F-A693BD880A2B}"/>
+              </a:ext>
+            </a:extLst>
+          </p:cNvPr>
+          <p:cNvSpPr>
+            <a:spLocks noGrp="1" noRot="1" noChangeAspect="1"/>
+          </p:cNvSpPr>
+          <p:nvPr>
+            <p:ph type="sldImg"/>
+          </p:nvPr>
+        </p:nvSpPr>
+        <p:spPr/>
+      </p:sp>
+      <p:sp>
+        <p:nvSpPr>
+          <p:cNvPr id="3" name="Notes Placeholder 2">
+            <a:extLst>
+              <a:ext uri="{FF2B5EF4-FFF2-40B4-BE49-F238E27FC236}">
+                <a16:creationId xmlns:a16="http://schemas.microsoft.com/office/drawing/2014/main" id="{F8B93E2C-04DC-A38B-CDE8-190666BE55C0}"/>
+              </a:ext>
+            </a:extLst>
+          </p:cNvPr>
+          <p:cNvSpPr>
+            <a:spLocks noGrp="1"/>
+          </p:cNvSpPr>
+          <p:nvPr>
+            <p:ph type="body" idx="1"/>
+          </p:nvPr>
+        </p:nvSpPr>
+        <p:spPr/>
+        <p:txBody>
+          <a:bodyPr/>
+          <a:lstStyle/>
+          <a:p>
+            <a:endParaRPr lang="en-US" dirty="0"/>
+          </a:p>
+        </p:txBody>
+      </p:sp>
+      <p:sp>
+        <p:nvSpPr>
+          <p:cNvPr id="4" name="Slide Number Placeholder 3">
+            <a:extLst>
+              <a:ext uri="{FF2B5EF4-FFF2-40B4-BE49-F238E27FC236}">
+                <a16:creationId xmlns:a16="http://schemas.microsoft.com/office/drawing/2014/main" id="{2ADD05E6-5AB3-1C22-E685-596F041C7725}"/>
+              </a:ext>
+            </a:extLst>
+          </p:cNvPr>
+          <p:cNvSpPr>
+            <a:spLocks noGrp="1"/>
+          </p:cNvSpPr>
+          <p:nvPr>
+            <p:ph type="sldNum" sz="quarter" idx="5"/>
+          </p:nvPr>
+        </p:nvSpPr>
+        <p:spPr/>
+        <p:txBody>
+          <a:bodyPr/>
+          <a:lstStyle/>
+          <a:p>
+            <a:fld id="{13FC26C8-C37B-D543-9AB9-4FE91B5DFE38}" type="slidenum">
+              <a:rPr lang="en-US" smtClean="0"/>
+              <a:t>18</a:t>
+            </a:fld>
+            <a:endParaRPr lang="en-US"/>
+          </a:p>
+        </p:txBody>
+      </p:sp>
+    </p:spTree>
+    <p:extLst>
+      <p:ext uri="{BB962C8B-B14F-4D97-AF65-F5344CB8AC3E}">
+        <p14:creationId xmlns:p14="http://schemas.microsoft.com/office/powerpoint/2010/main" val="3299272446"/>
+      </p:ext>
+    </p:extLst>
+  </p:cSld>
+  <p:clrMapOvr>
+    <a:masterClrMapping/>
+  </p:clrMapOvr>
+</p:notes>
+</file>
+
 <file path=ppt/notesSlides/notesSlide2.xml><?xml version="1.0" encoding="utf-8"?>
 <p:notes xmlns:a="http://schemas.openxmlformats.org/drawingml/2006/main" xmlns:r="http://schemas.openxmlformats.org/officeDocument/2006/relationships" xmlns:p="http://schemas.openxmlformats.org/presentationml/2006/main">
   <p:cSld>
@@ -1199,7 +1637,7 @@
           <a:p>
             <a:fld id="{13FC26C8-C37B-D543-9AB9-4FE91B5DFE38}" type="slidenum">
               <a:rPr lang="en-US" smtClean="0"/>
-              <a:t>11</a:t>
+              <a:t>12</a:t>
             </a:fld>
             <a:endParaRPr lang="en-US"/>
           </a:p>
@@ -1226,7 +1664,7 @@
         <p:cNvPr id="1" name="">
           <a:extLst>
             <a:ext uri="{FF2B5EF4-FFF2-40B4-BE49-F238E27FC236}">
-              <a16:creationId xmlns:a16="http://schemas.microsoft.com/office/drawing/2014/main" id="{18DEC249-14DD-35C3-7AA4-D4BD8CCC8B78}"/>
+              <a16:creationId xmlns:a16="http://schemas.microsoft.com/office/drawing/2014/main" id="{57423206-8EFF-D14D-D547-963ADB57E79F}"/>
             </a:ext>
           </a:extLst>
         </p:cNvPr>
@@ -1246,7 +1684,7 @@
           <p:cNvPr id="2" name="Slide Image Placeholder 1">
             <a:extLst>
               <a:ext uri="{FF2B5EF4-FFF2-40B4-BE49-F238E27FC236}">
-                <a16:creationId xmlns:a16="http://schemas.microsoft.com/office/drawing/2014/main" id="{DADE9EB2-BFA1-0FC8-6716-E36E2FD50FA5}"/>
+                <a16:creationId xmlns:a16="http://schemas.microsoft.com/office/drawing/2014/main" id="{75B38ABD-C7C0-E137-6450-36F8A9B3D8A1}"/>
               </a:ext>
             </a:extLst>
           </p:cNvPr>
@@ -1264,7 +1702,7 @@
           <p:cNvPr id="3" name="Notes Placeholder 2">
             <a:extLst>
               <a:ext uri="{FF2B5EF4-FFF2-40B4-BE49-F238E27FC236}">
-                <a16:creationId xmlns:a16="http://schemas.microsoft.com/office/drawing/2014/main" id="{EF5EE962-FD7B-D588-6F3D-26A5404EE5A5}"/>
+                <a16:creationId xmlns:a16="http://schemas.microsoft.com/office/drawing/2014/main" id="{EB25BCB7-1969-311C-782C-5EA0A0C6C3D0}"/>
               </a:ext>
             </a:extLst>
           </p:cNvPr>
@@ -1289,7 +1727,7 @@
           <p:cNvPr id="4" name="Slide Number Placeholder 3">
             <a:extLst>
               <a:ext uri="{FF2B5EF4-FFF2-40B4-BE49-F238E27FC236}">
-                <a16:creationId xmlns:a16="http://schemas.microsoft.com/office/drawing/2014/main" id="{DB011D55-FC6F-64CA-45BA-AD0CEBCB2983}"/>
+                <a16:creationId xmlns:a16="http://schemas.microsoft.com/office/drawing/2014/main" id="{4C3677AE-4555-8F0F-7CEE-A30CEF2E8E7F}"/>
               </a:ext>
             </a:extLst>
           </p:cNvPr>
@@ -1307,7 +1745,7 @@
           <a:p>
             <a:fld id="{13FC26C8-C37B-D543-9AB9-4FE91B5DFE38}" type="slidenum">
               <a:rPr lang="en-US" smtClean="0"/>
-              <a:t>12</a:t>
+              <a:t>13</a:t>
             </a:fld>
             <a:endParaRPr lang="en-US"/>
           </a:p>
@@ -1316,7 +1754,115 @@
     </p:spTree>
     <p:extLst>
       <p:ext uri="{BB962C8B-B14F-4D97-AF65-F5344CB8AC3E}">
-        <p14:creationId xmlns:p14="http://schemas.microsoft.com/office/powerpoint/2010/main" val="3417861335"/>
+        <p14:creationId xmlns:p14="http://schemas.microsoft.com/office/powerpoint/2010/main" val="1531390883"/>
+      </p:ext>
+    </p:extLst>
+  </p:cSld>
+  <p:clrMapOvr>
+    <a:masterClrMapping/>
+  </p:clrMapOvr>
+</p:notes>
+</file>
+
+<file path=ppt/notesSlides/notesSlide9.xml><?xml version="1.0" encoding="utf-8"?>
+<p:notes xmlns:a="http://schemas.openxmlformats.org/drawingml/2006/main" xmlns:r="http://schemas.openxmlformats.org/officeDocument/2006/relationships" xmlns:p="http://schemas.openxmlformats.org/presentationml/2006/main">
+  <p:cSld>
+    <p:spTree>
+      <p:nvGrpSpPr>
+        <p:cNvPr id="1" name="">
+          <a:extLst>
+            <a:ext uri="{FF2B5EF4-FFF2-40B4-BE49-F238E27FC236}">
+              <a16:creationId xmlns:a16="http://schemas.microsoft.com/office/drawing/2014/main" id="{E13CFEBC-BCD4-7844-A59C-5909EF358743}"/>
+            </a:ext>
+          </a:extLst>
+        </p:cNvPr>
+        <p:cNvGrpSpPr/>
+        <p:nvPr/>
+      </p:nvGrpSpPr>
+      <p:grpSpPr>
+        <a:xfrm>
+          <a:off x="0" y="0"/>
+          <a:ext cx="0" cy="0"/>
+          <a:chOff x="0" y="0"/>
+          <a:chExt cx="0" cy="0"/>
+        </a:xfrm>
+      </p:grpSpPr>
+      <p:sp>
+        <p:nvSpPr>
+          <p:cNvPr id="2" name="Slide Image Placeholder 1">
+            <a:extLst>
+              <a:ext uri="{FF2B5EF4-FFF2-40B4-BE49-F238E27FC236}">
+                <a16:creationId xmlns:a16="http://schemas.microsoft.com/office/drawing/2014/main" id="{1151DA7F-A43D-29D3-BD13-28F6462C8222}"/>
+              </a:ext>
+            </a:extLst>
+          </p:cNvPr>
+          <p:cNvSpPr>
+            <a:spLocks noGrp="1" noRot="1" noChangeAspect="1"/>
+          </p:cNvSpPr>
+          <p:nvPr>
+            <p:ph type="sldImg"/>
+          </p:nvPr>
+        </p:nvSpPr>
+        <p:spPr/>
+      </p:sp>
+      <p:sp>
+        <p:nvSpPr>
+          <p:cNvPr id="3" name="Notes Placeholder 2">
+            <a:extLst>
+              <a:ext uri="{FF2B5EF4-FFF2-40B4-BE49-F238E27FC236}">
+                <a16:creationId xmlns:a16="http://schemas.microsoft.com/office/drawing/2014/main" id="{825152BD-2EEF-514D-95F8-E7BC8E398410}"/>
+              </a:ext>
+            </a:extLst>
+          </p:cNvPr>
+          <p:cNvSpPr>
+            <a:spLocks noGrp="1"/>
+          </p:cNvSpPr>
+          <p:nvPr>
+            <p:ph type="body" idx="1"/>
+          </p:nvPr>
+        </p:nvSpPr>
+        <p:spPr/>
+        <p:txBody>
+          <a:bodyPr/>
+          <a:lstStyle/>
+          <a:p>
+            <a:endParaRPr lang="en-US" dirty="0"/>
+          </a:p>
+        </p:txBody>
+      </p:sp>
+      <p:sp>
+        <p:nvSpPr>
+          <p:cNvPr id="4" name="Slide Number Placeholder 3">
+            <a:extLst>
+              <a:ext uri="{FF2B5EF4-FFF2-40B4-BE49-F238E27FC236}">
+                <a16:creationId xmlns:a16="http://schemas.microsoft.com/office/drawing/2014/main" id="{6157DF49-D5B8-7B7E-39F0-B0D6C1A0D697}"/>
+              </a:ext>
+            </a:extLst>
+          </p:cNvPr>
+          <p:cNvSpPr>
+            <a:spLocks noGrp="1"/>
+          </p:cNvSpPr>
+          <p:nvPr>
+            <p:ph type="sldNum" sz="quarter" idx="5"/>
+          </p:nvPr>
+        </p:nvSpPr>
+        <p:spPr/>
+        <p:txBody>
+          <a:bodyPr/>
+          <a:lstStyle/>
+          <a:p>
+            <a:fld id="{13FC26C8-C37B-D543-9AB9-4FE91B5DFE38}" type="slidenum">
+              <a:rPr lang="en-US" smtClean="0"/>
+              <a:t>14</a:t>
+            </a:fld>
+            <a:endParaRPr lang="en-US"/>
+          </a:p>
+        </p:txBody>
+      </p:sp>
+    </p:spTree>
+    <p:extLst>
+      <p:ext uri="{BB962C8B-B14F-4D97-AF65-F5344CB8AC3E}">
+        <p14:creationId xmlns:p14="http://schemas.microsoft.com/office/powerpoint/2010/main" val="3616082361"/>
       </p:ext>
     </p:extLst>
   </p:cSld>
@@ -4795,6 +5341,387 @@
         <p:cNvPr id="1" name="">
           <a:extLst>
             <a:ext uri="{FF2B5EF4-FFF2-40B4-BE49-F238E27FC236}">
+              <a16:creationId xmlns:a16="http://schemas.microsoft.com/office/drawing/2014/main" id="{AB00F7F9-5493-0008-74A9-38BC2DB17CE7}"/>
+            </a:ext>
+          </a:extLst>
+        </p:cNvPr>
+        <p:cNvGrpSpPr/>
+        <p:nvPr/>
+      </p:nvGrpSpPr>
+      <p:grpSpPr>
+        <a:xfrm>
+          <a:off x="0" y="0"/>
+          <a:ext cx="0" cy="0"/>
+          <a:chOff x="0" y="0"/>
+          <a:chExt cx="0" cy="0"/>
+        </a:xfrm>
+      </p:grpSpPr>
+      <p:sp>
+        <p:nvSpPr>
+          <p:cNvPr id="7" name="Title 1">
+            <a:extLst>
+              <a:ext uri="{FF2B5EF4-FFF2-40B4-BE49-F238E27FC236}">
+                <a16:creationId xmlns:a16="http://schemas.microsoft.com/office/drawing/2014/main" id="{B861B58A-3584-2A75-CE4A-BC1665079C8A}"/>
+              </a:ext>
+            </a:extLst>
+          </p:cNvPr>
+          <p:cNvSpPr txBox="1">
+            <a:spLocks/>
+          </p:cNvSpPr>
+          <p:nvPr/>
+        </p:nvSpPr>
+        <p:spPr>
+          <a:xfrm>
+            <a:off x="990600" y="517525"/>
+            <a:ext cx="10515600" cy="1325563"/>
+          </a:xfrm>
+          <a:prstGeom prst="rect">
+            <a:avLst/>
+          </a:prstGeom>
+        </p:spPr>
+        <p:txBody>
+          <a:bodyPr vert="horz" lIns="91440" tIns="45720" rIns="91440" bIns="45720" rtlCol="0" anchor="ctr">
+            <a:normAutofit/>
+          </a:bodyPr>
+          <a:lstStyle>
+            <a:lvl1pPr algn="l" defTabSz="914400" rtl="0" eaLnBrk="1" latinLnBrk="0" hangingPunct="1">
+              <a:lnSpc>
+                <a:spcPct val="90000"/>
+              </a:lnSpc>
+              <a:spcBef>
+                <a:spcPct val="0"/>
+              </a:spcBef>
+              <a:buNone/>
+              <a:defRPr sz="4400" kern="1200">
+                <a:solidFill>
+                  <a:schemeClr val="tx1"/>
+                </a:solidFill>
+                <a:latin typeface="+mj-lt"/>
+                <a:ea typeface="+mj-ea"/>
+                <a:cs typeface="+mj-cs"/>
+              </a:defRPr>
+            </a:lvl1pPr>
+          </a:lstStyle>
+          <a:p>
+            <a:r>
+              <a:rPr lang="en-US" b="1" dirty="0"/>
+              <a:t>Try it yourself!</a:t>
+            </a:r>
+          </a:p>
+        </p:txBody>
+      </p:sp>
+      <p:pic>
+        <p:nvPicPr>
+          <p:cNvPr id="8" name="Picture 6" descr="coding Symbol mark in filled style 47628836 Vector Art at Vecteezy">
+            <a:extLst>
+              <a:ext uri="{FF2B5EF4-FFF2-40B4-BE49-F238E27FC236}">
+                <a16:creationId xmlns:a16="http://schemas.microsoft.com/office/drawing/2014/main" id="{80925230-2674-741D-DBBC-632AEE001FDB}"/>
+              </a:ext>
+            </a:extLst>
+          </p:cNvPr>
+          <p:cNvPicPr>
+            <a:picLocks noChangeAspect="1" noChangeArrowheads="1"/>
+          </p:cNvPicPr>
+          <p:nvPr/>
+        </p:nvPicPr>
+        <p:blipFill>
+          <a:blip r:embed="rId2">
+            <a:duotone>
+              <a:prstClr val="black"/>
+              <a:schemeClr val="accent4">
+                <a:tint val="45000"/>
+                <a:satMod val="400000"/>
+              </a:schemeClr>
+            </a:duotone>
+            <a:extLst>
+              <a:ext uri="{28A0092B-C50C-407E-A947-70E740481C1C}">
+                <a14:useLocalDpi xmlns:a14="http://schemas.microsoft.com/office/drawing/2010/main" val="0"/>
+              </a:ext>
+            </a:extLst>
+          </a:blip>
+          <a:srcRect/>
+          <a:stretch>
+            <a:fillRect/>
+          </a:stretch>
+        </p:blipFill>
+        <p:spPr bwMode="auto">
+          <a:xfrm>
+            <a:off x="4917440" y="626429"/>
+            <a:ext cx="904240" cy="904240"/>
+          </a:xfrm>
+          <a:prstGeom prst="rect">
+            <a:avLst/>
+          </a:prstGeom>
+          <a:noFill/>
+          <a:extLst>
+            <a:ext uri="{909E8E84-426E-40DD-AFC4-6F175D3DCCD1}">
+              <a14:hiddenFill xmlns:a14="http://schemas.microsoft.com/office/drawing/2010/main">
+                <a:solidFill>
+                  <a:srgbClr val="FFFFFF"/>
+                </a:solidFill>
+              </a14:hiddenFill>
+            </a:ext>
+          </a:extLst>
+        </p:spPr>
+      </p:pic>
+      <p:sp>
+        <p:nvSpPr>
+          <p:cNvPr id="2" name="TextBox 1">
+            <a:extLst>
+              <a:ext uri="{FF2B5EF4-FFF2-40B4-BE49-F238E27FC236}">
+                <a16:creationId xmlns:a16="http://schemas.microsoft.com/office/drawing/2014/main" id="{953177BE-CC3B-D76D-CEB2-FE40A73BA1D7}"/>
+              </a:ext>
+            </a:extLst>
+          </p:cNvPr>
+          <p:cNvSpPr txBox="1"/>
+          <p:nvPr/>
+        </p:nvSpPr>
+        <p:spPr>
+          <a:xfrm>
+            <a:off x="990600" y="2094496"/>
+            <a:ext cx="6486584" cy="3373359"/>
+          </a:xfrm>
+          <a:prstGeom prst="rect">
+            <a:avLst/>
+          </a:prstGeom>
+          <a:noFill/>
+        </p:spPr>
+        <p:txBody>
+          <a:bodyPr wrap="none" rtlCol="0">
+            <a:spAutoFit/>
+          </a:bodyPr>
+          <a:lstStyle/>
+          <a:p>
+            <a:pPr marL="342900" indent="-342900">
+              <a:lnSpc>
+                <a:spcPct val="150000"/>
+              </a:lnSpc>
+              <a:buAutoNum type="arabicPeriod"/>
+            </a:pPr>
+            <a:r>
+              <a:rPr lang="en-US" dirty="0"/>
+              <a:t>Start an interactive job</a:t>
+            </a:r>
+          </a:p>
+          <a:p>
+            <a:pPr marL="342900" indent="-342900">
+              <a:lnSpc>
+                <a:spcPct val="150000"/>
+              </a:lnSpc>
+              <a:buAutoNum type="arabicPeriod"/>
+            </a:pPr>
+            <a:r>
+              <a:rPr lang="en-US" dirty="0"/>
+              <a:t>Look up the available modules in Hazel</a:t>
+            </a:r>
+          </a:p>
+          <a:p>
+            <a:pPr marL="342900" indent="-342900">
+              <a:lnSpc>
+                <a:spcPct val="150000"/>
+              </a:lnSpc>
+              <a:buAutoNum type="arabicPeriod"/>
+            </a:pPr>
+            <a:r>
+              <a:rPr lang="en-US" dirty="0"/>
+              <a:t>Choose one and load it, then try to run it with the –h (help) flag</a:t>
+            </a:r>
+          </a:p>
+          <a:p>
+            <a:pPr marL="342900" indent="-342900">
+              <a:lnSpc>
+                <a:spcPct val="150000"/>
+              </a:lnSpc>
+              <a:buAutoNum type="arabicPeriod"/>
+            </a:pPr>
+            <a:endParaRPr lang="en-US" dirty="0"/>
+          </a:p>
+          <a:p>
+            <a:pPr marL="342900" indent="-342900">
+              <a:lnSpc>
+                <a:spcPct val="150000"/>
+              </a:lnSpc>
+              <a:buAutoNum type="arabicPeriod"/>
+            </a:pPr>
+            <a:r>
+              <a:rPr lang="en-US" dirty="0"/>
+              <a:t>Look up a </a:t>
+            </a:r>
+            <a:r>
+              <a:rPr lang="en-US" dirty="0" err="1"/>
+              <a:t>biocontainer</a:t>
+            </a:r>
+            <a:r>
+              <a:rPr lang="en-US" dirty="0"/>
+              <a:t> for a software you normally use</a:t>
+            </a:r>
+          </a:p>
+          <a:p>
+            <a:pPr marL="342900" indent="-342900">
+              <a:lnSpc>
+                <a:spcPct val="150000"/>
+              </a:lnSpc>
+              <a:buAutoNum type="arabicPeriod"/>
+            </a:pPr>
+            <a:r>
+              <a:rPr lang="en-US" dirty="0"/>
+              <a:t>Try to pull it using </a:t>
+            </a:r>
+            <a:r>
+              <a:rPr lang="en-US" dirty="0" err="1"/>
+              <a:t>apptainer</a:t>
+            </a:r>
+            <a:r>
+              <a:rPr lang="en-US" dirty="0"/>
+              <a:t> pull</a:t>
+            </a:r>
+          </a:p>
+          <a:p>
+            <a:pPr marL="342900" indent="-342900">
+              <a:lnSpc>
+                <a:spcPct val="150000"/>
+              </a:lnSpc>
+              <a:buAutoNum type="arabicPeriod"/>
+            </a:pPr>
+            <a:r>
+              <a:rPr lang="en-US" dirty="0"/>
+              <a:t>Test it! </a:t>
+            </a:r>
+          </a:p>
+          <a:p>
+            <a:pPr marL="342900" indent="-342900">
+              <a:lnSpc>
+                <a:spcPct val="150000"/>
+              </a:lnSpc>
+              <a:buAutoNum type="arabicPeriod"/>
+            </a:pPr>
+            <a:endParaRPr lang="en-US" dirty="0"/>
+          </a:p>
+        </p:txBody>
+      </p:sp>
+      <p:sp>
+        <p:nvSpPr>
+          <p:cNvPr id="3" name="TextBox 2">
+            <a:extLst>
+              <a:ext uri="{FF2B5EF4-FFF2-40B4-BE49-F238E27FC236}">
+                <a16:creationId xmlns:a16="http://schemas.microsoft.com/office/drawing/2014/main" id="{7880EB4B-0CE6-A8A7-05ED-239E2A66FC09}"/>
+              </a:ext>
+            </a:extLst>
+          </p:cNvPr>
+          <p:cNvSpPr txBox="1"/>
+          <p:nvPr/>
+        </p:nvSpPr>
+        <p:spPr>
+          <a:xfrm>
+            <a:off x="7980218" y="2152591"/>
+            <a:ext cx="2483885" cy="2862322"/>
+          </a:xfrm>
+          <a:prstGeom prst="rect">
+            <a:avLst/>
+          </a:prstGeom>
+          <a:noFill/>
+        </p:spPr>
+        <p:txBody>
+          <a:bodyPr wrap="none" rtlCol="0">
+            <a:spAutoFit/>
+          </a:bodyPr>
+          <a:lstStyle/>
+          <a:p>
+            <a:r>
+              <a:rPr lang="en-US" dirty="0"/>
+              <a:t>Interactive </a:t>
+            </a:r>
+          </a:p>
+          <a:p>
+            <a:r>
+              <a:rPr lang="en-US" dirty="0"/>
+              <a:t>Module avail</a:t>
+            </a:r>
+          </a:p>
+          <a:p>
+            <a:r>
+              <a:rPr lang="en-US" dirty="0"/>
+              <a:t>Module load </a:t>
+            </a:r>
+            <a:r>
+              <a:rPr lang="en-US" dirty="0" err="1"/>
+              <a:t>apptainer</a:t>
+            </a:r>
+            <a:endParaRPr lang="en-US" dirty="0"/>
+          </a:p>
+          <a:p>
+            <a:r>
+              <a:rPr lang="en-US" dirty="0" err="1"/>
+              <a:t>Apptainer</a:t>
+            </a:r>
+            <a:r>
+              <a:rPr lang="en-US" dirty="0"/>
+              <a:t> –h</a:t>
+            </a:r>
+          </a:p>
+          <a:p>
+            <a:endParaRPr lang="en-US" dirty="0"/>
+          </a:p>
+          <a:p>
+            <a:endParaRPr lang="en-US" dirty="0"/>
+          </a:p>
+          <a:p>
+            <a:r>
+              <a:rPr lang="en-US" dirty="0" err="1"/>
+              <a:t>Apptainer</a:t>
+            </a:r>
+            <a:r>
+              <a:rPr lang="en-US" dirty="0"/>
+              <a:t> pull </a:t>
+            </a:r>
+          </a:p>
+          <a:p>
+            <a:r>
+              <a:rPr lang="en-US" dirty="0" err="1"/>
+              <a:t>Apptainer</a:t>
+            </a:r>
+            <a:r>
+              <a:rPr lang="en-US" dirty="0"/>
+              <a:t> </a:t>
+            </a:r>
+            <a:r>
+              <a:rPr lang="en-US" dirty="0" err="1"/>
+              <a:t>program.sif</a:t>
+            </a:r>
+            <a:r>
+              <a:rPr lang="en-US" dirty="0"/>
+              <a:t> -h</a:t>
+            </a:r>
+          </a:p>
+          <a:p>
+            <a:endParaRPr lang="en-US" dirty="0"/>
+          </a:p>
+          <a:p>
+            <a:endParaRPr lang="en-US" dirty="0"/>
+          </a:p>
+        </p:txBody>
+      </p:sp>
+    </p:spTree>
+    <p:extLst>
+      <p:ext uri="{BB962C8B-B14F-4D97-AF65-F5344CB8AC3E}">
+        <p14:creationId xmlns:p14="http://schemas.microsoft.com/office/powerpoint/2010/main" val="1820864092"/>
+      </p:ext>
+    </p:extLst>
+  </p:cSld>
+  <p:clrMapOvr>
+    <a:masterClrMapping/>
+  </p:clrMapOvr>
+</p:sld>
+</file>
+
+<file path=ppt/slides/slide11.xml><?xml version="1.0" encoding="utf-8"?>
+<p:sld xmlns:a="http://schemas.openxmlformats.org/drawingml/2006/main" xmlns:r="http://schemas.openxmlformats.org/officeDocument/2006/relationships" xmlns:p="http://schemas.openxmlformats.org/presentationml/2006/main">
+  <p:cSld>
+    <p:spTree>
+      <p:nvGrpSpPr>
+        <p:cNvPr id="1" name="">
+          <a:extLst>
+            <a:ext uri="{FF2B5EF4-FFF2-40B4-BE49-F238E27FC236}">
               <a16:creationId xmlns:a16="http://schemas.microsoft.com/office/drawing/2014/main" id="{ECF3FCFC-5B5A-48C4-991E-88A3B828AF77}"/>
             </a:ext>
           </a:extLst>
@@ -4926,7 +5853,7 @@
 </p:sld>
 </file>
 
-<file path=ppt/slides/slide11.xml><?xml version="1.0" encoding="utf-8"?>
+<file path=ppt/slides/slide12.xml><?xml version="1.0" encoding="utf-8"?>
 <p:sld xmlns:a="http://schemas.openxmlformats.org/drawingml/2006/main" xmlns:r="http://schemas.openxmlformats.org/officeDocument/2006/relationships" xmlns:p="http://schemas.openxmlformats.org/presentationml/2006/main">
   <p:cSld>
     <p:spTree>
@@ -5024,7 +5951,2141 @@
 </p:sld>
 </file>
 
-<file path=ppt/slides/slide12.xml><?xml version="1.0" encoding="utf-8"?>
+<file path=ppt/slides/slide13.xml><?xml version="1.0" encoding="utf-8"?>
+<p:sld xmlns:a="http://schemas.openxmlformats.org/drawingml/2006/main" xmlns:r="http://schemas.openxmlformats.org/officeDocument/2006/relationships" xmlns:p="http://schemas.openxmlformats.org/presentationml/2006/main">
+  <p:cSld>
+    <p:spTree>
+      <p:nvGrpSpPr>
+        <p:cNvPr id="1" name="">
+          <a:extLst>
+            <a:ext uri="{FF2B5EF4-FFF2-40B4-BE49-F238E27FC236}">
+              <a16:creationId xmlns:a16="http://schemas.microsoft.com/office/drawing/2014/main" id="{F0F9E945-2B20-1F2B-6D96-7D7ECF8145E7}"/>
+            </a:ext>
+          </a:extLst>
+        </p:cNvPr>
+        <p:cNvGrpSpPr/>
+        <p:nvPr/>
+      </p:nvGrpSpPr>
+      <p:grpSpPr>
+        <a:xfrm>
+          <a:off x="0" y="0"/>
+          <a:ext cx="0" cy="0"/>
+          <a:chOff x="0" y="0"/>
+          <a:chExt cx="0" cy="0"/>
+        </a:xfrm>
+      </p:grpSpPr>
+      <p:sp>
+        <p:nvSpPr>
+          <p:cNvPr id="2" name="Title 1">
+            <a:extLst>
+              <a:ext uri="{FF2B5EF4-FFF2-40B4-BE49-F238E27FC236}">
+                <a16:creationId xmlns:a16="http://schemas.microsoft.com/office/drawing/2014/main" id="{B8791DE7-5804-43E5-C000-0715F59E697A}"/>
+              </a:ext>
+            </a:extLst>
+          </p:cNvPr>
+          <p:cNvSpPr>
+            <a:spLocks noGrp="1"/>
+          </p:cNvSpPr>
+          <p:nvPr>
+            <p:ph type="title"/>
+          </p:nvPr>
+        </p:nvSpPr>
+        <p:spPr/>
+        <p:txBody>
+          <a:bodyPr>
+            <a:normAutofit/>
+          </a:bodyPr>
+          <a:lstStyle/>
+          <a:p>
+            <a:r>
+              <a:rPr lang="en-US" sz="4000" dirty="0">
+                <a:latin typeface="Helvetica" pitchFamily="2" charset="0"/>
+              </a:rPr>
+              <a:t>Hazel HPC Storage</a:t>
+            </a:r>
+          </a:p>
+        </p:txBody>
+      </p:sp>
+      <p:pic>
+        <p:nvPicPr>
+          <p:cNvPr id="5" name="Picture 4">
+            <a:extLst>
+              <a:ext uri="{FF2B5EF4-FFF2-40B4-BE49-F238E27FC236}">
+                <a16:creationId xmlns:a16="http://schemas.microsoft.com/office/drawing/2014/main" id="{BD8AEF68-DF10-A822-53D6-C16263716C27}"/>
+              </a:ext>
+            </a:extLst>
+          </p:cNvPr>
+          <p:cNvPicPr>
+            <a:picLocks noChangeAspect="1"/>
+          </p:cNvPicPr>
+          <p:nvPr/>
+        </p:nvPicPr>
+        <p:blipFill>
+          <a:blip r:embed="rId3"/>
+          <a:stretch>
+            <a:fillRect/>
+          </a:stretch>
+        </p:blipFill>
+        <p:spPr>
+          <a:xfrm>
+            <a:off x="6729003" y="1743179"/>
+            <a:ext cx="5035602" cy="3463081"/>
+          </a:xfrm>
+          <a:prstGeom prst="rect">
+            <a:avLst/>
+          </a:prstGeom>
+        </p:spPr>
+      </p:pic>
+      <p:sp>
+        <p:nvSpPr>
+          <p:cNvPr id="3" name="TextBox 2">
+            <a:extLst>
+              <a:ext uri="{FF2B5EF4-FFF2-40B4-BE49-F238E27FC236}">
+                <a16:creationId xmlns:a16="http://schemas.microsoft.com/office/drawing/2014/main" id="{44A21048-9EAD-BB71-CEF7-6E293C3621E1}"/>
+              </a:ext>
+            </a:extLst>
+          </p:cNvPr>
+          <p:cNvSpPr txBox="1"/>
+          <p:nvPr/>
+        </p:nvSpPr>
+        <p:spPr>
+          <a:xfrm>
+            <a:off x="631915" y="1406434"/>
+            <a:ext cx="6097088" cy="4678204"/>
+          </a:xfrm>
+          <a:prstGeom prst="rect">
+            <a:avLst/>
+          </a:prstGeom>
+          <a:noFill/>
+        </p:spPr>
+        <p:txBody>
+          <a:bodyPr wrap="square">
+            <a:spAutoFit/>
+          </a:bodyPr>
+          <a:lstStyle/>
+          <a:p>
+            <a:pPr>
+              <a:buNone/>
+            </a:pPr>
+            <a:r>
+              <a:rPr lang="en-US" b="1" dirty="0">
+                <a:latin typeface="Helvetica" pitchFamily="2" charset="0"/>
+                <a:cs typeface="Arial" panose="020B0604020202020204" pitchFamily="34" charset="0"/>
+              </a:rPr>
+              <a:t>Home Directory </a:t>
+            </a:r>
+            <a:r>
+              <a:rPr lang="en-US" sz="1400" b="1" dirty="0">
+                <a:solidFill>
+                  <a:schemeClr val="accent2"/>
+                </a:solidFill>
+                <a:latin typeface="Menlo" panose="020B0609030804020204" pitchFamily="49" charset="0"/>
+                <a:ea typeface="Menlo" panose="020B0609030804020204" pitchFamily="49" charset="0"/>
+                <a:cs typeface="Menlo" panose="020B0609030804020204" pitchFamily="49" charset="0"/>
+              </a:rPr>
+              <a:t>/home/[</a:t>
+            </a:r>
+            <a:r>
+              <a:rPr lang="en-US" sz="1400" b="1" dirty="0" err="1">
+                <a:solidFill>
+                  <a:schemeClr val="accent2"/>
+                </a:solidFill>
+                <a:latin typeface="Menlo" panose="020B0609030804020204" pitchFamily="49" charset="0"/>
+                <a:ea typeface="Menlo" panose="020B0609030804020204" pitchFamily="49" charset="0"/>
+                <a:cs typeface="Menlo" panose="020B0609030804020204" pitchFamily="49" charset="0"/>
+              </a:rPr>
+              <a:t>UnityID</a:t>
+            </a:r>
+            <a:r>
+              <a:rPr lang="en-US" sz="1400" b="1" dirty="0">
+                <a:solidFill>
+                  <a:schemeClr val="accent2"/>
+                </a:solidFill>
+                <a:latin typeface="Menlo" panose="020B0609030804020204" pitchFamily="49" charset="0"/>
+                <a:ea typeface="Menlo" panose="020B0609030804020204" pitchFamily="49" charset="0"/>
+                <a:cs typeface="Menlo" panose="020B0609030804020204" pitchFamily="49" charset="0"/>
+              </a:rPr>
+              <a:t>]</a:t>
+            </a:r>
+          </a:p>
+          <a:p>
+            <a:pPr marL="285750" indent="-285750">
+              <a:buFont typeface="Arial" panose="020B0604020202020204" pitchFamily="34" charset="0"/>
+              <a:buChar char="•"/>
+            </a:pPr>
+            <a:r>
+              <a:rPr lang="en-US" sz="1400" b="1" dirty="0">
+                <a:latin typeface="Helvetica" pitchFamily="2" charset="0"/>
+                <a:cs typeface="Arial" panose="020B0604020202020204" pitchFamily="34" charset="0"/>
+              </a:rPr>
+              <a:t>Size:</a:t>
+            </a:r>
+            <a:r>
+              <a:rPr lang="en-US" sz="1400" dirty="0">
+                <a:latin typeface="Helvetica" pitchFamily="2" charset="0"/>
+                <a:cs typeface="Arial" panose="020B0604020202020204" pitchFamily="34" charset="0"/>
+              </a:rPr>
+              <a:t> 1 GB per user</a:t>
+            </a:r>
+          </a:p>
+          <a:p>
+            <a:pPr marL="285750" indent="-285750">
+              <a:buFont typeface="Arial" panose="020B0604020202020204" pitchFamily="34" charset="0"/>
+              <a:buChar char="•"/>
+            </a:pPr>
+            <a:r>
+              <a:rPr lang="en-US" sz="1400" b="1" dirty="0">
+                <a:latin typeface="Helvetica" pitchFamily="2" charset="0"/>
+                <a:cs typeface="Arial" panose="020B0604020202020204" pitchFamily="34" charset="0"/>
+              </a:rPr>
+              <a:t>Speed:</a:t>
+            </a:r>
+            <a:r>
+              <a:rPr lang="en-US" sz="1400" dirty="0">
+                <a:latin typeface="Helvetica" pitchFamily="2" charset="0"/>
+                <a:cs typeface="Arial" panose="020B0604020202020204" pitchFamily="34" charset="0"/>
+              </a:rPr>
+              <a:t> Moderate</a:t>
+            </a:r>
+          </a:p>
+          <a:p>
+            <a:pPr marL="285750" indent="-285750">
+              <a:buFont typeface="Arial" panose="020B0604020202020204" pitchFamily="34" charset="0"/>
+              <a:buChar char="•"/>
+            </a:pPr>
+            <a:r>
+              <a:rPr lang="en-US" sz="1400" b="1" dirty="0">
+                <a:latin typeface="Helvetica" pitchFamily="2" charset="0"/>
+                <a:cs typeface="Arial" panose="020B0604020202020204" pitchFamily="34" charset="0"/>
+              </a:rPr>
+              <a:t>Persistence:</a:t>
+            </a:r>
+            <a:r>
+              <a:rPr lang="en-US" sz="1400" dirty="0">
+                <a:latin typeface="Helvetica" pitchFamily="2" charset="0"/>
+                <a:cs typeface="Arial" panose="020B0604020202020204" pitchFamily="34" charset="0"/>
+              </a:rPr>
+              <a:t> Permanent</a:t>
+            </a:r>
+          </a:p>
+          <a:p>
+            <a:pPr marL="285750" indent="-285750">
+              <a:buFont typeface="Arial" panose="020B0604020202020204" pitchFamily="34" charset="0"/>
+              <a:buChar char="•"/>
+            </a:pPr>
+            <a:r>
+              <a:rPr lang="en-US" sz="1400" b="1" dirty="0">
+                <a:latin typeface="Helvetica" pitchFamily="2" charset="0"/>
+                <a:cs typeface="Arial" panose="020B0604020202020204" pitchFamily="34" charset="0"/>
+              </a:rPr>
+              <a:t>Backup:</a:t>
+            </a:r>
+            <a:r>
+              <a:rPr lang="en-US" sz="1400" dirty="0">
+                <a:latin typeface="Helvetica" pitchFamily="2" charset="0"/>
+                <a:cs typeface="Arial" panose="020B0604020202020204" pitchFamily="34" charset="0"/>
+              </a:rPr>
+              <a:t> Yes</a:t>
+            </a:r>
+          </a:p>
+          <a:p>
+            <a:pPr>
+              <a:buFont typeface="Arial" panose="020B0604020202020204" pitchFamily="34" charset="0"/>
+              <a:buChar char="•"/>
+            </a:pPr>
+            <a:endParaRPr lang="en-US" sz="1600" dirty="0">
+              <a:latin typeface="Helvetica" pitchFamily="2" charset="0"/>
+              <a:cs typeface="Arial" panose="020B0604020202020204" pitchFamily="34" charset="0"/>
+            </a:endParaRPr>
+          </a:p>
+          <a:p>
+            <a:r>
+              <a:rPr lang="en-US" sz="1400" b="1" dirty="0">
+                <a:latin typeface="Helvetica" pitchFamily="2" charset="0"/>
+                <a:cs typeface="Arial" panose="020B0604020202020204" pitchFamily="34" charset="0"/>
+              </a:rPr>
+              <a:t>What to store here:</a:t>
+            </a:r>
+            <a:endParaRPr lang="en-US" sz="1400" dirty="0">
+              <a:latin typeface="Helvetica" pitchFamily="2" charset="0"/>
+              <a:cs typeface="Arial" panose="020B0604020202020204" pitchFamily="34" charset="0"/>
+            </a:endParaRPr>
+          </a:p>
+          <a:p>
+            <a:pPr marL="285750" indent="-285750">
+              <a:buFont typeface="Arial" panose="020B0604020202020204" pitchFamily="34" charset="0"/>
+              <a:buChar char="•"/>
+            </a:pPr>
+            <a:r>
+              <a:rPr lang="en-US" sz="1400" dirty="0">
+                <a:latin typeface="Helvetica" pitchFamily="2" charset="0"/>
+                <a:cs typeface="Arial" panose="020B0604020202020204" pitchFamily="34" charset="0"/>
+              </a:rPr>
+              <a:t>.</a:t>
+            </a:r>
+            <a:r>
+              <a:rPr lang="en-US" sz="1400" dirty="0" err="1">
+                <a:latin typeface="Helvetica" pitchFamily="2" charset="0"/>
+                <a:cs typeface="Arial" panose="020B0604020202020204" pitchFamily="34" charset="0"/>
+              </a:rPr>
+              <a:t>bashrc</a:t>
+            </a:r>
+            <a:r>
+              <a:rPr lang="en-US" sz="1400" dirty="0">
+                <a:latin typeface="Helvetica" pitchFamily="2" charset="0"/>
+                <a:cs typeface="Arial" panose="020B0604020202020204" pitchFamily="34" charset="0"/>
+              </a:rPr>
+              <a:t> and other configuration files</a:t>
+            </a:r>
+          </a:p>
+          <a:p>
+            <a:pPr marL="285750" indent="-285750">
+              <a:buFont typeface="Arial" panose="020B0604020202020204" pitchFamily="34" charset="0"/>
+              <a:buChar char="•"/>
+            </a:pPr>
+            <a:r>
+              <a:rPr lang="en-US" sz="1400" dirty="0">
+                <a:latin typeface="Helvetica" pitchFamily="2" charset="0"/>
+                <a:cs typeface="Arial" panose="020B0604020202020204" pitchFamily="34" charset="0"/>
+              </a:rPr>
+              <a:t>Small utility scripts</a:t>
+            </a:r>
+          </a:p>
+          <a:p>
+            <a:pPr marL="285750" indent="-285750">
+              <a:buFont typeface="Arial" panose="020B0604020202020204" pitchFamily="34" charset="0"/>
+              <a:buChar char="•"/>
+            </a:pPr>
+            <a:r>
+              <a:rPr lang="en-US" sz="1400" dirty="0">
+                <a:latin typeface="Helvetica" pitchFamily="2" charset="0"/>
+                <a:cs typeface="Arial" panose="020B0604020202020204" pitchFamily="34" charset="0"/>
+              </a:rPr>
+              <a:t>SSH keys </a:t>
+            </a:r>
+            <a:r>
+              <a:rPr lang="en-US" sz="1400" dirty="0">
+                <a:solidFill>
+                  <a:srgbClr val="FF0000"/>
+                </a:solidFill>
+                <a:latin typeface="Helvetica" pitchFamily="2" charset="0"/>
+                <a:cs typeface="Arial" panose="020B0604020202020204" pitchFamily="34" charset="0"/>
+              </a:rPr>
+              <a:t>(not available for Hazel!)</a:t>
+            </a:r>
+          </a:p>
+          <a:p>
+            <a:pPr marL="285750" indent="-285750">
+              <a:buFont typeface="Arial" panose="020B0604020202020204" pitchFamily="34" charset="0"/>
+              <a:buChar char="•"/>
+            </a:pPr>
+            <a:r>
+              <a:rPr lang="en-US" sz="1400" dirty="0">
+                <a:latin typeface="Helvetica" pitchFamily="2" charset="0"/>
+                <a:cs typeface="Arial" panose="020B0604020202020204" pitchFamily="34" charset="0"/>
+              </a:rPr>
+              <a:t>Personal settings</a:t>
+            </a:r>
+          </a:p>
+          <a:p>
+            <a:r>
+              <a:rPr lang="en-US" sz="1400" b="1" dirty="0">
+                <a:latin typeface="Helvetica" pitchFamily="2" charset="0"/>
+                <a:cs typeface="Arial" panose="020B0604020202020204" pitchFamily="34" charset="0"/>
+              </a:rPr>
+              <a:t>What NOT to store here:</a:t>
+            </a:r>
+            <a:endParaRPr lang="en-US" sz="1400" dirty="0">
+              <a:latin typeface="Helvetica" pitchFamily="2" charset="0"/>
+              <a:cs typeface="Arial" panose="020B0604020202020204" pitchFamily="34" charset="0"/>
+            </a:endParaRPr>
+          </a:p>
+          <a:p>
+            <a:pPr marL="285750" indent="-285750">
+              <a:buFont typeface="Arial" panose="020B0604020202020204" pitchFamily="34" charset="0"/>
+              <a:buChar char="•"/>
+            </a:pPr>
+            <a:r>
+              <a:rPr lang="en-US" sz="1400" dirty="0">
+                <a:latin typeface="Helvetica" pitchFamily="2" charset="0"/>
+                <a:cs typeface="Arial" panose="020B0604020202020204" pitchFamily="34" charset="0"/>
+              </a:rPr>
+              <a:t>Raw sequencing data (too large)</a:t>
+            </a:r>
+          </a:p>
+          <a:p>
+            <a:pPr marL="285750" indent="-285750">
+              <a:buFont typeface="Arial" panose="020B0604020202020204" pitchFamily="34" charset="0"/>
+              <a:buChar char="•"/>
+            </a:pPr>
+            <a:r>
+              <a:rPr lang="en-US" sz="1400" dirty="0">
+                <a:latin typeface="Helvetica" pitchFamily="2" charset="0"/>
+                <a:cs typeface="Arial" panose="020B0604020202020204" pitchFamily="34" charset="0"/>
+              </a:rPr>
+              <a:t>Analysis results (too large)</a:t>
+            </a:r>
+          </a:p>
+          <a:p>
+            <a:pPr marL="285750" indent="-285750">
+              <a:buFont typeface="Arial" panose="020B0604020202020204" pitchFamily="34" charset="0"/>
+              <a:buChar char="•"/>
+            </a:pPr>
+            <a:r>
+              <a:rPr lang="en-US" sz="1400" dirty="0">
+                <a:latin typeface="Helvetica" pitchFamily="2" charset="0"/>
+                <a:cs typeface="Arial" panose="020B0604020202020204" pitchFamily="34" charset="0"/>
+              </a:rPr>
+              <a:t>Conda environments (will exceed quota quickly)</a:t>
+            </a:r>
+          </a:p>
+          <a:p>
+            <a:pPr marL="285750" indent="-285750">
+              <a:buFont typeface="Arial" panose="020B0604020202020204" pitchFamily="34" charset="0"/>
+              <a:buChar char="•"/>
+            </a:pPr>
+            <a:r>
+              <a:rPr lang="en-US" sz="1400" dirty="0">
+                <a:latin typeface="Helvetica" pitchFamily="2" charset="0"/>
+                <a:cs typeface="Arial" panose="020B0604020202020204" pitchFamily="34" charset="0"/>
+              </a:rPr>
+              <a:t>Any data files</a:t>
+            </a:r>
+          </a:p>
+          <a:p>
+            <a:pPr marL="285750" indent="-285750">
+              <a:buFont typeface="Arial" panose="020B0604020202020204" pitchFamily="34" charset="0"/>
+              <a:buChar char="•"/>
+            </a:pPr>
+            <a:endParaRPr lang="en-US" sz="1400" dirty="0">
+              <a:latin typeface="Helvetica" pitchFamily="2" charset="0"/>
+              <a:cs typeface="Arial" panose="020B0604020202020204" pitchFamily="34" charset="0"/>
+            </a:endParaRPr>
+          </a:p>
+          <a:p>
+            <a:r>
+              <a:rPr lang="en-US" sz="1400" b="1" dirty="0">
+                <a:latin typeface="Helvetica" pitchFamily="2" charset="0"/>
+                <a:cs typeface="Arial" panose="020B0604020202020204" pitchFamily="34" charset="0"/>
+              </a:rPr>
+              <a:t>Why it's small:</a:t>
+            </a:r>
+            <a:r>
+              <a:rPr lang="en-US" sz="1400" dirty="0">
+                <a:latin typeface="Helvetica" pitchFamily="2" charset="0"/>
+                <a:cs typeface="Arial" panose="020B0604020202020204" pitchFamily="34" charset="0"/>
+              </a:rPr>
+              <a:t> Home directories are backed up and designed only for personal configuration, not data storage.</a:t>
+            </a:r>
+          </a:p>
+          <a:p>
+            <a:pPr>
+              <a:buFont typeface="Arial" panose="020B0604020202020204" pitchFamily="34" charset="0"/>
+              <a:buChar char="•"/>
+            </a:pPr>
+            <a:endParaRPr lang="en-US" dirty="0">
+              <a:latin typeface="Helvetica" pitchFamily="2" charset="0"/>
+              <a:cs typeface="Arial" panose="020B0604020202020204" pitchFamily="34" charset="0"/>
+            </a:endParaRPr>
+          </a:p>
+        </p:txBody>
+      </p:sp>
+      <p:sp>
+        <p:nvSpPr>
+          <p:cNvPr id="4" name="Oval 3">
+            <a:extLst>
+              <a:ext uri="{FF2B5EF4-FFF2-40B4-BE49-F238E27FC236}">
+                <a16:creationId xmlns:a16="http://schemas.microsoft.com/office/drawing/2014/main" id="{B61BA87A-A58C-58EB-26DC-E4966C5A3C0F}"/>
+              </a:ext>
+            </a:extLst>
+          </p:cNvPr>
+          <p:cNvSpPr/>
+          <p:nvPr/>
+        </p:nvSpPr>
+        <p:spPr>
+          <a:xfrm>
+            <a:off x="10032274" y="2984863"/>
+            <a:ext cx="796835" cy="760673"/>
+          </a:xfrm>
+          <a:prstGeom prst="ellipse">
+            <a:avLst/>
+          </a:prstGeom>
+          <a:noFill/>
+          <a:ln w="19050">
+            <a:solidFill>
+              <a:srgbClr val="D80003"/>
+            </a:solidFill>
+          </a:ln>
+        </p:spPr>
+        <p:style>
+          <a:lnRef idx="2">
+            <a:schemeClr val="accent1">
+              <a:shade val="15000"/>
+            </a:schemeClr>
+          </a:lnRef>
+          <a:fillRef idx="1">
+            <a:schemeClr val="accent1"/>
+          </a:fillRef>
+          <a:effectRef idx="0">
+            <a:schemeClr val="accent1"/>
+          </a:effectRef>
+          <a:fontRef idx="minor">
+            <a:schemeClr val="lt1"/>
+          </a:fontRef>
+        </p:style>
+        <p:txBody>
+          <a:bodyPr rtlCol="0" anchor="ctr"/>
+          <a:lstStyle/>
+          <a:p>
+            <a:pPr algn="ctr"/>
+            <a:endParaRPr lang="en-US"/>
+          </a:p>
+        </p:txBody>
+      </p:sp>
+      <p:pic>
+        <p:nvPicPr>
+          <p:cNvPr id="1026" name="Picture 2" descr="hâB Shipping Container Tiny Home - Tiny Living">
+            <a:extLst>
+              <a:ext uri="{FF2B5EF4-FFF2-40B4-BE49-F238E27FC236}">
+                <a16:creationId xmlns:a16="http://schemas.microsoft.com/office/drawing/2014/main" id="{442E58FB-6572-CA80-A250-A13DBC354FA0}"/>
+              </a:ext>
+            </a:extLst>
+          </p:cNvPr>
+          <p:cNvPicPr>
+            <a:picLocks noChangeAspect="1" noChangeArrowheads="1"/>
+          </p:cNvPicPr>
+          <p:nvPr/>
+        </p:nvPicPr>
+        <p:blipFill>
+          <a:blip r:embed="rId4">
+            <a:extLst>
+              <a:ext uri="{28A0092B-C50C-407E-A947-70E740481C1C}">
+                <a14:useLocalDpi xmlns:a14="http://schemas.microsoft.com/office/drawing/2010/main" val="0"/>
+              </a:ext>
+            </a:extLst>
+          </a:blip>
+          <a:srcRect/>
+          <a:stretch>
+            <a:fillRect/>
+          </a:stretch>
+        </p:blipFill>
+        <p:spPr bwMode="auto">
+          <a:xfrm>
+            <a:off x="4572914" y="1514103"/>
+            <a:ext cx="1523086" cy="1009044"/>
+          </a:xfrm>
+          <a:prstGeom prst="rect">
+            <a:avLst/>
+          </a:prstGeom>
+          <a:noFill/>
+          <a:extLst>
+            <a:ext uri="{909E8E84-426E-40DD-AFC4-6F175D3DCCD1}">
+              <a14:hiddenFill xmlns:a14="http://schemas.microsoft.com/office/drawing/2010/main">
+                <a:solidFill>
+                  <a:srgbClr val="FFFFFF"/>
+                </a:solidFill>
+              </a14:hiddenFill>
+            </a:ext>
+          </a:extLst>
+        </p:spPr>
+      </p:pic>
+      <p:sp>
+        <p:nvSpPr>
+          <p:cNvPr id="6" name="TextBox 5">
+            <a:extLst>
+              <a:ext uri="{FF2B5EF4-FFF2-40B4-BE49-F238E27FC236}">
+                <a16:creationId xmlns:a16="http://schemas.microsoft.com/office/drawing/2014/main" id="{A265F0AC-B819-084D-03D9-94C0AB6559AE}"/>
+              </a:ext>
+            </a:extLst>
+          </p:cNvPr>
+          <p:cNvSpPr txBox="1"/>
+          <p:nvPr/>
+        </p:nvSpPr>
+        <p:spPr>
+          <a:xfrm>
+            <a:off x="4834961" y="2523147"/>
+            <a:ext cx="998991" cy="261610"/>
+          </a:xfrm>
+          <a:prstGeom prst="rect">
+            <a:avLst/>
+          </a:prstGeom>
+          <a:noFill/>
+        </p:spPr>
+        <p:txBody>
+          <a:bodyPr wrap="none" rtlCol="0">
+            <a:spAutoFit/>
+          </a:bodyPr>
+          <a:lstStyle/>
+          <a:p>
+            <a:r>
+              <a:rPr lang="en-US" sz="1100" dirty="0">
+                <a:solidFill>
+                  <a:srgbClr val="FF0000"/>
+                </a:solidFill>
+                <a:latin typeface="Helvetica" pitchFamily="2" charset="0"/>
+              </a:rPr>
+              <a:t>Home is tiny!</a:t>
+            </a:r>
+          </a:p>
+        </p:txBody>
+      </p:sp>
+    </p:spTree>
+    <p:extLst>
+      <p:ext uri="{BB962C8B-B14F-4D97-AF65-F5344CB8AC3E}">
+        <p14:creationId xmlns:p14="http://schemas.microsoft.com/office/powerpoint/2010/main" val="2067369866"/>
+      </p:ext>
+    </p:extLst>
+  </p:cSld>
+  <p:clrMapOvr>
+    <a:masterClrMapping/>
+  </p:clrMapOvr>
+</p:sld>
+</file>
+
+<file path=ppt/slides/slide14.xml><?xml version="1.0" encoding="utf-8"?>
+<p:sld xmlns:a="http://schemas.openxmlformats.org/drawingml/2006/main" xmlns:r="http://schemas.openxmlformats.org/officeDocument/2006/relationships" xmlns:p="http://schemas.openxmlformats.org/presentationml/2006/main">
+  <p:cSld>
+    <p:spTree>
+      <p:nvGrpSpPr>
+        <p:cNvPr id="1" name="">
+          <a:extLst>
+            <a:ext uri="{FF2B5EF4-FFF2-40B4-BE49-F238E27FC236}">
+              <a16:creationId xmlns:a16="http://schemas.microsoft.com/office/drawing/2014/main" id="{41BA03C2-4A92-E738-5690-FB464C6E4371}"/>
+            </a:ext>
+          </a:extLst>
+        </p:cNvPr>
+        <p:cNvGrpSpPr/>
+        <p:nvPr/>
+      </p:nvGrpSpPr>
+      <p:grpSpPr>
+        <a:xfrm>
+          <a:off x="0" y="0"/>
+          <a:ext cx="0" cy="0"/>
+          <a:chOff x="0" y="0"/>
+          <a:chExt cx="0" cy="0"/>
+        </a:xfrm>
+      </p:grpSpPr>
+      <p:sp>
+        <p:nvSpPr>
+          <p:cNvPr id="2" name="Title 1">
+            <a:extLst>
+              <a:ext uri="{FF2B5EF4-FFF2-40B4-BE49-F238E27FC236}">
+                <a16:creationId xmlns:a16="http://schemas.microsoft.com/office/drawing/2014/main" id="{4F595156-C867-D675-EDBE-C45CD75DD2DC}"/>
+              </a:ext>
+            </a:extLst>
+          </p:cNvPr>
+          <p:cNvSpPr>
+            <a:spLocks noGrp="1"/>
+          </p:cNvSpPr>
+          <p:nvPr>
+            <p:ph type="title"/>
+          </p:nvPr>
+        </p:nvSpPr>
+        <p:spPr/>
+        <p:txBody>
+          <a:bodyPr>
+            <a:normAutofit/>
+          </a:bodyPr>
+          <a:lstStyle/>
+          <a:p>
+            <a:r>
+              <a:rPr lang="en-US" sz="4000" dirty="0">
+                <a:latin typeface="Helvetica" pitchFamily="2" charset="0"/>
+              </a:rPr>
+              <a:t>Hazel HPC Storage</a:t>
+            </a:r>
+          </a:p>
+        </p:txBody>
+      </p:sp>
+      <p:pic>
+        <p:nvPicPr>
+          <p:cNvPr id="5" name="Picture 4">
+            <a:extLst>
+              <a:ext uri="{FF2B5EF4-FFF2-40B4-BE49-F238E27FC236}">
+                <a16:creationId xmlns:a16="http://schemas.microsoft.com/office/drawing/2014/main" id="{0A56FC8C-3009-B5C9-BEAC-86C3DFEC2DDD}"/>
+              </a:ext>
+            </a:extLst>
+          </p:cNvPr>
+          <p:cNvPicPr>
+            <a:picLocks noChangeAspect="1"/>
+          </p:cNvPicPr>
+          <p:nvPr/>
+        </p:nvPicPr>
+        <p:blipFill>
+          <a:blip r:embed="rId3"/>
+          <a:stretch>
+            <a:fillRect/>
+          </a:stretch>
+        </p:blipFill>
+        <p:spPr>
+          <a:xfrm>
+            <a:off x="6729003" y="1743179"/>
+            <a:ext cx="5035602" cy="3463081"/>
+          </a:xfrm>
+          <a:prstGeom prst="rect">
+            <a:avLst/>
+          </a:prstGeom>
+        </p:spPr>
+      </p:pic>
+      <p:sp>
+        <p:nvSpPr>
+          <p:cNvPr id="3" name="TextBox 2">
+            <a:extLst>
+              <a:ext uri="{FF2B5EF4-FFF2-40B4-BE49-F238E27FC236}">
+                <a16:creationId xmlns:a16="http://schemas.microsoft.com/office/drawing/2014/main" id="{6B28F258-CDB6-5601-476A-3EC12AA260FF}"/>
+              </a:ext>
+            </a:extLst>
+          </p:cNvPr>
+          <p:cNvSpPr txBox="1"/>
+          <p:nvPr/>
+        </p:nvSpPr>
+        <p:spPr>
+          <a:xfrm>
+            <a:off x="631915" y="1406434"/>
+            <a:ext cx="6097088" cy="4893647"/>
+          </a:xfrm>
+          <a:prstGeom prst="rect">
+            <a:avLst/>
+          </a:prstGeom>
+          <a:noFill/>
+        </p:spPr>
+        <p:txBody>
+          <a:bodyPr wrap="square">
+            <a:spAutoFit/>
+          </a:bodyPr>
+          <a:lstStyle/>
+          <a:p>
+            <a:r>
+              <a:rPr lang="en-US" b="1" dirty="0">
+                <a:latin typeface="Helvetica" pitchFamily="2" charset="0"/>
+              </a:rPr>
+              <a:t>Scratch Space </a:t>
+            </a:r>
+            <a:r>
+              <a:rPr lang="en-US" sz="1400" b="1" dirty="0">
+                <a:solidFill>
+                  <a:schemeClr val="accent2"/>
+                </a:solidFill>
+                <a:latin typeface="Menlo" panose="020B0609030804020204" pitchFamily="49" charset="0"/>
+                <a:ea typeface="Menlo" panose="020B0609030804020204" pitchFamily="49" charset="0"/>
+                <a:cs typeface="Menlo" panose="020B0609030804020204" pitchFamily="49" charset="0"/>
+              </a:rPr>
+              <a:t>/share/$GROUP/$USER</a:t>
+            </a:r>
+          </a:p>
+          <a:p>
+            <a:pPr marL="285750" indent="-285750">
+              <a:buFont typeface="Arial" panose="020B0604020202020204" pitchFamily="34" charset="0"/>
+              <a:buChar char="•"/>
+            </a:pPr>
+            <a:r>
+              <a:rPr lang="en-US" sz="1400" b="1" dirty="0">
+                <a:latin typeface="Helvetica" pitchFamily="2" charset="0"/>
+              </a:rPr>
+              <a:t>Size:</a:t>
+            </a:r>
+            <a:r>
+              <a:rPr lang="en-US" sz="1400" dirty="0">
+                <a:latin typeface="Helvetica" pitchFamily="2" charset="0"/>
+              </a:rPr>
+              <a:t> 20 TB per research group</a:t>
+            </a:r>
+          </a:p>
+          <a:p>
+            <a:pPr marL="285750" indent="-285750">
+              <a:buFont typeface="Arial" panose="020B0604020202020204" pitchFamily="34" charset="0"/>
+              <a:buChar char="•"/>
+            </a:pPr>
+            <a:r>
+              <a:rPr lang="en-US" sz="1400" b="1" dirty="0">
+                <a:latin typeface="Helvetica" pitchFamily="2" charset="0"/>
+              </a:rPr>
+              <a:t>Speed:</a:t>
+            </a:r>
+            <a:r>
+              <a:rPr lang="en-US" sz="1400" dirty="0">
+                <a:latin typeface="Helvetica" pitchFamily="2" charset="0"/>
+              </a:rPr>
+              <a:t> VERY FAST (optimized for parallel I/O)</a:t>
+            </a:r>
+          </a:p>
+          <a:p>
+            <a:pPr marL="285750" indent="-285750">
+              <a:buFont typeface="Arial" panose="020B0604020202020204" pitchFamily="34" charset="0"/>
+              <a:buChar char="•"/>
+            </a:pPr>
+            <a:r>
+              <a:rPr lang="en-US" sz="1400" b="1" dirty="0">
+                <a:latin typeface="Helvetica" pitchFamily="2" charset="0"/>
+              </a:rPr>
+              <a:t>Persistence:</a:t>
+            </a:r>
+            <a:r>
+              <a:rPr lang="en-US" sz="1400" dirty="0">
+                <a:latin typeface="Helvetica" pitchFamily="2" charset="0"/>
+              </a:rPr>
+              <a:t> 30-day automatic deletion</a:t>
+            </a:r>
+          </a:p>
+          <a:p>
+            <a:pPr marL="285750" indent="-285750">
+              <a:buFont typeface="Arial" panose="020B0604020202020204" pitchFamily="34" charset="0"/>
+              <a:buChar char="•"/>
+            </a:pPr>
+            <a:r>
+              <a:rPr lang="en-US" sz="1400" b="1" dirty="0">
+                <a:latin typeface="Helvetica" pitchFamily="2" charset="0"/>
+              </a:rPr>
+              <a:t>Backup:</a:t>
+            </a:r>
+            <a:r>
+              <a:rPr lang="en-US" sz="1400" dirty="0">
+                <a:latin typeface="Helvetica" pitchFamily="2" charset="0"/>
+              </a:rPr>
+              <a:t> No</a:t>
+            </a:r>
+          </a:p>
+          <a:p>
+            <a:endParaRPr lang="en-US" sz="1400" dirty="0">
+              <a:latin typeface="Helvetica" pitchFamily="2" charset="0"/>
+            </a:endParaRPr>
+          </a:p>
+          <a:p>
+            <a:r>
+              <a:rPr lang="en-US" sz="1400" b="1" dirty="0">
+                <a:latin typeface="Helvetica" pitchFamily="2" charset="0"/>
+              </a:rPr>
+              <a:t>What to store here:</a:t>
+            </a:r>
+            <a:endParaRPr lang="en-US" sz="1400" dirty="0">
+              <a:latin typeface="Helvetica" pitchFamily="2" charset="0"/>
+            </a:endParaRPr>
+          </a:p>
+          <a:p>
+            <a:pPr marL="285750" indent="-285750">
+              <a:buFont typeface="Arial" panose="020B0604020202020204" pitchFamily="34" charset="0"/>
+              <a:buChar char="•"/>
+            </a:pPr>
+            <a:r>
+              <a:rPr lang="en-US" sz="1400" dirty="0">
+                <a:latin typeface="Helvetica" pitchFamily="2" charset="0"/>
+              </a:rPr>
+              <a:t>Intermediate files during analysis (unsorted BAMs, temporary assembly files)</a:t>
+            </a:r>
+          </a:p>
+          <a:p>
+            <a:pPr marL="285750" indent="-285750">
+              <a:buFont typeface="Arial" panose="020B0604020202020204" pitchFamily="34" charset="0"/>
+              <a:buChar char="•"/>
+            </a:pPr>
+            <a:r>
+              <a:rPr lang="en-US" sz="1400" dirty="0">
+                <a:latin typeface="Helvetica" pitchFamily="2" charset="0"/>
+              </a:rPr>
+              <a:t>Job-specific temporary data</a:t>
+            </a:r>
+          </a:p>
+          <a:p>
+            <a:pPr marL="285750" indent="-285750">
+              <a:buFont typeface="Arial" panose="020B0604020202020204" pitchFamily="34" charset="0"/>
+              <a:buChar char="•"/>
+            </a:pPr>
+            <a:r>
+              <a:rPr lang="en-US" sz="1400" dirty="0">
+                <a:latin typeface="Helvetica" pitchFamily="2" charset="0"/>
+              </a:rPr>
+              <a:t>Conda package cache (.</a:t>
+            </a:r>
+            <a:r>
+              <a:rPr lang="en-US" sz="1400" dirty="0" err="1">
+                <a:latin typeface="Helvetica" pitchFamily="2" charset="0"/>
+              </a:rPr>
+              <a:t>conda</a:t>
+            </a:r>
+            <a:r>
+              <a:rPr lang="en-US" sz="1400" dirty="0">
+                <a:latin typeface="Helvetica" pitchFamily="2" charset="0"/>
+              </a:rPr>
+              <a:t>/pkgs)</a:t>
+            </a:r>
+          </a:p>
+          <a:p>
+            <a:pPr marL="285750" indent="-285750">
+              <a:buFont typeface="Arial" panose="020B0604020202020204" pitchFamily="34" charset="0"/>
+              <a:buChar char="•"/>
+            </a:pPr>
+            <a:r>
+              <a:rPr lang="en-US" sz="1400" dirty="0">
+                <a:latin typeface="Helvetica" pitchFamily="2" charset="0"/>
+              </a:rPr>
+              <a:t>Any large files that are only needed briefly</a:t>
+            </a:r>
+          </a:p>
+          <a:p>
+            <a:endParaRPr lang="en-US" sz="1400" dirty="0">
+              <a:latin typeface="Helvetica" pitchFamily="2" charset="0"/>
+            </a:endParaRPr>
+          </a:p>
+          <a:p>
+            <a:r>
+              <a:rPr lang="en-US" sz="1400" b="1" dirty="0">
+                <a:latin typeface="Helvetica" pitchFamily="2" charset="0"/>
+              </a:rPr>
+              <a:t>What NOT to store here:</a:t>
+            </a:r>
+            <a:endParaRPr lang="en-US" sz="1400" dirty="0">
+              <a:latin typeface="Helvetica" pitchFamily="2" charset="0"/>
+            </a:endParaRPr>
+          </a:p>
+          <a:p>
+            <a:pPr marL="285750" indent="-285750">
+              <a:buFont typeface="Arial" panose="020B0604020202020204" pitchFamily="34" charset="0"/>
+              <a:buChar char="•"/>
+            </a:pPr>
+            <a:r>
+              <a:rPr lang="en-US" sz="1400" dirty="0">
+                <a:latin typeface="Helvetica" pitchFamily="2" charset="0"/>
+              </a:rPr>
+              <a:t>Raw data (will be deleted after 30 days!)</a:t>
+            </a:r>
+          </a:p>
+          <a:p>
+            <a:pPr marL="285750" indent="-285750">
+              <a:buFont typeface="Arial" panose="020B0604020202020204" pitchFamily="34" charset="0"/>
+              <a:buChar char="•"/>
+            </a:pPr>
+            <a:r>
+              <a:rPr lang="en-US" sz="1400" dirty="0">
+                <a:latin typeface="Helvetica" pitchFamily="2" charset="0"/>
+              </a:rPr>
+              <a:t>Final results (will be deleted!)</a:t>
+            </a:r>
+          </a:p>
+          <a:p>
+            <a:pPr marL="285750" indent="-285750">
+              <a:buFont typeface="Arial" panose="020B0604020202020204" pitchFamily="34" charset="0"/>
+              <a:buChar char="•"/>
+            </a:pPr>
+            <a:r>
+              <a:rPr lang="en-US" sz="1400" dirty="0">
+                <a:latin typeface="Helvetica" pitchFamily="2" charset="0"/>
+              </a:rPr>
+              <a:t>Anything you want to keep</a:t>
+            </a:r>
+          </a:p>
+          <a:p>
+            <a:endParaRPr lang="en-US" sz="1400" dirty="0">
+              <a:latin typeface="Helvetica" pitchFamily="2" charset="0"/>
+            </a:endParaRPr>
+          </a:p>
+          <a:p>
+            <a:r>
+              <a:rPr lang="en-US" sz="1400" b="1" dirty="0">
+                <a:latin typeface="Helvetica" pitchFamily="2" charset="0"/>
+              </a:rPr>
+              <a:t>Why use scratch:</a:t>
+            </a:r>
+            <a:endParaRPr lang="en-US" sz="1400" dirty="0">
+              <a:latin typeface="Helvetica" pitchFamily="2" charset="0"/>
+            </a:endParaRPr>
+          </a:p>
+          <a:p>
+            <a:r>
+              <a:rPr lang="en-US" sz="1400" dirty="0">
+                <a:latin typeface="Helvetica" pitchFamily="2" charset="0"/>
+              </a:rPr>
+              <a:t>Fastest filesystem on Hazel</a:t>
+            </a:r>
+          </a:p>
+          <a:p>
+            <a:r>
+              <a:rPr lang="en-US" sz="1400" dirty="0">
+                <a:latin typeface="Helvetica" pitchFamily="2" charset="0"/>
+              </a:rPr>
+              <a:t>Perfect for large intermediate files that would slow down other filesystems</a:t>
+            </a:r>
+          </a:p>
+          <a:p>
+            <a:r>
+              <a:rPr lang="en-US" sz="1400" dirty="0">
+                <a:latin typeface="Helvetica" pitchFamily="2" charset="0"/>
+              </a:rPr>
+              <a:t>Your job runs faster when reading/writing many large files</a:t>
+            </a:r>
+          </a:p>
+        </p:txBody>
+      </p:sp>
+      <p:sp>
+        <p:nvSpPr>
+          <p:cNvPr id="4" name="Oval 3">
+            <a:extLst>
+              <a:ext uri="{FF2B5EF4-FFF2-40B4-BE49-F238E27FC236}">
+                <a16:creationId xmlns:a16="http://schemas.microsoft.com/office/drawing/2014/main" id="{30DEDC0A-E109-8341-1337-013EFD9C0ED9}"/>
+              </a:ext>
+            </a:extLst>
+          </p:cNvPr>
+          <p:cNvSpPr/>
+          <p:nvPr/>
+        </p:nvSpPr>
+        <p:spPr>
+          <a:xfrm>
+            <a:off x="10841082" y="3128554"/>
+            <a:ext cx="1025435" cy="894806"/>
+          </a:xfrm>
+          <a:prstGeom prst="ellipse">
+            <a:avLst/>
+          </a:prstGeom>
+          <a:noFill/>
+          <a:ln w="19050">
+            <a:solidFill>
+              <a:srgbClr val="D80003"/>
+            </a:solidFill>
+          </a:ln>
+        </p:spPr>
+        <p:style>
+          <a:lnRef idx="2">
+            <a:schemeClr val="accent1">
+              <a:shade val="15000"/>
+            </a:schemeClr>
+          </a:lnRef>
+          <a:fillRef idx="1">
+            <a:schemeClr val="accent1"/>
+          </a:fillRef>
+          <a:effectRef idx="0">
+            <a:schemeClr val="accent1"/>
+          </a:effectRef>
+          <a:fontRef idx="minor">
+            <a:schemeClr val="lt1"/>
+          </a:fontRef>
+        </p:style>
+        <p:txBody>
+          <a:bodyPr rtlCol="0" anchor="ctr"/>
+          <a:lstStyle/>
+          <a:p>
+            <a:pPr algn="ctr"/>
+            <a:endParaRPr lang="en-US"/>
+          </a:p>
+        </p:txBody>
+      </p:sp>
+      <p:sp>
+        <p:nvSpPr>
+          <p:cNvPr id="7" name="TextBox 6">
+            <a:extLst>
+              <a:ext uri="{FF2B5EF4-FFF2-40B4-BE49-F238E27FC236}">
+                <a16:creationId xmlns:a16="http://schemas.microsoft.com/office/drawing/2014/main" id="{FF61B977-1D15-08AE-2E21-16BAADB5E69C}"/>
+              </a:ext>
+            </a:extLst>
+          </p:cNvPr>
+          <p:cNvSpPr txBox="1"/>
+          <p:nvPr/>
+        </p:nvSpPr>
+        <p:spPr>
+          <a:xfrm>
+            <a:off x="6875962" y="5567290"/>
+            <a:ext cx="4888643" cy="738664"/>
+          </a:xfrm>
+          <a:prstGeom prst="rect">
+            <a:avLst/>
+          </a:prstGeom>
+          <a:noFill/>
+          <a:ln w="19050">
+            <a:solidFill>
+              <a:srgbClr val="D80003"/>
+            </a:solidFill>
+          </a:ln>
+        </p:spPr>
+        <p:txBody>
+          <a:bodyPr wrap="square">
+            <a:spAutoFit/>
+          </a:bodyPr>
+          <a:lstStyle/>
+          <a:p>
+            <a:r>
+              <a:rPr lang="en-US" sz="1400" b="1" dirty="0">
+                <a:latin typeface="Helvetica" pitchFamily="2" charset="0"/>
+              </a:rPr>
+              <a:t>⚠️ Critical feature:</a:t>
+            </a:r>
+            <a:r>
+              <a:rPr lang="en-US" sz="1400" dirty="0">
+                <a:latin typeface="Helvetica" pitchFamily="2" charset="0"/>
+              </a:rPr>
+              <a:t> Files untouched for 30 days are AUTOMATICALLY DELETED. The system does this cleanup without warning.</a:t>
+            </a:r>
+          </a:p>
+        </p:txBody>
+      </p:sp>
+    </p:spTree>
+    <p:extLst>
+      <p:ext uri="{BB962C8B-B14F-4D97-AF65-F5344CB8AC3E}">
+        <p14:creationId xmlns:p14="http://schemas.microsoft.com/office/powerpoint/2010/main" val="3963319067"/>
+      </p:ext>
+    </p:extLst>
+  </p:cSld>
+  <p:clrMapOvr>
+    <a:masterClrMapping/>
+  </p:clrMapOvr>
+</p:sld>
+</file>
+
+<file path=ppt/slides/slide15.xml><?xml version="1.0" encoding="utf-8"?>
+<p:sld xmlns:a="http://schemas.openxmlformats.org/drawingml/2006/main" xmlns:r="http://schemas.openxmlformats.org/officeDocument/2006/relationships" xmlns:p="http://schemas.openxmlformats.org/presentationml/2006/main">
+  <p:cSld>
+    <p:spTree>
+      <p:nvGrpSpPr>
+        <p:cNvPr id="1" name="">
+          <a:extLst>
+            <a:ext uri="{FF2B5EF4-FFF2-40B4-BE49-F238E27FC236}">
+              <a16:creationId xmlns:a16="http://schemas.microsoft.com/office/drawing/2014/main" id="{9223197D-2CAD-2A56-3265-311375BE7560}"/>
+            </a:ext>
+          </a:extLst>
+        </p:cNvPr>
+        <p:cNvGrpSpPr/>
+        <p:nvPr/>
+      </p:nvGrpSpPr>
+      <p:grpSpPr>
+        <a:xfrm>
+          <a:off x="0" y="0"/>
+          <a:ext cx="0" cy="0"/>
+          <a:chOff x="0" y="0"/>
+          <a:chExt cx="0" cy="0"/>
+        </a:xfrm>
+      </p:grpSpPr>
+      <p:sp>
+        <p:nvSpPr>
+          <p:cNvPr id="2" name="Title 1">
+            <a:extLst>
+              <a:ext uri="{FF2B5EF4-FFF2-40B4-BE49-F238E27FC236}">
+                <a16:creationId xmlns:a16="http://schemas.microsoft.com/office/drawing/2014/main" id="{48BC33E5-E879-6A3B-3922-C0266F7C219E}"/>
+              </a:ext>
+            </a:extLst>
+          </p:cNvPr>
+          <p:cNvSpPr>
+            <a:spLocks noGrp="1"/>
+          </p:cNvSpPr>
+          <p:nvPr>
+            <p:ph type="title"/>
+          </p:nvPr>
+        </p:nvSpPr>
+        <p:spPr/>
+        <p:txBody>
+          <a:bodyPr>
+            <a:normAutofit/>
+          </a:bodyPr>
+          <a:lstStyle/>
+          <a:p>
+            <a:r>
+              <a:rPr lang="en-US" sz="4000" dirty="0">
+                <a:latin typeface="Helvetica" pitchFamily="2" charset="0"/>
+              </a:rPr>
+              <a:t>Hazel HPC Storage</a:t>
+            </a:r>
+          </a:p>
+        </p:txBody>
+      </p:sp>
+      <p:pic>
+        <p:nvPicPr>
+          <p:cNvPr id="5" name="Picture 4">
+            <a:extLst>
+              <a:ext uri="{FF2B5EF4-FFF2-40B4-BE49-F238E27FC236}">
+                <a16:creationId xmlns:a16="http://schemas.microsoft.com/office/drawing/2014/main" id="{3CE6D684-8820-4B6B-1553-41FD88AEABD2}"/>
+              </a:ext>
+            </a:extLst>
+          </p:cNvPr>
+          <p:cNvPicPr>
+            <a:picLocks noChangeAspect="1"/>
+          </p:cNvPicPr>
+          <p:nvPr/>
+        </p:nvPicPr>
+        <p:blipFill>
+          <a:blip r:embed="rId3"/>
+          <a:stretch>
+            <a:fillRect/>
+          </a:stretch>
+        </p:blipFill>
+        <p:spPr>
+          <a:xfrm>
+            <a:off x="6729003" y="1743179"/>
+            <a:ext cx="5035602" cy="3463081"/>
+          </a:xfrm>
+          <a:prstGeom prst="rect">
+            <a:avLst/>
+          </a:prstGeom>
+        </p:spPr>
+      </p:pic>
+      <p:sp>
+        <p:nvSpPr>
+          <p:cNvPr id="3" name="TextBox 2">
+            <a:extLst>
+              <a:ext uri="{FF2B5EF4-FFF2-40B4-BE49-F238E27FC236}">
+                <a16:creationId xmlns:a16="http://schemas.microsoft.com/office/drawing/2014/main" id="{7A7F6715-B3E4-F537-F31D-4BC473A24CA9}"/>
+              </a:ext>
+            </a:extLst>
+          </p:cNvPr>
+          <p:cNvSpPr txBox="1"/>
+          <p:nvPr/>
+        </p:nvSpPr>
+        <p:spPr>
+          <a:xfrm>
+            <a:off x="631915" y="1412307"/>
+            <a:ext cx="6097088" cy="3600986"/>
+          </a:xfrm>
+          <a:prstGeom prst="rect">
+            <a:avLst/>
+          </a:prstGeom>
+          <a:noFill/>
+        </p:spPr>
+        <p:txBody>
+          <a:bodyPr wrap="square">
+            <a:spAutoFit/>
+          </a:bodyPr>
+          <a:lstStyle/>
+          <a:p>
+            <a:r>
+              <a:rPr lang="en-US" b="1" dirty="0">
+                <a:latin typeface="Helvetica" pitchFamily="2" charset="0"/>
+              </a:rPr>
+              <a:t>Applications Directory </a:t>
+            </a:r>
+            <a:r>
+              <a:rPr lang="en-US" sz="1400" b="1" dirty="0">
+                <a:solidFill>
+                  <a:schemeClr val="accent2"/>
+                </a:solidFill>
+                <a:latin typeface="Menlo" panose="020B0609030804020204" pitchFamily="49" charset="0"/>
+                <a:ea typeface="Menlo" panose="020B0609030804020204" pitchFamily="49" charset="0"/>
+                <a:cs typeface="Menlo" panose="020B0609030804020204" pitchFamily="49" charset="0"/>
+              </a:rPr>
+              <a:t>/</a:t>
+            </a:r>
+            <a:r>
+              <a:rPr lang="en-US" sz="1400" b="1" dirty="0" err="1">
+                <a:solidFill>
+                  <a:schemeClr val="accent2"/>
+                </a:solidFill>
+                <a:latin typeface="Menlo" panose="020B0609030804020204" pitchFamily="49" charset="0"/>
+                <a:ea typeface="Menlo" panose="020B0609030804020204" pitchFamily="49" charset="0"/>
+                <a:cs typeface="Menlo" panose="020B0609030804020204" pitchFamily="49" charset="0"/>
+              </a:rPr>
+              <a:t>usr</a:t>
+            </a:r>
+            <a:r>
+              <a:rPr lang="en-US" sz="1400" b="1" dirty="0">
+                <a:solidFill>
+                  <a:schemeClr val="accent2"/>
+                </a:solidFill>
+                <a:latin typeface="Menlo" panose="020B0609030804020204" pitchFamily="49" charset="0"/>
+                <a:ea typeface="Menlo" panose="020B0609030804020204" pitchFamily="49" charset="0"/>
+                <a:cs typeface="Menlo" panose="020B0609030804020204" pitchFamily="49" charset="0"/>
+              </a:rPr>
+              <a:t>/local/</a:t>
+            </a:r>
+            <a:r>
+              <a:rPr lang="en-US" sz="1400" b="1" dirty="0" err="1">
+                <a:solidFill>
+                  <a:schemeClr val="accent2"/>
+                </a:solidFill>
+                <a:latin typeface="Menlo" panose="020B0609030804020204" pitchFamily="49" charset="0"/>
+                <a:ea typeface="Menlo" panose="020B0609030804020204" pitchFamily="49" charset="0"/>
+                <a:cs typeface="Menlo" panose="020B0609030804020204" pitchFamily="49" charset="0"/>
+              </a:rPr>
+              <a:t>usrapps</a:t>
+            </a:r>
+            <a:r>
+              <a:rPr lang="en-US" sz="1400" b="1" dirty="0">
+                <a:solidFill>
+                  <a:schemeClr val="accent2"/>
+                </a:solidFill>
+                <a:latin typeface="Menlo" panose="020B0609030804020204" pitchFamily="49" charset="0"/>
+                <a:ea typeface="Menlo" panose="020B0609030804020204" pitchFamily="49" charset="0"/>
+                <a:cs typeface="Menlo" panose="020B0609030804020204" pitchFamily="49" charset="0"/>
+              </a:rPr>
+              <a:t>/$GROUP</a:t>
+            </a:r>
+            <a:endParaRPr lang="en-US" b="1" dirty="0">
+              <a:solidFill>
+                <a:schemeClr val="accent2"/>
+              </a:solidFill>
+              <a:latin typeface="Menlo" panose="020B0609030804020204" pitchFamily="49" charset="0"/>
+              <a:ea typeface="Menlo" panose="020B0609030804020204" pitchFamily="49" charset="0"/>
+              <a:cs typeface="Menlo" panose="020B0609030804020204" pitchFamily="49" charset="0"/>
+            </a:endParaRPr>
+          </a:p>
+          <a:p>
+            <a:pPr marL="285750" indent="-285750">
+              <a:buFont typeface="Arial" panose="020B0604020202020204" pitchFamily="34" charset="0"/>
+              <a:buChar char="•"/>
+            </a:pPr>
+            <a:r>
+              <a:rPr lang="en-US" sz="1400" b="1" dirty="0">
+                <a:latin typeface="Helvetica" pitchFamily="2" charset="0"/>
+              </a:rPr>
+              <a:t>Size:</a:t>
+            </a:r>
+            <a:r>
+              <a:rPr lang="en-US" sz="1400" dirty="0">
+                <a:latin typeface="Helvetica" pitchFamily="2" charset="0"/>
+              </a:rPr>
+              <a:t> 2 Tb</a:t>
+            </a:r>
+          </a:p>
+          <a:p>
+            <a:pPr marL="285750" indent="-285750">
+              <a:buFont typeface="Arial" panose="020B0604020202020204" pitchFamily="34" charset="0"/>
+              <a:buChar char="•"/>
+            </a:pPr>
+            <a:r>
+              <a:rPr lang="en-US" sz="1400" b="1" dirty="0">
+                <a:latin typeface="Helvetica" pitchFamily="2" charset="0"/>
+              </a:rPr>
+              <a:t>Speed:</a:t>
+            </a:r>
+            <a:r>
+              <a:rPr lang="en-US" sz="1400" dirty="0">
+                <a:latin typeface="Helvetica" pitchFamily="2" charset="0"/>
+              </a:rPr>
+              <a:t> Moderate</a:t>
+            </a:r>
+          </a:p>
+          <a:p>
+            <a:pPr marL="285750" indent="-285750">
+              <a:buFont typeface="Arial" panose="020B0604020202020204" pitchFamily="34" charset="0"/>
+              <a:buChar char="•"/>
+            </a:pPr>
+            <a:r>
+              <a:rPr lang="en-US" sz="1400" b="1" dirty="0">
+                <a:latin typeface="Helvetica" pitchFamily="2" charset="0"/>
+              </a:rPr>
+              <a:t>Persistence:</a:t>
+            </a:r>
+            <a:r>
+              <a:rPr lang="en-US" sz="1400" dirty="0">
+                <a:latin typeface="Helvetica" pitchFamily="2" charset="0"/>
+              </a:rPr>
+              <a:t> Permanent</a:t>
+            </a:r>
+          </a:p>
+          <a:p>
+            <a:pPr marL="285750" indent="-285750">
+              <a:buFont typeface="Arial" panose="020B0604020202020204" pitchFamily="34" charset="0"/>
+              <a:buChar char="•"/>
+            </a:pPr>
+            <a:r>
+              <a:rPr lang="en-US" sz="1400" b="1" dirty="0">
+                <a:latin typeface="Helvetica" pitchFamily="2" charset="0"/>
+              </a:rPr>
+              <a:t>Backup:</a:t>
+            </a:r>
+            <a:r>
+              <a:rPr lang="en-US" sz="1400" dirty="0">
+                <a:latin typeface="Helvetica" pitchFamily="2" charset="0"/>
+              </a:rPr>
+              <a:t> Limited</a:t>
+            </a:r>
+          </a:p>
+          <a:p>
+            <a:endParaRPr lang="en-US" sz="1400" dirty="0">
+              <a:latin typeface="Helvetica" pitchFamily="2" charset="0"/>
+            </a:endParaRPr>
+          </a:p>
+          <a:p>
+            <a:r>
+              <a:rPr lang="en-US" sz="1400" b="1" dirty="0">
+                <a:latin typeface="Helvetica" pitchFamily="2" charset="0"/>
+              </a:rPr>
+              <a:t>What to store here:</a:t>
+            </a:r>
+            <a:endParaRPr lang="en-US" sz="1400" dirty="0">
+              <a:latin typeface="Helvetica" pitchFamily="2" charset="0"/>
+            </a:endParaRPr>
+          </a:p>
+          <a:p>
+            <a:pPr marL="285750" indent="-285750">
+              <a:buFont typeface="Arial" panose="020B0604020202020204" pitchFamily="34" charset="0"/>
+              <a:buChar char="•"/>
+            </a:pPr>
+            <a:r>
+              <a:rPr lang="en-US" sz="1400" dirty="0">
+                <a:latin typeface="Helvetica" pitchFamily="2" charset="0"/>
+              </a:rPr>
+              <a:t>Conda environments</a:t>
+            </a:r>
+          </a:p>
+          <a:p>
+            <a:pPr marL="285750" indent="-285750">
+              <a:buFont typeface="Arial" panose="020B0604020202020204" pitchFamily="34" charset="0"/>
+              <a:buChar char="•"/>
+            </a:pPr>
+            <a:r>
+              <a:rPr lang="en-US" sz="1400" dirty="0">
+                <a:latin typeface="Helvetica" pitchFamily="2" charset="0"/>
+              </a:rPr>
+              <a:t>Singularity/</a:t>
+            </a:r>
+            <a:r>
+              <a:rPr lang="en-US" sz="1400" dirty="0" err="1">
+                <a:latin typeface="Helvetica" pitchFamily="2" charset="0"/>
+              </a:rPr>
+              <a:t>Apptainer</a:t>
+            </a:r>
+            <a:r>
+              <a:rPr lang="en-US" sz="1400" dirty="0">
+                <a:latin typeface="Helvetica" pitchFamily="2" charset="0"/>
+              </a:rPr>
+              <a:t> containers</a:t>
+            </a:r>
+          </a:p>
+          <a:p>
+            <a:pPr marL="285750" indent="-285750">
+              <a:buFont typeface="Arial" panose="020B0604020202020204" pitchFamily="34" charset="0"/>
+              <a:buChar char="•"/>
+            </a:pPr>
+            <a:r>
+              <a:rPr lang="en-US" sz="1400" dirty="0">
+                <a:latin typeface="Helvetica" pitchFamily="2" charset="0"/>
+              </a:rPr>
+              <a:t>Compiled software and binaries</a:t>
+            </a:r>
+          </a:p>
+          <a:p>
+            <a:pPr marL="285750" indent="-285750">
+              <a:buFont typeface="Arial" panose="020B0604020202020204" pitchFamily="34" charset="0"/>
+              <a:buChar char="•"/>
+            </a:pPr>
+            <a:r>
+              <a:rPr lang="en-US" sz="1400" dirty="0">
+                <a:latin typeface="Helvetica" pitchFamily="2" charset="0"/>
+              </a:rPr>
+              <a:t>Shared tools used by your research group</a:t>
+            </a:r>
+          </a:p>
+          <a:p>
+            <a:endParaRPr lang="en-US" sz="1400" dirty="0">
+              <a:latin typeface="Helvetica" pitchFamily="2" charset="0"/>
+            </a:endParaRPr>
+          </a:p>
+          <a:p>
+            <a:r>
+              <a:rPr lang="en-US" sz="1400" b="1" dirty="0">
+                <a:latin typeface="Helvetica" pitchFamily="2" charset="0"/>
+              </a:rPr>
+              <a:t>What NOT to store here:</a:t>
+            </a:r>
+            <a:endParaRPr lang="en-US" sz="1400" dirty="0">
+              <a:latin typeface="Helvetica" pitchFamily="2" charset="0"/>
+            </a:endParaRPr>
+          </a:p>
+          <a:p>
+            <a:pPr marL="285750" indent="-285750">
+              <a:buFont typeface="Arial" panose="020B0604020202020204" pitchFamily="34" charset="0"/>
+              <a:buChar char="•"/>
+            </a:pPr>
+            <a:r>
+              <a:rPr lang="en-US" sz="1400" dirty="0">
+                <a:latin typeface="Helvetica" pitchFamily="2" charset="0"/>
+              </a:rPr>
+              <a:t>Data files</a:t>
+            </a:r>
+          </a:p>
+          <a:p>
+            <a:pPr marL="285750" indent="-285750">
+              <a:buFont typeface="Arial" panose="020B0604020202020204" pitchFamily="34" charset="0"/>
+              <a:buChar char="•"/>
+            </a:pPr>
+            <a:r>
+              <a:rPr lang="en-US" sz="1400" dirty="0">
+                <a:latin typeface="Helvetica" pitchFamily="2" charset="0"/>
+              </a:rPr>
+              <a:t>Analysis scripts (use RS1 instead)</a:t>
+            </a:r>
+          </a:p>
+          <a:p>
+            <a:pPr marL="285750" indent="-285750">
+              <a:buFont typeface="Arial" panose="020B0604020202020204" pitchFamily="34" charset="0"/>
+              <a:buChar char="•"/>
+            </a:pPr>
+            <a:r>
+              <a:rPr lang="en-US" sz="1400" dirty="0">
+                <a:latin typeface="Helvetica" pitchFamily="2" charset="0"/>
+              </a:rPr>
+              <a:t>Job outputs</a:t>
+            </a:r>
+          </a:p>
+        </p:txBody>
+      </p:sp>
+      <p:sp>
+        <p:nvSpPr>
+          <p:cNvPr id="4" name="Oval 3">
+            <a:extLst>
+              <a:ext uri="{FF2B5EF4-FFF2-40B4-BE49-F238E27FC236}">
+                <a16:creationId xmlns:a16="http://schemas.microsoft.com/office/drawing/2014/main" id="{3DF1FA85-D55C-3D05-F0A8-5DF2F36B5461}"/>
+              </a:ext>
+            </a:extLst>
+          </p:cNvPr>
+          <p:cNvSpPr/>
+          <p:nvPr/>
+        </p:nvSpPr>
+        <p:spPr>
+          <a:xfrm>
+            <a:off x="8825527" y="3148148"/>
+            <a:ext cx="821394" cy="757646"/>
+          </a:xfrm>
+          <a:prstGeom prst="ellipse">
+            <a:avLst/>
+          </a:prstGeom>
+          <a:noFill/>
+          <a:ln w="19050">
+            <a:solidFill>
+              <a:srgbClr val="D80003"/>
+            </a:solidFill>
+          </a:ln>
+        </p:spPr>
+        <p:style>
+          <a:lnRef idx="2">
+            <a:schemeClr val="accent1">
+              <a:shade val="15000"/>
+            </a:schemeClr>
+          </a:lnRef>
+          <a:fillRef idx="1">
+            <a:schemeClr val="accent1"/>
+          </a:fillRef>
+          <a:effectRef idx="0">
+            <a:schemeClr val="accent1"/>
+          </a:effectRef>
+          <a:fontRef idx="minor">
+            <a:schemeClr val="lt1"/>
+          </a:fontRef>
+        </p:style>
+        <p:txBody>
+          <a:bodyPr rtlCol="0" anchor="ctr"/>
+          <a:lstStyle/>
+          <a:p>
+            <a:pPr algn="ctr"/>
+            <a:endParaRPr lang="en-US"/>
+          </a:p>
+        </p:txBody>
+      </p:sp>
+      <p:sp>
+        <p:nvSpPr>
+          <p:cNvPr id="7" name="TextBox 6">
+            <a:extLst>
+              <a:ext uri="{FF2B5EF4-FFF2-40B4-BE49-F238E27FC236}">
+                <a16:creationId xmlns:a16="http://schemas.microsoft.com/office/drawing/2014/main" id="{F6CF562E-788E-E30F-481C-CA33D79AC647}"/>
+              </a:ext>
+            </a:extLst>
+          </p:cNvPr>
+          <p:cNvSpPr txBox="1"/>
+          <p:nvPr/>
+        </p:nvSpPr>
+        <p:spPr>
+          <a:xfrm>
+            <a:off x="6875962" y="5567290"/>
+            <a:ext cx="4888643" cy="738664"/>
+          </a:xfrm>
+          <a:prstGeom prst="rect">
+            <a:avLst/>
+          </a:prstGeom>
+          <a:noFill/>
+          <a:ln w="19050">
+            <a:solidFill>
+              <a:srgbClr val="D80003"/>
+            </a:solidFill>
+          </a:ln>
+        </p:spPr>
+        <p:txBody>
+          <a:bodyPr wrap="square">
+            <a:spAutoFit/>
+          </a:bodyPr>
+          <a:lstStyle/>
+          <a:p>
+            <a:r>
+              <a:rPr lang="en-US" sz="1400" b="1" dirty="0">
+                <a:latin typeface="Helvetica" pitchFamily="2" charset="0"/>
+              </a:rPr>
+              <a:t>⚠️ Critical limitation:</a:t>
+            </a:r>
+            <a:r>
+              <a:rPr lang="en-US" sz="1400" dirty="0">
+                <a:latin typeface="Helvetica" pitchFamily="2" charset="0"/>
+              </a:rPr>
+              <a:t> You can only WRITE to this directory from the LOGIN NODE. Compute nodes can READ from it but cannot write.</a:t>
+            </a:r>
+          </a:p>
+        </p:txBody>
+      </p:sp>
+    </p:spTree>
+    <p:extLst>
+      <p:ext uri="{BB962C8B-B14F-4D97-AF65-F5344CB8AC3E}">
+        <p14:creationId xmlns:p14="http://schemas.microsoft.com/office/powerpoint/2010/main" val="3001670728"/>
+      </p:ext>
+    </p:extLst>
+  </p:cSld>
+  <p:clrMapOvr>
+    <a:masterClrMapping/>
+  </p:clrMapOvr>
+</p:sld>
+</file>
+
+<file path=ppt/slides/slide16.xml><?xml version="1.0" encoding="utf-8"?>
+<p:sld xmlns:a="http://schemas.openxmlformats.org/drawingml/2006/main" xmlns:r="http://schemas.openxmlformats.org/officeDocument/2006/relationships" xmlns:p="http://schemas.openxmlformats.org/presentationml/2006/main">
+  <p:cSld>
+    <p:spTree>
+      <p:nvGrpSpPr>
+        <p:cNvPr id="1" name="">
+          <a:extLst>
+            <a:ext uri="{FF2B5EF4-FFF2-40B4-BE49-F238E27FC236}">
+              <a16:creationId xmlns:a16="http://schemas.microsoft.com/office/drawing/2014/main" id="{2CAEFD12-0680-68D6-9899-C0CD8C498F97}"/>
+            </a:ext>
+          </a:extLst>
+        </p:cNvPr>
+        <p:cNvGrpSpPr/>
+        <p:nvPr/>
+      </p:nvGrpSpPr>
+      <p:grpSpPr>
+        <a:xfrm>
+          <a:off x="0" y="0"/>
+          <a:ext cx="0" cy="0"/>
+          <a:chOff x="0" y="0"/>
+          <a:chExt cx="0" cy="0"/>
+        </a:xfrm>
+      </p:grpSpPr>
+      <p:sp>
+        <p:nvSpPr>
+          <p:cNvPr id="2" name="Title 1">
+            <a:extLst>
+              <a:ext uri="{FF2B5EF4-FFF2-40B4-BE49-F238E27FC236}">
+                <a16:creationId xmlns:a16="http://schemas.microsoft.com/office/drawing/2014/main" id="{B61C94DE-0880-90E9-D1C9-729C57CDF643}"/>
+              </a:ext>
+            </a:extLst>
+          </p:cNvPr>
+          <p:cNvSpPr>
+            <a:spLocks noGrp="1"/>
+          </p:cNvSpPr>
+          <p:nvPr>
+            <p:ph type="title"/>
+          </p:nvPr>
+        </p:nvSpPr>
+        <p:spPr/>
+        <p:txBody>
+          <a:bodyPr>
+            <a:normAutofit/>
+          </a:bodyPr>
+          <a:lstStyle/>
+          <a:p>
+            <a:r>
+              <a:rPr lang="en-US" sz="4000" dirty="0">
+                <a:latin typeface="Helvetica" pitchFamily="2" charset="0"/>
+              </a:rPr>
+              <a:t>Hazel HPC Storage</a:t>
+            </a:r>
+          </a:p>
+        </p:txBody>
+      </p:sp>
+      <p:pic>
+        <p:nvPicPr>
+          <p:cNvPr id="5" name="Picture 4">
+            <a:extLst>
+              <a:ext uri="{FF2B5EF4-FFF2-40B4-BE49-F238E27FC236}">
+                <a16:creationId xmlns:a16="http://schemas.microsoft.com/office/drawing/2014/main" id="{02A96519-5FE8-BC85-5327-B066BB0F5B48}"/>
+              </a:ext>
+            </a:extLst>
+          </p:cNvPr>
+          <p:cNvPicPr>
+            <a:picLocks noChangeAspect="1"/>
+          </p:cNvPicPr>
+          <p:nvPr/>
+        </p:nvPicPr>
+        <p:blipFill>
+          <a:blip r:embed="rId3"/>
+          <a:stretch>
+            <a:fillRect/>
+          </a:stretch>
+        </p:blipFill>
+        <p:spPr>
+          <a:xfrm>
+            <a:off x="6729003" y="1743179"/>
+            <a:ext cx="5035602" cy="3463081"/>
+          </a:xfrm>
+          <a:prstGeom prst="rect">
+            <a:avLst/>
+          </a:prstGeom>
+        </p:spPr>
+      </p:pic>
+      <p:sp>
+        <p:nvSpPr>
+          <p:cNvPr id="3" name="TextBox 2">
+            <a:extLst>
+              <a:ext uri="{FF2B5EF4-FFF2-40B4-BE49-F238E27FC236}">
+                <a16:creationId xmlns:a16="http://schemas.microsoft.com/office/drawing/2014/main" id="{067A7D1C-761A-EEEC-FE27-4634C3E019D9}"/>
+              </a:ext>
+            </a:extLst>
+          </p:cNvPr>
+          <p:cNvSpPr txBox="1"/>
+          <p:nvPr/>
+        </p:nvSpPr>
+        <p:spPr>
+          <a:xfrm>
+            <a:off x="690698" y="1366140"/>
+            <a:ext cx="6017145" cy="5324535"/>
+          </a:xfrm>
+          <a:prstGeom prst="rect">
+            <a:avLst/>
+          </a:prstGeom>
+          <a:noFill/>
+        </p:spPr>
+        <p:txBody>
+          <a:bodyPr wrap="square">
+            <a:spAutoFit/>
+          </a:bodyPr>
+          <a:lstStyle/>
+          <a:p>
+            <a:r>
+              <a:rPr lang="en-US" b="1" dirty="0">
+                <a:latin typeface="Helvetica" pitchFamily="2" charset="0"/>
+              </a:rPr>
+              <a:t>Research Storage (RS1) </a:t>
+            </a:r>
+            <a:r>
+              <a:rPr lang="en-US" sz="1400" b="1" dirty="0">
+                <a:solidFill>
+                  <a:schemeClr val="accent2"/>
+                </a:solidFill>
+                <a:latin typeface="Menlo" panose="020B0609030804020204" pitchFamily="49" charset="0"/>
+                <a:ea typeface="Menlo" panose="020B0609030804020204" pitchFamily="49" charset="0"/>
+                <a:cs typeface="Menlo" panose="020B0609030804020204" pitchFamily="49" charset="0"/>
+              </a:rPr>
+              <a:t>/rs1/researchers/[letter]/[name] or /</a:t>
+            </a:r>
+            <a:r>
+              <a:rPr lang="en-US" sz="1400" b="1" dirty="0" err="1">
+                <a:solidFill>
+                  <a:schemeClr val="accent2"/>
+                </a:solidFill>
+                <a:latin typeface="Menlo" panose="020B0609030804020204" pitchFamily="49" charset="0"/>
+                <a:ea typeface="Menlo" panose="020B0609030804020204" pitchFamily="49" charset="0"/>
+                <a:cs typeface="Menlo" panose="020B0609030804020204" pitchFamily="49" charset="0"/>
+              </a:rPr>
+              <a:t>rsstu</a:t>
+            </a:r>
+            <a:r>
+              <a:rPr lang="en-US" sz="1400" b="1" dirty="0">
+                <a:solidFill>
+                  <a:schemeClr val="accent2"/>
+                </a:solidFill>
+                <a:latin typeface="Menlo" panose="020B0609030804020204" pitchFamily="49" charset="0"/>
+                <a:ea typeface="Menlo" panose="020B0609030804020204" pitchFamily="49" charset="0"/>
+                <a:cs typeface="Menlo" panose="020B0609030804020204" pitchFamily="49" charset="0"/>
+              </a:rPr>
+              <a:t>/users/[letter]/[</a:t>
+            </a:r>
+            <a:r>
+              <a:rPr lang="en-US" sz="1400" b="1" dirty="0" err="1">
+                <a:solidFill>
+                  <a:schemeClr val="accent2"/>
+                </a:solidFill>
+                <a:latin typeface="Menlo" panose="020B0609030804020204" pitchFamily="49" charset="0"/>
+                <a:ea typeface="Menlo" panose="020B0609030804020204" pitchFamily="49" charset="0"/>
+                <a:cs typeface="Menlo" panose="020B0609030804020204" pitchFamily="49" charset="0"/>
+              </a:rPr>
+              <a:t>projectname</a:t>
+            </a:r>
+            <a:r>
+              <a:rPr lang="en-US" sz="1400" b="1" dirty="0">
+                <a:solidFill>
+                  <a:schemeClr val="accent2"/>
+                </a:solidFill>
+                <a:latin typeface="Menlo" panose="020B0609030804020204" pitchFamily="49" charset="0"/>
+                <a:ea typeface="Menlo" panose="020B0609030804020204" pitchFamily="49" charset="0"/>
+                <a:cs typeface="Menlo" panose="020B0609030804020204" pitchFamily="49" charset="0"/>
+              </a:rPr>
+              <a:t>]</a:t>
+            </a:r>
+          </a:p>
+          <a:p>
+            <a:pPr marL="285750" indent="-285750">
+              <a:buFont typeface="Arial" panose="020B0604020202020204" pitchFamily="34" charset="0"/>
+              <a:buChar char="•"/>
+            </a:pPr>
+            <a:r>
+              <a:rPr lang="en-US" sz="1400" b="1" dirty="0">
+                <a:latin typeface="Helvetica" pitchFamily="2" charset="0"/>
+              </a:rPr>
+              <a:t>Size:</a:t>
+            </a:r>
+            <a:r>
+              <a:rPr lang="en-US" sz="1400" dirty="0">
+                <a:latin typeface="Helvetica" pitchFamily="2" charset="0"/>
+              </a:rPr>
+              <a:t> 30 TB per PI/project</a:t>
+            </a:r>
+          </a:p>
+          <a:p>
+            <a:pPr marL="285750" indent="-285750">
+              <a:buFont typeface="Arial" panose="020B0604020202020204" pitchFamily="34" charset="0"/>
+              <a:buChar char="•"/>
+            </a:pPr>
+            <a:r>
+              <a:rPr lang="en-US" sz="1400" b="1" dirty="0">
+                <a:latin typeface="Helvetica" pitchFamily="2" charset="0"/>
+              </a:rPr>
+              <a:t>Speed:</a:t>
+            </a:r>
+            <a:r>
+              <a:rPr lang="en-US" sz="1400" dirty="0">
+                <a:latin typeface="Helvetica" pitchFamily="2" charset="0"/>
+              </a:rPr>
+              <a:t> Moderate (slower than scratch for many small files)</a:t>
+            </a:r>
+          </a:p>
+          <a:p>
+            <a:pPr marL="285750" indent="-285750">
+              <a:buFont typeface="Arial" panose="020B0604020202020204" pitchFamily="34" charset="0"/>
+              <a:buChar char="•"/>
+            </a:pPr>
+            <a:r>
+              <a:rPr lang="en-US" sz="1400" b="1" dirty="0">
+                <a:latin typeface="Helvetica" pitchFamily="2" charset="0"/>
+              </a:rPr>
+              <a:t>Persistence:</a:t>
+            </a:r>
+            <a:r>
+              <a:rPr lang="en-US" sz="1400" dirty="0">
+                <a:latin typeface="Helvetica" pitchFamily="2" charset="0"/>
+              </a:rPr>
+              <a:t> Permanent</a:t>
+            </a:r>
+          </a:p>
+          <a:p>
+            <a:pPr marL="285750" indent="-285750">
+              <a:buFont typeface="Arial" panose="020B0604020202020204" pitchFamily="34" charset="0"/>
+              <a:buChar char="•"/>
+            </a:pPr>
+            <a:r>
+              <a:rPr lang="en-US" sz="1400" b="1" dirty="0">
+                <a:latin typeface="Helvetica" pitchFamily="2" charset="0"/>
+              </a:rPr>
+              <a:t>Backup:</a:t>
+            </a:r>
+            <a:r>
+              <a:rPr lang="en-US" sz="1400" dirty="0">
+                <a:latin typeface="Helvetica" pitchFamily="2" charset="0"/>
+              </a:rPr>
+              <a:t> Yes</a:t>
+            </a:r>
+          </a:p>
+          <a:p>
+            <a:pPr marL="285750" indent="-285750">
+              <a:buFont typeface="Arial" panose="020B0604020202020204" pitchFamily="34" charset="0"/>
+              <a:buChar char="•"/>
+            </a:pPr>
+            <a:endParaRPr lang="en-US" sz="1400" dirty="0">
+              <a:latin typeface="Helvetica" pitchFamily="2" charset="0"/>
+            </a:endParaRPr>
+          </a:p>
+          <a:p>
+            <a:r>
+              <a:rPr lang="en-US" sz="1400" b="1" dirty="0">
+                <a:latin typeface="Helvetica" pitchFamily="2" charset="0"/>
+              </a:rPr>
+              <a:t>What to store here:</a:t>
+            </a:r>
+            <a:endParaRPr lang="en-US" sz="1400" dirty="0">
+              <a:latin typeface="Helvetica" pitchFamily="2" charset="0"/>
+            </a:endParaRPr>
+          </a:p>
+          <a:p>
+            <a:pPr marL="285750" indent="-285750">
+              <a:buFont typeface="Arial" panose="020B0604020202020204" pitchFamily="34" charset="0"/>
+              <a:buChar char="•"/>
+            </a:pPr>
+            <a:r>
+              <a:rPr lang="en-US" sz="1400" dirty="0">
+                <a:latin typeface="Helvetica" pitchFamily="2" charset="0"/>
+              </a:rPr>
+              <a:t>Raw sequencing data (FASTQ files)</a:t>
+            </a:r>
+          </a:p>
+          <a:p>
+            <a:pPr marL="285750" indent="-285750">
+              <a:buFont typeface="Arial" panose="020B0604020202020204" pitchFamily="34" charset="0"/>
+              <a:buChar char="•"/>
+            </a:pPr>
+            <a:r>
+              <a:rPr lang="en-US" sz="1400" dirty="0">
+                <a:latin typeface="Helvetica" pitchFamily="2" charset="0"/>
+              </a:rPr>
+              <a:t>Final analysis results (BAM, VCF, count matrices)</a:t>
+            </a:r>
+          </a:p>
+          <a:p>
+            <a:pPr marL="285750" indent="-285750">
+              <a:buFont typeface="Arial" panose="020B0604020202020204" pitchFamily="34" charset="0"/>
+              <a:buChar char="•"/>
+            </a:pPr>
+            <a:r>
+              <a:rPr lang="en-US" sz="1400" dirty="0">
+                <a:latin typeface="Helvetica" pitchFamily="2" charset="0"/>
+              </a:rPr>
+              <a:t>Analysis scripts and pipelines</a:t>
+            </a:r>
+          </a:p>
+          <a:p>
+            <a:pPr marL="285750" indent="-285750">
+              <a:buFont typeface="Arial" panose="020B0604020202020204" pitchFamily="34" charset="0"/>
+              <a:buChar char="•"/>
+            </a:pPr>
+            <a:r>
+              <a:rPr lang="en-US" sz="1400" dirty="0">
+                <a:latin typeface="Helvetica" pitchFamily="2" charset="0"/>
+              </a:rPr>
+              <a:t>GitHub repositories</a:t>
+            </a:r>
+          </a:p>
+          <a:p>
+            <a:pPr marL="285750" indent="-285750">
+              <a:buFont typeface="Arial" panose="020B0604020202020204" pitchFamily="34" charset="0"/>
+              <a:buChar char="•"/>
+            </a:pPr>
+            <a:r>
+              <a:rPr lang="en-US" sz="1400" dirty="0">
+                <a:latin typeface="Helvetica" pitchFamily="2" charset="0"/>
+              </a:rPr>
+              <a:t>Anything you need to keep long-term</a:t>
+            </a:r>
+          </a:p>
+          <a:p>
+            <a:endParaRPr lang="en-US" sz="1400" dirty="0">
+              <a:latin typeface="Helvetica" pitchFamily="2" charset="0"/>
+            </a:endParaRPr>
+          </a:p>
+          <a:p>
+            <a:r>
+              <a:rPr lang="en-US" sz="1400" b="1" dirty="0">
+                <a:latin typeface="Helvetica" pitchFamily="2" charset="0"/>
+              </a:rPr>
+              <a:t>What NOT to store here:</a:t>
+            </a:r>
+            <a:endParaRPr lang="en-US" sz="1400" dirty="0">
+              <a:latin typeface="Helvetica" pitchFamily="2" charset="0"/>
+            </a:endParaRPr>
+          </a:p>
+          <a:p>
+            <a:pPr marL="285750" indent="-285750">
+              <a:buFont typeface="Arial" panose="020B0604020202020204" pitchFamily="34" charset="0"/>
+              <a:buChar char="•"/>
+            </a:pPr>
+            <a:r>
+              <a:rPr lang="en-US" sz="1400" dirty="0">
+                <a:latin typeface="Helvetica" pitchFamily="2" charset="0"/>
+              </a:rPr>
+              <a:t>Large intermediate files (use scratch)</a:t>
+            </a:r>
+          </a:p>
+          <a:p>
+            <a:pPr marL="285750" indent="-285750">
+              <a:buFont typeface="Arial" panose="020B0604020202020204" pitchFamily="34" charset="0"/>
+              <a:buChar char="•"/>
+            </a:pPr>
+            <a:r>
+              <a:rPr lang="en-US" sz="1400" dirty="0">
+                <a:latin typeface="Helvetica" pitchFamily="2" charset="0"/>
+              </a:rPr>
+              <a:t>Temporary files</a:t>
+            </a:r>
+          </a:p>
+          <a:p>
+            <a:pPr marL="285750" indent="-285750">
+              <a:buFont typeface="Arial" panose="020B0604020202020204" pitchFamily="34" charset="0"/>
+              <a:buChar char="•"/>
+            </a:pPr>
+            <a:r>
+              <a:rPr lang="en-US" sz="1400" dirty="0">
+                <a:latin typeface="Helvetica" pitchFamily="2" charset="0"/>
+              </a:rPr>
+              <a:t>Software installations (use </a:t>
+            </a:r>
+            <a:r>
+              <a:rPr lang="en-US" sz="1400" dirty="0" err="1">
+                <a:latin typeface="Helvetica" pitchFamily="2" charset="0"/>
+              </a:rPr>
+              <a:t>usrapps</a:t>
+            </a:r>
+            <a:r>
+              <a:rPr lang="en-US" sz="1400" dirty="0">
+                <a:latin typeface="Helvetica" pitchFamily="2" charset="0"/>
+              </a:rPr>
+              <a:t>)</a:t>
+            </a:r>
+          </a:p>
+          <a:p>
+            <a:endParaRPr lang="en-US" sz="1400" dirty="0">
+              <a:latin typeface="Helvetica" pitchFamily="2" charset="0"/>
+            </a:endParaRPr>
+          </a:p>
+          <a:p>
+            <a:r>
+              <a:rPr lang="en-US" sz="1400" b="1" dirty="0">
+                <a:latin typeface="Helvetica" pitchFamily="2" charset="0"/>
+              </a:rPr>
+              <a:t>Performance note:</a:t>
+            </a:r>
+            <a:r>
+              <a:rPr lang="en-US" sz="1400" dirty="0">
+                <a:latin typeface="Helvetica" pitchFamily="2" charset="0"/>
+              </a:rPr>
+              <a:t> RS1 is slower than scratch when working with many small files in parallel. For analyses that create thousands of temporary files, work in scratch first, then move final results to RS1.</a:t>
+            </a:r>
+          </a:p>
+          <a:p>
+            <a:endParaRPr lang="en-US" sz="1400" dirty="0">
+              <a:latin typeface="Helvetica" pitchFamily="2" charset="0"/>
+            </a:endParaRPr>
+          </a:p>
+        </p:txBody>
+      </p:sp>
+      <p:sp>
+        <p:nvSpPr>
+          <p:cNvPr id="4" name="Oval 3">
+            <a:extLst>
+              <a:ext uri="{FF2B5EF4-FFF2-40B4-BE49-F238E27FC236}">
+                <a16:creationId xmlns:a16="http://schemas.microsoft.com/office/drawing/2014/main" id="{048BB2B0-7976-D12C-187C-D8355F7CFD48}"/>
+              </a:ext>
+            </a:extLst>
+          </p:cNvPr>
+          <p:cNvSpPr/>
+          <p:nvPr/>
+        </p:nvSpPr>
+        <p:spPr>
+          <a:xfrm>
+            <a:off x="10353881" y="3579222"/>
+            <a:ext cx="821394" cy="757646"/>
+          </a:xfrm>
+          <a:prstGeom prst="ellipse">
+            <a:avLst/>
+          </a:prstGeom>
+          <a:noFill/>
+          <a:ln w="19050">
+            <a:solidFill>
+              <a:srgbClr val="D80003"/>
+            </a:solidFill>
+          </a:ln>
+        </p:spPr>
+        <p:style>
+          <a:lnRef idx="2">
+            <a:schemeClr val="accent1">
+              <a:shade val="15000"/>
+            </a:schemeClr>
+          </a:lnRef>
+          <a:fillRef idx="1">
+            <a:schemeClr val="accent1"/>
+          </a:fillRef>
+          <a:effectRef idx="0">
+            <a:schemeClr val="accent1"/>
+          </a:effectRef>
+          <a:fontRef idx="minor">
+            <a:schemeClr val="lt1"/>
+          </a:fontRef>
+        </p:style>
+        <p:txBody>
+          <a:bodyPr rtlCol="0" anchor="ctr"/>
+          <a:lstStyle/>
+          <a:p>
+            <a:pPr algn="ctr"/>
+            <a:endParaRPr lang="en-US"/>
+          </a:p>
+        </p:txBody>
+      </p:sp>
+      <p:sp>
+        <p:nvSpPr>
+          <p:cNvPr id="7" name="TextBox 6">
+            <a:extLst>
+              <a:ext uri="{FF2B5EF4-FFF2-40B4-BE49-F238E27FC236}">
+                <a16:creationId xmlns:a16="http://schemas.microsoft.com/office/drawing/2014/main" id="{414B0AB0-775E-5CEC-C44C-FE8B30BD4017}"/>
+              </a:ext>
+            </a:extLst>
+          </p:cNvPr>
+          <p:cNvSpPr txBox="1"/>
+          <p:nvPr/>
+        </p:nvSpPr>
+        <p:spPr>
+          <a:xfrm>
+            <a:off x="6879771" y="5445916"/>
+            <a:ext cx="4792849" cy="1107996"/>
+          </a:xfrm>
+          <a:prstGeom prst="rect">
+            <a:avLst/>
+          </a:prstGeom>
+          <a:noFill/>
+          <a:ln w="19050">
+            <a:solidFill>
+              <a:srgbClr val="D80003"/>
+            </a:solidFill>
+          </a:ln>
+        </p:spPr>
+        <p:txBody>
+          <a:bodyPr wrap="square">
+            <a:spAutoFit/>
+          </a:bodyPr>
+          <a:lstStyle/>
+          <a:p>
+            <a:r>
+              <a:rPr lang="en-US" sz="1100" b="1" dirty="0">
+                <a:latin typeface="Helvetica" pitchFamily="2" charset="0"/>
+              </a:rPr>
+              <a:t>Allocation details:</a:t>
+            </a:r>
+            <a:endParaRPr lang="en-US" sz="1100" dirty="0">
+              <a:latin typeface="Helvetica" pitchFamily="2" charset="0"/>
+            </a:endParaRPr>
+          </a:p>
+          <a:p>
+            <a:r>
+              <a:rPr lang="en-US" sz="1100" dirty="0">
+                <a:latin typeface="Helvetica" pitchFamily="2" charset="0"/>
+              </a:rPr>
+              <a:t>Every PI automatically gets one 30 TB project space</a:t>
+            </a:r>
+          </a:p>
+          <a:p>
+            <a:r>
+              <a:rPr lang="en-US" sz="1100" dirty="0">
+                <a:latin typeface="Helvetica" pitchFamily="2" charset="0"/>
+              </a:rPr>
+              <a:t>Additional projects can be requested with grant funding</a:t>
+            </a:r>
+          </a:p>
+          <a:p>
+            <a:r>
+              <a:rPr lang="en-US" sz="1100" dirty="0">
+                <a:latin typeface="Helvetica" pitchFamily="2" charset="0"/>
+              </a:rPr>
+              <a:t>If grant expires, additional project space is removed (after data migration period)</a:t>
+            </a:r>
+          </a:p>
+          <a:p>
+            <a:r>
+              <a:rPr lang="en-US" sz="1100" dirty="0">
+                <a:latin typeface="Helvetica" pitchFamily="2" charset="0"/>
+              </a:rPr>
+              <a:t>Can request quota increases on primary project if needed</a:t>
+            </a:r>
+          </a:p>
+        </p:txBody>
+      </p:sp>
+    </p:spTree>
+    <p:extLst>
+      <p:ext uri="{BB962C8B-B14F-4D97-AF65-F5344CB8AC3E}">
+        <p14:creationId xmlns:p14="http://schemas.microsoft.com/office/powerpoint/2010/main" val="3453448628"/>
+      </p:ext>
+    </p:extLst>
+  </p:cSld>
+  <p:clrMapOvr>
+    <a:masterClrMapping/>
+  </p:clrMapOvr>
+</p:sld>
+</file>
+
+<file path=ppt/slides/slide17.xml><?xml version="1.0" encoding="utf-8"?>
 <p:sld xmlns:a="http://schemas.openxmlformats.org/drawingml/2006/main" xmlns:r="http://schemas.openxmlformats.org/officeDocument/2006/relationships" xmlns:p="http://schemas.openxmlformats.org/presentationml/2006/main">
   <p:cSld>
     <p:spTree>
@@ -5074,6 +8135,437 @@
               <a:rPr lang="en-US" sz="4000" dirty="0">
                 <a:latin typeface="Helvetica" pitchFamily="2" charset="0"/>
               </a:rPr>
+              <a:t>Moving data in and out of hazel</a:t>
+            </a:r>
+          </a:p>
+        </p:txBody>
+      </p:sp>
+      <p:sp>
+        <p:nvSpPr>
+          <p:cNvPr id="4" name="TextBox 3">
+            <a:extLst>
+              <a:ext uri="{FF2B5EF4-FFF2-40B4-BE49-F238E27FC236}">
+                <a16:creationId xmlns:a16="http://schemas.microsoft.com/office/drawing/2014/main" id="{E2C155B8-2756-474B-E81F-C4230EB3C6A4}"/>
+              </a:ext>
+            </a:extLst>
+          </p:cNvPr>
+          <p:cNvSpPr txBox="1"/>
+          <p:nvPr/>
+        </p:nvSpPr>
+        <p:spPr>
+          <a:xfrm>
+            <a:off x="671945" y="1643650"/>
+            <a:ext cx="10681855" cy="4524315"/>
+          </a:xfrm>
+          <a:prstGeom prst="rect">
+            <a:avLst/>
+          </a:prstGeom>
+          <a:noFill/>
+        </p:spPr>
+        <p:txBody>
+          <a:bodyPr wrap="square">
+            <a:spAutoFit/>
+          </a:bodyPr>
+          <a:lstStyle/>
+          <a:p>
+            <a:pPr marL="285750" indent="-285750" algn="l">
+              <a:buFont typeface="Arial" panose="020B0604020202020204" pitchFamily="34" charset="0"/>
+              <a:buChar char="•"/>
+            </a:pPr>
+            <a:r>
+              <a:rPr lang="en-US" b="1" i="0" dirty="0">
+                <a:solidFill>
+                  <a:srgbClr val="373A3C"/>
+                </a:solidFill>
+                <a:effectLst/>
+                <a:latin typeface="Source Sans Pro" panose="020B0503030403020204" pitchFamily="34" charset="0"/>
+              </a:rPr>
+              <a:t>Option 1: Open OnDemand: </a:t>
+            </a:r>
+            <a:r>
+              <a:rPr lang="en-US" i="0" dirty="0">
+                <a:solidFill>
+                  <a:srgbClr val="373A3C"/>
+                </a:solidFill>
+                <a:effectLst/>
+                <a:latin typeface="Source Sans Pro" panose="020B0503030403020204" pitchFamily="34" charset="0"/>
+              </a:rPr>
+              <a:t>web platform for HPC</a:t>
+            </a:r>
+          </a:p>
+          <a:p>
+            <a:pPr marL="285750" indent="-285750" algn="l">
+              <a:buFont typeface="Arial" panose="020B0604020202020204" pitchFamily="34" charset="0"/>
+              <a:buChar char="•"/>
+            </a:pPr>
+            <a:endParaRPr lang="en-US" b="1" dirty="0">
+              <a:solidFill>
+                <a:srgbClr val="373A3C"/>
+              </a:solidFill>
+              <a:latin typeface="Source Sans Pro" panose="020B0503030403020204" pitchFamily="34" charset="0"/>
+            </a:endParaRPr>
+          </a:p>
+          <a:p>
+            <a:pPr marL="285750" indent="-285750" algn="l">
+              <a:buFont typeface="Arial" panose="020B0604020202020204" pitchFamily="34" charset="0"/>
+              <a:buChar char="•"/>
+            </a:pPr>
+            <a:endParaRPr lang="en-US" b="1" i="0" dirty="0">
+              <a:solidFill>
+                <a:srgbClr val="373A3C"/>
+              </a:solidFill>
+              <a:effectLst/>
+              <a:latin typeface="Source Sans Pro" panose="020B0503030403020204" pitchFamily="34" charset="0"/>
+            </a:endParaRPr>
+          </a:p>
+          <a:p>
+            <a:pPr marL="285750" indent="-285750" algn="l">
+              <a:buFont typeface="Arial" panose="020B0604020202020204" pitchFamily="34" charset="0"/>
+              <a:buChar char="•"/>
+            </a:pPr>
+            <a:endParaRPr lang="en-US" b="1" dirty="0">
+              <a:solidFill>
+                <a:srgbClr val="373A3C"/>
+              </a:solidFill>
+              <a:latin typeface="Source Sans Pro" panose="020B0503030403020204" pitchFamily="34" charset="0"/>
+            </a:endParaRPr>
+          </a:p>
+          <a:p>
+            <a:pPr marL="285750" indent="-285750" algn="l">
+              <a:buFont typeface="Arial" panose="020B0604020202020204" pitchFamily="34" charset="0"/>
+              <a:buChar char="•"/>
+            </a:pPr>
+            <a:endParaRPr lang="en-US" b="1" i="0" dirty="0">
+              <a:solidFill>
+                <a:srgbClr val="373A3C"/>
+              </a:solidFill>
+              <a:effectLst/>
+              <a:latin typeface="Source Sans Pro" panose="020B0503030403020204" pitchFamily="34" charset="0"/>
+            </a:endParaRPr>
+          </a:p>
+          <a:p>
+            <a:pPr marL="285750" indent="-285750" algn="l">
+              <a:buFont typeface="Arial" panose="020B0604020202020204" pitchFamily="34" charset="0"/>
+              <a:buChar char="•"/>
+            </a:pPr>
+            <a:endParaRPr lang="en-US" b="1" dirty="0">
+              <a:solidFill>
+                <a:srgbClr val="373A3C"/>
+              </a:solidFill>
+              <a:latin typeface="Source Sans Pro" panose="020B0503030403020204" pitchFamily="34" charset="0"/>
+            </a:endParaRPr>
+          </a:p>
+          <a:p>
+            <a:pPr marL="285750" indent="-285750" algn="l">
+              <a:buFont typeface="Arial" panose="020B0604020202020204" pitchFamily="34" charset="0"/>
+              <a:buChar char="•"/>
+            </a:pPr>
+            <a:endParaRPr lang="en-US" b="1" i="0" dirty="0">
+              <a:solidFill>
+                <a:srgbClr val="373A3C"/>
+              </a:solidFill>
+              <a:effectLst/>
+              <a:latin typeface="Source Sans Pro" panose="020B0503030403020204" pitchFamily="34" charset="0"/>
+            </a:endParaRPr>
+          </a:p>
+          <a:p>
+            <a:pPr marL="285750" indent="-285750" algn="l">
+              <a:buFont typeface="Arial" panose="020B0604020202020204" pitchFamily="34" charset="0"/>
+              <a:buChar char="•"/>
+            </a:pPr>
+            <a:endParaRPr lang="en-US" b="1" dirty="0">
+              <a:solidFill>
+                <a:srgbClr val="373A3C"/>
+              </a:solidFill>
+              <a:latin typeface="Source Sans Pro" panose="020B0503030403020204" pitchFamily="34" charset="0"/>
+            </a:endParaRPr>
+          </a:p>
+          <a:p>
+            <a:pPr marL="285750" indent="-285750" algn="l">
+              <a:buFont typeface="Arial" panose="020B0604020202020204" pitchFamily="34" charset="0"/>
+              <a:buChar char="•"/>
+            </a:pPr>
+            <a:endParaRPr lang="en-US" b="1" i="0" dirty="0">
+              <a:solidFill>
+                <a:srgbClr val="373A3C"/>
+              </a:solidFill>
+              <a:effectLst/>
+              <a:latin typeface="Source Sans Pro" panose="020B0503030403020204" pitchFamily="34" charset="0"/>
+            </a:endParaRPr>
+          </a:p>
+          <a:p>
+            <a:pPr marL="285750" indent="-285750" algn="l">
+              <a:buFont typeface="Arial" panose="020B0604020202020204" pitchFamily="34" charset="0"/>
+              <a:buChar char="•"/>
+            </a:pPr>
+            <a:endParaRPr lang="en-US" b="1" i="0" dirty="0">
+              <a:solidFill>
+                <a:srgbClr val="373A3C"/>
+              </a:solidFill>
+              <a:effectLst/>
+              <a:latin typeface="Source Sans Pro" panose="020B0503030403020204" pitchFamily="34" charset="0"/>
+            </a:endParaRPr>
+          </a:p>
+          <a:p>
+            <a:pPr marL="285750" indent="-285750" algn="l">
+              <a:buFont typeface="Arial" panose="020B0604020202020204" pitchFamily="34" charset="0"/>
+              <a:buChar char="•"/>
+            </a:pPr>
+            <a:r>
+              <a:rPr lang="en-US" b="1" dirty="0">
+                <a:solidFill>
+                  <a:srgbClr val="373A3C"/>
+                </a:solidFill>
+                <a:latin typeface="Source Sans Pro" panose="020B0503030403020204" pitchFamily="34" charset="0"/>
+              </a:rPr>
+              <a:t>Option 2: </a:t>
+            </a:r>
+            <a:r>
+              <a:rPr lang="en-US" b="1" dirty="0" err="1">
+                <a:solidFill>
+                  <a:srgbClr val="373A3C"/>
+                </a:solidFill>
+                <a:latin typeface="Source Sans Pro" panose="020B0503030403020204" pitchFamily="34" charset="0"/>
+              </a:rPr>
+              <a:t>scp</a:t>
+            </a:r>
+            <a:endParaRPr lang="en-US" b="1" dirty="0">
+              <a:solidFill>
+                <a:srgbClr val="373A3C"/>
+              </a:solidFill>
+              <a:latin typeface="Source Sans Pro" panose="020B0503030403020204" pitchFamily="34" charset="0"/>
+            </a:endParaRPr>
+          </a:p>
+          <a:p>
+            <a:pPr algn="l"/>
+            <a:endParaRPr lang="en-US" b="1" dirty="0">
+              <a:solidFill>
+                <a:srgbClr val="373A3C"/>
+              </a:solidFill>
+              <a:latin typeface="Source Sans Pro" panose="020B0503030403020204" pitchFamily="34" charset="0"/>
+            </a:endParaRPr>
+          </a:p>
+          <a:p>
+            <a:r>
+              <a:rPr lang="en-US" b="1" dirty="0">
+                <a:solidFill>
+                  <a:srgbClr val="373A3C"/>
+                </a:solidFill>
+                <a:latin typeface="Source Sans Pro" panose="020B0503030403020204" pitchFamily="34" charset="0"/>
+              </a:rPr>
+              <a:t>	</a:t>
+            </a:r>
+            <a:r>
+              <a:rPr lang="en-US" sz="1200" b="1" dirty="0">
+                <a:solidFill>
+                  <a:schemeClr val="accent2"/>
+                </a:solidFill>
+                <a:latin typeface="Menlo" panose="020B0609030804020204" pitchFamily="49" charset="0"/>
+                <a:ea typeface="Menlo" panose="020B0609030804020204" pitchFamily="49" charset="0"/>
+                <a:cs typeface="Menlo" panose="020B0609030804020204" pitchFamily="49" charset="0"/>
+              </a:rPr>
+              <a:t> $ </a:t>
+            </a:r>
+            <a:r>
+              <a:rPr lang="en-US" sz="1200" b="1" dirty="0" err="1">
+                <a:solidFill>
+                  <a:schemeClr val="accent2"/>
+                </a:solidFill>
+                <a:latin typeface="Menlo" panose="020B0609030804020204" pitchFamily="49" charset="0"/>
+                <a:ea typeface="Menlo" panose="020B0609030804020204" pitchFamily="49" charset="0"/>
+                <a:cs typeface="Menlo" panose="020B0609030804020204" pitchFamily="49" charset="0"/>
+              </a:rPr>
+              <a:t>scp</a:t>
+            </a:r>
+            <a:r>
+              <a:rPr lang="en-US" sz="1200" b="1" dirty="0">
+                <a:solidFill>
+                  <a:schemeClr val="accent2"/>
+                </a:solidFill>
+                <a:latin typeface="Menlo" panose="020B0609030804020204" pitchFamily="49" charset="0"/>
+                <a:ea typeface="Menlo" panose="020B0609030804020204" pitchFamily="49" charset="0"/>
+                <a:cs typeface="Menlo" panose="020B0609030804020204" pitchFamily="49" charset="0"/>
+              </a:rPr>
+              <a:t> </a:t>
+            </a:r>
+            <a:r>
+              <a:rPr lang="en-US" sz="1200" b="1" dirty="0" err="1">
+                <a:solidFill>
+                  <a:schemeClr val="accent6"/>
+                </a:solidFill>
+                <a:latin typeface="Menlo" panose="020B0609030804020204" pitchFamily="49" charset="0"/>
+                <a:ea typeface="Menlo" panose="020B0609030804020204" pitchFamily="49" charset="0"/>
+                <a:cs typeface="Menlo" panose="020B0609030804020204" pitchFamily="49" charset="0"/>
+              </a:rPr>
+              <a:t>UnityID@login.hpc.ncsu.edu</a:t>
+            </a:r>
+            <a:r>
+              <a:rPr lang="en-US" sz="1200" b="1" dirty="0">
+                <a:solidFill>
+                  <a:schemeClr val="accent6"/>
+                </a:solidFill>
+                <a:latin typeface="Menlo" panose="020B0609030804020204" pitchFamily="49" charset="0"/>
+                <a:ea typeface="Menlo" panose="020B0609030804020204" pitchFamily="49" charset="0"/>
+                <a:cs typeface="Menlo" panose="020B0609030804020204" pitchFamily="49" charset="0"/>
+              </a:rPr>
+              <a:t>:/rs1/researchers/[letter]/[name]/file </a:t>
+            </a:r>
+            <a:r>
+              <a:rPr lang="en-US" sz="1200" b="1" dirty="0">
+                <a:solidFill>
+                  <a:schemeClr val="accent2"/>
+                </a:solidFill>
+                <a:latin typeface="Menlo" panose="020B0609030804020204" pitchFamily="49" charset="0"/>
+                <a:ea typeface="Menlo" panose="020B0609030804020204" pitchFamily="49" charset="0"/>
+                <a:cs typeface="Menlo" panose="020B0609030804020204" pitchFamily="49" charset="0"/>
+              </a:rPr>
+              <a:t>~/Documents/data </a:t>
+            </a:r>
+            <a:endParaRPr lang="en-US" b="1" dirty="0">
+              <a:solidFill>
+                <a:schemeClr val="accent2">
+                  <a:lumMod val="75000"/>
+                </a:schemeClr>
+              </a:solidFill>
+              <a:latin typeface="Source Sans Pro" panose="020B0503030403020204" pitchFamily="34" charset="0"/>
+            </a:endParaRPr>
+          </a:p>
+          <a:p>
+            <a:pPr algn="l"/>
+            <a:endParaRPr lang="en-US" b="1" dirty="0">
+              <a:solidFill>
+                <a:srgbClr val="373A3C"/>
+              </a:solidFill>
+              <a:latin typeface="Source Sans Pro" panose="020B0503030403020204" pitchFamily="34" charset="0"/>
+            </a:endParaRPr>
+          </a:p>
+          <a:p>
+            <a:pPr algn="l"/>
+            <a:endParaRPr lang="en-US" b="1" dirty="0">
+              <a:solidFill>
+                <a:srgbClr val="373A3C"/>
+              </a:solidFill>
+              <a:latin typeface="Source Sans Pro" panose="020B0503030403020204" pitchFamily="34" charset="0"/>
+            </a:endParaRPr>
+          </a:p>
+          <a:p>
+            <a:pPr marL="285750" indent="-285750" algn="l">
+              <a:buFont typeface="Arial" panose="020B0604020202020204" pitchFamily="34" charset="0"/>
+              <a:buChar char="•"/>
+            </a:pPr>
+            <a:r>
+              <a:rPr lang="en-US" b="1" i="0" dirty="0">
+                <a:solidFill>
+                  <a:srgbClr val="373A3C"/>
+                </a:solidFill>
+                <a:effectLst/>
+                <a:latin typeface="Source Sans Pro" panose="020B0503030403020204" pitchFamily="34" charset="0"/>
+              </a:rPr>
+              <a:t>Option 3: Globus</a:t>
+            </a:r>
+            <a:endParaRPr lang="en-US" b="0" i="0" dirty="0">
+              <a:solidFill>
+                <a:srgbClr val="373A3C"/>
+              </a:solidFill>
+              <a:effectLst/>
+              <a:latin typeface="Source Sans Pro" panose="020B0503030403020204" pitchFamily="34" charset="0"/>
+            </a:endParaRPr>
+          </a:p>
+        </p:txBody>
+      </p:sp>
+      <p:pic>
+        <p:nvPicPr>
+          <p:cNvPr id="3" name="Picture 2">
+            <a:extLst>
+              <a:ext uri="{FF2B5EF4-FFF2-40B4-BE49-F238E27FC236}">
+                <a16:creationId xmlns:a16="http://schemas.microsoft.com/office/drawing/2014/main" id="{CFE38399-58F7-A6B9-6D47-F2E373006202}"/>
+              </a:ext>
+            </a:extLst>
+          </p:cNvPr>
+          <p:cNvPicPr>
+            <a:picLocks noChangeAspect="1"/>
+          </p:cNvPicPr>
+          <p:nvPr/>
+        </p:nvPicPr>
+        <p:blipFill>
+          <a:blip r:embed="rId3"/>
+          <a:stretch>
+            <a:fillRect/>
+          </a:stretch>
+        </p:blipFill>
+        <p:spPr>
+          <a:xfrm>
+            <a:off x="2734917" y="2108237"/>
+            <a:ext cx="6722165" cy="2224408"/>
+          </a:xfrm>
+          <a:prstGeom prst="rect">
+            <a:avLst/>
+          </a:prstGeom>
+        </p:spPr>
+      </p:pic>
+    </p:spTree>
+    <p:extLst>
+      <p:ext uri="{BB962C8B-B14F-4D97-AF65-F5344CB8AC3E}">
+        <p14:creationId xmlns:p14="http://schemas.microsoft.com/office/powerpoint/2010/main" val="3629241875"/>
+      </p:ext>
+    </p:extLst>
+  </p:cSld>
+  <p:clrMapOvr>
+    <a:masterClrMapping/>
+  </p:clrMapOvr>
+</p:sld>
+</file>
+
+<file path=ppt/slides/slide18.xml><?xml version="1.0" encoding="utf-8"?>
+<p:sld xmlns:a="http://schemas.openxmlformats.org/drawingml/2006/main" xmlns:r="http://schemas.openxmlformats.org/officeDocument/2006/relationships" xmlns:p="http://schemas.openxmlformats.org/presentationml/2006/main">
+  <p:cSld>
+    <p:spTree>
+      <p:nvGrpSpPr>
+        <p:cNvPr id="1" name="">
+          <a:extLst>
+            <a:ext uri="{FF2B5EF4-FFF2-40B4-BE49-F238E27FC236}">
+              <a16:creationId xmlns:a16="http://schemas.microsoft.com/office/drawing/2014/main" id="{31FA824A-14EB-39B9-08BC-29344D38BEF3}"/>
+            </a:ext>
+          </a:extLst>
+        </p:cNvPr>
+        <p:cNvGrpSpPr/>
+        <p:nvPr/>
+      </p:nvGrpSpPr>
+      <p:grpSpPr>
+        <a:xfrm>
+          <a:off x="0" y="0"/>
+          <a:ext cx="0" cy="0"/>
+          <a:chOff x="0" y="0"/>
+          <a:chExt cx="0" cy="0"/>
+        </a:xfrm>
+      </p:grpSpPr>
+      <p:sp>
+        <p:nvSpPr>
+          <p:cNvPr id="2" name="Title 1">
+            <a:extLst>
+              <a:ext uri="{FF2B5EF4-FFF2-40B4-BE49-F238E27FC236}">
+                <a16:creationId xmlns:a16="http://schemas.microsoft.com/office/drawing/2014/main" id="{284430C3-1A32-A4BC-DF58-BBE460EE1482}"/>
+              </a:ext>
+            </a:extLst>
+          </p:cNvPr>
+          <p:cNvSpPr>
+            <a:spLocks noGrp="1"/>
+          </p:cNvSpPr>
+          <p:nvPr>
+            <p:ph type="title"/>
+          </p:nvPr>
+        </p:nvSpPr>
+        <p:spPr/>
+        <p:txBody>
+          <a:bodyPr>
+            <a:normAutofit/>
+          </a:bodyPr>
+          <a:lstStyle/>
+          <a:p>
+            <a:r>
+              <a:rPr lang="en-US" sz="4000" dirty="0">
+                <a:latin typeface="Helvetica" pitchFamily="2" charset="0"/>
+              </a:rPr>
               <a:t>Globus transfers</a:t>
             </a:r>
           </a:p>
@@ -5084,7 +8576,7 @@
           <p:cNvPr id="4" name="TextBox 3">
             <a:extLst>
               <a:ext uri="{FF2B5EF4-FFF2-40B4-BE49-F238E27FC236}">
-                <a16:creationId xmlns:a16="http://schemas.microsoft.com/office/drawing/2014/main" id="{E2C155B8-2756-474B-E81F-C4230EB3C6A4}"/>
+                <a16:creationId xmlns:a16="http://schemas.microsoft.com/office/drawing/2014/main" id="{11B2F18F-75D9-9083-4A4B-2BC51DD84358}"/>
               </a:ext>
             </a:extLst>
           </p:cNvPr>
@@ -5319,7 +8811,7 @@
           <p:cNvPr id="3074" name="Picture 2" descr="HOWTO: Use Globus (Overview) | Ohio Supercomputer Center">
             <a:extLst>
               <a:ext uri="{FF2B5EF4-FFF2-40B4-BE49-F238E27FC236}">
-                <a16:creationId xmlns:a16="http://schemas.microsoft.com/office/drawing/2014/main" id="{6E875A50-2BF4-7213-911D-34D145F06DE5}"/>
+                <a16:creationId xmlns:a16="http://schemas.microsoft.com/office/drawing/2014/main" id="{E3EF264F-404F-3931-11F1-3BA3BE58E822}"/>
               </a:ext>
             </a:extLst>
           </p:cNvPr>
@@ -5366,7 +8858,7 @@
           <p:cNvPr id="3076" name="Picture 4" descr="Data Transfer With Globus">
             <a:extLst>
               <a:ext uri="{FF2B5EF4-FFF2-40B4-BE49-F238E27FC236}">
-                <a16:creationId xmlns:a16="http://schemas.microsoft.com/office/drawing/2014/main" id="{81C90500-73EC-108C-ABDE-9B8D021DB268}"/>
+                <a16:creationId xmlns:a16="http://schemas.microsoft.com/office/drawing/2014/main" id="{06FFD12A-74F3-061B-2636-083AE8DB4F25}"/>
               </a:ext>
             </a:extLst>
           </p:cNvPr>
@@ -5411,7 +8903,7 @@
     </p:spTree>
     <p:extLst>
       <p:ext uri="{BB962C8B-B14F-4D97-AF65-F5344CB8AC3E}">
-        <p14:creationId xmlns:p14="http://schemas.microsoft.com/office/powerpoint/2010/main" val="3629241875"/>
+        <p14:creationId xmlns:p14="http://schemas.microsoft.com/office/powerpoint/2010/main" val="3569862395"/>
       </p:ext>
     </p:extLst>
   </p:cSld>

--- a/slides/brc_hazel_week_d4.pptx
+++ b/slides/brc_hazel_week_d4.pptx
@@ -5,7 +5,7 @@
     <p:sldMasterId id="2147483648" r:id="rId1"/>
   </p:sldMasterIdLst>
   <p:notesMasterIdLst>
-    <p:notesMasterId r:id="rId20"/>
+    <p:notesMasterId r:id="rId21"/>
   </p:notesMasterIdLst>
   <p:sldIdLst>
     <p:sldId id="257" r:id="rId2"/>
@@ -26,6 +26,7 @@
     <p:sldId id="285" r:id="rId17"/>
     <p:sldId id="307" r:id="rId18"/>
     <p:sldId id="315" r:id="rId19"/>
+    <p:sldId id="316" r:id="rId20"/>
   </p:sldIdLst>
   <p:sldSz cx="12192000" cy="6858000"/>
   <p:notesSz cx="6858000" cy="9144000"/>
@@ -214,7 +215,7 @@
           <a:p>
             <a:fld id="{C03B9CC4-35C2-F643-8821-8A26B4C2EFBC}" type="datetimeFigureOut">
               <a:rPr lang="en-US" smtClean="0"/>
-              <a:t>4/21/26</a:t>
+              <a:t>5/11/26</a:t>
             </a:fld>
             <a:endParaRPr lang="en-US"/>
           </a:p>
@@ -2019,7 +2020,7 @@
           <a:p>
             <a:fld id="{07922428-1601-1349-B82F-394AB362B944}" type="datetimeFigureOut">
               <a:rPr lang="en-US" smtClean="0"/>
-              <a:t>4/21/26</a:t>
+              <a:t>5/11/26</a:t>
             </a:fld>
             <a:endParaRPr lang="en-US"/>
           </a:p>
@@ -2217,7 +2218,7 @@
           <a:p>
             <a:fld id="{07922428-1601-1349-B82F-394AB362B944}" type="datetimeFigureOut">
               <a:rPr lang="en-US" smtClean="0"/>
-              <a:t>4/21/26</a:t>
+              <a:t>5/11/26</a:t>
             </a:fld>
             <a:endParaRPr lang="en-US"/>
           </a:p>
@@ -2425,7 +2426,7 @@
           <a:p>
             <a:fld id="{07922428-1601-1349-B82F-394AB362B944}" type="datetimeFigureOut">
               <a:rPr lang="en-US" smtClean="0"/>
-              <a:t>4/21/26</a:t>
+              <a:t>5/11/26</a:t>
             </a:fld>
             <a:endParaRPr lang="en-US"/>
           </a:p>
@@ -2623,7 +2624,7 @@
           <a:p>
             <a:fld id="{07922428-1601-1349-B82F-394AB362B944}" type="datetimeFigureOut">
               <a:rPr lang="en-US" smtClean="0"/>
-              <a:t>4/21/26</a:t>
+              <a:t>5/11/26</a:t>
             </a:fld>
             <a:endParaRPr lang="en-US"/>
           </a:p>
@@ -2898,7 +2899,7 @@
           <a:p>
             <a:fld id="{07922428-1601-1349-B82F-394AB362B944}" type="datetimeFigureOut">
               <a:rPr lang="en-US" smtClean="0"/>
-              <a:t>4/21/26</a:t>
+              <a:t>5/11/26</a:t>
             </a:fld>
             <a:endParaRPr lang="en-US"/>
           </a:p>
@@ -3163,7 +3164,7 @@
           <a:p>
             <a:fld id="{07922428-1601-1349-B82F-394AB362B944}" type="datetimeFigureOut">
               <a:rPr lang="en-US" smtClean="0"/>
-              <a:t>4/21/26</a:t>
+              <a:t>5/11/26</a:t>
             </a:fld>
             <a:endParaRPr lang="en-US"/>
           </a:p>
@@ -3575,7 +3576,7 @@
           <a:p>
             <a:fld id="{07922428-1601-1349-B82F-394AB362B944}" type="datetimeFigureOut">
               <a:rPr lang="en-US" smtClean="0"/>
-              <a:t>4/21/26</a:t>
+              <a:t>5/11/26</a:t>
             </a:fld>
             <a:endParaRPr lang="en-US"/>
           </a:p>
@@ -3716,7 +3717,7 @@
           <a:p>
             <a:fld id="{07922428-1601-1349-B82F-394AB362B944}" type="datetimeFigureOut">
               <a:rPr lang="en-US" smtClean="0"/>
-              <a:t>4/21/26</a:t>
+              <a:t>5/11/26</a:t>
             </a:fld>
             <a:endParaRPr lang="en-US"/>
           </a:p>
@@ -3829,7 +3830,7 @@
           <a:p>
             <a:fld id="{07922428-1601-1349-B82F-394AB362B944}" type="datetimeFigureOut">
               <a:rPr lang="en-US" smtClean="0"/>
-              <a:t>4/21/26</a:t>
+              <a:t>5/11/26</a:t>
             </a:fld>
             <a:endParaRPr lang="en-US"/>
           </a:p>
@@ -4140,7 +4141,7 @@
           <a:p>
             <a:fld id="{07922428-1601-1349-B82F-394AB362B944}" type="datetimeFigureOut">
               <a:rPr lang="en-US" smtClean="0"/>
-              <a:t>4/21/26</a:t>
+              <a:t>5/11/26</a:t>
             </a:fld>
             <a:endParaRPr lang="en-US"/>
           </a:p>
@@ -4428,7 +4429,7 @@
           <a:p>
             <a:fld id="{07922428-1601-1349-B82F-394AB362B944}" type="datetimeFigureOut">
               <a:rPr lang="en-US" smtClean="0"/>
-              <a:t>4/21/26</a:t>
+              <a:t>5/11/26</a:t>
             </a:fld>
             <a:endParaRPr lang="en-US"/>
           </a:p>
@@ -4669,7 +4670,7 @@
           <a:p>
             <a:fld id="{07922428-1601-1349-B82F-394AB362B944}" type="datetimeFigureOut">
               <a:rPr lang="en-US" smtClean="0"/>
-              <a:t>4/21/26</a:t>
+              <a:t>5/11/26</a:t>
             </a:fld>
             <a:endParaRPr lang="en-US"/>
           </a:p>
@@ -8913,7 +8914,7 @@
 </p:sld>
 </file>
 
-<file path=ppt/slides/slide2.xml><?xml version="1.0" encoding="utf-8"?>
+<file path=ppt/slides/slide19.xml><?xml version="1.0" encoding="utf-8"?>
 <p:sld xmlns:a="http://schemas.openxmlformats.org/drawingml/2006/main" xmlns:r="http://schemas.openxmlformats.org/officeDocument/2006/relationships" xmlns:p="http://schemas.openxmlformats.org/presentationml/2006/main">
   <p:cSld>
     <p:spTree>
@@ -9030,7 +9031,7 @@
         <p:spPr>
           <a:xfrm>
             <a:off x="1794669" y="2206232"/>
-            <a:ext cx="6591506" cy="1754326"/>
+            <a:ext cx="4606131" cy="2031325"/>
           </a:xfrm>
           <a:prstGeom prst="rect">
             <a:avLst/>
@@ -9135,6 +9136,303 @@
               </a14:hiddenFill>
             </a:ext>
           </a:extLst>
+        </p:spPr>
+      </p:pic>
+      <p:pic>
+        <p:nvPicPr>
+          <p:cNvPr id="4" name="Picture 3">
+            <a:extLst>
+              <a:ext uri="{FF2B5EF4-FFF2-40B4-BE49-F238E27FC236}">
+                <a16:creationId xmlns:a16="http://schemas.microsoft.com/office/drawing/2014/main" id="{7EAC7020-766F-B0AF-849C-A72B60F880DB}"/>
+              </a:ext>
+            </a:extLst>
+          </p:cNvPr>
+          <p:cNvPicPr>
+            <a:picLocks noChangeAspect="1"/>
+          </p:cNvPicPr>
+          <p:nvPr/>
+        </p:nvPicPr>
+        <p:blipFill>
+          <a:blip r:embed="rId4"/>
+          <a:stretch>
+            <a:fillRect/>
+          </a:stretch>
+        </p:blipFill>
+        <p:spPr>
+          <a:xfrm>
+            <a:off x="7012709" y="1714968"/>
+            <a:ext cx="4606131" cy="4577873"/>
+          </a:xfrm>
+          <a:prstGeom prst="rect">
+            <a:avLst/>
+          </a:prstGeom>
+        </p:spPr>
+      </p:pic>
+    </p:spTree>
+    <p:extLst>
+      <p:ext uri="{BB962C8B-B14F-4D97-AF65-F5344CB8AC3E}">
+        <p14:creationId xmlns:p14="http://schemas.microsoft.com/office/powerpoint/2010/main" val="830814953"/>
+      </p:ext>
+    </p:extLst>
+  </p:cSld>
+  <p:clrMapOvr>
+    <a:masterClrMapping/>
+  </p:clrMapOvr>
+</p:sld>
+</file>
+
+<file path=ppt/slides/slide2.xml><?xml version="1.0" encoding="utf-8"?>
+<p:sld xmlns:a="http://schemas.openxmlformats.org/drawingml/2006/main" xmlns:r="http://schemas.openxmlformats.org/officeDocument/2006/relationships" xmlns:p="http://schemas.openxmlformats.org/presentationml/2006/main">
+  <p:cSld>
+    <p:spTree>
+      <p:nvGrpSpPr>
+        <p:cNvPr id="1" name="">
+          <a:extLst>
+            <a:ext uri="{FF2B5EF4-FFF2-40B4-BE49-F238E27FC236}">
+              <a16:creationId xmlns:a16="http://schemas.microsoft.com/office/drawing/2014/main" id="{45849598-BD4D-70E9-70C2-7215FDC0508E}"/>
+            </a:ext>
+          </a:extLst>
+        </p:cNvPr>
+        <p:cNvGrpSpPr/>
+        <p:nvPr/>
+      </p:nvGrpSpPr>
+      <p:grpSpPr>
+        <a:xfrm>
+          <a:off x="0" y="0"/>
+          <a:ext cx="0" cy="0"/>
+          <a:chOff x="0" y="0"/>
+          <a:chExt cx="0" cy="0"/>
+        </a:xfrm>
+      </p:grpSpPr>
+      <p:sp>
+        <p:nvSpPr>
+          <p:cNvPr id="2" name="Title 1">
+            <a:extLst>
+              <a:ext uri="{FF2B5EF4-FFF2-40B4-BE49-F238E27FC236}">
+                <a16:creationId xmlns:a16="http://schemas.microsoft.com/office/drawing/2014/main" id="{FFF1D083-096E-849D-8015-B191ED5D6A34}"/>
+              </a:ext>
+            </a:extLst>
+          </p:cNvPr>
+          <p:cNvSpPr>
+            <a:spLocks noGrp="1"/>
+          </p:cNvSpPr>
+          <p:nvPr>
+            <p:ph type="title"/>
+          </p:nvPr>
+        </p:nvSpPr>
+        <p:spPr/>
+        <p:txBody>
+          <a:bodyPr>
+            <a:normAutofit/>
+          </a:bodyPr>
+          <a:lstStyle/>
+          <a:p>
+            <a:r>
+              <a:rPr lang="en-US" sz="4000" dirty="0">
+                <a:latin typeface="Helvetica" pitchFamily="2" charset="0"/>
+              </a:rPr>
+              <a:t>Leave us your feedback!</a:t>
+            </a:r>
+          </a:p>
+        </p:txBody>
+      </p:sp>
+      <p:pic>
+        <p:nvPicPr>
+          <p:cNvPr id="2050" name="Picture 2" descr="Suggestion - Free communications icons">
+            <a:extLst>
+              <a:ext uri="{FF2B5EF4-FFF2-40B4-BE49-F238E27FC236}">
+                <a16:creationId xmlns:a16="http://schemas.microsoft.com/office/drawing/2014/main" id="{5020596A-D3B5-18D2-1D37-3B88E5CD788C}"/>
+              </a:ext>
+            </a:extLst>
+          </p:cNvPr>
+          <p:cNvPicPr>
+            <a:picLocks noChangeAspect="1" noChangeArrowheads="1"/>
+          </p:cNvPicPr>
+          <p:nvPr/>
+        </p:nvPicPr>
+        <p:blipFill>
+          <a:blip r:embed="rId2">
+            <a:extLst>
+              <a:ext uri="{28A0092B-C50C-407E-A947-70E740481C1C}">
+                <a14:useLocalDpi xmlns:a14="http://schemas.microsoft.com/office/drawing/2010/main" val="0"/>
+              </a:ext>
+            </a:extLst>
+          </a:blip>
+          <a:srcRect/>
+          <a:stretch>
+            <a:fillRect/>
+          </a:stretch>
+        </p:blipFill>
+        <p:spPr bwMode="auto">
+          <a:xfrm>
+            <a:off x="1182760" y="1866375"/>
+            <a:ext cx="611909" cy="611909"/>
+          </a:xfrm>
+          <a:prstGeom prst="rect">
+            <a:avLst/>
+          </a:prstGeom>
+          <a:noFill/>
+          <a:extLst>
+            <a:ext uri="{909E8E84-426E-40DD-AFC4-6F175D3DCCD1}">
+              <a14:hiddenFill xmlns:a14="http://schemas.microsoft.com/office/drawing/2010/main">
+                <a:solidFill>
+                  <a:srgbClr val="FFFFFF"/>
+                </a:solidFill>
+              </a14:hiddenFill>
+            </a:ext>
+          </a:extLst>
+        </p:spPr>
+      </p:pic>
+      <p:sp>
+        <p:nvSpPr>
+          <p:cNvPr id="3" name="TextBox 2">
+            <a:extLst>
+              <a:ext uri="{FF2B5EF4-FFF2-40B4-BE49-F238E27FC236}">
+                <a16:creationId xmlns:a16="http://schemas.microsoft.com/office/drawing/2014/main" id="{49C98279-5765-9BFA-2B15-04A8FEDAA130}"/>
+              </a:ext>
+            </a:extLst>
+          </p:cNvPr>
+          <p:cNvSpPr txBox="1"/>
+          <p:nvPr/>
+        </p:nvSpPr>
+        <p:spPr>
+          <a:xfrm>
+            <a:off x="1794669" y="2206232"/>
+            <a:ext cx="4606131" cy="2031325"/>
+          </a:xfrm>
+          <a:prstGeom prst="rect">
+            <a:avLst/>
+          </a:prstGeom>
+          <a:noFill/>
+        </p:spPr>
+        <p:txBody>
+          <a:bodyPr wrap="square" rtlCol="0">
+            <a:spAutoFit/>
+          </a:bodyPr>
+          <a:lstStyle/>
+          <a:p>
+            <a:r>
+              <a:rPr lang="en-US" dirty="0">
+                <a:latin typeface="Helvetica" pitchFamily="2" charset="0"/>
+              </a:rPr>
+              <a:t>Please let us know if you have suggestions!</a:t>
+            </a:r>
+          </a:p>
+          <a:p>
+            <a:endParaRPr lang="en-US" dirty="0">
+              <a:latin typeface="Helvetica" pitchFamily="2" charset="0"/>
+            </a:endParaRPr>
+          </a:p>
+          <a:p>
+            <a:pPr marL="342900" indent="-342900">
+              <a:buAutoNum type="arabicPeriod"/>
+            </a:pPr>
+            <a:r>
+              <a:rPr lang="en-US" dirty="0">
+                <a:latin typeface="Helvetica" pitchFamily="2" charset="0"/>
+              </a:rPr>
+              <a:t>What did you like about this workshop?</a:t>
+            </a:r>
+          </a:p>
+          <a:p>
+            <a:pPr marL="342900" indent="-342900">
+              <a:buAutoNum type="arabicPeriod"/>
+            </a:pPr>
+            <a:r>
+              <a:rPr lang="en-US" dirty="0">
+                <a:latin typeface="Helvetica" pitchFamily="2" charset="0"/>
+              </a:rPr>
+              <a:t>What could be improved?</a:t>
+            </a:r>
+          </a:p>
+          <a:p>
+            <a:pPr marL="342900" indent="-342900">
+              <a:buAutoNum type="arabicPeriod"/>
+            </a:pPr>
+            <a:r>
+              <a:rPr lang="en-US" dirty="0">
+                <a:latin typeface="Helvetica" pitchFamily="2" charset="0"/>
+              </a:rPr>
+              <a:t>Any suggestions for the following sessions (i.e. change in order, other topics, special interests)</a:t>
+            </a:r>
+          </a:p>
+        </p:txBody>
+      </p:sp>
+      <p:pic>
+        <p:nvPicPr>
+          <p:cNvPr id="5122" name="Picture 2" descr="Pen Icon Graphic by rudezstudio · Creative Fabrica">
+            <a:extLst>
+              <a:ext uri="{FF2B5EF4-FFF2-40B4-BE49-F238E27FC236}">
+                <a16:creationId xmlns:a16="http://schemas.microsoft.com/office/drawing/2014/main" id="{0DEEB3E2-D200-94F1-EB2C-1F94DD52C3EE}"/>
+              </a:ext>
+            </a:extLst>
+          </p:cNvPr>
+          <p:cNvPicPr>
+            <a:picLocks noChangeAspect="1" noChangeArrowheads="1"/>
+          </p:cNvPicPr>
+          <p:nvPr/>
+        </p:nvPicPr>
+        <p:blipFill>
+          <a:blip r:embed="rId3">
+            <a:extLst>
+              <a:ext uri="{28A0092B-C50C-407E-A947-70E740481C1C}">
+                <a14:useLocalDpi xmlns:a14="http://schemas.microsoft.com/office/drawing/2010/main" val="0"/>
+              </a:ext>
+            </a:extLst>
+          </a:blip>
+          <a:srcRect/>
+          <a:stretch>
+            <a:fillRect/>
+          </a:stretch>
+        </p:blipFill>
+        <p:spPr bwMode="auto">
+          <a:xfrm>
+            <a:off x="6521365" y="340845"/>
+            <a:ext cx="1576712" cy="1049329"/>
+          </a:xfrm>
+          <a:prstGeom prst="rect">
+            <a:avLst/>
+          </a:prstGeom>
+          <a:noFill/>
+          <a:extLst>
+            <a:ext uri="{909E8E84-426E-40DD-AFC4-6F175D3DCCD1}">
+              <a14:hiddenFill xmlns:a14="http://schemas.microsoft.com/office/drawing/2010/main">
+                <a:solidFill>
+                  <a:srgbClr val="FFFFFF"/>
+                </a:solidFill>
+              </a14:hiddenFill>
+            </a:ext>
+          </a:extLst>
+        </p:spPr>
+      </p:pic>
+      <p:pic>
+        <p:nvPicPr>
+          <p:cNvPr id="4" name="Picture 3">
+            <a:extLst>
+              <a:ext uri="{FF2B5EF4-FFF2-40B4-BE49-F238E27FC236}">
+                <a16:creationId xmlns:a16="http://schemas.microsoft.com/office/drawing/2014/main" id="{7EAC7020-766F-B0AF-849C-A72B60F880DB}"/>
+              </a:ext>
+            </a:extLst>
+          </p:cNvPr>
+          <p:cNvPicPr>
+            <a:picLocks noChangeAspect="1"/>
+          </p:cNvPicPr>
+          <p:nvPr/>
+        </p:nvPicPr>
+        <p:blipFill>
+          <a:blip r:embed="rId4"/>
+          <a:stretch>
+            <a:fillRect/>
+          </a:stretch>
+        </p:blipFill>
+        <p:spPr>
+          <a:xfrm>
+            <a:off x="7012709" y="1714968"/>
+            <a:ext cx="4606131" cy="4577873"/>
+          </a:xfrm>
+          <a:prstGeom prst="rect">
+            <a:avLst/>
+          </a:prstGeom>
         </p:spPr>
       </p:pic>
     </p:spTree>

--- a/slides/brc_hazel_week_d4.pptx
+++ b/slides/brc_hazel_week_d4.pptx
@@ -5,7 +5,7 @@
     <p:sldMasterId id="2147483648" r:id="rId1"/>
   </p:sldMasterIdLst>
   <p:notesMasterIdLst>
-    <p:notesMasterId r:id="rId21"/>
+    <p:notesMasterId r:id="rId23"/>
   </p:notesMasterIdLst>
   <p:sldIdLst>
     <p:sldId id="257" r:id="rId2"/>
@@ -26,7 +26,9 @@
     <p:sldId id="285" r:id="rId17"/>
     <p:sldId id="307" r:id="rId18"/>
     <p:sldId id="315" r:id="rId19"/>
-    <p:sldId id="316" r:id="rId20"/>
+    <p:sldId id="318" r:id="rId20"/>
+    <p:sldId id="317" r:id="rId21"/>
+    <p:sldId id="316" r:id="rId22"/>
   </p:sldIdLst>
   <p:sldSz cx="12192000" cy="6858000"/>
   <p:notesSz cx="6858000" cy="9144000"/>
@@ -215,7 +217,7 @@
           <a:p>
             <a:fld id="{C03B9CC4-35C2-F643-8821-8A26B4C2EFBC}" type="datetimeFigureOut">
               <a:rPr lang="en-US" smtClean="0"/>
-              <a:t>5/11/26</a:t>
+              <a:t>5/14/26</a:t>
             </a:fld>
             <a:endParaRPr lang="en-US"/>
           </a:p>
@@ -2020,7 +2022,7 @@
           <a:p>
             <a:fld id="{07922428-1601-1349-B82F-394AB362B944}" type="datetimeFigureOut">
               <a:rPr lang="en-US" smtClean="0"/>
-              <a:t>5/11/26</a:t>
+              <a:t>5/14/26</a:t>
             </a:fld>
             <a:endParaRPr lang="en-US"/>
           </a:p>
@@ -2218,7 +2220,7 @@
           <a:p>
             <a:fld id="{07922428-1601-1349-B82F-394AB362B944}" type="datetimeFigureOut">
               <a:rPr lang="en-US" smtClean="0"/>
-              <a:t>5/11/26</a:t>
+              <a:t>5/14/26</a:t>
             </a:fld>
             <a:endParaRPr lang="en-US"/>
           </a:p>
@@ -2426,7 +2428,7 @@
           <a:p>
             <a:fld id="{07922428-1601-1349-B82F-394AB362B944}" type="datetimeFigureOut">
               <a:rPr lang="en-US" smtClean="0"/>
-              <a:t>5/11/26</a:t>
+              <a:t>5/14/26</a:t>
             </a:fld>
             <a:endParaRPr lang="en-US"/>
           </a:p>
@@ -2624,7 +2626,7 @@
           <a:p>
             <a:fld id="{07922428-1601-1349-B82F-394AB362B944}" type="datetimeFigureOut">
               <a:rPr lang="en-US" smtClean="0"/>
-              <a:t>5/11/26</a:t>
+              <a:t>5/14/26</a:t>
             </a:fld>
             <a:endParaRPr lang="en-US"/>
           </a:p>
@@ -2899,7 +2901,7 @@
           <a:p>
             <a:fld id="{07922428-1601-1349-B82F-394AB362B944}" type="datetimeFigureOut">
               <a:rPr lang="en-US" smtClean="0"/>
-              <a:t>5/11/26</a:t>
+              <a:t>5/14/26</a:t>
             </a:fld>
             <a:endParaRPr lang="en-US"/>
           </a:p>
@@ -3164,7 +3166,7 @@
           <a:p>
             <a:fld id="{07922428-1601-1349-B82F-394AB362B944}" type="datetimeFigureOut">
               <a:rPr lang="en-US" smtClean="0"/>
-              <a:t>5/11/26</a:t>
+              <a:t>5/14/26</a:t>
             </a:fld>
             <a:endParaRPr lang="en-US"/>
           </a:p>
@@ -3576,7 +3578,7 @@
           <a:p>
             <a:fld id="{07922428-1601-1349-B82F-394AB362B944}" type="datetimeFigureOut">
               <a:rPr lang="en-US" smtClean="0"/>
-              <a:t>5/11/26</a:t>
+              <a:t>5/14/26</a:t>
             </a:fld>
             <a:endParaRPr lang="en-US"/>
           </a:p>
@@ -3717,7 +3719,7 @@
           <a:p>
             <a:fld id="{07922428-1601-1349-B82F-394AB362B944}" type="datetimeFigureOut">
               <a:rPr lang="en-US" smtClean="0"/>
-              <a:t>5/11/26</a:t>
+              <a:t>5/14/26</a:t>
             </a:fld>
             <a:endParaRPr lang="en-US"/>
           </a:p>
@@ -3830,7 +3832,7 @@
           <a:p>
             <a:fld id="{07922428-1601-1349-B82F-394AB362B944}" type="datetimeFigureOut">
               <a:rPr lang="en-US" smtClean="0"/>
-              <a:t>5/11/26</a:t>
+              <a:t>5/14/26</a:t>
             </a:fld>
             <a:endParaRPr lang="en-US"/>
           </a:p>
@@ -4141,7 +4143,7 @@
           <a:p>
             <a:fld id="{07922428-1601-1349-B82F-394AB362B944}" type="datetimeFigureOut">
               <a:rPr lang="en-US" smtClean="0"/>
-              <a:t>5/11/26</a:t>
+              <a:t>5/14/26</a:t>
             </a:fld>
             <a:endParaRPr lang="en-US"/>
           </a:p>
@@ -4429,7 +4431,7 @@
           <a:p>
             <a:fld id="{07922428-1601-1349-B82F-394AB362B944}" type="datetimeFigureOut">
               <a:rPr lang="en-US" smtClean="0"/>
-              <a:t>5/11/26</a:t>
+              <a:t>5/14/26</a:t>
             </a:fld>
             <a:endParaRPr lang="en-US"/>
           </a:p>
@@ -4670,7 +4672,7 @@
           <a:p>
             <a:fld id="{07922428-1601-1349-B82F-394AB362B944}" type="datetimeFigureOut">
               <a:rPr lang="en-US" smtClean="0"/>
-              <a:t>5/11/26</a:t>
+              <a:t>5/14/26</a:t>
             </a:fld>
             <a:endParaRPr lang="en-US"/>
           </a:p>
@@ -5615,12 +5617,16 @@
         <p:spPr>
           <a:xfrm>
             <a:off x="7980218" y="2152591"/>
-            <a:ext cx="2483885" cy="2862322"/>
+            <a:ext cx="3836307" cy="2893100"/>
           </a:xfrm>
           <a:prstGeom prst="rect">
             <a:avLst/>
           </a:prstGeom>
-          <a:noFill/>
+          <a:solidFill>
+            <a:schemeClr val="bg1">
+              <a:lumMod val="95000"/>
+            </a:schemeClr>
+          </a:solidFill>
         </p:spPr>
         <p:txBody>
           <a:bodyPr wrap="none" rtlCol="0">
@@ -5629,76 +5635,274 @@
           <a:lstStyle/>
           <a:p>
             <a:r>
-              <a:rPr lang="en-US" dirty="0"/>
-              <a:t>Interactive </a:t>
-            </a:r>
-          </a:p>
-          <a:p>
-            <a:r>
-              <a:rPr lang="en-US" dirty="0"/>
-              <a:t>Module avail</a:t>
-            </a:r>
-          </a:p>
-          <a:p>
-            <a:r>
-              <a:rPr lang="en-US" dirty="0"/>
-              <a:t>Module load </a:t>
-            </a:r>
-            <a:r>
-              <a:rPr lang="en-US" dirty="0" err="1"/>
+              <a:rPr lang="en-US" sz="1400" dirty="0">
+                <a:solidFill>
+                  <a:schemeClr val="accent6"/>
+                </a:solidFill>
+                <a:latin typeface="Menlo" panose="020B0609030804020204" pitchFamily="49" charset="0"/>
+                <a:ea typeface="Menlo" panose="020B0609030804020204" pitchFamily="49" charset="0"/>
+                <a:cs typeface="Menlo" panose="020B0609030804020204" pitchFamily="49" charset="0"/>
+              </a:rPr>
+              <a:t>$: </a:t>
+            </a:r>
+            <a:r>
+              <a:rPr lang="en-US" sz="1400" dirty="0" err="1">
+                <a:solidFill>
+                  <a:schemeClr val="accent6"/>
+                </a:solidFill>
+                <a:latin typeface="Menlo" panose="020B0609030804020204" pitchFamily="49" charset="0"/>
+                <a:ea typeface="Menlo" panose="020B0609030804020204" pitchFamily="49" charset="0"/>
+                <a:cs typeface="Menlo" panose="020B0609030804020204" pitchFamily="49" charset="0"/>
+              </a:rPr>
+              <a:t>bsub</a:t>
+            </a:r>
+            <a:r>
+              <a:rPr lang="en-US" sz="1400" dirty="0">
+                <a:solidFill>
+                  <a:schemeClr val="accent6"/>
+                </a:solidFill>
+                <a:latin typeface="Menlo" panose="020B0609030804020204" pitchFamily="49" charset="0"/>
+                <a:ea typeface="Menlo" panose="020B0609030804020204" pitchFamily="49" charset="0"/>
+                <a:cs typeface="Menlo" panose="020B0609030804020204" pitchFamily="49" charset="0"/>
+              </a:rPr>
+              <a:t> –Is –W10</a:t>
+            </a:r>
+          </a:p>
+          <a:p>
+            <a:r>
+              <a:rPr lang="en-US" sz="1400" dirty="0">
+                <a:solidFill>
+                  <a:schemeClr val="accent6"/>
+                </a:solidFill>
+                <a:latin typeface="Menlo" panose="020B0609030804020204" pitchFamily="49" charset="0"/>
+                <a:ea typeface="Menlo" panose="020B0609030804020204" pitchFamily="49" charset="0"/>
+                <a:cs typeface="Menlo" panose="020B0609030804020204" pitchFamily="49" charset="0"/>
+              </a:rPr>
+              <a:t>$: module avail</a:t>
+            </a:r>
+          </a:p>
+          <a:p>
+            <a:r>
+              <a:rPr lang="en-US" sz="1400" dirty="0">
+                <a:solidFill>
+                  <a:schemeClr val="accent6"/>
+                </a:solidFill>
+                <a:latin typeface="Menlo" panose="020B0609030804020204" pitchFamily="49" charset="0"/>
+                <a:ea typeface="Menlo" panose="020B0609030804020204" pitchFamily="49" charset="0"/>
+                <a:cs typeface="Menlo" panose="020B0609030804020204" pitchFamily="49" charset="0"/>
+              </a:rPr>
+              <a:t>$: module load </a:t>
+            </a:r>
+            <a:r>
+              <a:rPr lang="en-US" sz="1400" dirty="0" err="1">
+                <a:solidFill>
+                  <a:schemeClr val="accent6"/>
+                </a:solidFill>
+                <a:latin typeface="Menlo" panose="020B0609030804020204" pitchFamily="49" charset="0"/>
+                <a:ea typeface="Menlo" panose="020B0609030804020204" pitchFamily="49" charset="0"/>
+                <a:cs typeface="Menlo" panose="020B0609030804020204" pitchFamily="49" charset="0"/>
+              </a:rPr>
               <a:t>apptainer</a:t>
             </a:r>
-            <a:endParaRPr lang="en-US" dirty="0"/>
-          </a:p>
-          <a:p>
-            <a:r>
-              <a:rPr lang="en-US" dirty="0" err="1"/>
-              <a:t>Apptainer</a:t>
-            </a:r>
-            <a:r>
-              <a:rPr lang="en-US" dirty="0"/>
+            <a:endParaRPr lang="en-US" sz="1400" dirty="0">
+              <a:solidFill>
+                <a:schemeClr val="accent6"/>
+              </a:solidFill>
+              <a:latin typeface="Menlo" panose="020B0609030804020204" pitchFamily="49" charset="0"/>
+              <a:ea typeface="Menlo" panose="020B0609030804020204" pitchFamily="49" charset="0"/>
+              <a:cs typeface="Menlo" panose="020B0609030804020204" pitchFamily="49" charset="0"/>
+            </a:endParaRPr>
+          </a:p>
+          <a:p>
+            <a:r>
+              <a:rPr lang="en-US" sz="1400" dirty="0">
+                <a:solidFill>
+                  <a:schemeClr val="accent6"/>
+                </a:solidFill>
+                <a:latin typeface="Menlo" panose="020B0609030804020204" pitchFamily="49" charset="0"/>
+                <a:ea typeface="Menlo" panose="020B0609030804020204" pitchFamily="49" charset="0"/>
+                <a:cs typeface="Menlo" panose="020B0609030804020204" pitchFamily="49" charset="0"/>
+              </a:rPr>
+              <a:t>$: </a:t>
+            </a:r>
+            <a:r>
+              <a:rPr lang="en-US" sz="1400" dirty="0" err="1">
+                <a:solidFill>
+                  <a:schemeClr val="accent6"/>
+                </a:solidFill>
+                <a:latin typeface="Menlo" panose="020B0609030804020204" pitchFamily="49" charset="0"/>
+                <a:ea typeface="Menlo" panose="020B0609030804020204" pitchFamily="49" charset="0"/>
+                <a:cs typeface="Menlo" panose="020B0609030804020204" pitchFamily="49" charset="0"/>
+              </a:rPr>
+              <a:t>apptainer</a:t>
+            </a:r>
+            <a:r>
+              <a:rPr lang="en-US" sz="1400" dirty="0">
+                <a:solidFill>
+                  <a:schemeClr val="accent6"/>
+                </a:solidFill>
+                <a:latin typeface="Menlo" panose="020B0609030804020204" pitchFamily="49" charset="0"/>
+                <a:ea typeface="Menlo" panose="020B0609030804020204" pitchFamily="49" charset="0"/>
+                <a:cs typeface="Menlo" panose="020B0609030804020204" pitchFamily="49" charset="0"/>
+              </a:rPr>
               <a:t> –h</a:t>
             </a:r>
           </a:p>
           <a:p>
-            <a:endParaRPr lang="en-US" dirty="0"/>
-          </a:p>
-          <a:p>
-            <a:endParaRPr lang="en-US" dirty="0"/>
-          </a:p>
-          <a:p>
-            <a:r>
-              <a:rPr lang="en-US" dirty="0" err="1"/>
-              <a:t>Apptainer</a:t>
-            </a:r>
-            <a:r>
-              <a:rPr lang="en-US" dirty="0"/>
-              <a:t> pull </a:t>
-            </a:r>
-          </a:p>
-          <a:p>
-            <a:r>
-              <a:rPr lang="en-US" dirty="0" err="1"/>
-              <a:t>Apptainer</a:t>
-            </a:r>
-            <a:r>
-              <a:rPr lang="en-US" dirty="0"/>
-              <a:t> </a:t>
-            </a:r>
-            <a:r>
-              <a:rPr lang="en-US" dirty="0" err="1"/>
+            <a:endParaRPr lang="en-US" sz="1400" dirty="0">
+              <a:solidFill>
+                <a:schemeClr val="accent6"/>
+              </a:solidFill>
+              <a:latin typeface="Menlo" panose="020B0609030804020204" pitchFamily="49" charset="0"/>
+              <a:ea typeface="Menlo" panose="020B0609030804020204" pitchFamily="49" charset="0"/>
+              <a:cs typeface="Menlo" panose="020B0609030804020204" pitchFamily="49" charset="0"/>
+            </a:endParaRPr>
+          </a:p>
+          <a:p>
+            <a:endParaRPr lang="en-US" sz="1400" dirty="0">
+              <a:solidFill>
+                <a:schemeClr val="accent6"/>
+              </a:solidFill>
+              <a:latin typeface="Menlo" panose="020B0609030804020204" pitchFamily="49" charset="0"/>
+              <a:ea typeface="Menlo" panose="020B0609030804020204" pitchFamily="49" charset="0"/>
+              <a:cs typeface="Menlo" panose="020B0609030804020204" pitchFamily="49" charset="0"/>
+            </a:endParaRPr>
+          </a:p>
+          <a:p>
+            <a:endParaRPr lang="en-US" sz="1400" dirty="0">
+              <a:solidFill>
+                <a:schemeClr val="accent6"/>
+              </a:solidFill>
+              <a:latin typeface="Menlo" panose="020B0609030804020204" pitchFamily="49" charset="0"/>
+              <a:ea typeface="Menlo" panose="020B0609030804020204" pitchFamily="49" charset="0"/>
+              <a:cs typeface="Menlo" panose="020B0609030804020204" pitchFamily="49" charset="0"/>
+            </a:endParaRPr>
+          </a:p>
+          <a:p>
+            <a:endParaRPr lang="en-US" sz="1400" dirty="0">
+              <a:solidFill>
+                <a:schemeClr val="accent6"/>
+              </a:solidFill>
+              <a:latin typeface="Menlo" panose="020B0609030804020204" pitchFamily="49" charset="0"/>
+              <a:ea typeface="Menlo" panose="020B0609030804020204" pitchFamily="49" charset="0"/>
+              <a:cs typeface="Menlo" panose="020B0609030804020204" pitchFamily="49" charset="0"/>
+            </a:endParaRPr>
+          </a:p>
+          <a:p>
+            <a:endParaRPr lang="en-US" sz="1400" dirty="0">
+              <a:solidFill>
+                <a:schemeClr val="accent6"/>
+              </a:solidFill>
+              <a:latin typeface="Menlo" panose="020B0609030804020204" pitchFamily="49" charset="0"/>
+              <a:ea typeface="Menlo" panose="020B0609030804020204" pitchFamily="49" charset="0"/>
+              <a:cs typeface="Menlo" panose="020B0609030804020204" pitchFamily="49" charset="0"/>
+            </a:endParaRPr>
+          </a:p>
+          <a:p>
+            <a:r>
+              <a:rPr lang="en-US" sz="1400" dirty="0">
+                <a:solidFill>
+                  <a:schemeClr val="accent6"/>
+                </a:solidFill>
+                <a:latin typeface="Menlo" panose="020B0609030804020204" pitchFamily="49" charset="0"/>
+                <a:ea typeface="Menlo" panose="020B0609030804020204" pitchFamily="49" charset="0"/>
+                <a:cs typeface="Menlo" panose="020B0609030804020204" pitchFamily="49" charset="0"/>
+              </a:rPr>
+              <a:t>$: </a:t>
+            </a:r>
+            <a:r>
+              <a:rPr lang="en-US" sz="1400" dirty="0" err="1">
+                <a:solidFill>
+                  <a:schemeClr val="accent6"/>
+                </a:solidFill>
+                <a:latin typeface="Menlo" panose="020B0609030804020204" pitchFamily="49" charset="0"/>
+                <a:ea typeface="Menlo" panose="020B0609030804020204" pitchFamily="49" charset="0"/>
+                <a:cs typeface="Menlo" panose="020B0609030804020204" pitchFamily="49" charset="0"/>
+              </a:rPr>
+              <a:t>apptainer</a:t>
+            </a:r>
+            <a:r>
+              <a:rPr lang="en-US" sz="1400" dirty="0">
+                <a:solidFill>
+                  <a:schemeClr val="accent6"/>
+                </a:solidFill>
+                <a:latin typeface="Menlo" panose="020B0609030804020204" pitchFamily="49" charset="0"/>
+                <a:ea typeface="Menlo" panose="020B0609030804020204" pitchFamily="49" charset="0"/>
+                <a:cs typeface="Menlo" panose="020B0609030804020204" pitchFamily="49" charset="0"/>
+              </a:rPr>
+              <a:t> pull [image you want]</a:t>
+            </a:r>
+          </a:p>
+          <a:p>
+            <a:r>
+              <a:rPr lang="en-US" sz="1400" dirty="0">
+                <a:solidFill>
+                  <a:schemeClr val="accent6"/>
+                </a:solidFill>
+                <a:latin typeface="Menlo" panose="020B0609030804020204" pitchFamily="49" charset="0"/>
+                <a:ea typeface="Menlo" panose="020B0609030804020204" pitchFamily="49" charset="0"/>
+                <a:cs typeface="Menlo" panose="020B0609030804020204" pitchFamily="49" charset="0"/>
+              </a:rPr>
+              <a:t>$: </a:t>
+            </a:r>
+            <a:r>
+              <a:rPr lang="en-US" sz="1400" dirty="0" err="1">
+                <a:solidFill>
+                  <a:schemeClr val="accent6"/>
+                </a:solidFill>
+                <a:latin typeface="Menlo" panose="020B0609030804020204" pitchFamily="49" charset="0"/>
+                <a:ea typeface="Menlo" panose="020B0609030804020204" pitchFamily="49" charset="0"/>
+                <a:cs typeface="Menlo" panose="020B0609030804020204" pitchFamily="49" charset="0"/>
+              </a:rPr>
+              <a:t>apptainer</a:t>
+            </a:r>
+            <a:r>
+              <a:rPr lang="en-US" sz="1400" dirty="0">
+                <a:solidFill>
+                  <a:schemeClr val="accent6"/>
+                </a:solidFill>
+                <a:latin typeface="Menlo" panose="020B0609030804020204" pitchFamily="49" charset="0"/>
+                <a:ea typeface="Menlo" panose="020B0609030804020204" pitchFamily="49" charset="0"/>
+                <a:cs typeface="Menlo" panose="020B0609030804020204" pitchFamily="49" charset="0"/>
+              </a:rPr>
+              <a:t> exec </a:t>
+            </a:r>
+            <a:r>
+              <a:rPr lang="en-US" sz="1400" dirty="0" err="1">
+                <a:solidFill>
+                  <a:schemeClr val="accent6"/>
+                </a:solidFill>
+                <a:latin typeface="Menlo" panose="020B0609030804020204" pitchFamily="49" charset="0"/>
+                <a:ea typeface="Menlo" panose="020B0609030804020204" pitchFamily="49" charset="0"/>
+                <a:cs typeface="Menlo" panose="020B0609030804020204" pitchFamily="49" charset="0"/>
+              </a:rPr>
               <a:t>program.sif</a:t>
             </a:r>
             <a:r>
-              <a:rPr lang="en-US" dirty="0"/>
+              <a:rPr lang="en-US" sz="1400" dirty="0">
+                <a:solidFill>
+                  <a:schemeClr val="accent6"/>
+                </a:solidFill>
+                <a:latin typeface="Menlo" panose="020B0609030804020204" pitchFamily="49" charset="0"/>
+                <a:ea typeface="Menlo" panose="020B0609030804020204" pitchFamily="49" charset="0"/>
+                <a:cs typeface="Menlo" panose="020B0609030804020204" pitchFamily="49" charset="0"/>
+              </a:rPr>
               <a:t> -h</a:t>
             </a:r>
           </a:p>
           <a:p>
-            <a:endParaRPr lang="en-US" dirty="0"/>
-          </a:p>
-          <a:p>
-            <a:endParaRPr lang="en-US" dirty="0"/>
+            <a:endParaRPr lang="en-US" sz="1400" dirty="0">
+              <a:latin typeface="Menlo" panose="020B0609030804020204" pitchFamily="49" charset="0"/>
+              <a:ea typeface="Menlo" panose="020B0609030804020204" pitchFamily="49" charset="0"/>
+              <a:cs typeface="Menlo" panose="020B0609030804020204" pitchFamily="49" charset="0"/>
+            </a:endParaRPr>
+          </a:p>
+          <a:p>
+            <a:endParaRPr lang="en-US" sz="1400" dirty="0">
+              <a:latin typeface="Menlo" panose="020B0609030804020204" pitchFamily="49" charset="0"/>
+              <a:ea typeface="Menlo" panose="020B0609030804020204" pitchFamily="49" charset="0"/>
+              <a:cs typeface="Menlo" panose="020B0609030804020204" pitchFamily="49" charset="0"/>
+            </a:endParaRPr>
           </a:p>
         </p:txBody>
       </p:sp>
@@ -8922,7 +9126,7 @@
         <p:cNvPr id="1" name="">
           <a:extLst>
             <a:ext uri="{FF2B5EF4-FFF2-40B4-BE49-F238E27FC236}">
-              <a16:creationId xmlns:a16="http://schemas.microsoft.com/office/drawing/2014/main" id="{45849598-BD4D-70E9-70C2-7215FDC0508E}"/>
+              <a16:creationId xmlns:a16="http://schemas.microsoft.com/office/drawing/2014/main" id="{D447E8A8-D195-D5BD-FF40-708B62C1AE0E}"/>
             </a:ext>
           </a:extLst>
         </p:cNvPr>
@@ -8939,42 +9143,64 @@
       </p:grpSpPr>
       <p:sp>
         <p:nvSpPr>
-          <p:cNvPr id="2" name="Title 1">
-            <a:extLst>
-              <a:ext uri="{FF2B5EF4-FFF2-40B4-BE49-F238E27FC236}">
-                <a16:creationId xmlns:a16="http://schemas.microsoft.com/office/drawing/2014/main" id="{FFF1D083-096E-849D-8015-B191ED5D6A34}"/>
-              </a:ext>
-            </a:extLst>
-          </p:cNvPr>
-          <p:cNvSpPr>
-            <a:spLocks noGrp="1"/>
+          <p:cNvPr id="7" name="Title 1">
+            <a:extLst>
+              <a:ext uri="{FF2B5EF4-FFF2-40B4-BE49-F238E27FC236}">
+                <a16:creationId xmlns:a16="http://schemas.microsoft.com/office/drawing/2014/main" id="{685619AF-B272-1E22-1E16-9639608C3509}"/>
+              </a:ext>
+            </a:extLst>
+          </p:cNvPr>
+          <p:cNvSpPr txBox="1">
+            <a:spLocks/>
           </p:cNvSpPr>
-          <p:nvPr>
-            <p:ph type="title"/>
-          </p:nvPr>
-        </p:nvSpPr>
-        <p:spPr/>
+          <p:nvPr/>
+        </p:nvSpPr>
+        <p:spPr>
+          <a:xfrm>
+            <a:off x="990600" y="517525"/>
+            <a:ext cx="10515600" cy="1325563"/>
+          </a:xfrm>
+          <a:prstGeom prst="rect">
+            <a:avLst/>
+          </a:prstGeom>
+        </p:spPr>
         <p:txBody>
-          <a:bodyPr>
+          <a:bodyPr vert="horz" lIns="91440" tIns="45720" rIns="91440" bIns="45720" rtlCol="0" anchor="ctr">
             <a:normAutofit/>
           </a:bodyPr>
-          <a:lstStyle/>
-          <a:p>
-            <a:r>
-              <a:rPr lang="en-US" sz="4000" dirty="0">
-                <a:latin typeface="Helvetica" pitchFamily="2" charset="0"/>
-              </a:rPr>
-              <a:t>Leave us your feedback!</a:t>
+          <a:lstStyle>
+            <a:lvl1pPr algn="l" defTabSz="914400" rtl="0" eaLnBrk="1" latinLnBrk="0" hangingPunct="1">
+              <a:lnSpc>
+                <a:spcPct val="90000"/>
+              </a:lnSpc>
+              <a:spcBef>
+                <a:spcPct val="0"/>
+              </a:spcBef>
+              <a:buNone/>
+              <a:defRPr sz="4400" kern="1200">
+                <a:solidFill>
+                  <a:schemeClr val="tx1"/>
+                </a:solidFill>
+                <a:latin typeface="+mj-lt"/>
+                <a:ea typeface="+mj-ea"/>
+                <a:cs typeface="+mj-cs"/>
+              </a:defRPr>
+            </a:lvl1pPr>
+          </a:lstStyle>
+          <a:p>
+            <a:r>
+              <a:rPr lang="en-US" b="1" dirty="0"/>
+              <a:t>Globus set up live</a:t>
             </a:r>
           </a:p>
         </p:txBody>
       </p:sp>
       <p:pic>
         <p:nvPicPr>
-          <p:cNvPr id="2050" name="Picture 2" descr="Suggestion - Free communications icons">
-            <a:extLst>
-              <a:ext uri="{FF2B5EF4-FFF2-40B4-BE49-F238E27FC236}">
-                <a16:creationId xmlns:a16="http://schemas.microsoft.com/office/drawing/2014/main" id="{5020596A-D3B5-18D2-1D37-3B88E5CD788C}"/>
+          <p:cNvPr id="3" name="Picture 2" descr="HOWTO: Use Globus (Overview) | Ohio Supercomputer Center">
+            <a:extLst>
+              <a:ext uri="{FF2B5EF4-FFF2-40B4-BE49-F238E27FC236}">
+                <a16:creationId xmlns:a16="http://schemas.microsoft.com/office/drawing/2014/main" id="{50435BBF-D0E4-1C9C-C778-4DEA5A5F7793}"/>
               </a:ext>
             </a:extLst>
           </p:cNvPr>
@@ -8998,8 +9224,8 @@
         </p:blipFill>
         <p:spPr bwMode="auto">
           <a:xfrm>
-            <a:off x="1182760" y="1866375"/>
-            <a:ext cx="611909" cy="611909"/>
+            <a:off x="5513200" y="517525"/>
+            <a:ext cx="1069649" cy="965359"/>
           </a:xfrm>
           <a:prstGeom prst="rect">
             <a:avLst/>
@@ -9016,162 +9242,10 @@
           </a:extLst>
         </p:spPr>
       </p:pic>
-      <p:sp>
-        <p:nvSpPr>
-          <p:cNvPr id="3" name="TextBox 2">
-            <a:extLst>
-              <a:ext uri="{FF2B5EF4-FFF2-40B4-BE49-F238E27FC236}">
-                <a16:creationId xmlns:a16="http://schemas.microsoft.com/office/drawing/2014/main" id="{49C98279-5765-9BFA-2B15-04A8FEDAA130}"/>
-              </a:ext>
-            </a:extLst>
-          </p:cNvPr>
-          <p:cNvSpPr txBox="1"/>
-          <p:nvPr/>
-        </p:nvSpPr>
-        <p:spPr>
-          <a:xfrm>
-            <a:off x="1794669" y="2206232"/>
-            <a:ext cx="4606131" cy="2031325"/>
-          </a:xfrm>
-          <a:prstGeom prst="rect">
-            <a:avLst/>
-          </a:prstGeom>
-          <a:noFill/>
-        </p:spPr>
-        <p:txBody>
-          <a:bodyPr wrap="square" rtlCol="0">
-            <a:spAutoFit/>
-          </a:bodyPr>
-          <a:lstStyle/>
-          <a:p>
-            <a:r>
-              <a:rPr lang="en-US" dirty="0">
-                <a:latin typeface="Helvetica" pitchFamily="2" charset="0"/>
-              </a:rPr>
-              <a:t>Please let us know if you have suggestions!</a:t>
-            </a:r>
-          </a:p>
-          <a:p>
-            <a:endParaRPr lang="en-US" dirty="0">
-              <a:latin typeface="Helvetica" pitchFamily="2" charset="0"/>
-            </a:endParaRPr>
-          </a:p>
-          <a:p>
-            <a:pPr marL="342900" indent="-342900">
-              <a:buAutoNum type="arabicPeriod"/>
-            </a:pPr>
-            <a:r>
-              <a:rPr lang="en-US" dirty="0">
-                <a:latin typeface="Helvetica" pitchFamily="2" charset="0"/>
-              </a:rPr>
-              <a:t>What did you like about this workshop?</a:t>
-            </a:r>
-          </a:p>
-          <a:p>
-            <a:pPr marL="342900" indent="-342900">
-              <a:buAutoNum type="arabicPeriod"/>
-            </a:pPr>
-            <a:r>
-              <a:rPr lang="en-US" dirty="0">
-                <a:latin typeface="Helvetica" pitchFamily="2" charset="0"/>
-              </a:rPr>
-              <a:t>What could be improved?</a:t>
-            </a:r>
-          </a:p>
-          <a:p>
-            <a:pPr marL="342900" indent="-342900">
-              <a:buAutoNum type="arabicPeriod"/>
-            </a:pPr>
-            <a:r>
-              <a:rPr lang="en-US" dirty="0">
-                <a:latin typeface="Helvetica" pitchFamily="2" charset="0"/>
-              </a:rPr>
-              <a:t>Any suggestions for the following sessions (i.e. change in order, other topics, special interests)</a:t>
-            </a:r>
-          </a:p>
-        </p:txBody>
-      </p:sp>
-      <p:pic>
-        <p:nvPicPr>
-          <p:cNvPr id="5122" name="Picture 2" descr="Pen Icon Graphic by rudezstudio · Creative Fabrica">
-            <a:extLst>
-              <a:ext uri="{FF2B5EF4-FFF2-40B4-BE49-F238E27FC236}">
-                <a16:creationId xmlns:a16="http://schemas.microsoft.com/office/drawing/2014/main" id="{0DEEB3E2-D200-94F1-EB2C-1F94DD52C3EE}"/>
-              </a:ext>
-            </a:extLst>
-          </p:cNvPr>
-          <p:cNvPicPr>
-            <a:picLocks noChangeAspect="1" noChangeArrowheads="1"/>
-          </p:cNvPicPr>
-          <p:nvPr/>
-        </p:nvPicPr>
-        <p:blipFill>
-          <a:blip r:embed="rId3">
-            <a:extLst>
-              <a:ext uri="{28A0092B-C50C-407E-A947-70E740481C1C}">
-                <a14:useLocalDpi xmlns:a14="http://schemas.microsoft.com/office/drawing/2010/main" val="0"/>
-              </a:ext>
-            </a:extLst>
-          </a:blip>
-          <a:srcRect/>
-          <a:stretch>
-            <a:fillRect/>
-          </a:stretch>
-        </p:blipFill>
-        <p:spPr bwMode="auto">
-          <a:xfrm>
-            <a:off x="6521365" y="340845"/>
-            <a:ext cx="1576712" cy="1049329"/>
-          </a:xfrm>
-          <a:prstGeom prst="rect">
-            <a:avLst/>
-          </a:prstGeom>
-          <a:noFill/>
-          <a:extLst>
-            <a:ext uri="{909E8E84-426E-40DD-AFC4-6F175D3DCCD1}">
-              <a14:hiddenFill xmlns:a14="http://schemas.microsoft.com/office/drawing/2010/main">
-                <a:solidFill>
-                  <a:srgbClr val="FFFFFF"/>
-                </a:solidFill>
-              </a14:hiddenFill>
-            </a:ext>
-          </a:extLst>
-        </p:spPr>
-      </p:pic>
-      <p:pic>
-        <p:nvPicPr>
-          <p:cNvPr id="4" name="Picture 3">
-            <a:extLst>
-              <a:ext uri="{FF2B5EF4-FFF2-40B4-BE49-F238E27FC236}">
-                <a16:creationId xmlns:a16="http://schemas.microsoft.com/office/drawing/2014/main" id="{7EAC7020-766F-B0AF-849C-A72B60F880DB}"/>
-              </a:ext>
-            </a:extLst>
-          </p:cNvPr>
-          <p:cNvPicPr>
-            <a:picLocks noChangeAspect="1"/>
-          </p:cNvPicPr>
-          <p:nvPr/>
-        </p:nvPicPr>
-        <p:blipFill>
-          <a:blip r:embed="rId4"/>
-          <a:stretch>
-            <a:fillRect/>
-          </a:stretch>
-        </p:blipFill>
-        <p:spPr>
-          <a:xfrm>
-            <a:off x="7012709" y="1714968"/>
-            <a:ext cx="4606131" cy="4577873"/>
-          </a:xfrm>
-          <a:prstGeom prst="rect">
-            <a:avLst/>
-          </a:prstGeom>
-        </p:spPr>
-      </p:pic>
     </p:spTree>
     <p:extLst>
       <p:ext uri="{BB962C8B-B14F-4D97-AF65-F5344CB8AC3E}">
-        <p14:creationId xmlns:p14="http://schemas.microsoft.com/office/powerpoint/2010/main" val="830814953"/>
+        <p14:creationId xmlns:p14="http://schemas.microsoft.com/office/powerpoint/2010/main" val="706912703"/>
       </p:ext>
     </p:extLst>
   </p:cSld>
@@ -9439,6 +9513,499 @@
     <p:extLst>
       <p:ext uri="{BB962C8B-B14F-4D97-AF65-F5344CB8AC3E}">
         <p14:creationId xmlns:p14="http://schemas.microsoft.com/office/powerpoint/2010/main" val="2528438318"/>
+      </p:ext>
+    </p:extLst>
+  </p:cSld>
+  <p:clrMapOvr>
+    <a:masterClrMapping/>
+  </p:clrMapOvr>
+</p:sld>
+</file>
+
+<file path=ppt/slides/slide20.xml><?xml version="1.0" encoding="utf-8"?>
+<p:sld xmlns:a="http://schemas.openxmlformats.org/drawingml/2006/main" xmlns:r="http://schemas.openxmlformats.org/officeDocument/2006/relationships" xmlns:p="http://schemas.openxmlformats.org/presentationml/2006/main">
+  <p:cSld>
+    <p:spTree>
+      <p:nvGrpSpPr>
+        <p:cNvPr id="1" name="">
+          <a:extLst>
+            <a:ext uri="{FF2B5EF4-FFF2-40B4-BE49-F238E27FC236}">
+              <a16:creationId xmlns:a16="http://schemas.microsoft.com/office/drawing/2014/main" id="{F9E46914-EB09-5C7F-70B7-4D48FB6E8BBD}"/>
+            </a:ext>
+          </a:extLst>
+        </p:cNvPr>
+        <p:cNvGrpSpPr/>
+        <p:nvPr/>
+      </p:nvGrpSpPr>
+      <p:grpSpPr>
+        <a:xfrm>
+          <a:off x="0" y="0"/>
+          <a:ext cx="0" cy="0"/>
+          <a:chOff x="0" y="0"/>
+          <a:chExt cx="0" cy="0"/>
+        </a:xfrm>
+      </p:grpSpPr>
+      <p:sp>
+        <p:nvSpPr>
+          <p:cNvPr id="7" name="Title 1">
+            <a:extLst>
+              <a:ext uri="{FF2B5EF4-FFF2-40B4-BE49-F238E27FC236}">
+                <a16:creationId xmlns:a16="http://schemas.microsoft.com/office/drawing/2014/main" id="{A1FEEA4C-CDF2-73EF-DCCC-1E8D3AD48F3F}"/>
+              </a:ext>
+            </a:extLst>
+          </p:cNvPr>
+          <p:cNvSpPr txBox="1">
+            <a:spLocks/>
+          </p:cNvSpPr>
+          <p:nvPr/>
+        </p:nvSpPr>
+        <p:spPr>
+          <a:xfrm>
+            <a:off x="990600" y="517525"/>
+            <a:ext cx="10515600" cy="1325563"/>
+          </a:xfrm>
+          <a:prstGeom prst="rect">
+            <a:avLst/>
+          </a:prstGeom>
+        </p:spPr>
+        <p:txBody>
+          <a:bodyPr vert="horz" lIns="91440" tIns="45720" rIns="91440" bIns="45720" rtlCol="0" anchor="ctr">
+            <a:normAutofit/>
+          </a:bodyPr>
+          <a:lstStyle>
+            <a:lvl1pPr algn="l" defTabSz="914400" rtl="0" eaLnBrk="1" latinLnBrk="0" hangingPunct="1">
+              <a:lnSpc>
+                <a:spcPct val="90000"/>
+              </a:lnSpc>
+              <a:spcBef>
+                <a:spcPct val="0"/>
+              </a:spcBef>
+              <a:buNone/>
+              <a:defRPr sz="4400" kern="1200">
+                <a:solidFill>
+                  <a:schemeClr val="tx1"/>
+                </a:solidFill>
+                <a:latin typeface="+mj-lt"/>
+                <a:ea typeface="+mj-ea"/>
+                <a:cs typeface="+mj-cs"/>
+              </a:defRPr>
+            </a:lvl1pPr>
+          </a:lstStyle>
+          <a:p>
+            <a:r>
+              <a:rPr lang="en-US" b="1" dirty="0"/>
+              <a:t>Try it yourself!</a:t>
+            </a:r>
+          </a:p>
+        </p:txBody>
+      </p:sp>
+      <p:pic>
+        <p:nvPicPr>
+          <p:cNvPr id="8" name="Picture 6" descr="coding Symbol mark in filled style 47628836 Vector Art at Vecteezy">
+            <a:extLst>
+              <a:ext uri="{FF2B5EF4-FFF2-40B4-BE49-F238E27FC236}">
+                <a16:creationId xmlns:a16="http://schemas.microsoft.com/office/drawing/2014/main" id="{204BE7DB-E88A-1AA6-0F49-C92C33896E61}"/>
+              </a:ext>
+            </a:extLst>
+          </p:cNvPr>
+          <p:cNvPicPr>
+            <a:picLocks noChangeAspect="1" noChangeArrowheads="1"/>
+          </p:cNvPicPr>
+          <p:nvPr/>
+        </p:nvPicPr>
+        <p:blipFill>
+          <a:blip r:embed="rId2">
+            <a:duotone>
+              <a:prstClr val="black"/>
+              <a:schemeClr val="accent4">
+                <a:tint val="45000"/>
+                <a:satMod val="400000"/>
+              </a:schemeClr>
+            </a:duotone>
+            <a:extLst>
+              <a:ext uri="{28A0092B-C50C-407E-A947-70E740481C1C}">
+                <a14:useLocalDpi xmlns:a14="http://schemas.microsoft.com/office/drawing/2010/main" val="0"/>
+              </a:ext>
+            </a:extLst>
+          </a:blip>
+          <a:srcRect/>
+          <a:stretch>
+            <a:fillRect/>
+          </a:stretch>
+        </p:blipFill>
+        <p:spPr bwMode="auto">
+          <a:xfrm>
+            <a:off x="4917440" y="626429"/>
+            <a:ext cx="904240" cy="904240"/>
+          </a:xfrm>
+          <a:prstGeom prst="rect">
+            <a:avLst/>
+          </a:prstGeom>
+          <a:noFill/>
+          <a:extLst>
+            <a:ext uri="{909E8E84-426E-40DD-AFC4-6F175D3DCCD1}">
+              <a14:hiddenFill xmlns:a14="http://schemas.microsoft.com/office/drawing/2010/main">
+                <a:solidFill>
+                  <a:srgbClr val="FFFFFF"/>
+                </a:solidFill>
+              </a14:hiddenFill>
+            </a:ext>
+          </a:extLst>
+        </p:spPr>
+      </p:pic>
+      <p:sp>
+        <p:nvSpPr>
+          <p:cNvPr id="2" name="TextBox 1">
+            <a:extLst>
+              <a:ext uri="{FF2B5EF4-FFF2-40B4-BE49-F238E27FC236}">
+                <a16:creationId xmlns:a16="http://schemas.microsoft.com/office/drawing/2014/main" id="{C4791D9F-C201-7278-448A-21C996DEE015}"/>
+              </a:ext>
+            </a:extLst>
+          </p:cNvPr>
+          <p:cNvSpPr txBox="1"/>
+          <p:nvPr/>
+        </p:nvSpPr>
+        <p:spPr>
+          <a:xfrm>
+            <a:off x="990600" y="2094496"/>
+            <a:ext cx="6152646" cy="1711366"/>
+          </a:xfrm>
+          <a:prstGeom prst="rect">
+            <a:avLst/>
+          </a:prstGeom>
+          <a:noFill/>
+        </p:spPr>
+        <p:txBody>
+          <a:bodyPr wrap="none" rtlCol="0">
+            <a:spAutoFit/>
+          </a:bodyPr>
+          <a:lstStyle/>
+          <a:p>
+            <a:pPr>
+              <a:lnSpc>
+                <a:spcPct val="150000"/>
+              </a:lnSpc>
+            </a:pPr>
+            <a:r>
+              <a:rPr lang="en-US" dirty="0"/>
+              <a:t>Choose or create a file to move around and try to move it with: </a:t>
+            </a:r>
+            <a:br>
+              <a:rPr lang="en-US" dirty="0"/>
+            </a:br>
+            <a:r>
+              <a:rPr lang="en-US" dirty="0"/>
+              <a:t>- On Demand</a:t>
+            </a:r>
+          </a:p>
+          <a:p>
+            <a:pPr marL="285750" indent="-285750">
+              <a:lnSpc>
+                <a:spcPct val="150000"/>
+              </a:lnSpc>
+              <a:buFontTx/>
+              <a:buChar char="-"/>
+            </a:pPr>
+            <a:r>
+              <a:rPr lang="en-US" dirty="0" err="1">
+                <a:solidFill>
+                  <a:schemeClr val="accent6"/>
+                </a:solidFill>
+              </a:rPr>
+              <a:t>scp</a:t>
+            </a:r>
+            <a:endParaRPr lang="en-US" dirty="0">
+              <a:solidFill>
+                <a:schemeClr val="accent6"/>
+              </a:solidFill>
+            </a:endParaRPr>
+          </a:p>
+          <a:p>
+            <a:pPr marL="285750" indent="-285750">
+              <a:lnSpc>
+                <a:spcPct val="150000"/>
+              </a:lnSpc>
+              <a:buFontTx/>
+              <a:buChar char="-"/>
+            </a:pPr>
+            <a:r>
+              <a:rPr lang="en-US" dirty="0"/>
+              <a:t>Globus</a:t>
+            </a:r>
+          </a:p>
+        </p:txBody>
+      </p:sp>
+    </p:spTree>
+    <p:extLst>
+      <p:ext uri="{BB962C8B-B14F-4D97-AF65-F5344CB8AC3E}">
+        <p14:creationId xmlns:p14="http://schemas.microsoft.com/office/powerpoint/2010/main" val="1785707755"/>
+      </p:ext>
+    </p:extLst>
+  </p:cSld>
+  <p:clrMapOvr>
+    <a:masterClrMapping/>
+  </p:clrMapOvr>
+</p:sld>
+</file>
+
+<file path=ppt/slides/slide21.xml><?xml version="1.0" encoding="utf-8"?>
+<p:sld xmlns:a="http://schemas.openxmlformats.org/drawingml/2006/main" xmlns:r="http://schemas.openxmlformats.org/officeDocument/2006/relationships" xmlns:p="http://schemas.openxmlformats.org/presentationml/2006/main">
+  <p:cSld>
+    <p:spTree>
+      <p:nvGrpSpPr>
+        <p:cNvPr id="1" name="">
+          <a:extLst>
+            <a:ext uri="{FF2B5EF4-FFF2-40B4-BE49-F238E27FC236}">
+              <a16:creationId xmlns:a16="http://schemas.microsoft.com/office/drawing/2014/main" id="{45849598-BD4D-70E9-70C2-7215FDC0508E}"/>
+            </a:ext>
+          </a:extLst>
+        </p:cNvPr>
+        <p:cNvGrpSpPr/>
+        <p:nvPr/>
+      </p:nvGrpSpPr>
+      <p:grpSpPr>
+        <a:xfrm>
+          <a:off x="0" y="0"/>
+          <a:ext cx="0" cy="0"/>
+          <a:chOff x="0" y="0"/>
+          <a:chExt cx="0" cy="0"/>
+        </a:xfrm>
+      </p:grpSpPr>
+      <p:sp>
+        <p:nvSpPr>
+          <p:cNvPr id="2" name="Title 1">
+            <a:extLst>
+              <a:ext uri="{FF2B5EF4-FFF2-40B4-BE49-F238E27FC236}">
+                <a16:creationId xmlns:a16="http://schemas.microsoft.com/office/drawing/2014/main" id="{FFF1D083-096E-849D-8015-B191ED5D6A34}"/>
+              </a:ext>
+            </a:extLst>
+          </p:cNvPr>
+          <p:cNvSpPr>
+            <a:spLocks noGrp="1"/>
+          </p:cNvSpPr>
+          <p:nvPr>
+            <p:ph type="title"/>
+          </p:nvPr>
+        </p:nvSpPr>
+        <p:spPr/>
+        <p:txBody>
+          <a:bodyPr>
+            <a:normAutofit/>
+          </a:bodyPr>
+          <a:lstStyle/>
+          <a:p>
+            <a:r>
+              <a:rPr lang="en-US" sz="4000" dirty="0">
+                <a:latin typeface="Helvetica" pitchFamily="2" charset="0"/>
+              </a:rPr>
+              <a:t>Leave us your feedback!</a:t>
+            </a:r>
+          </a:p>
+        </p:txBody>
+      </p:sp>
+      <p:pic>
+        <p:nvPicPr>
+          <p:cNvPr id="2050" name="Picture 2" descr="Suggestion - Free communications icons">
+            <a:extLst>
+              <a:ext uri="{FF2B5EF4-FFF2-40B4-BE49-F238E27FC236}">
+                <a16:creationId xmlns:a16="http://schemas.microsoft.com/office/drawing/2014/main" id="{5020596A-D3B5-18D2-1D37-3B88E5CD788C}"/>
+              </a:ext>
+            </a:extLst>
+          </p:cNvPr>
+          <p:cNvPicPr>
+            <a:picLocks noChangeAspect="1" noChangeArrowheads="1"/>
+          </p:cNvPicPr>
+          <p:nvPr/>
+        </p:nvPicPr>
+        <p:blipFill>
+          <a:blip r:embed="rId2">
+            <a:extLst>
+              <a:ext uri="{28A0092B-C50C-407E-A947-70E740481C1C}">
+                <a14:useLocalDpi xmlns:a14="http://schemas.microsoft.com/office/drawing/2010/main" val="0"/>
+              </a:ext>
+            </a:extLst>
+          </a:blip>
+          <a:srcRect/>
+          <a:stretch>
+            <a:fillRect/>
+          </a:stretch>
+        </p:blipFill>
+        <p:spPr bwMode="auto">
+          <a:xfrm>
+            <a:off x="1182760" y="1866375"/>
+            <a:ext cx="611909" cy="611909"/>
+          </a:xfrm>
+          <a:prstGeom prst="rect">
+            <a:avLst/>
+          </a:prstGeom>
+          <a:noFill/>
+          <a:extLst>
+            <a:ext uri="{909E8E84-426E-40DD-AFC4-6F175D3DCCD1}">
+              <a14:hiddenFill xmlns:a14="http://schemas.microsoft.com/office/drawing/2010/main">
+                <a:solidFill>
+                  <a:srgbClr val="FFFFFF"/>
+                </a:solidFill>
+              </a14:hiddenFill>
+            </a:ext>
+          </a:extLst>
+        </p:spPr>
+      </p:pic>
+      <p:sp>
+        <p:nvSpPr>
+          <p:cNvPr id="3" name="TextBox 2">
+            <a:extLst>
+              <a:ext uri="{FF2B5EF4-FFF2-40B4-BE49-F238E27FC236}">
+                <a16:creationId xmlns:a16="http://schemas.microsoft.com/office/drawing/2014/main" id="{49C98279-5765-9BFA-2B15-04A8FEDAA130}"/>
+              </a:ext>
+            </a:extLst>
+          </p:cNvPr>
+          <p:cNvSpPr txBox="1"/>
+          <p:nvPr/>
+        </p:nvSpPr>
+        <p:spPr>
+          <a:xfrm>
+            <a:off x="1794669" y="2206232"/>
+            <a:ext cx="4606131" cy="2031325"/>
+          </a:xfrm>
+          <a:prstGeom prst="rect">
+            <a:avLst/>
+          </a:prstGeom>
+          <a:noFill/>
+        </p:spPr>
+        <p:txBody>
+          <a:bodyPr wrap="square" rtlCol="0">
+            <a:spAutoFit/>
+          </a:bodyPr>
+          <a:lstStyle/>
+          <a:p>
+            <a:r>
+              <a:rPr lang="en-US" dirty="0">
+                <a:latin typeface="Helvetica" pitchFamily="2" charset="0"/>
+              </a:rPr>
+              <a:t>Please let us know if you have suggestions!</a:t>
+            </a:r>
+          </a:p>
+          <a:p>
+            <a:endParaRPr lang="en-US" dirty="0">
+              <a:latin typeface="Helvetica" pitchFamily="2" charset="0"/>
+            </a:endParaRPr>
+          </a:p>
+          <a:p>
+            <a:pPr marL="342900" indent="-342900">
+              <a:buAutoNum type="arabicPeriod"/>
+            </a:pPr>
+            <a:r>
+              <a:rPr lang="en-US" dirty="0">
+                <a:latin typeface="Helvetica" pitchFamily="2" charset="0"/>
+              </a:rPr>
+              <a:t>What did you like about this workshop?</a:t>
+            </a:r>
+          </a:p>
+          <a:p>
+            <a:pPr marL="342900" indent="-342900">
+              <a:buAutoNum type="arabicPeriod"/>
+            </a:pPr>
+            <a:r>
+              <a:rPr lang="en-US" dirty="0">
+                <a:latin typeface="Helvetica" pitchFamily="2" charset="0"/>
+              </a:rPr>
+              <a:t>What could be improved?</a:t>
+            </a:r>
+          </a:p>
+          <a:p>
+            <a:pPr marL="342900" indent="-342900">
+              <a:buAutoNum type="arabicPeriod"/>
+            </a:pPr>
+            <a:r>
+              <a:rPr lang="en-US" dirty="0">
+                <a:latin typeface="Helvetica" pitchFamily="2" charset="0"/>
+              </a:rPr>
+              <a:t>Any suggestions for the following sessions (i.e. change in order, other topics, special interests)</a:t>
+            </a:r>
+          </a:p>
+        </p:txBody>
+      </p:sp>
+      <p:pic>
+        <p:nvPicPr>
+          <p:cNvPr id="5122" name="Picture 2" descr="Pen Icon Graphic by rudezstudio · Creative Fabrica">
+            <a:extLst>
+              <a:ext uri="{FF2B5EF4-FFF2-40B4-BE49-F238E27FC236}">
+                <a16:creationId xmlns:a16="http://schemas.microsoft.com/office/drawing/2014/main" id="{0DEEB3E2-D200-94F1-EB2C-1F94DD52C3EE}"/>
+              </a:ext>
+            </a:extLst>
+          </p:cNvPr>
+          <p:cNvPicPr>
+            <a:picLocks noChangeAspect="1" noChangeArrowheads="1"/>
+          </p:cNvPicPr>
+          <p:nvPr/>
+        </p:nvPicPr>
+        <p:blipFill>
+          <a:blip r:embed="rId3">
+            <a:extLst>
+              <a:ext uri="{28A0092B-C50C-407E-A947-70E740481C1C}">
+                <a14:useLocalDpi xmlns:a14="http://schemas.microsoft.com/office/drawing/2010/main" val="0"/>
+              </a:ext>
+            </a:extLst>
+          </a:blip>
+          <a:srcRect/>
+          <a:stretch>
+            <a:fillRect/>
+          </a:stretch>
+        </p:blipFill>
+        <p:spPr bwMode="auto">
+          <a:xfrm>
+            <a:off x="6521365" y="340845"/>
+            <a:ext cx="1576712" cy="1049329"/>
+          </a:xfrm>
+          <a:prstGeom prst="rect">
+            <a:avLst/>
+          </a:prstGeom>
+          <a:noFill/>
+          <a:extLst>
+            <a:ext uri="{909E8E84-426E-40DD-AFC4-6F175D3DCCD1}">
+              <a14:hiddenFill xmlns:a14="http://schemas.microsoft.com/office/drawing/2010/main">
+                <a:solidFill>
+                  <a:srgbClr val="FFFFFF"/>
+                </a:solidFill>
+              </a14:hiddenFill>
+            </a:ext>
+          </a:extLst>
+        </p:spPr>
+      </p:pic>
+      <p:pic>
+        <p:nvPicPr>
+          <p:cNvPr id="4" name="Picture 3">
+            <a:extLst>
+              <a:ext uri="{FF2B5EF4-FFF2-40B4-BE49-F238E27FC236}">
+                <a16:creationId xmlns:a16="http://schemas.microsoft.com/office/drawing/2014/main" id="{7EAC7020-766F-B0AF-849C-A72B60F880DB}"/>
+              </a:ext>
+            </a:extLst>
+          </p:cNvPr>
+          <p:cNvPicPr>
+            <a:picLocks noChangeAspect="1"/>
+          </p:cNvPicPr>
+          <p:nvPr/>
+        </p:nvPicPr>
+        <p:blipFill>
+          <a:blip r:embed="rId4"/>
+          <a:stretch>
+            <a:fillRect/>
+          </a:stretch>
+        </p:blipFill>
+        <p:spPr>
+          <a:xfrm>
+            <a:off x="7012709" y="1714968"/>
+            <a:ext cx="4606131" cy="4577873"/>
+          </a:xfrm>
+          <a:prstGeom prst="rect">
+            <a:avLst/>
+          </a:prstGeom>
+        </p:spPr>
+      </p:pic>
+    </p:spTree>
+    <p:extLst>
+      <p:ext uri="{BB962C8B-B14F-4D97-AF65-F5344CB8AC3E}">
+        <p14:creationId xmlns:p14="http://schemas.microsoft.com/office/powerpoint/2010/main" val="830814953"/>
       </p:ext>
     </p:extLst>
   </p:cSld>
@@ -13091,6 +13658,314 @@
       </p:grpSpPr>
       <p:sp>
         <p:nvSpPr>
+          <p:cNvPr id="21" name="TextBox 20">
+            <a:extLst>
+              <a:ext uri="{FF2B5EF4-FFF2-40B4-BE49-F238E27FC236}">
+                <a16:creationId xmlns:a16="http://schemas.microsoft.com/office/drawing/2014/main" id="{889CB220-62D6-96EE-98EC-00AE9AAC3044}"/>
+              </a:ext>
+            </a:extLst>
+          </p:cNvPr>
+          <p:cNvSpPr txBox="1"/>
+          <p:nvPr/>
+        </p:nvSpPr>
+        <p:spPr>
+          <a:xfrm>
+            <a:off x="558128" y="6159990"/>
+            <a:ext cx="7709679" cy="507831"/>
+          </a:xfrm>
+          <a:prstGeom prst="rect">
+            <a:avLst/>
+          </a:prstGeom>
+          <a:solidFill>
+            <a:schemeClr val="accent3">
+              <a:lumMod val="20000"/>
+              <a:lumOff val="80000"/>
+            </a:schemeClr>
+          </a:solidFill>
+        </p:spPr>
+        <p:txBody>
+          <a:bodyPr wrap="square">
+            <a:spAutoFit/>
+          </a:bodyPr>
+          <a:lstStyle/>
+          <a:p>
+            <a:pPr>
+              <a:buNone/>
+            </a:pPr>
+            <a:r>
+              <a:rPr lang="en-US" sz="900" dirty="0">
+                <a:solidFill>
+                  <a:srgbClr val="000000"/>
+                </a:solidFill>
+                <a:effectLst/>
+                <a:latin typeface="Menlo" panose="020B0609030804020204" pitchFamily="49" charset="0"/>
+              </a:rPr>
+              <a:t># Change the </a:t>
+            </a:r>
+            <a:r>
+              <a:rPr lang="en-US" sz="900" dirty="0" err="1">
+                <a:solidFill>
+                  <a:srgbClr val="000000"/>
+                </a:solidFill>
+                <a:effectLst/>
+                <a:latin typeface="Menlo" panose="020B0609030804020204" pitchFamily="49" charset="0"/>
+              </a:rPr>
+              <a:t>conda</a:t>
+            </a:r>
+            <a:r>
+              <a:rPr lang="en-US" sz="900" dirty="0">
+                <a:solidFill>
+                  <a:srgbClr val="000000"/>
+                </a:solidFill>
+                <a:effectLst/>
+                <a:latin typeface="Menlo" panose="020B0609030804020204" pitchFamily="49" charset="0"/>
+              </a:rPr>
+              <a:t> </a:t>
+            </a:r>
+            <a:r>
+              <a:rPr lang="en-US" sz="900" dirty="0" err="1">
+                <a:solidFill>
+                  <a:srgbClr val="000000"/>
+                </a:solidFill>
+                <a:effectLst/>
+                <a:latin typeface="Menlo" panose="020B0609030804020204" pitchFamily="49" charset="0"/>
+              </a:rPr>
+              <a:t>envs</a:t>
+            </a:r>
+            <a:r>
+              <a:rPr lang="en-US" sz="900" dirty="0">
+                <a:solidFill>
+                  <a:srgbClr val="000000"/>
+                </a:solidFill>
+                <a:effectLst/>
+                <a:latin typeface="Menlo" panose="020B0609030804020204" pitchFamily="49" charset="0"/>
+              </a:rPr>
+              <a:t> and pkgs default paths</a:t>
+            </a:r>
+          </a:p>
+          <a:p>
+            <a:pPr>
+              <a:buNone/>
+            </a:pPr>
+            <a:r>
+              <a:rPr lang="en-US" sz="900" dirty="0">
+                <a:solidFill>
+                  <a:srgbClr val="000000"/>
+                </a:solidFill>
+                <a:latin typeface="Menlo" panose="020B0609030804020204" pitchFamily="49" charset="0"/>
+              </a:rPr>
+              <a:t>e</a:t>
+            </a:r>
+            <a:r>
+              <a:rPr lang="en-US" sz="900" dirty="0">
+                <a:solidFill>
+                  <a:srgbClr val="000000"/>
+                </a:solidFill>
+                <a:effectLst/>
+                <a:latin typeface="Menlo" panose="020B0609030804020204" pitchFamily="49" charset="0"/>
+              </a:rPr>
+              <a:t>xport CONDA_ENVS_PATH="/rs1/researchers/b/</a:t>
+            </a:r>
+            <a:r>
+              <a:rPr lang="en-US" sz="900" dirty="0" err="1">
+                <a:solidFill>
+                  <a:srgbClr val="000000"/>
+                </a:solidFill>
+                <a:effectLst/>
+                <a:latin typeface="Menlo" panose="020B0609030804020204" pitchFamily="49" charset="0"/>
+              </a:rPr>
+              <a:t>blhurwit</a:t>
+            </a:r>
+            <a:r>
+              <a:rPr lang="en-US" sz="900" dirty="0">
+                <a:solidFill>
+                  <a:srgbClr val="000000"/>
+                </a:solidFill>
+                <a:effectLst/>
+                <a:latin typeface="Menlo" panose="020B0609030804020204" pitchFamily="49" charset="0"/>
+              </a:rPr>
+              <a:t>/users/</a:t>
+            </a:r>
+            <a:r>
+              <a:rPr lang="en-US" sz="900" dirty="0" err="1">
+                <a:solidFill>
+                  <a:srgbClr val="000000"/>
+                </a:solidFill>
+                <a:effectLst/>
+                <a:latin typeface="Menlo" panose="020B0609030804020204" pitchFamily="49" charset="0"/>
+              </a:rPr>
+              <a:t>mtouced</a:t>
+            </a:r>
+            <a:r>
+              <a:rPr lang="en-US" sz="900" dirty="0">
+                <a:solidFill>
+                  <a:srgbClr val="000000"/>
+                </a:solidFill>
+                <a:effectLst/>
+                <a:latin typeface="Menlo" panose="020B0609030804020204" pitchFamily="49" charset="0"/>
+              </a:rPr>
+              <a:t>/installations/</a:t>
+            </a:r>
+            <a:r>
+              <a:rPr lang="en-US" sz="900" dirty="0" err="1">
+                <a:solidFill>
+                  <a:srgbClr val="000000"/>
+                </a:solidFill>
+                <a:effectLst/>
+                <a:latin typeface="Menlo" panose="020B0609030804020204" pitchFamily="49" charset="0"/>
+              </a:rPr>
+              <a:t>conda</a:t>
+            </a:r>
+            <a:r>
+              <a:rPr lang="en-US" sz="900" dirty="0">
+                <a:solidFill>
+                  <a:srgbClr val="000000"/>
+                </a:solidFill>
+                <a:effectLst/>
+                <a:latin typeface="Menlo" panose="020B0609030804020204" pitchFamily="49" charset="0"/>
+              </a:rPr>
+              <a:t>/</a:t>
+            </a:r>
+            <a:r>
+              <a:rPr lang="en-US" sz="900" dirty="0" err="1">
+                <a:solidFill>
+                  <a:srgbClr val="000000"/>
+                </a:solidFill>
+                <a:effectLst/>
+                <a:latin typeface="Menlo" panose="020B0609030804020204" pitchFamily="49" charset="0"/>
+              </a:rPr>
+              <a:t>envs</a:t>
+            </a:r>
+            <a:r>
+              <a:rPr lang="en-US" sz="900" dirty="0">
+                <a:solidFill>
+                  <a:srgbClr val="000000"/>
+                </a:solidFill>
+                <a:effectLst/>
+                <a:latin typeface="Menlo" panose="020B0609030804020204" pitchFamily="49" charset="0"/>
+              </a:rPr>
+              <a:t>:$HOME/.</a:t>
+            </a:r>
+            <a:r>
+              <a:rPr lang="en-US" sz="900" dirty="0" err="1">
+                <a:solidFill>
+                  <a:srgbClr val="000000"/>
+                </a:solidFill>
+                <a:effectLst/>
+                <a:latin typeface="Menlo" panose="020B0609030804020204" pitchFamily="49" charset="0"/>
+              </a:rPr>
+              <a:t>conda</a:t>
+            </a:r>
+            <a:r>
+              <a:rPr lang="en-US" sz="900" dirty="0">
+                <a:solidFill>
+                  <a:srgbClr val="000000"/>
+                </a:solidFill>
+                <a:effectLst/>
+                <a:latin typeface="Menlo" panose="020B0609030804020204" pitchFamily="49" charset="0"/>
+              </a:rPr>
+              <a:t>/</a:t>
+            </a:r>
+            <a:r>
+              <a:rPr lang="en-US" sz="900" dirty="0" err="1">
+                <a:solidFill>
+                  <a:srgbClr val="000000"/>
+                </a:solidFill>
+                <a:effectLst/>
+                <a:latin typeface="Menlo" panose="020B0609030804020204" pitchFamily="49" charset="0"/>
+              </a:rPr>
+              <a:t>envs</a:t>
+            </a:r>
+            <a:r>
+              <a:rPr lang="en-US" sz="900" dirty="0">
+                <a:solidFill>
+                  <a:srgbClr val="000000"/>
+                </a:solidFill>
+                <a:effectLst/>
+                <a:latin typeface="Menlo" panose="020B0609030804020204" pitchFamily="49" charset="0"/>
+              </a:rPr>
+              <a:t>"</a:t>
+            </a:r>
+          </a:p>
+          <a:p>
+            <a:pPr>
+              <a:buNone/>
+            </a:pPr>
+            <a:r>
+              <a:rPr lang="en-US" sz="900" dirty="0">
+                <a:solidFill>
+                  <a:srgbClr val="000000"/>
+                </a:solidFill>
+                <a:effectLst/>
+                <a:latin typeface="Menlo" panose="020B0609030804020204" pitchFamily="49" charset="0"/>
+              </a:rPr>
+              <a:t>export CONDA_PKGS_DIRS="/share/</a:t>
+            </a:r>
+            <a:r>
+              <a:rPr lang="en-US" sz="900" dirty="0" err="1">
+                <a:solidFill>
+                  <a:srgbClr val="000000"/>
+                </a:solidFill>
+                <a:effectLst/>
+                <a:latin typeface="Menlo" panose="020B0609030804020204" pitchFamily="49" charset="0"/>
+              </a:rPr>
+              <a:t>ivirus</a:t>
+            </a:r>
+            <a:r>
+              <a:rPr lang="en-US" sz="900" dirty="0">
+                <a:solidFill>
+                  <a:srgbClr val="000000"/>
+                </a:solidFill>
+                <a:effectLst/>
+                <a:latin typeface="Menlo" panose="020B0609030804020204" pitchFamily="49" charset="0"/>
+              </a:rPr>
+              <a:t>/</a:t>
+            </a:r>
+            <a:r>
+              <a:rPr lang="en-US" sz="900" dirty="0" err="1">
+                <a:solidFill>
+                  <a:srgbClr val="000000"/>
+                </a:solidFill>
+                <a:effectLst/>
+                <a:latin typeface="Menlo" panose="020B0609030804020204" pitchFamily="49" charset="0"/>
+              </a:rPr>
+              <a:t>mtouced</a:t>
+            </a:r>
+            <a:r>
+              <a:rPr lang="en-US" sz="900" dirty="0">
+                <a:solidFill>
+                  <a:srgbClr val="000000"/>
+                </a:solidFill>
+                <a:effectLst/>
+                <a:latin typeface="Menlo" panose="020B0609030804020204" pitchFamily="49" charset="0"/>
+              </a:rPr>
+              <a:t>/</a:t>
+            </a:r>
+            <a:r>
+              <a:rPr lang="en-US" sz="900" dirty="0" err="1">
+                <a:solidFill>
+                  <a:srgbClr val="000000"/>
+                </a:solidFill>
+                <a:effectLst/>
+                <a:latin typeface="Menlo" panose="020B0609030804020204" pitchFamily="49" charset="0"/>
+              </a:rPr>
+              <a:t>conda_pkgs</a:t>
+            </a:r>
+            <a:r>
+              <a:rPr lang="en-US" sz="900" dirty="0">
+                <a:solidFill>
+                  <a:srgbClr val="000000"/>
+                </a:solidFill>
+                <a:effectLst/>
+                <a:latin typeface="Menlo" panose="020B0609030804020204" pitchFamily="49" charset="0"/>
+              </a:rPr>
+              <a:t>"</a:t>
+            </a:r>
+          </a:p>
+        </p:txBody>
+      </p:sp>
+      <p:sp>
+        <p:nvSpPr>
           <p:cNvPr id="2" name="Title 1">
             <a:extLst>
               <a:ext uri="{FF2B5EF4-FFF2-40B4-BE49-F238E27FC236}">
@@ -13335,7 +14210,7 @@
         </p:nvSpPr>
         <p:spPr>
           <a:xfrm>
-            <a:off x="838200" y="4989383"/>
+            <a:off x="816365" y="4518428"/>
             <a:ext cx="6945581" cy="938719"/>
           </a:xfrm>
           <a:prstGeom prst="rect">
@@ -14915,6 +15790,145 @@
           </a:fontRef>
         </p:style>
       </p:cxnSp>
+      <p:pic>
+        <p:nvPicPr>
+          <p:cNvPr id="36" name="Graphic 35" descr="Warning with solid fill">
+            <a:extLst>
+              <a:ext uri="{FF2B5EF4-FFF2-40B4-BE49-F238E27FC236}">
+                <a16:creationId xmlns:a16="http://schemas.microsoft.com/office/drawing/2014/main" id="{148B4881-7C33-933D-E1DE-463C2043846F}"/>
+              </a:ext>
+            </a:extLst>
+          </p:cNvPr>
+          <p:cNvPicPr>
+            <a:picLocks noChangeAspect="1"/>
+          </p:cNvPicPr>
+          <p:nvPr/>
+        </p:nvPicPr>
+        <p:blipFill>
+          <a:blip>
+            <a:extLst>
+              <a:ext uri="{96DAC541-7B7A-43D3-8B79-37D633B846F1}">
+                <asvg:svgBlip xmlns:asvg="http://schemas.microsoft.com/office/drawing/2016/SVG/main" r:embed="rId5"/>
+              </a:ext>
+            </a:extLst>
+          </a:blip>
+          <a:stretch>
+            <a:fillRect/>
+          </a:stretch>
+        </p:blipFill>
+        <p:spPr>
+          <a:xfrm>
+            <a:off x="220129" y="5649433"/>
+            <a:ext cx="395965" cy="395965"/>
+          </a:xfrm>
+          <a:prstGeom prst="rect">
+            <a:avLst/>
+          </a:prstGeom>
+        </p:spPr>
+      </p:pic>
+      <p:sp>
+        <p:nvSpPr>
+          <p:cNvPr id="37" name="TextBox 36">
+            <a:extLst>
+              <a:ext uri="{FF2B5EF4-FFF2-40B4-BE49-F238E27FC236}">
+                <a16:creationId xmlns:a16="http://schemas.microsoft.com/office/drawing/2014/main" id="{6F75CD98-E92B-3E9F-272A-4C0DDED3CD3F}"/>
+              </a:ext>
+            </a:extLst>
+          </p:cNvPr>
+          <p:cNvSpPr txBox="1"/>
+          <p:nvPr/>
+        </p:nvSpPr>
+        <p:spPr>
+          <a:xfrm>
+            <a:off x="637562" y="5706844"/>
+            <a:ext cx="7411773" cy="338554"/>
+          </a:xfrm>
+          <a:prstGeom prst="rect">
+            <a:avLst/>
+          </a:prstGeom>
+          <a:noFill/>
+        </p:spPr>
+        <p:txBody>
+          <a:bodyPr wrap="none" rtlCol="0">
+            <a:spAutoFit/>
+          </a:bodyPr>
+          <a:lstStyle/>
+          <a:p>
+            <a:r>
+              <a:rPr lang="en-US" sz="1600" dirty="0">
+                <a:solidFill>
+                  <a:srgbClr val="FF0000"/>
+                </a:solidFill>
+              </a:rPr>
+              <a:t>If you are going to use </a:t>
+            </a:r>
+            <a:r>
+              <a:rPr lang="en-US" sz="1600" dirty="0" err="1">
+                <a:solidFill>
+                  <a:srgbClr val="FF0000"/>
+                </a:solidFill>
+              </a:rPr>
+              <a:t>conda</a:t>
+            </a:r>
+            <a:r>
+              <a:rPr lang="en-US" sz="1600" dirty="0">
+                <a:solidFill>
+                  <a:srgbClr val="FF0000"/>
+                </a:solidFill>
+              </a:rPr>
+              <a:t> you need to add this to </a:t>
+            </a:r>
+            <a:r>
+              <a:rPr lang="en-US" sz="1400" dirty="0">
+                <a:solidFill>
+                  <a:srgbClr val="FF0000"/>
+                </a:solidFill>
+                <a:latin typeface="Menlo" panose="020B0609030804020204" pitchFamily="49" charset="0"/>
+                <a:ea typeface="Menlo" panose="020B0609030804020204" pitchFamily="49" charset="0"/>
+                <a:cs typeface="Menlo" panose="020B0609030804020204" pitchFamily="49" charset="0"/>
+              </a:rPr>
+              <a:t>.</a:t>
+            </a:r>
+            <a:r>
+              <a:rPr lang="en-US" sz="1400" dirty="0" err="1">
+                <a:solidFill>
+                  <a:srgbClr val="FF0000"/>
+                </a:solidFill>
+                <a:latin typeface="Menlo" panose="020B0609030804020204" pitchFamily="49" charset="0"/>
+                <a:ea typeface="Menlo" panose="020B0609030804020204" pitchFamily="49" charset="0"/>
+                <a:cs typeface="Menlo" panose="020B0609030804020204" pitchFamily="49" charset="0"/>
+              </a:rPr>
+              <a:t>bashrc</a:t>
+            </a:r>
+            <a:r>
+              <a:rPr lang="en-US" sz="1600" dirty="0">
+                <a:solidFill>
+                  <a:srgbClr val="FF0000"/>
+                </a:solidFill>
+                <a:latin typeface="Menlo" panose="020B0609030804020204" pitchFamily="49" charset="0"/>
+                <a:ea typeface="Menlo" panose="020B0609030804020204" pitchFamily="49" charset="0"/>
+                <a:cs typeface="Menlo" panose="020B0609030804020204" pitchFamily="49" charset="0"/>
+              </a:rPr>
+              <a:t> </a:t>
+            </a:r>
+            <a:r>
+              <a:rPr lang="en-US" sz="1600" dirty="0">
+                <a:solidFill>
+                  <a:srgbClr val="FF0000"/>
+                </a:solidFill>
+                <a:ea typeface="Menlo" panose="020B0609030804020204" pitchFamily="49" charset="0"/>
+                <a:cs typeface="Menlo" panose="020B0609030804020204" pitchFamily="49" charset="0"/>
+              </a:rPr>
+              <a:t>(avoid home clogging): </a:t>
+            </a:r>
+            <a:endParaRPr lang="en-US" sz="1600" dirty="0">
+              <a:solidFill>
+                <a:srgbClr val="FF0000"/>
+              </a:solidFill>
+            </a:endParaRPr>
+          </a:p>
+        </p:txBody>
+      </p:sp>
     </p:spTree>
     <p:extLst>
       <p:ext uri="{BB962C8B-B14F-4D97-AF65-F5344CB8AC3E}">

--- a/slides/brc_hazel_week_d4.pptx
+++ b/slides/brc_hazel_week_d4.pptx
@@ -217,7 +217,7 @@
           <a:p>
             <a:fld id="{C03B9CC4-35C2-F643-8821-8A26B4C2EFBC}" type="datetimeFigureOut">
               <a:rPr lang="en-US" smtClean="0"/>
-              <a:t>5/14/26</a:t>
+              <a:t>5/18/26</a:t>
             </a:fld>
             <a:endParaRPr lang="en-US"/>
           </a:p>
@@ -2022,7 +2022,7 @@
           <a:p>
             <a:fld id="{07922428-1601-1349-B82F-394AB362B944}" type="datetimeFigureOut">
               <a:rPr lang="en-US" smtClean="0"/>
-              <a:t>5/14/26</a:t>
+              <a:t>5/18/26</a:t>
             </a:fld>
             <a:endParaRPr lang="en-US"/>
           </a:p>
@@ -2220,7 +2220,7 @@
           <a:p>
             <a:fld id="{07922428-1601-1349-B82F-394AB362B944}" type="datetimeFigureOut">
               <a:rPr lang="en-US" smtClean="0"/>
-              <a:t>5/14/26</a:t>
+              <a:t>5/18/26</a:t>
             </a:fld>
             <a:endParaRPr lang="en-US"/>
           </a:p>
@@ -2428,7 +2428,7 @@
           <a:p>
             <a:fld id="{07922428-1601-1349-B82F-394AB362B944}" type="datetimeFigureOut">
               <a:rPr lang="en-US" smtClean="0"/>
-              <a:t>5/14/26</a:t>
+              <a:t>5/18/26</a:t>
             </a:fld>
             <a:endParaRPr lang="en-US"/>
           </a:p>
@@ -2626,7 +2626,7 @@
           <a:p>
             <a:fld id="{07922428-1601-1349-B82F-394AB362B944}" type="datetimeFigureOut">
               <a:rPr lang="en-US" smtClean="0"/>
-              <a:t>5/14/26</a:t>
+              <a:t>5/18/26</a:t>
             </a:fld>
             <a:endParaRPr lang="en-US"/>
           </a:p>
@@ -2901,7 +2901,7 @@
           <a:p>
             <a:fld id="{07922428-1601-1349-B82F-394AB362B944}" type="datetimeFigureOut">
               <a:rPr lang="en-US" smtClean="0"/>
-              <a:t>5/14/26</a:t>
+              <a:t>5/18/26</a:t>
             </a:fld>
             <a:endParaRPr lang="en-US"/>
           </a:p>
@@ -3166,7 +3166,7 @@
           <a:p>
             <a:fld id="{07922428-1601-1349-B82F-394AB362B944}" type="datetimeFigureOut">
               <a:rPr lang="en-US" smtClean="0"/>
-              <a:t>5/14/26</a:t>
+              <a:t>5/18/26</a:t>
             </a:fld>
             <a:endParaRPr lang="en-US"/>
           </a:p>
@@ -3578,7 +3578,7 @@
           <a:p>
             <a:fld id="{07922428-1601-1349-B82F-394AB362B944}" type="datetimeFigureOut">
               <a:rPr lang="en-US" smtClean="0"/>
-              <a:t>5/14/26</a:t>
+              <a:t>5/18/26</a:t>
             </a:fld>
             <a:endParaRPr lang="en-US"/>
           </a:p>
@@ -3719,7 +3719,7 @@
           <a:p>
             <a:fld id="{07922428-1601-1349-B82F-394AB362B944}" type="datetimeFigureOut">
               <a:rPr lang="en-US" smtClean="0"/>
-              <a:t>5/14/26</a:t>
+              <a:t>5/18/26</a:t>
             </a:fld>
             <a:endParaRPr lang="en-US"/>
           </a:p>
@@ -3832,7 +3832,7 @@
           <a:p>
             <a:fld id="{07922428-1601-1349-B82F-394AB362B944}" type="datetimeFigureOut">
               <a:rPr lang="en-US" smtClean="0"/>
-              <a:t>5/14/26</a:t>
+              <a:t>5/18/26</a:t>
             </a:fld>
             <a:endParaRPr lang="en-US"/>
           </a:p>
@@ -4143,7 +4143,7 @@
           <a:p>
             <a:fld id="{07922428-1601-1349-B82F-394AB362B944}" type="datetimeFigureOut">
               <a:rPr lang="en-US" smtClean="0"/>
-              <a:t>5/14/26</a:t>
+              <a:t>5/18/26</a:t>
             </a:fld>
             <a:endParaRPr lang="en-US"/>
           </a:p>
@@ -4431,7 +4431,7 @@
           <a:p>
             <a:fld id="{07922428-1601-1349-B82F-394AB362B944}" type="datetimeFigureOut">
               <a:rPr lang="en-US" smtClean="0"/>
-              <a:t>5/14/26</a:t>
+              <a:t>5/18/26</a:t>
             </a:fld>
             <a:endParaRPr lang="en-US"/>
           </a:p>
@@ -4672,7 +4672,7 @@
           <a:p>
             <a:fld id="{07922428-1601-1349-B82F-394AB362B944}" type="datetimeFigureOut">
               <a:rPr lang="en-US" smtClean="0"/>
-              <a:t>5/14/26</a:t>
+              <a:t>5/18/26</a:t>
             </a:fld>
             <a:endParaRPr lang="en-US"/>
           </a:p>
@@ -5154,10 +5154,19 @@
           <a:p>
             <a:pPr algn="l"/>
             <a:r>
+              <a:rPr lang="en-US" sz="1800" b="1" dirty="0">
+                <a:latin typeface="Helvetica" pitchFamily="2" charset="0"/>
+              </a:rPr>
+              <a:t>María (Mery) Touceda-Suárez, PhD</a:t>
+            </a:r>
+          </a:p>
+          <a:p>
+            <a:pPr algn="l"/>
+            <a:r>
               <a:rPr lang="en-US" sz="1800" dirty="0">
                 <a:latin typeface="Helvetica" pitchFamily="2" charset="0"/>
               </a:rPr>
-              <a:t>María (Mery) Touceda-Suárez, PhD</a:t>
+              <a:t>Bonnie Hurwitz, PhD</a:t>
             </a:r>
           </a:p>
           <a:p>
@@ -5166,7 +5175,7 @@
               <a:rPr lang="en-US" sz="1800" dirty="0">
                 <a:latin typeface="Helvetica" pitchFamily="2" charset="0"/>
               </a:rPr>
-              <a:t>Bonnie Hurwitz, PhD</a:t>
+              <a:t>Seth Weaver, PhD</a:t>
             </a:r>
           </a:p>
           <a:p>
@@ -5175,7 +5184,7 @@
               <a:rPr lang="en-US" sz="1800" dirty="0">
                 <a:latin typeface="Helvetica" pitchFamily="2" charset="0"/>
               </a:rPr>
-              <a:t>February 4</a:t>
+              <a:t>May 11</a:t>
             </a:r>
             <a:r>
               <a:rPr lang="en-US" sz="1800" baseline="30000" dirty="0">
@@ -5187,7 +5196,19 @@
               <a:rPr lang="en-US" sz="1800" dirty="0">
                 <a:latin typeface="Helvetica" pitchFamily="2" charset="0"/>
               </a:rPr>
-              <a:t> 2025</a:t>
+              <a:t>-14</a:t>
+            </a:r>
+            <a:r>
+              <a:rPr lang="en-US" sz="1800" baseline="30000" dirty="0">
+                <a:latin typeface="Helvetica" pitchFamily="2" charset="0"/>
+              </a:rPr>
+              <a:t>th</a:t>
+            </a:r>
+            <a:r>
+              <a:rPr lang="en-US" sz="1800" dirty="0">
+                <a:latin typeface="Helvetica" pitchFamily="2" charset="0"/>
+              </a:rPr>
+              <a:t> 2026</a:t>
             </a:r>
           </a:p>
           <a:p>
@@ -5617,7 +5638,7 @@
         <p:spPr>
           <a:xfrm>
             <a:off x="7980218" y="2152591"/>
-            <a:ext cx="3836307" cy="2893100"/>
+            <a:ext cx="3836307" cy="2954655"/>
           </a:xfrm>
           <a:prstGeom prst="rect">
             <a:avLst/>
@@ -5646,26 +5667,20 @@
               <a:t>$: </a:t>
             </a:r>
             <a:r>
-              <a:rPr lang="en-US" sz="1400" dirty="0" err="1">
+              <a:rPr lang="en-US" dirty="0" err="1">
                 <a:solidFill>
                   <a:schemeClr val="accent6"/>
                 </a:solidFill>
-                <a:latin typeface="Menlo" panose="020B0609030804020204" pitchFamily="49" charset="0"/>
-                <a:ea typeface="Menlo" panose="020B0609030804020204" pitchFamily="49" charset="0"/>
-                <a:cs typeface="Menlo" panose="020B0609030804020204" pitchFamily="49" charset="0"/>
               </a:rPr>
               <a:t>bsub</a:t>
             </a:r>
             <a:r>
-              <a:rPr lang="en-US" sz="1400" dirty="0">
+              <a:rPr lang="en-US" dirty="0">
                 <a:solidFill>
                   <a:schemeClr val="accent6"/>
                 </a:solidFill>
-                <a:latin typeface="Menlo" panose="020B0609030804020204" pitchFamily="49" charset="0"/>
-                <a:ea typeface="Menlo" panose="020B0609030804020204" pitchFamily="49" charset="0"/>
-                <a:cs typeface="Menlo" panose="020B0609030804020204" pitchFamily="49" charset="0"/>
-              </a:rPr>
-              <a:t> –Is –W10</a:t>
+              </a:rPr>
+              <a:t> -Is -n 1 -W 10 bash </a:t>
             </a:r>
           </a:p>
           <a:p>
@@ -5903,6 +5918,77 @@
               <a:ea typeface="Menlo" panose="020B0609030804020204" pitchFamily="49" charset="0"/>
               <a:cs typeface="Menlo" panose="020B0609030804020204" pitchFamily="49" charset="0"/>
             </a:endParaRPr>
+          </a:p>
+        </p:txBody>
+      </p:sp>
+      <p:sp>
+        <p:nvSpPr>
+          <p:cNvPr id="4" name="TextBox 3">
+            <a:extLst>
+              <a:ext uri="{FF2B5EF4-FFF2-40B4-BE49-F238E27FC236}">
+                <a16:creationId xmlns:a16="http://schemas.microsoft.com/office/drawing/2014/main" id="{49930472-265E-98F1-A7C3-F792A8F76805}"/>
+              </a:ext>
+            </a:extLst>
+          </p:cNvPr>
+          <p:cNvSpPr txBox="1"/>
+          <p:nvPr/>
+        </p:nvSpPr>
+        <p:spPr>
+          <a:xfrm>
+            <a:off x="990600" y="5534597"/>
+            <a:ext cx="7554119" cy="369332"/>
+          </a:xfrm>
+          <a:prstGeom prst="rect">
+            <a:avLst/>
+          </a:prstGeom>
+          <a:noFill/>
+        </p:spPr>
+        <p:txBody>
+          <a:bodyPr wrap="none" rtlCol="0">
+            <a:spAutoFit/>
+          </a:bodyPr>
+          <a:lstStyle/>
+          <a:p>
+            <a:r>
+              <a:rPr lang="en-US" dirty="0">
+                <a:solidFill>
+                  <a:schemeClr val="accent2"/>
+                </a:solidFill>
+              </a:rPr>
+              <a:t>BRC containers archive in hazel: /</a:t>
+            </a:r>
+            <a:r>
+              <a:rPr lang="en-US" dirty="0" err="1">
+                <a:solidFill>
+                  <a:schemeClr val="accent2"/>
+                </a:solidFill>
+              </a:rPr>
+              <a:t>gpfs_backup</a:t>
+            </a:r>
+            <a:r>
+              <a:rPr lang="en-US" dirty="0">
+                <a:solidFill>
+                  <a:schemeClr val="accent2"/>
+                </a:solidFill>
+              </a:rPr>
+              <a:t>/</a:t>
+            </a:r>
+            <a:r>
+              <a:rPr lang="en-US" dirty="0" err="1">
+                <a:solidFill>
+                  <a:schemeClr val="accent2"/>
+                </a:solidFill>
+              </a:rPr>
+              <a:t>bioinfo_data</a:t>
+            </a:r>
+            <a:r>
+              <a:rPr lang="en-US" dirty="0">
+                <a:solidFill>
+                  <a:schemeClr val="accent2"/>
+                </a:solidFill>
+              </a:rPr>
+              <a:t>/containers/images</a:t>
+            </a:r>
           </a:p>
         </p:txBody>
       </p:sp>
